--- a/docs/scripts/Md_Riaz_Final_Defense_0322310105101024.pptx
+++ b/docs/scripts/Md_Riaz_Final_Defense_0322310105101024.pptx
@@ -11159,7 +11159,7 @@
                         </a:defRPr>
                       </a:pPr>
                       <a:r>
-                        <a:t>Semantic coverage</a:t>
+                        <a:t>Semantic intent validation</a:t>
                       </a:r>
                     </a:p>
                   </a:txBody>
@@ -11240,7 +11240,7 @@
                         </a:defRPr>
                       </a:pPr>
                       <a:r>
-                        <a:t>Vocabulary coverage passes</a:t>
+                        <a:t>Vocabulary intent validation passes</a:t>
                       </a:r>
                     </a:p>
                   </a:txBody>
@@ -11913,7 +11913,7 @@
                         </a:defRPr>
                       </a:pPr>
                       <a:r>
-                        <a:t>Need reports but cannot write SQL</a:t>
+                        <a:t>Need reports but need new report combinations</a:t>
                       </a:r>
                     </a:p>
                   </a:txBody>
@@ -12707,7 +12707,7 @@
                 </a:solidFill>
                 <a:latin typeface="Times New Roman"/>
               </a:rPr>
-              <a:t>• Unsupported combinations are expected to be rejected or clarified, not guessed.</a:t>
+              <a:t>• Unsupported structured intents are expected to be rejected or clarified, not guessed.</a:t>
             </a:r>
           </a:p>
           <a:p>
@@ -12751,7 +12751,7 @@
                 </a:solidFill>
                 <a:latin typeface="Times New Roman"/>
               </a:rPr>
-              <a:t>• Additional commerce datasets would strengthen external validity.</a:t>
+              <a:t>• Vague unsupported language can still be misread during LLM intent extraction.</a:t>
             </a:r>
           </a:p>
           <a:p>
@@ -12773,7 +12773,7 @@
                 </a:solidFill>
                 <a:latin typeface="Times New Roman"/>
               </a:rPr>
-              <a:t>• More admin report oracles can be added over time.</a:t>
+              <a:t>• Additional commerce datasets would strengthen external validity.</a:t>
             </a:r>
           </a:p>
           <a:p>
@@ -17705,7 +17705,7 @@
                         </a:defRPr>
                       </a:pPr>
                       <a:r>
-                        <a:t>Trades open SQL for auditable analytics coverage</a:t>
+                        <a:t>Trades open SQL for auditable analytics intent validation</a:t>
                       </a:r>
                     </a:p>
                   </a:txBody>
@@ -18145,7 +18145,7 @@
                 </a:solidFill>
                 <a:latin typeface="Times New Roman"/>
               </a:rPr>
-              <a:t>• Many systems improve SQL generation accuracy, but still treat SQL text as the model's output.</a:t>
+              <a:t>• Many systems improve SQL generation accuracy, but still let executable SQL be authored by the model.</a:t>
             </a:r>
           </a:p>
           <a:p>
@@ -18876,7 +18876,7 @@
                         </a:defRPr>
                       </a:pPr>
                       <a:r>
-                        <a:t>Use fixed natural-language questions, semantic-coverage tests, and admin-fidelity checks for reproducible evidence.</a:t>
+                        <a:t>Use fixed natural-language questions, semantic-intent validation tests, and admin-fidelity checks for reproducible evidence.</a:t>
                       </a:r>
                     </a:p>
                   </a:txBody>

--- a/docs/scripts/Md_Riaz_Final_Defense_0322310105101024.pptx
+++ b/docs/scripts/Md_Riaz_Final_Defense_0322310105101024.pptx
@@ -4015,20 +4015,14 @@
       </p:pic>
       <p:sp>
         <p:nvSpPr>
-          <p:cNvPr id="15" name="TextBox 14">
-            <a:extLst>
-              <a:ext uri="{FF2B5EF4-FFF2-40B4-BE49-F238E27FC236}">
-                <a16:creationId xmlns:a16="http://schemas.microsoft.com/office/drawing/2014/main" id="{CE67231A-ED4F-8480-A39E-C3D024BD1954}"/>
-              </a:ext>
-            </a:extLst>
-          </p:cNvPr>
+          <p:cNvPr id="9" name="TextBox 8"/>
           <p:cNvSpPr txBox="1"/>
           <p:nvPr/>
         </p:nvSpPr>
         <p:spPr>
           <a:xfrm>
-            <a:off x="3282222" y="6089006"/>
-            <a:ext cx="5627553" cy="646331"/>
+            <a:off x="3282222" y="5413248"/>
+            <a:ext cx="5627553" cy="530352"/>
           </a:xfrm>
           <a:prstGeom prst="rect">
             <a:avLst/>
@@ -4036,41 +4030,35 @@
           <a:noFill/>
         </p:spPr>
         <p:txBody>
-          <a:bodyPr wrap="square" rtlCol="0">
+          <a:bodyPr wrap="square">
             <a:spAutoFit/>
           </a:bodyPr>
           <a:lstStyle/>
           <a:p>
-            <a:pPr algn="ctr"/>
-            <a:r>
-              <a:rPr lang="en-US" sz="2000" b="1" dirty="0">
-                <a:solidFill>
-                  <a:schemeClr val="bg1"/>
-                </a:solidFill>
-                <a:latin typeface="Times New Roman" panose="02020603050405020304" pitchFamily="18" charset="0"/>
-                <a:cs typeface="Times New Roman" panose="02020603050405020304" pitchFamily="18" charset="0"/>
-              </a:rPr>
+            <a:pPr algn="ctr">
+              <a:defRPr sz="1500">
+                <a:latin typeface="Times New Roman"/>
+              </a:defRPr>
+            </a:pPr>
+            <a:r>
               <a:t>Department of Computer Science &amp; Engineering</a:t>
             </a:r>
           </a:p>
           <a:p>
-            <a:pPr algn="ctr"/>
-            <a:r>
-              <a:rPr lang="en-US" sz="1600" dirty="0">
-                <a:solidFill>
-                  <a:schemeClr val="bg1"/>
-                </a:solidFill>
-                <a:latin typeface="Times New Roman" panose="02020603050405020304" pitchFamily="18" charset="0"/>
-                <a:cs typeface="Times New Roman" panose="02020603050405020304" pitchFamily="18" charset="0"/>
-              </a:rPr>
-              <a:t>Pundra University of Science &amp; Technology, Bogura – 5800 </a:t>
-            </a:r>
-          </a:p>
-        </p:txBody>
-      </p:sp>
-      <p:sp>
-        <p:nvSpPr>
-          <p:cNvPr id="16" name="TextBox 15"/>
+            <a:pPr algn="ctr">
+              <a:defRPr sz="1200">
+                <a:latin typeface="Times New Roman"/>
+              </a:defRPr>
+            </a:pPr>
+            <a:r>
+              <a:t>Pundra University of Science &amp; Technology, Bogura - 5800</a:t>
+            </a:r>
+          </a:p>
+        </p:txBody>
+      </p:sp>
+      <p:sp>
+        <p:nvSpPr>
+          <p:cNvPr id="10" name="TextBox 9"/>
           <p:cNvSpPr txBox="1"/>
           <p:nvPr/>
         </p:nvSpPr>
@@ -4103,7 +4091,7 @@
       </p:sp>
       <p:sp>
         <p:nvSpPr>
-          <p:cNvPr id="17" name="TextBox 16"/>
+          <p:cNvPr id="11" name="TextBox 10"/>
           <p:cNvSpPr txBox="1"/>
           <p:nvPr/>
         </p:nvSpPr>
@@ -4136,7 +4124,7 @@
       </p:sp>
       <p:sp>
         <p:nvSpPr>
-          <p:cNvPr id="18" name="TextBox 17"/>
+          <p:cNvPr id="12" name="TextBox 11"/>
           <p:cNvSpPr txBox="1"/>
           <p:nvPr/>
         </p:nvSpPr>
@@ -4237,7 +4225,7 @@
       </p:sp>
       <p:sp>
         <p:nvSpPr>
-          <p:cNvPr id="19" name="TextBox 18"/>
+          <p:cNvPr id="13" name="TextBox 12"/>
           <p:cNvSpPr txBox="1"/>
           <p:nvPr/>
         </p:nvSpPr>
@@ -4270,7 +4258,7 @@
       </p:sp>
       <p:sp>
         <p:nvSpPr>
-          <p:cNvPr id="20" name="TextBox 19"/>
+          <p:cNvPr id="14" name="TextBox 13"/>
           <p:cNvSpPr txBox="1"/>
           <p:nvPr/>
         </p:nvSpPr>
@@ -4779,7 +4767,7 @@
                 </a:solidFill>
                 <a:latin typeface="Times New Roman"/>
               </a:rPr>
-              <a:t>• Business vocabulary:</a:t>
+              <a:t>- Business vocabulary:</a:t>
             </a:r>
             <a:r>
               <a:rPr b="0" i="0" sz="1450">
@@ -4810,7 +4798,7 @@
                 </a:solidFill>
                 <a:latin typeface="Times New Roman"/>
               </a:rPr>
-              <a:t>• Metric definitions:</a:t>
+              <a:t>- Metric definitions:</a:t>
             </a:r>
             <a:r>
               <a:rPr b="0" i="0" sz="1450">
@@ -4841,7 +4829,7 @@
                 </a:solidFill>
                 <a:latin typeface="Times New Roman"/>
               </a:rPr>
-              <a:t>• Dimension definitions:</a:t>
+              <a:t>- Dimension definitions:</a:t>
             </a:r>
             <a:r>
               <a:rPr b="0" i="0" sz="1450">
@@ -4872,7 +4860,7 @@
                 </a:solidFill>
                 <a:latin typeface="Times New Roman"/>
               </a:rPr>
-              <a:t>• Join policy:</a:t>
+              <a:t>- Join policy:</a:t>
             </a:r>
             <a:r>
               <a:rPr b="0" i="0" sz="1450">
@@ -4903,7 +4891,7 @@
                 </a:solidFill>
                 <a:latin typeface="Times New Roman"/>
               </a:rPr>
-              <a:t>• Output contracts:</a:t>
+              <a:t>- Output contracts:</a:t>
             </a:r>
             <a:r>
               <a:rPr b="0" i="0" sz="1450">
@@ -5282,14 +5270,69 @@
       </p:sp>
       <p:sp>
         <p:nvSpPr>
-          <p:cNvPr id="13" name="TextBox 12"/>
+          <p:cNvPr id="13" name="Rounded Rectangle 12"/>
+          <p:cNvSpPr/>
+          <p:nvPr/>
+        </p:nvSpPr>
+        <p:spPr>
+          <a:xfrm>
+            <a:off x="658368" y="1335024"/>
+            <a:ext cx="2880360" cy="566928"/>
+          </a:xfrm>
+          <a:prstGeom prst="roundRect">
+            <a:avLst/>
+          </a:prstGeom>
+          <a:solidFill>
+            <a:srgbClr val="E9F1FA"/>
+          </a:solidFill>
+          <a:ln w="12700">
+            <a:solidFill>
+              <a:srgbClr val="003366"/>
+            </a:solidFill>
+          </a:ln>
+        </p:spPr>
+        <p:style>
+          <a:lnRef idx="1">
+            <a:schemeClr val="accent1"/>
+          </a:lnRef>
+          <a:fillRef idx="3">
+            <a:schemeClr val="accent1"/>
+          </a:fillRef>
+          <a:effectRef idx="2">
+            <a:schemeClr val="accent1"/>
+          </a:effectRef>
+          <a:fontRef idx="minor">
+            <a:schemeClr val="lt1"/>
+          </a:fontRef>
+        </p:style>
+        <p:txBody>
+          <a:bodyPr rtlCol="0" anchor="ctr" wrap="square" lIns="109728" rIns="109728" tIns="54864"/>
+          <a:lstStyle/>
+          <a:p>
+            <a:pPr algn="ctr">
+              <a:defRPr sz="1300" b="1">
+                <a:solidFill>
+                  <a:srgbClr val="003366"/>
+                </a:solidFill>
+                <a:latin typeface="Times New Roman"/>
+              </a:defRPr>
+            </a:pPr>
+            <a:r>
+              <a:t>1. User asks a business question</a:t>
+            </a:r>
+          </a:p>
+        </p:txBody>
+      </p:sp>
+      <p:sp>
+        <p:nvSpPr>
+          <p:cNvPr id="14" name="TextBox 13"/>
           <p:cNvSpPr txBox="1"/>
           <p:nvPr/>
         </p:nvSpPr>
         <p:spPr>
           <a:xfrm>
-            <a:off x="822960" y="1664208"/>
-            <a:ext cx="4937760" cy="4251960"/>
+            <a:off x="822960" y="2048256"/>
+            <a:ext cx="2651760" cy="786384"/>
           </a:xfrm>
           <a:prstGeom prst="rect">
             <a:avLst/>
@@ -5304,7 +5347,7 @@
           <a:p>
             <a:pPr marL="0" indent="0">
               <a:lnSpc>
-                <a:spcPct val="108000"/>
+                <a:spcPct val="100000"/>
               </a:lnSpc>
               <a:spcBef>
                 <a:spcPts val="1200"/>
@@ -5314,19 +5357,141 @@
               </a:spcAft>
             </a:pPr>
             <a:r>
-              <a:rPr b="1" i="0" sz="1450">
+              <a:rPr b="1" i="0" sz="1650">
                 <a:solidFill>
                   <a:srgbClr val="003366"/>
                 </a:solidFill>
                 <a:latin typeface="Times New Roman"/>
               </a:rPr>
-              <a:t>What the LLM may produce:</a:t>
+              <a:t>Example:</a:t>
+            </a:r>
+          </a:p>
+          <a:p>
+            <a:pPr marL="0" indent="0">
+              <a:lnSpc>
+                <a:spcPct val="100000"/>
+              </a:lnSpc>
+              <a:spcBef>
+                <a:spcPts val="1200"/>
+              </a:spcBef>
+              <a:spcAft>
+                <a:spcPts val="500"/>
+              </a:spcAft>
+            </a:pPr>
+            <a:r>
+              <a:rPr b="1" i="0" sz="1650">
+                <a:solidFill>
+                  <a:srgbClr val="003366"/>
+                </a:solidFill>
+                <a:latin typeface="Times New Roman"/>
+              </a:rPr>
+              <a:t>Show order average by status</a:t>
+            </a:r>
+          </a:p>
+        </p:txBody>
+      </p:sp>
+      <p:sp>
+        <p:nvSpPr>
+          <p:cNvPr id="15" name="Rounded Rectangle 14"/>
+          <p:cNvSpPr/>
+          <p:nvPr/>
+        </p:nvSpPr>
+        <p:spPr>
+          <a:xfrm>
+            <a:off x="3886200" y="1335024"/>
+            <a:ext cx="3337560" cy="566928"/>
+          </a:xfrm>
+          <a:prstGeom prst="roundRect">
+            <a:avLst/>
+          </a:prstGeom>
+          <a:solidFill>
+            <a:srgbClr val="E9F1FA"/>
+          </a:solidFill>
+          <a:ln w="12700">
+            <a:solidFill>
+              <a:srgbClr val="003366"/>
+            </a:solidFill>
+          </a:ln>
+        </p:spPr>
+        <p:style>
+          <a:lnRef idx="1">
+            <a:schemeClr val="accent1"/>
+          </a:lnRef>
+          <a:fillRef idx="3">
+            <a:schemeClr val="accent1"/>
+          </a:fillRef>
+          <a:effectRef idx="2">
+            <a:schemeClr val="accent1"/>
+          </a:effectRef>
+          <a:fontRef idx="minor">
+            <a:schemeClr val="lt1"/>
+          </a:fontRef>
+        </p:style>
+        <p:txBody>
+          <a:bodyPr rtlCol="0" anchor="ctr" wrap="square" lIns="109728" rIns="109728" tIns="54864"/>
+          <a:lstStyle/>
+          <a:p>
+            <a:pPr algn="ctr">
+              <a:defRPr sz="1260" b="1">
+                <a:solidFill>
+                  <a:srgbClr val="003366"/>
+                </a:solidFill>
+                <a:latin typeface="Times New Roman"/>
+              </a:defRPr>
+            </a:pPr>
+            <a:r>
+              <a:t>2. Prompt exposes approved vocabulary</a:t>
+            </a:r>
+          </a:p>
+        </p:txBody>
+      </p:sp>
+      <p:sp>
+        <p:nvSpPr>
+          <p:cNvPr id="16" name="TextBox 15"/>
+          <p:cNvSpPr txBox="1"/>
+          <p:nvPr/>
+        </p:nvSpPr>
+        <p:spPr>
+          <a:xfrm>
+            <a:off x="3950208" y="2011680"/>
+            <a:ext cx="3154680" cy="1298448"/>
+          </a:xfrm>
+          <a:prstGeom prst="rect">
+            <a:avLst/>
+          </a:prstGeom>
+          <a:noFill/>
+        </p:spPr>
+        <p:txBody>
+          <a:bodyPr wrap="square" anchor="t" lIns="0" tIns="0" rIns="0">
+            <a:spAutoFit/>
+          </a:bodyPr>
+          <a:lstStyle/>
+          <a:p>
+            <a:pPr marL="0" indent="0">
+              <a:lnSpc>
+                <a:spcPct val="90000"/>
+              </a:lnSpc>
+              <a:spcBef>
+                <a:spcPts val="1200"/>
+              </a:spcBef>
+              <a:spcAft>
+                <a:spcPts val="500"/>
+              </a:spcAft>
+            </a:pPr>
+            <a:r>
+              <a:rPr b="1" i="0" sz="1370">
+                <a:solidFill>
+                  <a:srgbClr val="003366"/>
+                </a:solidFill>
+                <a:latin typeface="Times New Roman"/>
+              </a:rPr>
+              <a:t>Vocabulary excerpt:</a:t>
             </a:r>
           </a:p>
           <a:p>
             <a:pPr marL="256032" indent="-256032">
               <a:lnSpc>
-                <a:spcPct val="108000"/>
+                <a:spcPct val="90000"/>
               </a:lnSpc>
               <a:spcBef>
                 <a:spcPts val="300"/>
@@ -5336,19 +5501,28 @@
               </a:spcAft>
             </a:pPr>
             <a:r>
-              <a:rPr b="0" i="0" sz="1150">
+              <a:rPr b="1" i="0" sz="1070">
+                <a:solidFill>
+                  <a:srgbClr val="003366"/>
+                </a:solidFill>
+                <a:latin typeface="Times New Roman"/>
+              </a:rPr>
+              <a:t>- Metrics:</a:t>
+            </a:r>
+            <a:r>
+              <a:rPr b="0" i="0" sz="1070">
                 <a:solidFill>
                   <a:srgbClr val="333333"/>
                 </a:solidFill>
                 <a:latin typeface="Times New Roman"/>
               </a:rPr>
-              <a:t>• Intent class</a:t>
+              <a:t> revenue, order_count, avg_order_value</a:t>
             </a:r>
           </a:p>
           <a:p>
             <a:pPr marL="256032" indent="-256032">
               <a:lnSpc>
-                <a:spcPct val="108000"/>
+                <a:spcPct val="90000"/>
               </a:lnSpc>
               <a:spcBef>
                 <a:spcPts val="300"/>
@@ -5358,19 +5532,28 @@
               </a:spcAft>
             </a:pPr>
             <a:r>
-              <a:rPr b="0" i="0" sz="1150">
+              <a:rPr b="1" i="0" sz="1070">
+                <a:solidFill>
+                  <a:srgbClr val="003366"/>
+                </a:solidFill>
+                <a:latin typeface="Times New Roman"/>
+              </a:rPr>
+              <a:t>- Dimensions:</a:t>
+            </a:r>
+            <a:r>
+              <a:rPr b="0" i="0" sz="1070">
                 <a:solidFill>
                   <a:srgbClr val="333333"/>
                 </a:solidFill>
                 <a:latin typeface="Times New Roman"/>
               </a:rPr>
-              <a:t>• Metric term</a:t>
+              <a:t> order_status, category, country</a:t>
             </a:r>
           </a:p>
           <a:p>
             <a:pPr marL="256032" indent="-256032">
               <a:lnSpc>
-                <a:spcPct val="108000"/>
+                <a:spcPct val="90000"/>
               </a:lnSpc>
               <a:spcBef>
                 <a:spcPts val="300"/>
@@ -5380,225 +5563,91 @@
               </a:spcAft>
             </a:pPr>
             <a:r>
-              <a:rPr b="0" i="0" sz="1150">
+              <a:rPr b="1" i="0" sz="1070">
+                <a:solidFill>
+                  <a:srgbClr val="003366"/>
+                </a:solidFill>
+                <a:latin typeface="Times New Roman"/>
+              </a:rPr>
+              <a:t>- Output:</a:t>
+            </a:r>
+            <a:r>
+              <a:rPr b="0" i="0" sz="1070">
                 <a:solidFill>
                   <a:srgbClr val="333333"/>
                 </a:solidFill>
                 <a:latin typeface="Times New Roman"/>
               </a:rPr>
-              <a:t>• Dimension term</a:t>
-            </a:r>
-          </a:p>
-          <a:p>
-            <a:pPr marL="256032" indent="-256032">
-              <a:lnSpc>
-                <a:spcPct val="108000"/>
-              </a:lnSpc>
-              <a:spcBef>
-                <a:spcPts val="300"/>
-              </a:spcBef>
-              <a:spcAft>
-                <a:spcPts val="700"/>
-              </a:spcAft>
-            </a:pPr>
-            <a:r>
-              <a:rPr b="0" i="0" sz="1150">
-                <a:solidFill>
-                  <a:srgbClr val="333333"/>
-                </a:solidFill>
-                <a:latin typeface="Times New Roman"/>
-              </a:rPr>
-              <a:t>• Time range</a:t>
-            </a:r>
-          </a:p>
-          <a:p>
-            <a:pPr marL="256032" indent="-256032">
-              <a:lnSpc>
-                <a:spcPct val="108000"/>
-              </a:lnSpc>
-              <a:spcBef>
-                <a:spcPts val="300"/>
-              </a:spcBef>
-              <a:spcAft>
-                <a:spcPts val="700"/>
-              </a:spcAft>
-            </a:pPr>
-            <a:r>
-              <a:rPr b="0" i="0" sz="1150">
-                <a:solidFill>
-                  <a:srgbClr val="333333"/>
-                </a:solidFill>
-                <a:latin typeface="Times New Roman"/>
-              </a:rPr>
-              <a:t>• Filter terms</a:t>
-            </a:r>
-          </a:p>
-          <a:p>
-            <a:pPr marL="256032" indent="-256032">
-              <a:lnSpc>
-                <a:spcPct val="108000"/>
-              </a:lnSpc>
-              <a:spcBef>
-                <a:spcPts val="300"/>
-              </a:spcBef>
-              <a:spcAft>
-                <a:spcPts val="700"/>
-              </a:spcAft>
-            </a:pPr>
-            <a:r>
-              <a:rPr b="0" i="0" sz="1150">
-                <a:solidFill>
-                  <a:srgbClr val="333333"/>
-                </a:solidFill>
-                <a:latin typeface="Times New Roman"/>
-              </a:rPr>
-              <a:t>• Requested output shape</a:t>
-            </a:r>
-          </a:p>
-          <a:p>
-            <a:pPr marL="0" indent="0">
-              <a:lnSpc>
-                <a:spcPct val="108000"/>
-              </a:lnSpc>
-              <a:spcBef>
-                <a:spcPts val="1200"/>
-              </a:spcBef>
-              <a:spcAft>
-                <a:spcPts val="500"/>
-              </a:spcAft>
-            </a:pPr>
-            <a:r>
-              <a:rPr b="1" i="0" sz="1450">
-                <a:solidFill>
-                  <a:srgbClr val="003366"/>
-                </a:solidFill>
-                <a:latin typeface="Times New Roman"/>
-              </a:rPr>
-              <a:t>What the LLM may not produce:</a:t>
-            </a:r>
-          </a:p>
-          <a:p>
-            <a:pPr marL="256032" indent="-256032">
-              <a:lnSpc>
-                <a:spcPct val="108000"/>
-              </a:lnSpc>
-              <a:spcBef>
-                <a:spcPts val="300"/>
-              </a:spcBef>
-              <a:spcAft>
-                <a:spcPts val="700"/>
-              </a:spcAft>
-            </a:pPr>
-            <a:r>
-              <a:rPr b="0" i="0" sz="1150">
-                <a:solidFill>
-                  <a:srgbClr val="333333"/>
-                </a:solidFill>
-                <a:latin typeface="Times New Roman"/>
-              </a:rPr>
-              <a:t>• Raw SQL</a:t>
-            </a:r>
-          </a:p>
-          <a:p>
-            <a:pPr marL="256032" indent="-256032">
-              <a:lnSpc>
-                <a:spcPct val="108000"/>
-              </a:lnSpc>
-              <a:spcBef>
-                <a:spcPts val="300"/>
-              </a:spcBef>
-              <a:spcAft>
-                <a:spcPts val="700"/>
-              </a:spcAft>
-            </a:pPr>
-            <a:r>
-              <a:rPr b="0" i="0" sz="1150">
-                <a:solidFill>
-                  <a:srgbClr val="333333"/>
-                </a:solidFill>
-                <a:latin typeface="Times New Roman"/>
-              </a:rPr>
-              <a:t>• Table names as executable authority</a:t>
-            </a:r>
-          </a:p>
-          <a:p>
-            <a:pPr marL="256032" indent="-256032">
-              <a:lnSpc>
-                <a:spcPct val="108000"/>
-              </a:lnSpc>
-              <a:spcBef>
-                <a:spcPts val="300"/>
-              </a:spcBef>
-              <a:spcAft>
-                <a:spcPts val="700"/>
-              </a:spcAft>
-            </a:pPr>
-            <a:r>
-              <a:rPr b="0" i="0" sz="1150">
-                <a:solidFill>
-                  <a:srgbClr val="333333"/>
-                </a:solidFill>
-                <a:latin typeface="Times New Roman"/>
-              </a:rPr>
-              <a:t>• Join paths</a:t>
-            </a:r>
-          </a:p>
-          <a:p>
-            <a:pPr marL="256032" indent="-256032">
-              <a:lnSpc>
-                <a:spcPct val="108000"/>
-              </a:lnSpc>
-              <a:spcBef>
-                <a:spcPts val="300"/>
-              </a:spcBef>
-              <a:spcAft>
-                <a:spcPts val="700"/>
-              </a:spcAft>
-            </a:pPr>
-            <a:r>
-              <a:rPr b="0" i="0" sz="1150">
-                <a:solidFill>
-                  <a:srgbClr val="333333"/>
-                </a:solidFill>
-                <a:latin typeface="Times New Roman"/>
-              </a:rPr>
-              <a:t>• Write statements</a:t>
-            </a:r>
-          </a:p>
-          <a:p>
-            <a:pPr marL="256032" indent="-256032">
-              <a:lnSpc>
-                <a:spcPct val="108000"/>
-              </a:lnSpc>
-              <a:spcBef>
-                <a:spcPts val="300"/>
-              </a:spcBef>
-              <a:spcAft>
-                <a:spcPts val="700"/>
-              </a:spcAft>
-            </a:pPr>
-            <a:r>
-              <a:rPr b="0" i="0" sz="1150">
-                <a:solidFill>
-                  <a:srgbClr val="333333"/>
-                </a:solidFill>
-                <a:latin typeface="Times New Roman"/>
-              </a:rPr>
-              <a:t>• Arbitrary expressions</a:t>
-            </a:r>
-          </a:p>
-        </p:txBody>
-      </p:sp>
-      <p:sp>
-        <p:nvSpPr>
-          <p:cNvPr id="14" name="Rectangle 13"/>
+              <a:t> kpi, table, matrix, chart</a:t>
+            </a:r>
+          </a:p>
+        </p:txBody>
+      </p:sp>
+      <p:sp>
+        <p:nvSpPr>
+          <p:cNvPr id="17" name="Rounded Rectangle 16"/>
           <p:cNvSpPr/>
           <p:nvPr/>
         </p:nvSpPr>
         <p:spPr>
           <a:xfrm>
-            <a:off x="6172200" y="1783080"/>
-            <a:ext cx="4480560" cy="2103120"/>
+            <a:off x="7882127" y="1335024"/>
+            <a:ext cx="3200400" cy="566928"/>
+          </a:xfrm>
+          <a:prstGeom prst="roundRect">
+            <a:avLst/>
+          </a:prstGeom>
+          <a:solidFill>
+            <a:srgbClr val="E2F0D9"/>
+          </a:solidFill>
+          <a:ln w="12700">
+            <a:solidFill>
+              <a:srgbClr val="003366"/>
+            </a:solidFill>
+          </a:ln>
+        </p:spPr>
+        <p:style>
+          <a:lnRef idx="1">
+            <a:schemeClr val="accent1"/>
+          </a:lnRef>
+          <a:fillRef idx="3">
+            <a:schemeClr val="accent1"/>
+          </a:fillRef>
+          <a:effectRef idx="2">
+            <a:schemeClr val="accent1"/>
+          </a:effectRef>
+          <a:fontRef idx="minor">
+            <a:schemeClr val="lt1"/>
+          </a:fontRef>
+        </p:style>
+        <p:txBody>
+          <a:bodyPr rtlCol="0" anchor="ctr" wrap="square" lIns="109728" rIns="109728" tIns="54864"/>
+          <a:lstStyle/>
+          <a:p>
+            <a:pPr algn="ctr">
+              <a:defRPr sz="1280" b="1">
+                <a:solidFill>
+                  <a:srgbClr val="003366"/>
+                </a:solidFill>
+                <a:latin typeface="Times New Roman"/>
+              </a:defRPr>
+            </a:pPr>
+            <a:r>
+              <a:t>3. LLM returns typed intent</a:t>
+            </a:r>
+          </a:p>
+        </p:txBody>
+      </p:sp>
+      <p:sp>
+        <p:nvSpPr>
+          <p:cNvPr id="18" name="Rectangle 17"/>
+          <p:cNvSpPr/>
+          <p:nvPr/>
+        </p:nvSpPr>
+        <p:spPr>
+          <a:xfrm>
+            <a:off x="7973568" y="2011680"/>
+            <a:ext cx="2971800" cy="1536192"/>
           </a:xfrm>
           <a:prstGeom prst="rect">
             <a:avLst/>
@@ -5627,14 +5676,14 @@
           </a:fontRef>
         </p:style>
         <p:txBody>
-          <a:bodyPr rtlCol="0" anchor="ctr" wrap="square" lIns="109728" tIns="73152"/>
-          <a:lstStyle/>
-          <a:p>
-            <a:pPr algn="ctr">
+          <a:bodyPr rtlCol="0" anchor="t" wrap="square" lIns="36576" tIns="73152"/>
+          <a:lstStyle/>
+          <a:p>
+            <a:pPr algn="l">
               <a:spcAft>
                 <a:spcPts val="100"/>
               </a:spcAft>
-              <a:defRPr sz="1300">
+              <a:defRPr sz="969">
                 <a:solidFill>
                   <a:srgbClr val="505050"/>
                 </a:solidFill>
@@ -5646,11 +5695,11 @@
             </a:r>
           </a:p>
           <a:p>
-            <a:pPr>
+            <a:pPr algn="l">
               <a:spcAft>
                 <a:spcPts val="100"/>
               </a:spcAft>
-              <a:defRPr sz="1300">
+              <a:defRPr sz="969">
                 <a:solidFill>
                   <a:srgbClr val="505050"/>
                 </a:solidFill>
@@ -5662,11 +5711,11 @@
             </a:r>
           </a:p>
           <a:p>
-            <a:pPr>
+            <a:pPr algn="l">
               <a:spcAft>
                 <a:spcPts val="100"/>
               </a:spcAft>
-              <a:defRPr sz="1300">
+              <a:defRPr sz="969">
                 <a:solidFill>
                   <a:srgbClr val="505050"/>
                 </a:solidFill>
@@ -5678,11 +5727,11 @@
             </a:r>
           </a:p>
           <a:p>
-            <a:pPr>
+            <a:pPr algn="l">
               <a:spcAft>
                 <a:spcPts val="100"/>
               </a:spcAft>
-              <a:defRPr sz="1300">
+              <a:defRPr sz="969">
                 <a:solidFill>
                   <a:srgbClr val="505050"/>
                 </a:solidFill>
@@ -5694,11 +5743,11 @@
             </a:r>
           </a:p>
           <a:p>
-            <a:pPr>
+            <a:pPr algn="l">
               <a:spcAft>
                 <a:spcPts val="100"/>
               </a:spcAft>
-              <a:defRPr sz="1300">
+              <a:defRPr sz="969">
                 <a:solidFill>
                   <a:srgbClr val="505050"/>
                 </a:solidFill>
@@ -5706,15 +5755,15 @@
               </a:defRPr>
             </a:pPr>
             <a:r>
-              <a:t>  "time_range": "all_time",</a:t>
-            </a:r>
-          </a:p>
-          <a:p>
-            <a:pPr>
+              <a:t>  "output_shape": "table"</a:t>
+            </a:r>
+          </a:p>
+          <a:p>
+            <a:pPr algn="l">
               <a:spcAft>
                 <a:spcPts val="100"/>
               </a:spcAft>
-              <a:defRPr sz="1300">
+              <a:defRPr sz="969">
                 <a:solidFill>
                   <a:srgbClr val="505050"/>
                 </a:solidFill>
@@ -5722,138 +5771,345 @@
               </a:defRPr>
             </a:pPr>
             <a:r>
-              <a:t>  "output_shape": "table"</a:t>
-            </a:r>
-          </a:p>
-          <a:p>
-            <a:pPr>
-              <a:spcAft>
-                <a:spcPts val="100"/>
-              </a:spcAft>
-              <a:defRPr sz="1300">
-                <a:solidFill>
-                  <a:srgbClr val="505050"/>
-                </a:solidFill>
-                <a:latin typeface="Consolas"/>
-              </a:defRPr>
-            </a:pPr>
-            <a:r>
               <a:t>}</a:t>
             </a:r>
           </a:p>
         </p:txBody>
       </p:sp>
-      <p:sp>
-        <p:nvSpPr>
-          <p:cNvPr id="15" name="TextBox 14"/>
-          <p:cNvSpPr txBox="1"/>
+      <p:cxnSp>
+        <p:nvCxnSpPr>
+          <p:cNvPr id="19" name="Connector 18"/>
+          <p:cNvCxnSpPr/>
           <p:nvPr/>
-        </p:nvSpPr>
-        <p:spPr>
-          <a:xfrm>
-            <a:off x="6172200" y="4160520"/>
-            <a:ext cx="4937760" cy="1600200"/>
-          </a:xfrm>
-          <a:prstGeom prst="rect">
+        </p:nvCxnSpPr>
+        <p:spPr>
+          <a:xfrm>
+            <a:off x="3538728" y="1618488"/>
+            <a:ext cx="347472" cy="0"/>
+          </a:xfrm>
+          <a:prstGeom prst="line">
             <a:avLst/>
           </a:prstGeom>
-          <a:noFill/>
-        </p:spPr>
-        <p:txBody>
-          <a:bodyPr wrap="square" anchor="t" lIns="0" tIns="0" rIns="0">
-            <a:spAutoFit/>
-          </a:bodyPr>
-          <a:lstStyle/>
-          <a:p>
-            <a:pPr marL="0" indent="0">
-              <a:lnSpc>
-                <a:spcPct val="108000"/>
-              </a:lnSpc>
-              <a:spcBef>
-                <a:spcPts val="1200"/>
-              </a:spcBef>
-              <a:spcAft>
-                <a:spcPts val="500"/>
-              </a:spcAft>
-            </a:pPr>
-            <a:r>
-              <a:rPr b="1" i="0" sz="1600">
-                <a:solidFill>
-                  <a:srgbClr val="003366"/>
-                </a:solidFill>
-                <a:latin typeface="Times New Roman"/>
-              </a:rPr>
-              <a:t>Boundary claim:</a:t>
-            </a:r>
-          </a:p>
-          <a:p>
-            <a:pPr marL="256032" indent="-256032">
-              <a:lnSpc>
-                <a:spcPct val="108000"/>
-              </a:lnSpc>
-              <a:spcBef>
-                <a:spcPts val="300"/>
-              </a:spcBef>
-              <a:spcAft>
-                <a:spcPts val="700"/>
-              </a:spcAft>
-            </a:pPr>
-            <a:r>
-              <a:rPr b="0" i="0" sz="1300">
-                <a:solidFill>
-                  <a:srgbClr val="333333"/>
-                </a:solidFill>
-                <a:latin typeface="Times New Roman"/>
-              </a:rPr>
-              <a:t>• The model output is treated as data.</a:t>
-            </a:r>
-          </a:p>
-          <a:p>
-            <a:pPr marL="256032" indent="-256032">
-              <a:lnSpc>
-                <a:spcPct val="108000"/>
-              </a:lnSpc>
-              <a:spcBef>
-                <a:spcPts val="300"/>
-              </a:spcBef>
-              <a:spcAft>
-                <a:spcPts val="700"/>
-              </a:spcAft>
-            </a:pPr>
-            <a:r>
-              <a:rPr b="0" i="0" sz="1300">
-                <a:solidFill>
-                  <a:srgbClr val="333333"/>
-                </a:solidFill>
-                <a:latin typeface="Times New Roman"/>
-              </a:rPr>
-              <a:t>• The compiler accepts only fields that map to semantic-layer entries.</a:t>
-            </a:r>
-          </a:p>
-          <a:p>
-            <a:pPr marL="256032" indent="-256032">
-              <a:lnSpc>
-                <a:spcPct val="108000"/>
-              </a:lnSpc>
-              <a:spcBef>
-                <a:spcPts val="300"/>
-              </a:spcBef>
-              <a:spcAft>
-                <a:spcPts val="700"/>
-              </a:spcAft>
-            </a:pPr>
-            <a:r>
-              <a:rPr b="0" i="0" sz="1300">
-                <a:solidFill>
-                  <a:srgbClr val="333333"/>
-                </a:solidFill>
-                <a:latin typeface="Times New Roman"/>
-              </a:rPr>
-              <a:t>• If a required mapping is absent, the system returns a controlled refusal or clarification instead of inventing SQL.</a:t>
-            </a:r>
-          </a:p>
-        </p:txBody>
-      </p:sp>
+          <a:ln w="25400">
+            <a:solidFill>
+              <a:srgbClr val="003366"/>
+            </a:solidFill>
+          </a:ln>
+        </p:spPr>
+        <p:style>
+          <a:lnRef idx="2">
+            <a:schemeClr val="accent1"/>
+          </a:lnRef>
+          <a:fillRef idx="0">
+            <a:schemeClr val="accent1"/>
+          </a:fillRef>
+          <a:effectRef idx="1">
+            <a:schemeClr val="accent1"/>
+          </a:effectRef>
+          <a:fontRef idx="minor">
+            <a:schemeClr val="tx1"/>
+          </a:fontRef>
+        </p:style>
+      </p:cxnSp>
+      <p:cxnSp>
+        <p:nvCxnSpPr>
+          <p:cNvPr id="20" name="Connector 19"/>
+          <p:cNvCxnSpPr/>
+          <p:nvPr/>
+        </p:nvCxnSpPr>
+        <p:spPr>
+          <a:xfrm>
+            <a:off x="7223760" y="1618488"/>
+            <a:ext cx="658367" cy="0"/>
+          </a:xfrm>
+          <a:prstGeom prst="line">
+            <a:avLst/>
+          </a:prstGeom>
+          <a:ln w="25400">
+            <a:solidFill>
+              <a:srgbClr val="003366"/>
+            </a:solidFill>
+          </a:ln>
+        </p:spPr>
+        <p:style>
+          <a:lnRef idx="2">
+            <a:schemeClr val="accent1"/>
+          </a:lnRef>
+          <a:fillRef idx="0">
+            <a:schemeClr val="accent1"/>
+          </a:fillRef>
+          <a:effectRef idx="1">
+            <a:schemeClr val="accent1"/>
+          </a:effectRef>
+          <a:fontRef idx="minor">
+            <a:schemeClr val="tx1"/>
+          </a:fontRef>
+        </p:style>
+      </p:cxnSp>
+      <p:graphicFrame>
+        <p:nvGraphicFramePr>
+          <p:cNvPr id="21" name="Table 20"/>
+          <p:cNvGraphicFramePr>
+            <a:graphicFrameLocks noGrp="1"/>
+          </p:cNvGraphicFramePr>
+          <p:nvPr/>
+        </p:nvGraphicFramePr>
+        <p:xfrm>
+          <a:off x="804672" y="4279392"/>
+          <a:ext cx="10286999" cy="1298448"/>
+        </p:xfrm>
+        <a:graphic>
+          <a:graphicData uri="http://schemas.openxmlformats.org/drawingml/2006/table">
+            <a:tbl>
+              <a:tblPr firstRow="1" bandRow="1">
+                <a:tableStyleId>{5C22544A-7EE6-4342-B048-85BDC9FD1C3A}</a:tableStyleId>
+              </a:tblPr>
+              <a:tblGrid>
+                <a:gridCol w="2240280"/>
+                <a:gridCol w="3749039"/>
+                <a:gridCol w="4297680"/>
+              </a:tblGrid>
+              <a:tr h="432816">
+                <a:tc>
+                  <a:txBody>
+                    <a:bodyPr/>
+                    <a:lstStyle/>
+                    <a:p>
+                      <a:pPr algn="ctr">
+                        <a:lnSpc>
+                          <a:spcPct val="100000"/>
+                        </a:lnSpc>
+                        <a:defRPr sz="1150" b="1">
+                          <a:solidFill>
+                            <a:srgbClr val="FFFFFF"/>
+                          </a:solidFill>
+                          <a:latin typeface="Times New Roman"/>
+                        </a:defRPr>
+                      </a:pPr>
+                      <a:r>
+                        <a:t>Stage</a:t>
+                      </a:r>
+                    </a:p>
+                  </a:txBody>
+                  <a:tcPr marL="36576" marR="36576" marT="13716" marB="13716" anchor="ctr">
+                    <a:solidFill>
+                      <a:srgbClr val="003366"/>
+                    </a:solidFill>
+                  </a:tcPr>
+                </a:tc>
+                <a:tc>
+                  <a:txBody>
+                    <a:bodyPr/>
+                    <a:lstStyle/>
+                    <a:p>
+                      <a:pPr algn="ctr">
+                        <a:lnSpc>
+                          <a:spcPct val="100000"/>
+                        </a:lnSpc>
+                        <a:defRPr sz="1150" b="1">
+                          <a:solidFill>
+                            <a:srgbClr val="FFFFFF"/>
+                          </a:solidFill>
+                          <a:latin typeface="Times New Roman"/>
+                        </a:defRPr>
+                      </a:pPr>
+                      <a:r>
+                        <a:t>Allowed</a:t>
+                      </a:r>
+                    </a:p>
+                  </a:txBody>
+                  <a:tcPr marL="36576" marR="36576" marT="13716" marB="13716" anchor="ctr">
+                    <a:solidFill>
+                      <a:srgbClr val="003366"/>
+                    </a:solidFill>
+                  </a:tcPr>
+                </a:tc>
+                <a:tc>
+                  <a:txBody>
+                    <a:bodyPr/>
+                    <a:lstStyle/>
+                    <a:p>
+                      <a:pPr algn="ctr">
+                        <a:lnSpc>
+                          <a:spcPct val="100000"/>
+                        </a:lnSpc>
+                        <a:defRPr sz="1150" b="1">
+                          <a:solidFill>
+                            <a:srgbClr val="FFFFFF"/>
+                          </a:solidFill>
+                          <a:latin typeface="Times New Roman"/>
+                        </a:defRPr>
+                      </a:pPr>
+                      <a:r>
+                        <a:t>Not allowed</a:t>
+                      </a:r>
+                    </a:p>
+                  </a:txBody>
+                  <a:tcPr marL="36576" marR="36576" marT="13716" marB="13716" anchor="ctr">
+                    <a:solidFill>
+                      <a:srgbClr val="003366"/>
+                    </a:solidFill>
+                  </a:tcPr>
+                </a:tc>
+              </a:tr>
+              <a:tr h="432816">
+                <a:tc>
+                  <a:txBody>
+                    <a:bodyPr/>
+                    <a:lstStyle/>
+                    <a:p>
+                      <a:pPr algn="ctr">
+                        <a:lnSpc>
+                          <a:spcPct val="100000"/>
+                        </a:lnSpc>
+                        <a:defRPr sz="1060" b="1">
+                          <a:solidFill>
+                            <a:srgbClr val="333333"/>
+                          </a:solidFill>
+                          <a:latin typeface="Times New Roman"/>
+                        </a:defRPr>
+                      </a:pPr>
+                      <a:r>
+                        <a:t>LLM</a:t>
+                      </a:r>
+                    </a:p>
+                  </a:txBody>
+                  <a:tcPr marL="36576" marR="36576" marT="13716" marB="13716" anchor="ctr"/>
+                </a:tc>
+                <a:tc>
+                  <a:txBody>
+                    <a:bodyPr/>
+                    <a:lstStyle/>
+                    <a:p>
+                      <a:pPr algn="l">
+                        <a:lnSpc>
+                          <a:spcPct val="100000"/>
+                        </a:lnSpc>
+                        <a:defRPr sz="1060" b="0">
+                          <a:solidFill>
+                            <a:srgbClr val="333333"/>
+                          </a:solidFill>
+                          <a:latin typeface="Times New Roman"/>
+                        </a:defRPr>
+                      </a:pPr>
+                      <a:r>
+                        <a:t>Choose approved ids from vocabulary</a:t>
+                      </a:r>
+                    </a:p>
+                  </a:txBody>
+                  <a:tcPr marL="36576" marR="36576" marT="13716" marB="13716" anchor="ctr"/>
+                </a:tc>
+                <a:tc>
+                  <a:txBody>
+                    <a:bodyPr/>
+                    <a:lstStyle/>
+                    <a:p>
+                      <a:pPr algn="l">
+                        <a:lnSpc>
+                          <a:spcPct val="100000"/>
+                        </a:lnSpc>
+                        <a:defRPr sz="1060" b="0">
+                          <a:solidFill>
+                            <a:srgbClr val="333333"/>
+                          </a:solidFill>
+                          <a:latin typeface="Times New Roman"/>
+                        </a:defRPr>
+                      </a:pPr>
+                      <a:r>
+                        <a:t>Raw SQL, joins, table names, writes</a:t>
+                      </a:r>
+                    </a:p>
+                  </a:txBody>
+                  <a:tcPr marL="36576" marR="36576" marT="13716" marB="13716" anchor="ctr"/>
+                </a:tc>
+              </a:tr>
+              <a:tr h="432816">
+                <a:tc>
+                  <a:txBody>
+                    <a:bodyPr/>
+                    <a:lstStyle/>
+                    <a:p>
+                      <a:pPr algn="ctr">
+                        <a:lnSpc>
+                          <a:spcPct val="100000"/>
+                        </a:lnSpc>
+                        <a:defRPr sz="1060" b="1">
+                          <a:solidFill>
+                            <a:srgbClr val="333333"/>
+                          </a:solidFill>
+                          <a:latin typeface="Times New Roman"/>
+                        </a:defRPr>
+                      </a:pPr>
+                      <a:r>
+                        <a:t>AEGIS</a:t>
+                      </a:r>
+                    </a:p>
+                  </a:txBody>
+                  <a:tcPr marL="36576" marR="36576" marT="13716" marB="13716" anchor="ctr">
+                    <a:solidFill>
+                      <a:srgbClr val="F2F4F8"/>
+                    </a:solidFill>
+                  </a:tcPr>
+                </a:tc>
+                <a:tc>
+                  <a:txBody>
+                    <a:bodyPr/>
+                    <a:lstStyle/>
+                    <a:p>
+                      <a:pPr algn="l">
+                        <a:lnSpc>
+                          <a:spcPct val="100000"/>
+                        </a:lnSpc>
+                        <a:defRPr sz="1060" b="0">
+                          <a:solidFill>
+                            <a:srgbClr val="333333"/>
+                          </a:solidFill>
+                          <a:latin typeface="Times New Roman"/>
+                        </a:defRPr>
+                      </a:pPr>
+                      <a:r>
+                        <a:t>Bind ids to semantic definitions</a:t>
+                      </a:r>
+                    </a:p>
+                  </a:txBody>
+                  <a:tcPr marL="36576" marR="36576" marT="13716" marB="13716" anchor="ctr">
+                    <a:solidFill>
+                      <a:srgbClr val="F2F4F8"/>
+                    </a:solidFill>
+                  </a:tcPr>
+                </a:tc>
+                <a:tc>
+                  <a:txBody>
+                    <a:bodyPr/>
+                    <a:lstStyle/>
+                    <a:p>
+                      <a:pPr algn="l">
+                        <a:lnSpc>
+                          <a:spcPct val="100000"/>
+                        </a:lnSpc>
+                        <a:defRPr sz="1060" b="0">
+                          <a:solidFill>
+                            <a:srgbClr val="333333"/>
+                          </a:solidFill>
+                          <a:latin typeface="Times New Roman"/>
+                        </a:defRPr>
+                      </a:pPr>
+                      <a:r>
+                        <a:t>Unknown ids, silent fallback, unsafe execution</a:t>
+                      </a:r>
+                    </a:p>
+                  </a:txBody>
+                  <a:tcPr marL="36576" marR="36576" marT="13716" marB="13716" anchor="ctr">
+                    <a:solidFill>
+                      <a:srgbClr val="F2F4F8"/>
+                    </a:solidFill>
+                  </a:tcPr>
+                </a:tc>
+              </a:tr>
+            </a:tbl>
+          </a:graphicData>
+        </a:graphic>
+      </p:graphicFrame>
     </p:spTree>
   </p:cSld>
   <p:clrMapOvr>
@@ -6092,7 +6348,7 @@
               </a:defRPr>
             </a:pPr>
             <a:r>
-              <a:t>Question-to-SQL Walkthrough</a:t>
+              <a:t>Semantic Mapping Under the Hood</a:t>
             </a:r>
           </a:p>
         </p:txBody>
@@ -6225,8 +6481,8 @@
         </p:nvSpPr>
         <p:spPr>
           <a:xfrm>
-            <a:off x="685800" y="1371600"/>
-            <a:ext cx="2331720" cy="713232"/>
+            <a:off x="749808" y="1353312"/>
+            <a:ext cx="2834640" cy="841248"/>
           </a:xfrm>
           <a:prstGeom prst="roundRect">
             <a:avLst/>
@@ -6259,7 +6515,7 @@
           <a:lstStyle/>
           <a:p>
             <a:pPr algn="ctr">
-              <a:defRPr sz="1300" b="1">
+              <a:defRPr sz="1200" b="1">
                 <a:solidFill>
                   <a:srgbClr val="003366"/>
                 </a:solidFill>
@@ -6267,11 +6523,15 @@
               </a:defRPr>
             </a:pPr>
             <a:r>
-              <a:t>User question</a:t>
+              <a:t>Intent received</a:t>
             </a:r>
             <a:br/>
             <a:r>
-              <a:t>"Show order average by status"</a:t>
+              <a:t>metric_term=avg_order_value</a:t>
+            </a:r>
+            <a:br/>
+            <a:r>
+              <a:t>dimension_term=order_status</a:t>
             </a:r>
           </a:p>
         </p:txBody>
@@ -6284,8 +6544,8 @@
         </p:nvSpPr>
         <p:spPr>
           <a:xfrm>
-            <a:off x="3337560" y="1371600"/>
-            <a:ext cx="2514600" cy="713232"/>
+            <a:off x="4572000" y="1353312"/>
+            <a:ext cx="2834640" cy="841248"/>
           </a:xfrm>
           <a:prstGeom prst="roundRect">
             <a:avLst/>
@@ -6326,15 +6586,11 @@
               </a:defRPr>
             </a:pPr>
             <a:r>
-              <a:t>Intent JSON</a:t>
+              <a:t>Lookup in semantic layer</a:t>
             </a:r>
             <a:br/>
             <a:r>
-              <a:t>metric=avg_order_value</a:t>
-            </a:r>
-            <a:br/>
-            <a:r>
-              <a:t>dimension=order_status</a:t>
+              <a:t>METRICS + DIMENSIONS</a:t>
             </a:r>
           </a:p>
         </p:txBody>
@@ -6347,8 +6603,8 @@
         </p:nvSpPr>
         <p:spPr>
           <a:xfrm>
-            <a:off x="6172200" y="1371600"/>
-            <a:ext cx="2514600" cy="713232"/>
+            <a:off x="8339327" y="1353312"/>
+            <a:ext cx="2331720" cy="841248"/>
           </a:xfrm>
           <a:prstGeom prst="roundRect">
             <a:avLst/>
@@ -6389,84 +6645,29 @@
               </a:defRPr>
             </a:pPr>
             <a:r>
-              <a:t>Semantic mapping</a:t>
+              <a:t>Analysis plan</a:t>
             </a:r>
             <a:br/>
             <a:r>
-              <a:t>metric + dimension + matrix pattern</a:t>
-            </a:r>
-          </a:p>
-        </p:txBody>
-      </p:sp>
-      <p:sp>
-        <p:nvSpPr>
-          <p:cNvPr id="16" name="Rounded Rectangle 15"/>
-          <p:cNvSpPr/>
-          <p:nvPr/>
-        </p:nvSpPr>
-        <p:spPr>
-          <a:xfrm>
-            <a:off x="8979408" y="1371600"/>
-            <a:ext cx="2331720" cy="713232"/>
-          </a:xfrm>
-          <a:prstGeom prst="roundRect">
-            <a:avLst/>
-          </a:prstGeom>
-          <a:solidFill>
-            <a:srgbClr val="E2F0D9"/>
-          </a:solidFill>
-          <a:ln w="12700">
-            <a:solidFill>
-              <a:srgbClr val="003366"/>
-            </a:solidFill>
-          </a:ln>
-        </p:spPr>
-        <p:style>
-          <a:lnRef idx="1">
-            <a:schemeClr val="accent1"/>
-          </a:lnRef>
-          <a:fillRef idx="3">
-            <a:schemeClr val="accent1"/>
-          </a:fillRef>
-          <a:effectRef idx="2">
-            <a:schemeClr val="accent1"/>
-          </a:effectRef>
-          <a:fontRef idx="minor">
-            <a:schemeClr val="lt1"/>
-          </a:fontRef>
-        </p:style>
-        <p:txBody>
-          <a:bodyPr rtlCol="0" anchor="ctr" wrap="square" lIns="109728" rIns="109728" tIns="54864"/>
-          <a:lstStyle/>
-          <a:p>
-            <a:pPr algn="ctr">
-              <a:defRPr sz="1300" b="1">
-                <a:solidFill>
-                  <a:srgbClr val="003366"/>
-                </a:solidFill>
-                <a:latin typeface="Times New Roman"/>
-              </a:defRPr>
-            </a:pPr>
-            <a:r>
-              <a:t>Compiler output</a:t>
+              <a:t>pattern=segment</a:t>
             </a:r>
             <a:br/>
             <a:r>
-              <a:t>safe SELECT only</a:t>
+              <a:t>shape=table</a:t>
             </a:r>
           </a:p>
         </p:txBody>
       </p:sp>
       <p:cxnSp>
         <p:nvCxnSpPr>
-          <p:cNvPr id="17" name="Connector 16"/>
+          <p:cNvPr id="16" name="Connector 15"/>
           <p:cNvCxnSpPr/>
           <p:nvPr/>
         </p:nvCxnSpPr>
         <p:spPr>
           <a:xfrm>
-            <a:off x="3017520" y="1728216"/>
-            <a:ext cx="320040" cy="0"/>
+            <a:off x="3584448" y="1773936"/>
+            <a:ext cx="987552" cy="0"/>
           </a:xfrm>
           <a:prstGeom prst="line">
             <a:avLst/>
@@ -6494,14 +6695,14 @@
       </p:cxnSp>
       <p:cxnSp>
         <p:nvCxnSpPr>
-          <p:cNvPr id="18" name="Connector 17"/>
+          <p:cNvPr id="17" name="Connector 16"/>
           <p:cNvCxnSpPr/>
           <p:nvPr/>
         </p:nvCxnSpPr>
         <p:spPr>
           <a:xfrm>
-            <a:off x="5852160" y="1728216"/>
-            <a:ext cx="320040" cy="0"/>
+            <a:off x="7406640" y="1773936"/>
+            <a:ext cx="932687" cy="0"/>
           </a:xfrm>
           <a:prstGeom prst="line">
             <a:avLst/>
@@ -6527,206 +6728,17 @@
           </a:fontRef>
         </p:style>
       </p:cxnSp>
-      <p:cxnSp>
-        <p:nvCxnSpPr>
-          <p:cNvPr id="19" name="Connector 18"/>
-          <p:cNvCxnSpPr/>
-          <p:nvPr/>
-        </p:nvCxnSpPr>
-        <p:spPr>
-          <a:xfrm>
-            <a:off x="8686800" y="1728216"/>
-            <a:ext cx="292608" cy="0"/>
-          </a:xfrm>
-          <a:prstGeom prst="line">
-            <a:avLst/>
-          </a:prstGeom>
-          <a:ln w="25400">
-            <a:solidFill>
-              <a:srgbClr val="003366"/>
-            </a:solidFill>
-          </a:ln>
-        </p:spPr>
-        <p:style>
-          <a:lnRef idx="2">
-            <a:schemeClr val="accent1"/>
-          </a:lnRef>
-          <a:fillRef idx="0">
-            <a:schemeClr val="accent1"/>
-          </a:fillRef>
-          <a:effectRef idx="1">
-            <a:schemeClr val="accent1"/>
-          </a:effectRef>
-          <a:fontRef idx="minor">
-            <a:schemeClr val="tx1"/>
-          </a:fontRef>
-        </p:style>
-      </p:cxnSp>
-      <p:sp>
-        <p:nvSpPr>
-          <p:cNvPr id="20" name="Rectangle 19"/>
-          <p:cNvSpPr/>
-          <p:nvPr/>
-        </p:nvSpPr>
-        <p:spPr>
-          <a:xfrm>
-            <a:off x="960120" y="2743200"/>
-            <a:ext cx="5074920" cy="2057400"/>
-          </a:xfrm>
-          <a:prstGeom prst="rect">
-            <a:avLst/>
-          </a:prstGeom>
-          <a:solidFill>
-            <a:srgbClr val="F7F7F7"/>
-          </a:solidFill>
-          <a:ln>
-            <a:solidFill>
-              <a:srgbClr val="B7B7B7"/>
-            </a:solidFill>
-          </a:ln>
-        </p:spPr>
-        <p:style>
-          <a:lnRef idx="1">
-            <a:schemeClr val="accent1"/>
-          </a:lnRef>
-          <a:fillRef idx="3">
-            <a:schemeClr val="accent1"/>
-          </a:fillRef>
-          <a:effectRef idx="2">
-            <a:schemeClr val="accent1"/>
-          </a:effectRef>
-          <a:fontRef idx="minor">
-            <a:schemeClr val="lt1"/>
-          </a:fontRef>
-        </p:style>
-        <p:txBody>
-          <a:bodyPr rtlCol="0" anchor="ctr" wrap="square" lIns="109728" tIns="73152"/>
-          <a:lstStyle/>
-          <a:p>
-            <a:pPr algn="ctr">
-              <a:spcAft>
-                <a:spcPts val="100"/>
-              </a:spcAft>
-              <a:defRPr sz="1200">
-                <a:solidFill>
-                  <a:srgbClr val="505050"/>
-                </a:solidFill>
-                <a:latin typeface="Consolas"/>
-              </a:defRPr>
-            </a:pPr>
-            <a:r>
-              <a:t>SELECT status_label,</a:t>
-            </a:r>
-          </a:p>
-          <a:p>
-            <a:pPr>
-              <a:spcAft>
-                <a:spcPts val="100"/>
-              </a:spcAft>
-              <a:defRPr sz="1200">
-                <a:solidFill>
-                  <a:srgbClr val="505050"/>
-                </a:solidFill>
-                <a:latin typeface="Consolas"/>
-              </a:defRPr>
-            </a:pPr>
-            <a:r>
-              <a:t>       COUNT(*) AS order_count,</a:t>
-            </a:r>
-          </a:p>
-          <a:p>
-            <a:pPr>
-              <a:spcAft>
-                <a:spcPts val="100"/>
-              </a:spcAft>
-              <a:defRPr sz="1200">
-                <a:solidFill>
-                  <a:srgbClr val="505050"/>
-                </a:solidFill>
-                <a:latin typeface="Consolas"/>
-              </a:defRPr>
-            </a:pPr>
-            <a:r>
-              <a:t>       SUM(OrderTotal) AS revenue,</a:t>
-            </a:r>
-          </a:p>
-          <a:p>
-            <a:pPr>
-              <a:spcAft>
-                <a:spcPts val="100"/>
-              </a:spcAft>
-              <a:defRPr sz="1200">
-                <a:solidFill>
-                  <a:srgbClr val="505050"/>
-                </a:solidFill>
-                <a:latin typeface="Consolas"/>
-              </a:defRPr>
-            </a:pPr>
-            <a:r>
-              <a:t>       AVG(OrderTotal) AS avg_order_value</a:t>
-            </a:r>
-          </a:p>
-          <a:p>
-            <a:pPr>
-              <a:spcAft>
-                <a:spcPts val="100"/>
-              </a:spcAft>
-              <a:defRPr sz="1200">
-                <a:solidFill>
-                  <a:srgbClr val="505050"/>
-                </a:solidFill>
-                <a:latin typeface="Consolas"/>
-              </a:defRPr>
-            </a:pPr>
-            <a:r>
-              <a:t>FROM approved_order_summary</a:t>
-            </a:r>
-          </a:p>
-          <a:p>
-            <a:pPr>
-              <a:spcAft>
-                <a:spcPts val="100"/>
-              </a:spcAft>
-              <a:defRPr sz="1200">
-                <a:solidFill>
-                  <a:srgbClr val="505050"/>
-                </a:solidFill>
-                <a:latin typeface="Consolas"/>
-              </a:defRPr>
-            </a:pPr>
-            <a:r>
-              <a:t>GROUP BY status_label</a:t>
-            </a:r>
-          </a:p>
-          <a:p>
-            <a:pPr>
-              <a:spcAft>
-                <a:spcPts val="100"/>
-              </a:spcAft>
-              <a:defRPr sz="1200">
-                <a:solidFill>
-                  <a:srgbClr val="505050"/>
-                </a:solidFill>
-                <a:latin typeface="Consolas"/>
-              </a:defRPr>
-            </a:pPr>
-            <a:r>
-              <a:t>ORDER BY revenue DESC;</a:t>
-            </a:r>
-          </a:p>
-        </p:txBody>
-      </p:sp>
       <p:graphicFrame>
         <p:nvGraphicFramePr>
-          <p:cNvPr id="21" name="Table 20"/>
+          <p:cNvPr id="18" name="Table 17"/>
           <p:cNvGraphicFramePr>
             <a:graphicFrameLocks noGrp="1"/>
           </p:cNvGraphicFramePr>
           <p:nvPr/>
         </p:nvGraphicFramePr>
         <p:xfrm>
-          <a:off x="6400800" y="2697480"/>
-          <a:ext cx="4754880" cy="2148840"/>
+          <a:off x="685800" y="2606040"/>
+          <a:ext cx="10835640" cy="2148840"/>
         </p:xfrm>
         <a:graphic>
           <a:graphicData uri="http://schemas.openxmlformats.org/drawingml/2006/table">
@@ -6735,12 +6747,13 @@
                 <a:tableStyleId>{5C22544A-7EE6-4342-B048-85BDC9FD1C3A}</a:tableStyleId>
               </a:tblPr>
               <a:tblGrid>
-                <a:gridCol w="1188720"/>
-                <a:gridCol w="1188720"/>
-                <a:gridCol w="1188720"/>
-                <a:gridCol w="1188720"/>
+                <a:gridCol w="1508760"/>
+                <a:gridCol w="1828800"/>
+                <a:gridCol w="2834640"/>
+                <a:gridCol w="2377440"/>
+                <a:gridCol w="2286000"/>
               </a:tblGrid>
-              <a:tr h="429768">
+              <a:tr h="537210">
                 <a:tc>
                   <a:txBody>
                     <a:bodyPr/>
@@ -6758,11 +6771,11 @@
                         </a:defRPr>
                       </a:pPr>
                       <a:r>
-                        <a:t>Status</a:t>
+                        <a:t>Slot</a:t>
                       </a:r>
                     </a:p>
                   </a:txBody>
-                  <a:tcPr marL="91440" marR="91440" marT="45720" marB="45720" anchor="ctr">
+                  <a:tcPr marL="32004" marR="32004" marT="13716" marB="13716" anchor="ctr">
                     <a:solidFill>
                       <a:srgbClr val="003366"/>
                     </a:solidFill>
@@ -6785,11 +6798,11 @@
                         </a:defRPr>
                       </a:pPr>
                       <a:r>
-                        <a:t>Orders</a:t>
+                        <a:t>Resolved id</a:t>
                       </a:r>
                     </a:p>
                   </a:txBody>
-                  <a:tcPr marL="91440" marR="91440" marT="45720" marB="45720" anchor="ctr">
+                  <a:tcPr marL="32004" marR="32004" marT="13716" marB="13716" anchor="ctr">
                     <a:solidFill>
                       <a:srgbClr val="003366"/>
                     </a:solidFill>
@@ -6812,11 +6825,11 @@
                         </a:defRPr>
                       </a:pPr>
                       <a:r>
-                        <a:t>Revenue</a:t>
+                        <a:t>Business meaning</a:t>
                       </a:r>
                     </a:p>
                   </a:txBody>
-                  <a:tcPr marL="91440" marR="91440" marT="45720" marB="45720" anchor="ctr">
+                  <a:tcPr marL="32004" marR="32004" marT="13716" marB="13716" anchor="ctr">
                     <a:solidFill>
                       <a:srgbClr val="003366"/>
                     </a:solidFill>
@@ -6839,40 +6852,15 @@
                         </a:defRPr>
                       </a:pPr>
                       <a:r>
-                        <a:t>AOV</a:t>
+                        <a:t>SQL expression</a:t>
                       </a:r>
                     </a:p>
                   </a:txBody>
-                  <a:tcPr marL="91440" marR="91440" marT="45720" marB="45720" anchor="ctr">
+                  <a:tcPr marL="32004" marR="32004" marT="13716" marB="13716" anchor="ctr">
                     <a:solidFill>
                       <a:srgbClr val="003366"/>
                     </a:solidFill>
                   </a:tcPr>
-                </a:tc>
-              </a:tr>
-              <a:tr h="429768">
-                <a:tc>
-                  <a:txBody>
-                    <a:bodyPr/>
-                    <a:lstStyle/>
-                    <a:p>
-                      <a:pPr algn="l">
-                        <a:lnSpc>
-                          <a:spcPct val="100000"/>
-                        </a:lnSpc>
-                        <a:defRPr sz="1050" b="0">
-                          <a:solidFill>
-                            <a:srgbClr val="333333"/>
-                          </a:solidFill>
-                          <a:latin typeface="Times New Roman"/>
-                        </a:defRPr>
-                      </a:pPr>
-                      <a:r>
-                        <a:t>Complete</a:t>
-                      </a:r>
-                    </a:p>
-                  </a:txBody>
-                  <a:tcPr marL="91440" marR="91440" marT="45720" marB="45720" anchor="ctr"/>
                 </a:tc>
                 <a:tc>
                   <a:txBody>
@@ -6883,7 +6871,36 @@
                         <a:lnSpc>
                           <a:spcPct val="100000"/>
                         </a:lnSpc>
-                        <a:defRPr sz="1050" b="0">
+                        <a:defRPr sz="1050" b="1">
+                          <a:solidFill>
+                            <a:srgbClr val="FFFFFF"/>
+                          </a:solidFill>
+                          <a:latin typeface="Times New Roman"/>
+                        </a:defRPr>
+                      </a:pPr>
+                      <a:r>
+                        <a:t>Binding</a:t>
+                      </a:r>
+                    </a:p>
+                  </a:txBody>
+                  <a:tcPr marL="32004" marR="32004" marT="13716" marB="13716" anchor="ctr">
+                    <a:solidFill>
+                      <a:srgbClr val="003366"/>
+                    </a:solidFill>
+                  </a:tcPr>
+                </a:tc>
+              </a:tr>
+              <a:tr h="537210">
+                <a:tc>
+                  <a:txBody>
+                    <a:bodyPr/>
+                    <a:lstStyle/>
+                    <a:p>
+                      <a:pPr algn="ctr">
+                        <a:lnSpc>
+                          <a:spcPct val="100000"/>
+                        </a:lnSpc>
+                        <a:defRPr sz="980" b="1">
                           <a:solidFill>
                             <a:srgbClr val="333333"/>
                           </a:solidFill>
@@ -6891,11 +6908,11 @@
                         </a:defRPr>
                       </a:pPr>
                       <a:r>
-                        <a:t>1,846</a:t>
+                        <a:t>Metric</a:t>
                       </a:r>
                     </a:p>
                   </a:txBody>
-                  <a:tcPr marL="91440" marR="91440" marT="45720" marB="45720" anchor="ctr"/>
+                  <a:tcPr marL="32004" marR="32004" marT="13716" marB="13716" anchor="ctr"/>
                 </a:tc>
                 <a:tc>
                   <a:txBody>
@@ -6906,7 +6923,7 @@
                         <a:lnSpc>
                           <a:spcPct val="100000"/>
                         </a:lnSpc>
-                        <a:defRPr sz="1050" b="0">
+                        <a:defRPr sz="980" b="0">
                           <a:solidFill>
                             <a:srgbClr val="333333"/>
                           </a:solidFill>
@@ -6914,12 +6931,83 @@
                         </a:defRPr>
                       </a:pPr>
                       <a:r>
-                        <a:t>Tk ...</a:t>
+                        <a:t>avg_order_value</a:t>
                       </a:r>
                     </a:p>
                   </a:txBody>
-                  <a:tcPr marL="91440" marR="91440" marT="45720" marB="45720" anchor="ctr"/>
+                  <a:tcPr marL="32004" marR="32004" marT="13716" marB="13716" anchor="ctr"/>
                 </a:tc>
+                <a:tc>
+                  <a:txBody>
+                    <a:bodyPr/>
+                    <a:lstStyle/>
+                    <a:p>
+                      <a:pPr algn="l">
+                        <a:lnSpc>
+                          <a:spcPct val="100000"/>
+                        </a:lnSpc>
+                        <a:defRPr sz="980" b="0">
+                          <a:solidFill>
+                            <a:srgbClr val="333333"/>
+                          </a:solidFill>
+                          <a:latin typeface="Times New Roman"/>
+                        </a:defRPr>
+                      </a:pPr>
+                      <a:r>
+                        <a:t>Average revenue per order</a:t>
+                      </a:r>
+                    </a:p>
+                  </a:txBody>
+                  <a:tcPr marL="32004" marR="32004" marT="13716" marB="13716" anchor="ctr"/>
+                </a:tc>
+                <a:tc>
+                  <a:txBody>
+                    <a:bodyPr/>
+                    <a:lstStyle/>
+                    <a:p>
+                      <a:pPr algn="l">
+                        <a:lnSpc>
+                          <a:spcPct val="100000"/>
+                        </a:lnSpc>
+                        <a:defRPr sz="980" b="0">
+                          <a:solidFill>
+                            <a:srgbClr val="333333"/>
+                          </a:solidFill>
+                          <a:latin typeface="Times New Roman"/>
+                        </a:defRPr>
+                      </a:pPr>
+                      <a:r>
+                        <a:t>AVG(COALESCE(o.OrderTotal, 0))</a:t>
+                      </a:r>
+                    </a:p>
+                  </a:txBody>
+                  <a:tcPr marL="32004" marR="32004" marT="13716" marB="13716" anchor="ctr"/>
+                </a:tc>
+                <a:tc>
+                  <a:txBody>
+                    <a:bodyPr/>
+                    <a:lstStyle/>
+                    <a:p>
+                      <a:pPr algn="l">
+                        <a:lnSpc>
+                          <a:spcPct val="100000"/>
+                        </a:lnSpc>
+                        <a:defRPr sz="980" b="0">
+                          <a:solidFill>
+                            <a:srgbClr val="333333"/>
+                          </a:solidFill>
+                          <a:latin typeface="Times New Roman"/>
+                        </a:defRPr>
+                      </a:pPr>
+                      <a:r>
+                        <a:t>Order as o</a:t>
+                      </a:r>
+                    </a:p>
+                  </a:txBody>
+                  <a:tcPr marL="32004" marR="32004" marT="13716" marB="13716" anchor="ctr"/>
+                </a:tc>
+              </a:tr>
+              <a:tr h="537210">
                 <a:tc>
                   <a:txBody>
                     <a:bodyPr/>
@@ -6929,7 +7017,7 @@
                         <a:lnSpc>
                           <a:spcPct val="100000"/>
                         </a:lnSpc>
-                        <a:defRPr sz="1050" b="0">
+                        <a:defRPr sz="980" b="1">
                           <a:solidFill>
                             <a:srgbClr val="333333"/>
                           </a:solidFill>
@@ -6937,36 +7025,11 @@
                         </a:defRPr>
                       </a:pPr>
                       <a:r>
-                        <a:t>Tk ...</a:t>
+                        <a:t>Dimension</a:t>
                       </a:r>
                     </a:p>
                   </a:txBody>
-                  <a:tcPr marL="91440" marR="91440" marT="45720" marB="45720" anchor="ctr"/>
-                </a:tc>
-              </a:tr>
-              <a:tr h="429768">
-                <a:tc>
-                  <a:txBody>
-                    <a:bodyPr/>
-                    <a:lstStyle/>
-                    <a:p>
-                      <a:pPr algn="l">
-                        <a:lnSpc>
-                          <a:spcPct val="100000"/>
-                        </a:lnSpc>
-                        <a:defRPr sz="1050" b="0">
-                          <a:solidFill>
-                            <a:srgbClr val="333333"/>
-                          </a:solidFill>
-                          <a:latin typeface="Times New Roman"/>
-                        </a:defRPr>
-                      </a:pPr>
-                      <a:r>
-                        <a:t>Processing</a:t>
-                      </a:r>
-                    </a:p>
-                  </a:txBody>
-                  <a:tcPr marL="91440" marR="91440" marT="45720" marB="45720" anchor="ctr">
+                  <a:tcPr marL="32004" marR="32004" marT="13716" marB="13716" anchor="ctr">
                     <a:solidFill>
                       <a:srgbClr val="F2F4F8"/>
                     </a:solidFill>
@@ -6981,7 +7044,7 @@
                         <a:lnSpc>
                           <a:spcPct val="100000"/>
                         </a:lnSpc>
-                        <a:defRPr sz="1050" b="0">
+                        <a:defRPr sz="980" b="0">
                           <a:solidFill>
                             <a:srgbClr val="333333"/>
                           </a:solidFill>
@@ -6989,11 +7052,11 @@
                         </a:defRPr>
                       </a:pPr>
                       <a:r>
-                        <a:t>312</a:t>
+                        <a:t>order_status</a:t>
                       </a:r>
                     </a:p>
                   </a:txBody>
-                  <a:tcPr marL="91440" marR="91440" marT="45720" marB="45720" anchor="ctr">
+                  <a:tcPr marL="32004" marR="32004" marT="13716" marB="13716" anchor="ctr">
                     <a:solidFill>
                       <a:srgbClr val="F2F4F8"/>
                     </a:solidFill>
@@ -7004,11 +7067,11 @@
                     <a:bodyPr/>
                     <a:lstStyle/>
                     <a:p>
-                      <a:pPr algn="ctr">
+                      <a:pPr algn="l">
                         <a:lnSpc>
                           <a:spcPct val="100000"/>
                         </a:lnSpc>
-                        <a:defRPr sz="1050" b="0">
+                        <a:defRPr sz="980" b="0">
                           <a:solidFill>
                             <a:srgbClr val="333333"/>
                           </a:solidFill>
@@ -7016,11 +7079,11 @@
                         </a:defRPr>
                       </a:pPr>
                       <a:r>
-                        <a:t>Tk ...</a:t>
+                        <a:t>Readable order status label</a:t>
                       </a:r>
                     </a:p>
                   </a:txBody>
-                  <a:tcPr marL="91440" marR="91440" marT="45720" marB="45720" anchor="ctr">
+                  <a:tcPr marL="32004" marR="32004" marT="13716" marB="13716" anchor="ctr">
                     <a:solidFill>
                       <a:srgbClr val="F2F4F8"/>
                     </a:solidFill>
@@ -7031,11 +7094,11 @@
                     <a:bodyPr/>
                     <a:lstStyle/>
                     <a:p>
-                      <a:pPr algn="ctr">
+                      <a:pPr algn="l">
                         <a:lnSpc>
                           <a:spcPct val="100000"/>
                         </a:lnSpc>
-                        <a:defRPr sz="1050" b="0">
+                        <a:defRPr sz="980" b="0">
                           <a:solidFill>
                             <a:srgbClr val="333333"/>
                           </a:solidFill>
@@ -7043,18 +7106,16 @@
                         </a:defRPr>
                       </a:pPr>
                       <a:r>
-                        <a:t>Tk ...</a:t>
+                        <a:t>CASE o.OrderStatusId ... END</a:t>
                       </a:r>
                     </a:p>
                   </a:txBody>
-                  <a:tcPr marL="91440" marR="91440" marT="45720" marB="45720" anchor="ctr">
+                  <a:tcPr marL="32004" marR="32004" marT="13716" marB="13716" anchor="ctr">
                     <a:solidFill>
                       <a:srgbClr val="F2F4F8"/>
                     </a:solidFill>
                   </a:tcPr>
                 </a:tc>
-              </a:tr>
-              <a:tr h="429768">
                 <a:tc>
                   <a:txBody>
                     <a:bodyPr/>
@@ -7064,7 +7125,7 @@
                         <a:lnSpc>
                           <a:spcPct val="100000"/>
                         </a:lnSpc>
-                        <a:defRPr sz="1050" b="0">
+                        <a:defRPr sz="980" b="0">
                           <a:solidFill>
                             <a:srgbClr val="333333"/>
                           </a:solidFill>
@@ -7072,11 +7133,40 @@
                         </a:defRPr>
                       </a:pPr>
                       <a:r>
-                        <a:t>Pending</a:t>
+                        <a:t>Order as o</a:t>
                       </a:r>
                     </a:p>
                   </a:txBody>
-                  <a:tcPr marL="91440" marR="91440" marT="45720" marB="45720" anchor="ctr"/>
+                  <a:tcPr marL="32004" marR="32004" marT="13716" marB="13716" anchor="ctr">
+                    <a:solidFill>
+                      <a:srgbClr val="F2F4F8"/>
+                    </a:solidFill>
+                  </a:tcPr>
+                </a:tc>
+              </a:tr>
+              <a:tr h="537210">
+                <a:tc>
+                  <a:txBody>
+                    <a:bodyPr/>
+                    <a:lstStyle/>
+                    <a:p>
+                      <a:pPr algn="ctr">
+                        <a:lnSpc>
+                          <a:spcPct val="100000"/>
+                        </a:lnSpc>
+                        <a:defRPr sz="980" b="1">
+                          <a:solidFill>
+                            <a:srgbClr val="333333"/>
+                          </a:solidFill>
+                          <a:latin typeface="Times New Roman"/>
+                        </a:defRPr>
+                      </a:pPr>
+                      <a:r>
+                        <a:t>Rule</a:t>
+                      </a:r>
+                    </a:p>
+                  </a:txBody>
+                  <a:tcPr marL="32004" marR="32004" marT="13716" marB="13716" anchor="ctr"/>
                 </a:tc>
                 <a:tc>
                   <a:txBody>
@@ -7087,7 +7177,7 @@
                         <a:lnSpc>
                           <a:spcPct val="100000"/>
                         </a:lnSpc>
-                        <a:defRPr sz="1050" b="0">
+                        <a:defRPr sz="980" b="0">
                           <a:solidFill>
                             <a:srgbClr val="333333"/>
                           </a:solidFill>
@@ -7095,60 +7185,12 @@
                         </a:defRPr>
                       </a:pPr>
                       <a:r>
-                        <a:t>226</a:t>
+                        <a:t>mandatory</a:t>
                       </a:r>
                     </a:p>
                   </a:txBody>
-                  <a:tcPr marL="91440" marR="91440" marT="45720" marB="45720" anchor="ctr"/>
+                  <a:tcPr marL="32004" marR="32004" marT="13716" marB="13716" anchor="ctr"/>
                 </a:tc>
-                <a:tc>
-                  <a:txBody>
-                    <a:bodyPr/>
-                    <a:lstStyle/>
-                    <a:p>
-                      <a:pPr algn="ctr">
-                        <a:lnSpc>
-                          <a:spcPct val="100000"/>
-                        </a:lnSpc>
-                        <a:defRPr sz="1050" b="0">
-                          <a:solidFill>
-                            <a:srgbClr val="333333"/>
-                          </a:solidFill>
-                          <a:latin typeface="Times New Roman"/>
-                        </a:defRPr>
-                      </a:pPr>
-                      <a:r>
-                        <a:t>Tk ...</a:t>
-                      </a:r>
-                    </a:p>
-                  </a:txBody>
-                  <a:tcPr marL="91440" marR="91440" marT="45720" marB="45720" anchor="ctr"/>
-                </a:tc>
-                <a:tc>
-                  <a:txBody>
-                    <a:bodyPr/>
-                    <a:lstStyle/>
-                    <a:p>
-                      <a:pPr algn="ctr">
-                        <a:lnSpc>
-                          <a:spcPct val="100000"/>
-                        </a:lnSpc>
-                        <a:defRPr sz="1050" b="0">
-                          <a:solidFill>
-                            <a:srgbClr val="333333"/>
-                          </a:solidFill>
-                          <a:latin typeface="Times New Roman"/>
-                        </a:defRPr>
-                      </a:pPr>
-                      <a:r>
-                        <a:t>Tk ...</a:t>
-                      </a:r>
-                    </a:p>
-                  </a:txBody>
-                  <a:tcPr marL="91440" marR="91440" marT="45720" marB="45720" anchor="ctr"/>
-                </a:tc>
-              </a:tr>
-              <a:tr h="429768">
                 <a:tc>
                   <a:txBody>
                     <a:bodyPr/>
@@ -7158,7 +7200,7 @@
                         <a:lnSpc>
                           <a:spcPct val="100000"/>
                         </a:lnSpc>
-                        <a:defRPr sz="1050" b="0">
+                        <a:defRPr sz="980" b="0">
                           <a:solidFill>
                             <a:srgbClr val="333333"/>
                           </a:solidFill>
@@ -7166,26 +7208,22 @@
                         </a:defRPr>
                       </a:pPr>
                       <a:r>
-                        <a:t>Cancelled</a:t>
+                        <a:t>Ignore soft-deleted orders</a:t>
                       </a:r>
                     </a:p>
                   </a:txBody>
-                  <a:tcPr marL="91440" marR="91440" marT="45720" marB="45720" anchor="ctr">
-                    <a:solidFill>
-                      <a:srgbClr val="F2F4F8"/>
-                    </a:solidFill>
-                  </a:tcPr>
+                  <a:tcPr marL="32004" marR="32004" marT="13716" marB="13716" anchor="ctr"/>
                 </a:tc>
                 <a:tc>
                   <a:txBody>
                     <a:bodyPr/>
                     <a:lstStyle/>
                     <a:p>
-                      <a:pPr algn="ctr">
+                      <a:pPr algn="l">
                         <a:lnSpc>
                           <a:spcPct val="100000"/>
                         </a:lnSpc>
-                        <a:defRPr sz="1050" b="0">
+                        <a:defRPr sz="980" b="0">
                           <a:solidFill>
                             <a:srgbClr val="333333"/>
                           </a:solidFill>
@@ -7193,26 +7231,22 @@
                         </a:defRPr>
                       </a:pPr>
                       <a:r>
-                        <a:t>116</a:t>
+                        <a:t>o.Deleted = 0</a:t>
                       </a:r>
                     </a:p>
                   </a:txBody>
-                  <a:tcPr marL="91440" marR="91440" marT="45720" marB="45720" anchor="ctr">
-                    <a:solidFill>
-                      <a:srgbClr val="F2F4F8"/>
-                    </a:solidFill>
-                  </a:tcPr>
+                  <a:tcPr marL="32004" marR="32004" marT="13716" marB="13716" anchor="ctr"/>
                 </a:tc>
                 <a:tc>
                   <a:txBody>
                     <a:bodyPr/>
                     <a:lstStyle/>
                     <a:p>
-                      <a:pPr algn="ctr">
+                      <a:pPr algn="l">
                         <a:lnSpc>
                           <a:spcPct val="100000"/>
                         </a:lnSpc>
-                        <a:defRPr sz="1050" b="0">
+                        <a:defRPr sz="980" b="0">
                           <a:solidFill>
                             <a:srgbClr val="333333"/>
                           </a:solidFill>
@@ -7220,42 +7254,11 @@
                         </a:defRPr>
                       </a:pPr>
                       <a:r>
-                        <a:t>Tk ...</a:t>
+                        <a:t>WHERE</a:t>
                       </a:r>
                     </a:p>
                   </a:txBody>
-                  <a:tcPr marL="91440" marR="91440" marT="45720" marB="45720" anchor="ctr">
-                    <a:solidFill>
-                      <a:srgbClr val="F2F4F8"/>
-                    </a:solidFill>
-                  </a:tcPr>
-                </a:tc>
-                <a:tc>
-                  <a:txBody>
-                    <a:bodyPr/>
-                    <a:lstStyle/>
-                    <a:p>
-                      <a:pPr algn="ctr">
-                        <a:lnSpc>
-                          <a:spcPct val="100000"/>
-                        </a:lnSpc>
-                        <a:defRPr sz="1050" b="0">
-                          <a:solidFill>
-                            <a:srgbClr val="333333"/>
-                          </a:solidFill>
-                          <a:latin typeface="Times New Roman"/>
-                        </a:defRPr>
-                      </a:pPr>
-                      <a:r>
-                        <a:t>Tk ...</a:t>
-                      </a:r>
-                    </a:p>
-                  </a:txBody>
-                  <a:tcPr marL="91440" marR="91440" marT="45720" marB="45720" anchor="ctr">
-                    <a:solidFill>
-                      <a:srgbClr val="F2F4F8"/>
-                    </a:solidFill>
-                  </a:tcPr>
+                  <a:tcPr marL="32004" marR="32004" marT="13716" marB="13716" anchor="ctr"/>
                 </a:tc>
               </a:tr>
             </a:tbl>
@@ -7264,14 +7267,14 @@
       </p:graphicFrame>
       <p:sp>
         <p:nvSpPr>
-          <p:cNvPr id="22" name="TextBox 21"/>
+          <p:cNvPr id="19" name="TextBox 18"/>
           <p:cNvSpPr txBox="1"/>
           <p:nvPr/>
         </p:nvSpPr>
         <p:spPr>
           <a:xfrm>
-            <a:off x="960120" y="5120640"/>
-            <a:ext cx="10149840" cy="594360"/>
+            <a:off x="868680" y="5047488"/>
+            <a:ext cx="10241280" cy="658368"/>
           </a:xfrm>
           <a:prstGeom prst="rect">
             <a:avLst/>
@@ -7296,22 +7299,22 @@
               </a:spcAft>
             </a:pPr>
             <a:r>
-              <a:rPr b="1" i="0" sz="1500">
+              <a:rPr b="1" i="0" sz="1450">
                 <a:solidFill>
                   <a:srgbClr val="003366"/>
                 </a:solidFill>
                 <a:latin typeface="Times New Roman"/>
               </a:rPr>
-              <a:t>Proof point:</a:t>
-            </a:r>
-            <a:r>
-              <a:rPr b="0" i="0" sz="1400">
+              <a:t>Under the hood:</a:t>
+            </a:r>
+            <a:r>
+              <a:rPr b="0" i="0" sz="1350">
                 <a:solidFill>
                   <a:srgbClr val="333333"/>
                 </a:solidFill>
                 <a:latin typeface="Times New Roman"/>
               </a:rPr>
-              <a:t> the SQL is selected and compiled from known metric/dimension definitions; the model never writes the SELECT statement.</a:t>
+              <a:t> metric and dimension are not table names from the LLM. They are ids that bind to administrator-authored semantic objects.</a:t>
             </a:r>
           </a:p>
         </p:txBody>
@@ -7554,7 +7557,7 @@
               </a:defRPr>
             </a:pPr>
             <a:r>
-              <a:t>SQL Compiler and Safety Controls</a:t>
+              <a:t>Template-Based SQL Compilation</a:t>
             </a:r>
           </a:p>
         </p:txBody>
@@ -7679,40 +7682,731 @@
           </a:p>
         </p:txBody>
       </p:sp>
-      <p:pic>
-        <p:nvPicPr>
-          <p:cNvPr id="13" name="Picture 12" descr="figure-07-sql-safety-defense.png"/>
-          <p:cNvPicPr>
-            <a:picLocks noChangeAspect="1"/>
-          </p:cNvPicPr>
+      <p:sp>
+        <p:nvSpPr>
+          <p:cNvPr id="13" name="Rounded Rectangle 12"/>
+          <p:cNvSpPr/>
           <p:nvPr/>
-        </p:nvPicPr>
-        <p:blipFill>
-          <a:blip r:embed="rId3"/>
-          <a:stretch>
-            <a:fillRect/>
-          </a:stretch>
-        </p:blipFill>
-        <p:spPr>
-          <a:xfrm>
-            <a:off x="731520" y="1821942"/>
-            <a:ext cx="5212080" cy="3040380"/>
+        </p:nvSpPr>
+        <p:spPr>
+          <a:xfrm>
+            <a:off x="658368" y="1298448"/>
+            <a:ext cx="3154680" cy="530352"/>
+          </a:xfrm>
+          <a:prstGeom prst="roundRect">
+            <a:avLst/>
+          </a:prstGeom>
+          <a:solidFill>
+            <a:srgbClr val="E9F1FA"/>
+          </a:solidFill>
+          <a:ln w="12700">
+            <a:solidFill>
+              <a:srgbClr val="003366"/>
+            </a:solidFill>
+          </a:ln>
+        </p:spPr>
+        <p:style>
+          <a:lnRef idx="1">
+            <a:schemeClr val="accent1"/>
+          </a:lnRef>
+          <a:fillRef idx="3">
+            <a:schemeClr val="accent1"/>
+          </a:fillRef>
+          <a:effectRef idx="2">
+            <a:schemeClr val="accent1"/>
+          </a:effectRef>
+          <a:fontRef idx="minor">
+            <a:schemeClr val="lt1"/>
+          </a:fontRef>
+        </p:style>
+        <p:txBody>
+          <a:bodyPr rtlCol="0" anchor="ctr" wrap="square" lIns="109728" rIns="109728" tIns="54864"/>
+          <a:lstStyle/>
+          <a:p>
+            <a:pPr algn="ctr">
+              <a:defRPr sz="1300" b="1">
+                <a:solidFill>
+                  <a:srgbClr val="003366"/>
+                </a:solidFill>
+                <a:latin typeface="Times New Roman"/>
+              </a:defRPr>
+            </a:pPr>
+            <a:r>
+              <a:t>Compiler template</a:t>
+            </a:r>
+          </a:p>
+        </p:txBody>
+      </p:sp>
+      <p:sp>
+        <p:nvSpPr>
+          <p:cNvPr id="14" name="Rectangle 13"/>
+          <p:cNvSpPr/>
+          <p:nvPr/>
+        </p:nvSpPr>
+        <p:spPr>
+          <a:xfrm>
+            <a:off x="713232" y="1993392"/>
+            <a:ext cx="4526280" cy="2359152"/>
           </a:xfrm>
           <a:prstGeom prst="rect">
             <a:avLst/>
           </a:prstGeom>
-        </p:spPr>
-      </p:pic>
-      <p:sp>
-        <p:nvSpPr>
-          <p:cNvPr id="14" name="TextBox 13"/>
+          <a:solidFill>
+            <a:srgbClr val="F7F7F7"/>
+          </a:solidFill>
+          <a:ln>
+            <a:solidFill>
+              <a:srgbClr val="B7B7B7"/>
+            </a:solidFill>
+          </a:ln>
+        </p:spPr>
+        <p:style>
+          <a:lnRef idx="1">
+            <a:schemeClr val="accent1"/>
+          </a:lnRef>
+          <a:fillRef idx="3">
+            <a:schemeClr val="accent1"/>
+          </a:fillRef>
+          <a:effectRef idx="2">
+            <a:schemeClr val="accent1"/>
+          </a:effectRef>
+          <a:fontRef idx="minor">
+            <a:schemeClr val="lt1"/>
+          </a:fontRef>
+        </p:style>
+        <p:txBody>
+          <a:bodyPr rtlCol="0" anchor="t" wrap="square" lIns="36576" tIns="73152"/>
+          <a:lstStyle/>
+          <a:p>
+            <a:pPr algn="l">
+              <a:spcAft>
+                <a:spcPts val="100"/>
+              </a:spcAft>
+              <a:defRPr sz="930">
+                <a:solidFill>
+                  <a:srgbClr val="505050"/>
+                </a:solidFill>
+                <a:latin typeface="Consolas"/>
+              </a:defRPr>
+            </a:pPr>
+            <a:r>
+              <a:t>SELECT {dimension_expr} AS label,</a:t>
+            </a:r>
+          </a:p>
+          <a:p>
+            <a:pPr algn="l">
+              <a:spcAft>
+                <a:spcPts val="100"/>
+              </a:spcAft>
+              <a:defRPr sz="930">
+                <a:solidFill>
+                  <a:srgbClr val="505050"/>
+                </a:solidFill>
+                <a:latin typeface="Consolas"/>
+              </a:defRPr>
+            </a:pPr>
+            <a:r>
+              <a:t>       {metric_expr} AS value</a:t>
+            </a:r>
+          </a:p>
+          <a:p>
+            <a:pPr algn="l">
+              <a:spcAft>
+                <a:spcPts val="100"/>
+              </a:spcAft>
+              <a:defRPr sz="930">
+                <a:solidFill>
+                  <a:srgbClr val="505050"/>
+                </a:solidFill>
+                <a:latin typeface="Consolas"/>
+              </a:defRPr>
+            </a:pPr>
+            <a:r>
+              <a:t>FROM {base_table}</a:t>
+            </a:r>
+          </a:p>
+          <a:p>
+            <a:pPr algn="l">
+              <a:spcAft>
+                <a:spcPts val="100"/>
+              </a:spcAft>
+              <a:defRPr sz="930">
+                <a:solidFill>
+                  <a:srgbClr val="505050"/>
+                </a:solidFill>
+                <a:latin typeface="Consolas"/>
+              </a:defRPr>
+            </a:pPr>
+            <a:r>
+              <a:t>{join_clauses}</a:t>
+            </a:r>
+          </a:p>
+          <a:p>
+            <a:pPr algn="l">
+              <a:spcAft>
+                <a:spcPts val="100"/>
+              </a:spcAft>
+              <a:defRPr sz="930">
+                <a:solidFill>
+                  <a:srgbClr val="505050"/>
+                </a:solidFill>
+                <a:latin typeface="Consolas"/>
+              </a:defRPr>
+            </a:pPr>
+            <a:r>
+              <a:t>WHERE {mandatory_predicates}</a:t>
+            </a:r>
+          </a:p>
+          <a:p>
+            <a:pPr algn="l">
+              <a:spcAft>
+                <a:spcPts val="100"/>
+              </a:spcAft>
+              <a:defRPr sz="930">
+                <a:solidFill>
+                  <a:srgbClr val="505050"/>
+                </a:solidFill>
+                <a:latin typeface="Consolas"/>
+              </a:defRPr>
+            </a:pPr>
+            <a:r>
+              <a:t>GROUP BY {dimension_group_expr}</a:t>
+            </a:r>
+          </a:p>
+          <a:p>
+            <a:pPr algn="l">
+              <a:spcAft>
+                <a:spcPts val="100"/>
+              </a:spcAft>
+              <a:defRPr sz="930">
+                <a:solidFill>
+                  <a:srgbClr val="505050"/>
+                </a:solidFill>
+                <a:latin typeface="Consolas"/>
+              </a:defRPr>
+            </a:pPr>
+            <a:r>
+              <a:t>ORDER BY value DESC;</a:t>
+            </a:r>
+          </a:p>
+        </p:txBody>
+      </p:sp>
+      <p:sp>
+        <p:nvSpPr>
+          <p:cNvPr id="15" name="Rounded Rectangle 14"/>
+          <p:cNvSpPr/>
+          <p:nvPr/>
+        </p:nvSpPr>
+        <p:spPr>
+          <a:xfrm>
+            <a:off x="5596128" y="1298448"/>
+            <a:ext cx="2606040" cy="530352"/>
+          </a:xfrm>
+          <a:prstGeom prst="roundRect">
+            <a:avLst/>
+          </a:prstGeom>
+          <a:solidFill>
+            <a:srgbClr val="E2F0D9"/>
+          </a:solidFill>
+          <a:ln w="12700">
+            <a:solidFill>
+              <a:srgbClr val="003366"/>
+            </a:solidFill>
+          </a:ln>
+        </p:spPr>
+        <p:style>
+          <a:lnRef idx="1">
+            <a:schemeClr val="accent1"/>
+          </a:lnRef>
+          <a:fillRef idx="3">
+            <a:schemeClr val="accent1"/>
+          </a:fillRef>
+          <a:effectRef idx="2">
+            <a:schemeClr val="accent1"/>
+          </a:effectRef>
+          <a:fontRef idx="minor">
+            <a:schemeClr val="lt1"/>
+          </a:fontRef>
+        </p:style>
+        <p:txBody>
+          <a:bodyPr rtlCol="0" anchor="ctr" wrap="square" lIns="109728" rIns="109728" tIns="54864"/>
+          <a:lstStyle/>
+          <a:p>
+            <a:pPr algn="ctr">
+              <a:defRPr sz="1300" b="1">
+                <a:solidFill>
+                  <a:srgbClr val="003366"/>
+                </a:solidFill>
+                <a:latin typeface="Times New Roman"/>
+              </a:defRPr>
+            </a:pPr>
+            <a:r>
+              <a:t>Filled from semantic layer</a:t>
+            </a:r>
+          </a:p>
+        </p:txBody>
+      </p:sp>
+      <p:sp>
+        <p:nvSpPr>
+          <p:cNvPr id="16" name="TextBox 15"/>
           <p:cNvSpPr txBox="1"/>
           <p:nvPr/>
         </p:nvSpPr>
         <p:spPr>
           <a:xfrm>
-            <a:off x="6172200" y="1627632"/>
-            <a:ext cx="4983480" cy="4160520"/>
+            <a:off x="5623560" y="1938528"/>
+            <a:ext cx="2697480" cy="1965960"/>
+          </a:xfrm>
+          <a:prstGeom prst="rect">
+            <a:avLst/>
+          </a:prstGeom>
+          <a:noFill/>
+        </p:spPr>
+        <p:txBody>
+          <a:bodyPr wrap="square" anchor="t" lIns="0" tIns="0" rIns="0">
+            <a:spAutoFit/>
+          </a:bodyPr>
+          <a:lstStyle/>
+          <a:p>
+            <a:pPr marL="256032" indent="-256032">
+              <a:lnSpc>
+                <a:spcPct val="92000"/>
+              </a:lnSpc>
+              <a:spcBef>
+                <a:spcPts val="300"/>
+              </a:spcBef>
+              <a:spcAft>
+                <a:spcPts val="700"/>
+              </a:spcAft>
+            </a:pPr>
+            <a:r>
+              <a:rPr b="1" i="0" sz="1120">
+                <a:solidFill>
+                  <a:srgbClr val="003366"/>
+                </a:solidFill>
+                <a:latin typeface="Times New Roman"/>
+              </a:rPr>
+              <a:t>- dimension_expr:</a:t>
+            </a:r>
+            <a:r>
+              <a:rPr b="0" i="0" sz="1120">
+                <a:solidFill>
+                  <a:srgbClr val="333333"/>
+                </a:solidFill>
+                <a:latin typeface="Times New Roman"/>
+              </a:rPr>
+              <a:t> CASE order status mapping</a:t>
+            </a:r>
+          </a:p>
+          <a:p>
+            <a:pPr marL="256032" indent="-256032">
+              <a:lnSpc>
+                <a:spcPct val="92000"/>
+              </a:lnSpc>
+              <a:spcBef>
+                <a:spcPts val="300"/>
+              </a:spcBef>
+              <a:spcAft>
+                <a:spcPts val="700"/>
+              </a:spcAft>
+            </a:pPr>
+            <a:r>
+              <a:rPr b="1" i="0" sz="1120">
+                <a:solidFill>
+                  <a:srgbClr val="003366"/>
+                </a:solidFill>
+                <a:latin typeface="Times New Roman"/>
+              </a:rPr>
+              <a:t>- metric_expr:</a:t>
+            </a:r>
+            <a:r>
+              <a:rPr b="0" i="0" sz="1120">
+                <a:solidFill>
+                  <a:srgbClr val="333333"/>
+                </a:solidFill>
+                <a:latin typeface="Times New Roman"/>
+              </a:rPr>
+              <a:t> AVG(order total)</a:t>
+            </a:r>
+          </a:p>
+          <a:p>
+            <a:pPr marL="256032" indent="-256032">
+              <a:lnSpc>
+                <a:spcPct val="92000"/>
+              </a:lnSpc>
+              <a:spcBef>
+                <a:spcPts val="300"/>
+              </a:spcBef>
+              <a:spcAft>
+                <a:spcPts val="700"/>
+              </a:spcAft>
+            </a:pPr>
+            <a:r>
+              <a:rPr b="1" i="0" sz="1120">
+                <a:solidFill>
+                  <a:srgbClr val="003366"/>
+                </a:solidFill>
+                <a:latin typeface="Times New Roman"/>
+              </a:rPr>
+              <a:t>- base_table:</a:t>
+            </a:r>
+            <a:r>
+              <a:rPr b="0" i="0" sz="1120">
+                <a:solidFill>
+                  <a:srgbClr val="333333"/>
+                </a:solidFill>
+                <a:latin typeface="Times New Roman"/>
+              </a:rPr>
+              <a:t> Order o</a:t>
+            </a:r>
+          </a:p>
+          <a:p>
+            <a:pPr marL="256032" indent="-256032">
+              <a:lnSpc>
+                <a:spcPct val="92000"/>
+              </a:lnSpc>
+              <a:spcBef>
+                <a:spcPts val="300"/>
+              </a:spcBef>
+              <a:spcAft>
+                <a:spcPts val="700"/>
+              </a:spcAft>
+            </a:pPr>
+            <a:r>
+              <a:rPr b="1" i="0" sz="1120">
+                <a:solidFill>
+                  <a:srgbClr val="003366"/>
+                </a:solidFill>
+                <a:latin typeface="Times New Roman"/>
+              </a:rPr>
+              <a:t>- joins:</a:t>
+            </a:r>
+            <a:r>
+              <a:rPr b="0" i="0" sz="1120">
+                <a:solidFill>
+                  <a:srgbClr val="333333"/>
+                </a:solidFill>
+                <a:latin typeface="Times New Roman"/>
+              </a:rPr>
+              <a:t> none required here</a:t>
+            </a:r>
+          </a:p>
+          <a:p>
+            <a:pPr marL="256032" indent="-256032">
+              <a:lnSpc>
+                <a:spcPct val="92000"/>
+              </a:lnSpc>
+              <a:spcBef>
+                <a:spcPts val="300"/>
+              </a:spcBef>
+              <a:spcAft>
+                <a:spcPts val="700"/>
+              </a:spcAft>
+            </a:pPr>
+            <a:r>
+              <a:rPr b="1" i="0" sz="1120">
+                <a:solidFill>
+                  <a:srgbClr val="003366"/>
+                </a:solidFill>
+                <a:latin typeface="Times New Roman"/>
+              </a:rPr>
+              <a:t>- predicates:</a:t>
+            </a:r>
+            <a:r>
+              <a:rPr b="0" i="0" sz="1120">
+                <a:solidFill>
+                  <a:srgbClr val="333333"/>
+                </a:solidFill>
+                <a:latin typeface="Times New Roman"/>
+              </a:rPr>
+              <a:t> o.Deleted = 0</a:t>
+            </a:r>
+          </a:p>
+        </p:txBody>
+      </p:sp>
+      <p:sp>
+        <p:nvSpPr>
+          <p:cNvPr id="17" name="Rounded Rectangle 16"/>
+          <p:cNvSpPr/>
+          <p:nvPr/>
+        </p:nvSpPr>
+        <p:spPr>
+          <a:xfrm>
+            <a:off x="8613648" y="1298448"/>
+            <a:ext cx="2560320" cy="530352"/>
+          </a:xfrm>
+          <a:prstGeom prst="roundRect">
+            <a:avLst/>
+          </a:prstGeom>
+          <a:solidFill>
+            <a:srgbClr val="E9F1FA"/>
+          </a:solidFill>
+          <a:ln w="12700">
+            <a:solidFill>
+              <a:srgbClr val="003366"/>
+            </a:solidFill>
+          </a:ln>
+        </p:spPr>
+        <p:style>
+          <a:lnRef idx="1">
+            <a:schemeClr val="accent1"/>
+          </a:lnRef>
+          <a:fillRef idx="3">
+            <a:schemeClr val="accent1"/>
+          </a:fillRef>
+          <a:effectRef idx="2">
+            <a:schemeClr val="accent1"/>
+          </a:effectRef>
+          <a:fontRef idx="minor">
+            <a:schemeClr val="lt1"/>
+          </a:fontRef>
+        </p:style>
+        <p:txBody>
+          <a:bodyPr rtlCol="0" anchor="ctr" wrap="square" lIns="109728" rIns="109728" tIns="54864"/>
+          <a:lstStyle/>
+          <a:p>
+            <a:pPr algn="ctr">
+              <a:defRPr sz="1300" b="1">
+                <a:solidFill>
+                  <a:srgbClr val="003366"/>
+                </a:solidFill>
+                <a:latin typeface="Times New Roman"/>
+              </a:defRPr>
+            </a:pPr>
+            <a:r>
+              <a:t>Compiled safe SELECT</a:t>
+            </a:r>
+          </a:p>
+        </p:txBody>
+      </p:sp>
+      <p:sp>
+        <p:nvSpPr>
+          <p:cNvPr id="18" name="Rectangle 17"/>
+          <p:cNvSpPr/>
+          <p:nvPr/>
+        </p:nvSpPr>
+        <p:spPr>
+          <a:xfrm>
+            <a:off x="8394192" y="1938528"/>
+            <a:ext cx="2880360" cy="2651760"/>
+          </a:xfrm>
+          <a:prstGeom prst="rect">
+            <a:avLst/>
+          </a:prstGeom>
+          <a:solidFill>
+            <a:srgbClr val="F7F7F7"/>
+          </a:solidFill>
+          <a:ln>
+            <a:solidFill>
+              <a:srgbClr val="B7B7B7"/>
+            </a:solidFill>
+          </a:ln>
+        </p:spPr>
+        <p:style>
+          <a:lnRef idx="1">
+            <a:schemeClr val="accent1"/>
+          </a:lnRef>
+          <a:fillRef idx="3">
+            <a:schemeClr val="accent1"/>
+          </a:fillRef>
+          <a:effectRef idx="2">
+            <a:schemeClr val="accent1"/>
+          </a:effectRef>
+          <a:fontRef idx="minor">
+            <a:schemeClr val="lt1"/>
+          </a:fontRef>
+        </p:style>
+        <p:txBody>
+          <a:bodyPr rtlCol="0" anchor="t" wrap="square" lIns="36576" tIns="73152"/>
+          <a:lstStyle/>
+          <a:p>
+            <a:pPr algn="l">
+              <a:spcAft>
+                <a:spcPts val="100"/>
+              </a:spcAft>
+              <a:defRPr sz="720">
+                <a:solidFill>
+                  <a:srgbClr val="505050"/>
+                </a:solidFill>
+                <a:latin typeface="Consolas"/>
+              </a:defRPr>
+            </a:pPr>
+            <a:r>
+              <a:t>SELECT CASE o.OrderStatusId</a:t>
+            </a:r>
+          </a:p>
+          <a:p>
+            <a:pPr algn="l">
+              <a:spcAft>
+                <a:spcPts val="100"/>
+              </a:spcAft>
+              <a:defRPr sz="720">
+                <a:solidFill>
+                  <a:srgbClr val="505050"/>
+                </a:solidFill>
+                <a:latin typeface="Consolas"/>
+              </a:defRPr>
+            </a:pPr>
+            <a:r>
+              <a:t>       WHEN 10 THEN "Pending"</a:t>
+            </a:r>
+          </a:p>
+          <a:p>
+            <a:pPr algn="l">
+              <a:spcAft>
+                <a:spcPts val="100"/>
+              </a:spcAft>
+              <a:defRPr sz="720">
+                <a:solidFill>
+                  <a:srgbClr val="505050"/>
+                </a:solidFill>
+                <a:latin typeface="Consolas"/>
+              </a:defRPr>
+            </a:pPr>
+            <a:r>
+              <a:t>       WHEN 20 THEN "Processing"</a:t>
+            </a:r>
+          </a:p>
+          <a:p>
+            <a:pPr algn="l">
+              <a:spcAft>
+                <a:spcPts val="100"/>
+              </a:spcAft>
+              <a:defRPr sz="720">
+                <a:solidFill>
+                  <a:srgbClr val="505050"/>
+                </a:solidFill>
+                <a:latin typeface="Consolas"/>
+              </a:defRPr>
+            </a:pPr>
+            <a:r>
+              <a:t>       WHEN 30 THEN "Complete"</a:t>
+            </a:r>
+          </a:p>
+          <a:p>
+            <a:pPr algn="l">
+              <a:spcAft>
+                <a:spcPts val="100"/>
+              </a:spcAft>
+              <a:defRPr sz="720">
+                <a:solidFill>
+                  <a:srgbClr val="505050"/>
+                </a:solidFill>
+                <a:latin typeface="Consolas"/>
+              </a:defRPr>
+            </a:pPr>
+            <a:r>
+              <a:t>       WHEN 40 THEN "Cancelled"</a:t>
+            </a:r>
+          </a:p>
+          <a:p>
+            <a:pPr algn="l">
+              <a:spcAft>
+                <a:spcPts val="100"/>
+              </a:spcAft>
+              <a:defRPr sz="720">
+                <a:solidFill>
+                  <a:srgbClr val="505050"/>
+                </a:solidFill>
+                <a:latin typeface="Consolas"/>
+              </a:defRPr>
+            </a:pPr>
+            <a:r>
+              <a:t>       END AS label,</a:t>
+            </a:r>
+          </a:p>
+          <a:p>
+            <a:pPr algn="l">
+              <a:spcAft>
+                <a:spcPts val="100"/>
+              </a:spcAft>
+              <a:defRPr sz="720">
+                <a:solidFill>
+                  <a:srgbClr val="505050"/>
+                </a:solidFill>
+                <a:latin typeface="Consolas"/>
+              </a:defRPr>
+            </a:pPr>
+            <a:r>
+              <a:t>       AVG(COALESCE(o.OrderTotal, 0)) AS value</a:t>
+            </a:r>
+          </a:p>
+          <a:p>
+            <a:pPr algn="l">
+              <a:spcAft>
+                <a:spcPts val="100"/>
+              </a:spcAft>
+              <a:defRPr sz="720">
+                <a:solidFill>
+                  <a:srgbClr val="505050"/>
+                </a:solidFill>
+                <a:latin typeface="Consolas"/>
+              </a:defRPr>
+            </a:pPr>
+            <a:r>
+              <a:t>FROM `Order` o</a:t>
+            </a:r>
+          </a:p>
+          <a:p>
+            <a:pPr algn="l">
+              <a:spcAft>
+                <a:spcPts val="100"/>
+              </a:spcAft>
+              <a:defRPr sz="720">
+                <a:solidFill>
+                  <a:srgbClr val="505050"/>
+                </a:solidFill>
+                <a:latin typeface="Consolas"/>
+              </a:defRPr>
+            </a:pPr>
+            <a:r>
+              <a:t>WHERE o.Deleted = 0</a:t>
+            </a:r>
+          </a:p>
+          <a:p>
+            <a:pPr algn="l">
+              <a:spcAft>
+                <a:spcPts val="100"/>
+              </a:spcAft>
+              <a:defRPr sz="720">
+                <a:solidFill>
+                  <a:srgbClr val="505050"/>
+                </a:solidFill>
+                <a:latin typeface="Consolas"/>
+              </a:defRPr>
+            </a:pPr>
+            <a:r>
+              <a:t>GROUP BY CASE o.OrderStatusId ... END</a:t>
+            </a:r>
+          </a:p>
+          <a:p>
+            <a:pPr algn="l">
+              <a:spcAft>
+                <a:spcPts val="100"/>
+              </a:spcAft>
+              <a:defRPr sz="720">
+                <a:solidFill>
+                  <a:srgbClr val="505050"/>
+                </a:solidFill>
+                <a:latin typeface="Consolas"/>
+              </a:defRPr>
+            </a:pPr>
+            <a:r>
+              <a:t>ORDER BY value DESC;</a:t>
+            </a:r>
+          </a:p>
+        </p:txBody>
+      </p:sp>
+      <p:sp>
+        <p:nvSpPr>
+          <p:cNvPr id="19" name="TextBox 18"/>
+          <p:cNvSpPr txBox="1"/>
+          <p:nvPr/>
+        </p:nvSpPr>
+        <p:spPr>
+          <a:xfrm>
+            <a:off x="822960" y="5074920"/>
+            <a:ext cx="10378440" cy="658368"/>
           </a:xfrm>
           <a:prstGeom prst="rect">
             <a:avLst/>
@@ -7737,211 +8431,22 @@
               </a:spcAft>
             </a:pPr>
             <a:r>
-              <a:rPr b="1" i="0" sz="1800">
+              <a:rPr b="1" i="0" sz="1430">
                 <a:solidFill>
                   <a:srgbClr val="003366"/>
                 </a:solidFill>
                 <a:latin typeface="Times New Roman"/>
               </a:rPr>
-              <a:t>Compiler responsibilities:</a:t>
-            </a:r>
-          </a:p>
-          <a:p>
-            <a:pPr marL="256032" indent="-256032">
-              <a:lnSpc>
-                <a:spcPct val="108000"/>
-              </a:lnSpc>
-              <a:spcBef>
-                <a:spcPts val="300"/>
-              </a:spcBef>
-              <a:spcAft>
-                <a:spcPts val="700"/>
-              </a:spcAft>
-            </a:pPr>
-            <a:r>
-              <a:rPr b="0" i="0" sz="1500">
+              <a:t>Safety point:</a:t>
+            </a:r>
+            <a:r>
+              <a:rPr b="0" i="0" sz="1330">
                 <a:solidFill>
                   <a:srgbClr val="333333"/>
                 </a:solidFill>
                 <a:latin typeface="Times New Roman"/>
               </a:rPr>
-              <a:t>• Resolve metric and dimension ids from the semantic layer.</a:t>
-            </a:r>
-          </a:p>
-          <a:p>
-            <a:pPr marL="256032" indent="-256032">
-              <a:lnSpc>
-                <a:spcPct val="108000"/>
-              </a:lnSpc>
-              <a:spcBef>
-                <a:spcPts val="300"/>
-              </a:spcBef>
-              <a:spcAft>
-                <a:spcPts val="700"/>
-              </a:spcAft>
-            </a:pPr>
-            <a:r>
-              <a:rPr b="0" i="0" sz="1500">
-                <a:solidFill>
-                  <a:srgbClr val="333333"/>
-                </a:solidFill>
-                <a:latin typeface="Times New Roman"/>
-              </a:rPr>
-              <a:t>• Add only allowed joins and filters.</a:t>
-            </a:r>
-          </a:p>
-          <a:p>
-            <a:pPr marL="256032" indent="-256032">
-              <a:lnSpc>
-                <a:spcPct val="108000"/>
-              </a:lnSpc>
-              <a:spcBef>
-                <a:spcPts val="300"/>
-              </a:spcBef>
-              <a:spcAft>
-                <a:spcPts val="700"/>
-              </a:spcAft>
-            </a:pPr>
-            <a:r>
-              <a:rPr b="0" i="0" sz="1500">
-                <a:solidFill>
-                  <a:srgbClr val="333333"/>
-                </a:solidFill>
-                <a:latin typeface="Times New Roman"/>
-              </a:rPr>
-              <a:t>• Compile read-only SQL for MySQL.</a:t>
-            </a:r>
-          </a:p>
-          <a:p>
-            <a:pPr marL="256032" indent="-256032">
-              <a:lnSpc>
-                <a:spcPct val="108000"/>
-              </a:lnSpc>
-              <a:spcBef>
-                <a:spcPts val="300"/>
-              </a:spcBef>
-              <a:spcAft>
-                <a:spcPts val="700"/>
-              </a:spcAft>
-            </a:pPr>
-            <a:r>
-              <a:rPr b="0" i="0" sz="1500">
-                <a:solidFill>
-                  <a:srgbClr val="333333"/>
-                </a:solidFill>
-                <a:latin typeface="Times New Roman"/>
-              </a:rPr>
-              <a:t>• Validate SQL structure before execution.</a:t>
-            </a:r>
-          </a:p>
-          <a:p>
-            <a:pPr marL="0" indent="0">
-              <a:lnSpc>
-                <a:spcPct val="108000"/>
-              </a:lnSpc>
-              <a:spcBef>
-                <a:spcPts val="1200"/>
-              </a:spcBef>
-              <a:spcAft>
-                <a:spcPts val="500"/>
-              </a:spcAft>
-            </a:pPr>
-            <a:r>
-              <a:rPr b="1" i="0" sz="1800">
-                <a:solidFill>
-                  <a:srgbClr val="003366"/>
-                </a:solidFill>
-                <a:latin typeface="Times New Roman"/>
-              </a:rPr>
-              <a:t>Safety controls:</a:t>
-            </a:r>
-          </a:p>
-          <a:p>
-            <a:pPr marL="256032" indent="-256032">
-              <a:lnSpc>
-                <a:spcPct val="108000"/>
-              </a:lnSpc>
-              <a:spcBef>
-                <a:spcPts val="300"/>
-              </a:spcBef>
-              <a:spcAft>
-                <a:spcPts val="700"/>
-              </a:spcAft>
-            </a:pPr>
-            <a:r>
-              <a:rPr b="0" i="0" sz="1500">
-                <a:solidFill>
-                  <a:srgbClr val="333333"/>
-                </a:solidFill>
-                <a:latin typeface="Times New Roman"/>
-              </a:rPr>
-              <a:t>• No DDL or DML.</a:t>
-            </a:r>
-          </a:p>
-          <a:p>
-            <a:pPr marL="256032" indent="-256032">
-              <a:lnSpc>
-                <a:spcPct val="108000"/>
-              </a:lnSpc>
-              <a:spcBef>
-                <a:spcPts val="300"/>
-              </a:spcBef>
-              <a:spcAft>
-                <a:spcPts val="700"/>
-              </a:spcAft>
-            </a:pPr>
-            <a:r>
-              <a:rPr b="0" i="0" sz="1500">
-                <a:solidFill>
-                  <a:srgbClr val="333333"/>
-                </a:solidFill>
-                <a:latin typeface="Times New Roman"/>
-              </a:rPr>
-              <a:t>• No unapproved tables or columns.</a:t>
-            </a:r>
-          </a:p>
-          <a:p>
-            <a:pPr marL="256032" indent="-256032">
-              <a:lnSpc>
-                <a:spcPct val="108000"/>
-              </a:lnSpc>
-              <a:spcBef>
-                <a:spcPts val="300"/>
-              </a:spcBef>
-              <a:spcAft>
-                <a:spcPts val="700"/>
-              </a:spcAft>
-            </a:pPr>
-            <a:r>
-              <a:rPr b="0" i="0" sz="1500">
-                <a:solidFill>
-                  <a:srgbClr val="333333"/>
-                </a:solidFill>
-                <a:latin typeface="Times New Roman"/>
-              </a:rPr>
-              <a:t>• No silent fallback to a plausible metric.</a:t>
-            </a:r>
-          </a:p>
-          <a:p>
-            <a:pPr marL="256032" indent="-256032">
-              <a:lnSpc>
-                <a:spcPct val="108000"/>
-              </a:lnSpc>
-              <a:spcBef>
-                <a:spcPts val="300"/>
-              </a:spcBef>
-              <a:spcAft>
-                <a:spcPts val="700"/>
-              </a:spcAft>
-            </a:pPr>
-            <a:r>
-              <a:rPr b="0" i="0" sz="1500">
-                <a:solidFill>
-                  <a:srgbClr val="333333"/>
-                </a:solidFill>
-                <a:latin typeface="Times New Roman"/>
-              </a:rPr>
-              <a:t>• Refuse or clarify unsupported requests.</a:t>
+              <a:t> the template controls SQL structure; the semantic layer supplies approved identifiers and expressions; user text is never inserted into the query.</a:t>
             </a:r>
           </a:p>
         </p:txBody>
@@ -8395,7 +8900,7 @@
                 </a:solidFill>
                 <a:latin typeface="Times New Roman"/>
               </a:rPr>
-              <a:t>• KPI:</a:t>
+              <a:t>- KPI:</a:t>
             </a:r>
             <a:r>
               <a:rPr b="0" i="0" sz="1420">
@@ -8426,7 +8931,7 @@
                 </a:solidFill>
                 <a:latin typeface="Times New Roman"/>
               </a:rPr>
-              <a:t>• Table:</a:t>
+              <a:t>- Table:</a:t>
             </a:r>
             <a:r>
               <a:rPr b="0" i="0" sz="1420">
@@ -8457,7 +8962,7 @@
                 </a:solidFill>
                 <a:latin typeface="Times New Roman"/>
               </a:rPr>
-              <a:t>• Matrix:</a:t>
+              <a:t>- Matrix:</a:t>
             </a:r>
             <a:r>
               <a:rPr b="0" i="0" sz="1420">
@@ -8488,7 +8993,7 @@
                 </a:solidFill>
                 <a:latin typeface="Times New Roman"/>
               </a:rPr>
-              <a:t>• Chart-ready output:</a:t>
+              <a:t>- Chart-ready output:</a:t>
             </a:r>
             <a:r>
               <a:rPr b="0" i="0" sz="1420">
@@ -8949,7 +9454,7 @@
                 </a:solidFill>
                 <a:latin typeface="Times New Roman"/>
               </a:rPr>
-              <a:t>• FastAPI backend for NL analytics requests.</a:t>
+              <a:t>- FastAPI backend for NL analytics requests.</a:t>
             </a:r>
           </a:p>
           <a:p>
@@ -8971,7 +9476,7 @@
                 </a:solidFill>
                 <a:latin typeface="Times New Roman"/>
               </a:rPr>
-              <a:t>• MySQL seeded with nopCommerce-style [7] commerce data.</a:t>
+              <a:t>- MySQL seeded with nopCommerce-style [7] commerce data.</a:t>
             </a:r>
           </a:p>
           <a:p>
@@ -8993,7 +9498,7 @@
                 </a:solidFill>
                 <a:latin typeface="Times New Roman"/>
               </a:rPr>
-              <a:t>• OpenAI-compatible LLM API for intent extraction.</a:t>
+              <a:t>- OpenAI-compatible LLM API for intent extraction.</a:t>
             </a:r>
           </a:p>
           <a:p>
@@ -9015,7 +9520,7 @@
                 </a:solidFill>
                 <a:latin typeface="Times New Roman"/>
               </a:rPr>
-              <a:t>• Semantic-layer files define metrics, dimensions, filters, and output shapes.</a:t>
+              <a:t>- Semantic-layer files define metrics, dimensions, filters, and output shapes.</a:t>
             </a:r>
           </a:p>
           <a:p>
@@ -9037,7 +9542,7 @@
                 </a:solidFill>
                 <a:latin typeface="Times New Roman"/>
               </a:rPr>
-              <a:t>• Frontend shows answer output plus AEGIS stage evidence.</a:t>
+              <a:t>- Frontend shows answer output plus AEGIS stage evidence.</a:t>
             </a:r>
           </a:p>
         </p:txBody>
@@ -9643,7 +10148,7 @@
                 </a:solidFill>
                 <a:latin typeface="Times New Roman"/>
               </a:rPr>
-              <a:t>• Docker build includes app, database seed scripts, and smoke checks.</a:t>
+              <a:t>- Docker build includes app, database seed scripts, and smoke checks.</a:t>
             </a:r>
           </a:p>
           <a:p>
@@ -9665,7 +10170,7 @@
                 </a:solidFill>
                 <a:latin typeface="Times New Roman"/>
               </a:rPr>
-              <a:t>• Local health test verified database connection and seeded counts.</a:t>
+              <a:t>- Local health test verified database connection and seeded counts.</a:t>
             </a:r>
           </a:p>
         </p:txBody>
@@ -11398,7 +11903,7 @@
                 </a:solidFill>
                 <a:latin typeface="Times New Roman"/>
               </a:rPr>
-              <a:t> the benchmark checks validate the implemented nopCommerce [7] semantic-layer scope.</a:t>
+              <a:t> the benchmark checks validate the implemented nopCommerce [7] semantic layer scope.</a:t>
             </a:r>
           </a:p>
         </p:txBody>
@@ -12663,7 +13168,7 @@
                 </a:solidFill>
                 <a:latin typeface="Times New Roman"/>
               </a:rPr>
-              <a:t>• The prototype is implemented and tested for nopCommerce-style [7] analytics on MySQL.</a:t>
+              <a:t>- The prototype is implemented and tested for nopCommerce-style [7] analytics on MySQL.</a:t>
             </a:r>
           </a:p>
           <a:p>
@@ -12685,7 +13190,7 @@
                 </a:solidFill>
                 <a:latin typeface="Times New Roman"/>
               </a:rPr>
-              <a:t>• The semantic layer is intentionally finite and deployment-specific.</a:t>
+              <a:t>- The semantic layer is intentionally finite and deployment-specific.</a:t>
             </a:r>
           </a:p>
           <a:p>
@@ -12707,7 +13212,7 @@
                 </a:solidFill>
                 <a:latin typeface="Times New Roman"/>
               </a:rPr>
-              <a:t>• Unsupported structured intents are expected to be rejected or clarified, not guessed.</a:t>
+              <a:t>- Unsupported structured intents are expected to be rejected or clarified, not guessed.</a:t>
             </a:r>
           </a:p>
           <a:p>
@@ -12751,7 +13256,7 @@
                 </a:solidFill>
                 <a:latin typeface="Times New Roman"/>
               </a:rPr>
-              <a:t>• Vague unsupported language can still be misread during LLM intent extraction.</a:t>
+              <a:t>- Vague unsupported language can still be misread during LLM intent extraction.</a:t>
             </a:r>
           </a:p>
           <a:p>
@@ -12773,7 +13278,7 @@
                 </a:solidFill>
                 <a:latin typeface="Times New Roman"/>
               </a:rPr>
-              <a:t>• Additional commerce datasets would strengthen external validity.</a:t>
+              <a:t>- Additional commerce datasets would strengthen external validity.</a:t>
             </a:r>
           </a:p>
           <a:p>
@@ -12795,7 +13300,7 @@
                 </a:solidFill>
                 <a:latin typeface="Times New Roman"/>
               </a:rPr>
-              <a:t>• Other SQL dialects require compiler extensions.</a:t>
+              <a:t>- Other SQL dialects require compiler extensions.</a:t>
             </a:r>
           </a:p>
           <a:p>
@@ -12839,7 +13344,7 @@
                 </a:solidFill>
                 <a:latin typeface="Times New Roman"/>
               </a:rPr>
-              <a:t>• Multi-turn conversation is outside this thesis because the work evaluates single-request natural-language analytics.</a:t>
+              <a:t>- Multi-turn conversation is outside this thesis because the work evaluates single-request natural-language analytics.</a:t>
             </a:r>
           </a:p>
         </p:txBody>
@@ -13269,7 +13774,7 @@
                 </a:solidFill>
                 <a:latin typeface="Times New Roman"/>
               </a:rPr>
-              <a:t>• AEGIS keeps the LLM useful for language understanding while removing SQL-authoring authority from the model.</a:t>
+              <a:t>- AEGIS keeps the LLM useful for language understanding while removing SQL-authoring authority from the model.</a:t>
             </a:r>
           </a:p>
           <a:p>
@@ -13291,7 +13796,7 @@
                 </a:solidFill>
                 <a:latin typeface="Times New Roman"/>
               </a:rPr>
-              <a:t>• The semantic layer makes analytics definitions explicit, auditable, and reusable for a target system.</a:t>
+              <a:t>- The semantic layer makes analytics definitions explicit, auditable, and reusable for a target system.</a:t>
             </a:r>
           </a:p>
           <a:p>
@@ -13313,7 +13818,7 @@
                 </a:solidFill>
                 <a:latin typeface="Times New Roman"/>
               </a:rPr>
-              <a:t>• The compiler produces read-only SQL from approved definitions and blocks unsupported execution paths.</a:t>
+              <a:t>- The compiler produces read-only SQL from approved definitions and blocks unsupported execution paths.</a:t>
             </a:r>
           </a:p>
           <a:p>
@@ -13335,7 +13840,7 @@
                 </a:solidFill>
                 <a:latin typeface="Times New Roman"/>
               </a:rPr>
-              <a:t>• The nopCommerce [7] prototype, static datasets, and admin-fidelity checks show that the approach can be implemented and evaluated practically.</a:t>
+              <a:t>- The nopCommerce [7] prototype, static datasets, and admin-fidelity checks show that the approach can be implemented and evaluated practically.</a:t>
             </a:r>
           </a:p>
           <a:p>
@@ -13379,7 +13884,7 @@
                 </a:solidFill>
                 <a:latin typeface="Times New Roman"/>
               </a:rPr>
-              <a:t>• A constraint-based architecture for safe LLM-assisted natural language analytics.</a:t>
+              <a:t>- A constraint-based architecture for safe LLM-assisted natural language analytics.</a:t>
             </a:r>
           </a:p>
         </p:txBody>
@@ -14437,7 +14942,7 @@
                 </a:solidFill>
                 <a:latin typeface="Times New Roman"/>
               </a:rPr>
-              <a:t>• Evaluate AEGIS on another e-commerce system by replacing only the semantic layer.</a:t>
+              <a:t>- Evaluate AEGIS on another e-commerce system by replacing only the semantic layer.</a:t>
             </a:r>
           </a:p>
           <a:p>
@@ -14459,7 +14964,7 @@
                 </a:solidFill>
                 <a:latin typeface="Times New Roman"/>
               </a:rPr>
-              <a:t>• Add more oracle reports from real admin and business workflows.</a:t>
+              <a:t>- Add more oracle reports from real admin and business workflows.</a:t>
             </a:r>
           </a:p>
           <a:p>
@@ -14481,7 +14986,7 @@
                 </a:solidFill>
                 <a:latin typeface="Times New Roman"/>
               </a:rPr>
-              <a:t>• Extend compiler modules for PostgreSQL and SQL Server.</a:t>
+              <a:t>- Extend compiler modules for PostgreSQL and SQL Server.</a:t>
             </a:r>
           </a:p>
           <a:p>
@@ -14503,7 +15008,7 @@
                 </a:solidFill>
                 <a:latin typeface="Times New Roman"/>
               </a:rPr>
-              <a:t>• Improve clarification behavior for ambiguous but answerable user questions.</a:t>
+              <a:t>- Improve clarification behavior for ambiguous but answerable user questions.</a:t>
             </a:r>
           </a:p>
           <a:p>
@@ -14525,7 +15030,7 @@
                 </a:solidFill>
                 <a:latin typeface="Times New Roman"/>
               </a:rPr>
-              <a:t>• Add richer chart recommendation while keeping SQL generation deterministic.</a:t>
+              <a:t>- Add richer chart recommendation while keeping SQL generation deterministic.</a:t>
             </a:r>
           </a:p>
         </p:txBody>
@@ -15886,7 +16391,7 @@
                 </a:solidFill>
                 <a:latin typeface="Times New Roman"/>
               </a:rPr>
-              <a:t>• E-commerce systems store rich operational data, but built-in dashboards answer only a fixed set of questions.</a:t>
+              <a:t>- E-commerce systems store rich operational data, but built-in dashboards answer only a fixed set of questions.</a:t>
             </a:r>
           </a:p>
           <a:p>
@@ -15908,7 +16413,7 @@
                 </a:solidFill>
                 <a:latin typeface="Times New Roman"/>
               </a:rPr>
-              <a:t>• When users need new analytical combinations, the request usually depends on a developer or BI person to translate it into report logic.</a:t>
+              <a:t>- When users need new analytical combinations, the request usually depends on a developer or BI person to translate it into report logic.</a:t>
             </a:r>
           </a:p>
           <a:p>
@@ -15930,7 +16435,7 @@
                 </a:solidFill>
                 <a:latin typeface="Times New Roman"/>
               </a:rPr>
-              <a:t>• Natural language analytics can reduce that delay for managers, sales teams, and administrators.</a:t>
+              <a:t>- Natural language analytics can reduce that delay for managers, sales teams, and administrators.</a:t>
             </a:r>
           </a:p>
           <a:p>
@@ -15974,7 +16479,7 @@
                 </a:solidFill>
                 <a:latin typeface="Times New Roman"/>
               </a:rPr>
-              <a:t>• Direct LLM-to-SQL systems are flexible, but the model writes executable database code.</a:t>
+              <a:t>- Direct LLM-to-SQL systems are flexible, but the model writes executable database code.</a:t>
             </a:r>
           </a:p>
           <a:p>
@@ -15996,7 +16501,7 @@
                 </a:solidFill>
                 <a:latin typeface="Times New Roman"/>
               </a:rPr>
-              <a:t>• A safe analytics system should understand the question without giving the model authority to create arbitrary SQL.</a:t>
+              <a:t>- A safe analytics system should understand the question without giving the model authority to create arbitrary SQL.</a:t>
             </a:r>
           </a:p>
           <a:p>
@@ -16040,7 +16545,7 @@
                 </a:solidFill>
                 <a:latin typeface="Times New Roman"/>
               </a:rPr>
-              <a:t>• Use the LLM for intent extraction only.</a:t>
+              <a:t>- Use the LLM for intent extraction only.</a:t>
             </a:r>
           </a:p>
           <a:p>
@@ -16062,7 +16567,7 @@
                 </a:solidFill>
                 <a:latin typeface="Times New Roman"/>
               </a:rPr>
-              <a:t>• Use deterministic semantic mapping and SQL compilation for execution.</a:t>
+              <a:t>- Use deterministic semantic mapping and SQL compilation for execution.</a:t>
             </a:r>
           </a:p>
         </p:txBody>
@@ -18145,7 +18650,7 @@
                 </a:solidFill>
                 <a:latin typeface="Times New Roman"/>
               </a:rPr>
-              <a:t>• Many systems improve SQL generation accuracy, but still let executable SQL be authored by the model.</a:t>
+              <a:t>- Many systems improve SQL generation accuracy, but still let executable SQL be authored by the model.</a:t>
             </a:r>
           </a:p>
           <a:p>
@@ -18167,7 +18672,7 @@
                 </a:solidFill>
                 <a:latin typeface="Times New Roman"/>
               </a:rPr>
-              <a:t>• Visualization systems help users express analysis, but do not fully address database execution safety.</a:t>
+              <a:t>- Visualization systems help users express analysis, but do not fully address database execution safety.</a:t>
             </a:r>
           </a:p>
           <a:p>
@@ -18189,7 +18694,7 @@
                 </a:solidFill>
                 <a:latin typeface="Times New Roman"/>
               </a:rPr>
-              <a:t>• Parser and repair methods can reject invalid syntax, yet syntactically valid SQL can still be unsafe or semantically wrong.</a:t>
+              <a:t>- Parser and repair methods can reject invalid syntax, yet syntactically valid SQL can still be unsafe or semantically wrong.</a:t>
             </a:r>
           </a:p>
           <a:p>
@@ -18233,7 +18738,7 @@
                 </a:solidFill>
                 <a:latin typeface="Times New Roman"/>
               </a:rPr>
-              <a:t>• A practical architecture is needed where natural language is accepted, but executable SQL is produced only from an explicit semantic layer and deterministic compiler.</a:t>
+              <a:t>- A practical architecture is needed where natural language is accepted, but executable SQL is produced only from an explicit semantic layer and deterministic compiler.</a:t>
             </a:r>
           </a:p>
         </p:txBody>
@@ -19270,169 +19775,14 @@
         </p:blipFill>
         <p:spPr>
           <a:xfrm>
-            <a:off x="731520" y="2221992"/>
-            <a:ext cx="5120640" cy="2560320"/>
+            <a:off x="1577340" y="1572768"/>
+            <a:ext cx="9052560" cy="4526280"/>
           </a:xfrm>
           <a:prstGeom prst="rect">
             <a:avLst/>
           </a:prstGeom>
         </p:spPr>
       </p:pic>
-      <p:sp>
-        <p:nvSpPr>
-          <p:cNvPr id="14" name="TextBox 13"/>
-          <p:cNvSpPr txBox="1"/>
-          <p:nvPr/>
-        </p:nvSpPr>
-        <p:spPr>
-          <a:xfrm>
-            <a:off x="6080760" y="1719072"/>
-            <a:ext cx="5120640" cy="3840480"/>
-          </a:xfrm>
-          <a:prstGeom prst="rect">
-            <a:avLst/>
-          </a:prstGeom>
-          <a:noFill/>
-        </p:spPr>
-        <p:txBody>
-          <a:bodyPr wrap="square" anchor="t" lIns="0" tIns="0" rIns="0">
-            <a:spAutoFit/>
-          </a:bodyPr>
-          <a:lstStyle/>
-          <a:p>
-            <a:pPr marL="0" indent="0">
-              <a:lnSpc>
-                <a:spcPct val="108000"/>
-              </a:lnSpc>
-              <a:spcBef>
-                <a:spcPts val="1200"/>
-              </a:spcBef>
-              <a:spcAft>
-                <a:spcPts val="500"/>
-              </a:spcAft>
-            </a:pPr>
-            <a:r>
-              <a:rPr b="1" i="0" sz="1900">
-                <a:solidFill>
-                  <a:srgbClr val="003366"/>
-                </a:solidFill>
-                <a:latin typeface="Times New Roman"/>
-              </a:rPr>
-              <a:t>Design Science Research Process:</a:t>
-            </a:r>
-          </a:p>
-          <a:p>
-            <a:pPr marL="256032" indent="-256032">
-              <a:lnSpc>
-                <a:spcPct val="108000"/>
-              </a:lnSpc>
-              <a:spcBef>
-                <a:spcPts val="300"/>
-              </a:spcBef>
-              <a:spcAft>
-                <a:spcPts val="700"/>
-              </a:spcAft>
-            </a:pPr>
-            <a:r>
-              <a:rPr b="0" i="0" sz="1600">
-                <a:solidFill>
-                  <a:srgbClr val="333333"/>
-                </a:solidFill>
-                <a:latin typeface="Times New Roman"/>
-              </a:rPr>
-              <a:t>• Identify the unsafe execution problem in LLM-assisted database analytics.</a:t>
-            </a:r>
-          </a:p>
-          <a:p>
-            <a:pPr marL="256032" indent="-256032">
-              <a:lnSpc>
-                <a:spcPct val="108000"/>
-              </a:lnSpc>
-              <a:spcBef>
-                <a:spcPts val="300"/>
-              </a:spcBef>
-              <a:spcAft>
-                <a:spcPts val="700"/>
-              </a:spcAft>
-            </a:pPr>
-            <a:r>
-              <a:rPr b="0" i="0" sz="1600">
-                <a:solidFill>
-                  <a:srgbClr val="333333"/>
-                </a:solidFill>
-                <a:latin typeface="Times New Roman"/>
-              </a:rPr>
-              <a:t>• Design a constraint-based architecture where SQL is compiled from explicit definitions.</a:t>
-            </a:r>
-          </a:p>
-          <a:p>
-            <a:pPr marL="256032" indent="-256032">
-              <a:lnSpc>
-                <a:spcPct val="108000"/>
-              </a:lnSpc>
-              <a:spcBef>
-                <a:spcPts val="300"/>
-              </a:spcBef>
-              <a:spcAft>
-                <a:spcPts val="700"/>
-              </a:spcAft>
-            </a:pPr>
-            <a:r>
-              <a:rPr b="0" i="0" sz="1600">
-                <a:solidFill>
-                  <a:srgbClr val="333333"/>
-                </a:solidFill>
-                <a:latin typeface="Times New Roman"/>
-              </a:rPr>
-              <a:t>• Implement the prototype for nopCommerce [7] on MySQL.</a:t>
-            </a:r>
-          </a:p>
-          <a:p>
-            <a:pPr marL="256032" indent="-256032">
-              <a:lnSpc>
-                <a:spcPct val="108000"/>
-              </a:lnSpc>
-              <a:spcBef>
-                <a:spcPts val="300"/>
-              </a:spcBef>
-              <a:spcAft>
-                <a:spcPts val="700"/>
-              </a:spcAft>
-            </a:pPr>
-            <a:r>
-              <a:rPr b="0" i="0" sz="1600">
-                <a:solidFill>
-                  <a:srgbClr val="333333"/>
-                </a:solidFill>
-                <a:latin typeface="Times New Roman"/>
-              </a:rPr>
-              <a:t>• Evaluate with static datasets and executable oracle checks.</a:t>
-            </a:r>
-          </a:p>
-          <a:p>
-            <a:pPr marL="256032" indent="-256032">
-              <a:lnSpc>
-                <a:spcPct val="108000"/>
-              </a:lnSpc>
-              <a:spcBef>
-                <a:spcPts val="300"/>
-              </a:spcBef>
-              <a:spcAft>
-                <a:spcPts val="700"/>
-              </a:spcAft>
-            </a:pPr>
-            <a:r>
-              <a:rPr b="0" i="0" sz="1600">
-                <a:solidFill>
-                  <a:srgbClr val="333333"/>
-                </a:solidFill>
-                <a:latin typeface="Times New Roman"/>
-              </a:rPr>
-              <a:t>• Refine implementation gaps before freezing thesis claims.</a:t>
-            </a:r>
-          </a:p>
-        </p:txBody>
-      </p:sp>
     </p:spTree>
   </p:cSld>
   <p:clrMapOvr>
@@ -19812,68 +20162,14 @@
         </p:blipFill>
         <p:spPr>
           <a:xfrm>
-            <a:off x="2514600" y="1143000"/>
-            <a:ext cx="7132320" cy="4160520"/>
+            <a:off x="1758261" y="1097280"/>
+            <a:ext cx="8699862" cy="5074920"/>
           </a:xfrm>
           <a:prstGeom prst="rect">
             <a:avLst/>
           </a:prstGeom>
         </p:spPr>
       </p:pic>
-      <p:sp>
-        <p:nvSpPr>
-          <p:cNvPr id="14" name="TextBox 13"/>
-          <p:cNvSpPr txBox="1"/>
-          <p:nvPr/>
-        </p:nvSpPr>
-        <p:spPr>
-          <a:xfrm>
-            <a:off x="1005840" y="5440680"/>
-            <a:ext cx="10149840" cy="548640"/>
-          </a:xfrm>
-          <a:prstGeom prst="rect">
-            <a:avLst/>
-          </a:prstGeom>
-          <a:noFill/>
-        </p:spPr>
-        <p:txBody>
-          <a:bodyPr wrap="square" anchor="t" lIns="0" tIns="0" rIns="0">
-            <a:spAutoFit/>
-          </a:bodyPr>
-          <a:lstStyle/>
-          <a:p>
-            <a:pPr marL="0" indent="0">
-              <a:lnSpc>
-                <a:spcPct val="108000"/>
-              </a:lnSpc>
-              <a:spcBef>
-                <a:spcPts val="1200"/>
-              </a:spcBef>
-              <a:spcAft>
-                <a:spcPts val="500"/>
-              </a:spcAft>
-            </a:pPr>
-            <a:r>
-              <a:rPr b="1" i="0" sz="1550">
-                <a:solidFill>
-                  <a:srgbClr val="003366"/>
-                </a:solidFill>
-                <a:latin typeface="Times New Roman"/>
-              </a:rPr>
-              <a:t>Main architectural rule:</a:t>
-            </a:r>
-            <a:r>
-              <a:rPr b="0" i="0" sz="1450">
-                <a:solidFill>
-                  <a:srgbClr val="333333"/>
-                </a:solidFill>
-                <a:latin typeface="Times New Roman"/>
-              </a:rPr>
-              <a:t> the LLM extracts intent only; approved code maps that intent to semantic definitions and compiled SQL.</a:t>
-            </a:r>
-          </a:p>
-        </p:txBody>
-      </p:sp>
     </p:spTree>
   </p:cSld>
   <p:clrMapOvr>

--- a/docs/scripts/Md_Riaz_Final_Defense_0322310105101024.pptx
+++ b/docs/scripts/Md_Riaz_Final_Defense_0322310105101024.pptx
@@ -13983,7 +13983,7 @@
                         </a:defRPr>
                       </a:pPr>
                       <a:r>
-                        <a:t>498/500 (99.6%)</a:t>
+                        <a:t>499/500 (99.8%)</a:t>
                       </a:r>
                     </a:p>
                   </a:txBody>
@@ -14062,7 +14062,7 @@
                         </a:defRPr>
                       </a:pPr>
                       <a:r>
-                        <a:t>422/425 (99.3%)</a:t>
+                        <a:t>423/425 (99.5%)</a:t>
                       </a:r>
                     </a:p>
                   </a:txBody>
@@ -14216,7 +14216,7 @@
                         </a:defRPr>
                       </a:pPr>
                       <a:r>
-                        <a:t>345/425 (81.2%)</a:t>
+                        <a:t>313/425 (73.6%)</a:t>
                       </a:r>
                     </a:p>
                   </a:txBody>
@@ -14291,7 +14291,7 @@
                         </a:defRPr>
                       </a:pPr>
                       <a:r>
-                        <a:t>74/75 (98.7%)</a:t>
+                        <a:t>72/75 (96.0%)</a:t>
                       </a:r>
                     </a:p>
                   </a:txBody>
@@ -15702,7 +15702,7 @@
                         </a:defRPr>
                       </a:pPr>
                       <a:r>
-                        <a:t>not measured</a:t>
+                        <a:t>9,029.89 ms</a:t>
                       </a:r>
                     </a:p>
                   </a:txBody>
@@ -15725,7 +15725,7 @@
                         </a:defRPr>
                       </a:pPr>
                       <a:r>
-                        <a:t>not measured</a:t>
+                        <a:t>19,460.15 ms</a:t>
                       </a:r>
                     </a:p>
                   </a:txBody>
@@ -16110,7 +16110,7 @@
                         </a:defRPr>
                       </a:pPr>
                       <a:r>
-                        <a:t>not measured</a:t>
+                        <a:t>3.62 ms</a:t>
                       </a:r>
                     </a:p>
                   </a:txBody>
@@ -16133,7 +16133,7 @@
                         </a:defRPr>
                       </a:pPr>
                       <a:r>
-                        <a:t>not measured</a:t>
+                        <a:t>14.02 ms</a:t>
                       </a:r>
                     </a:p>
                   </a:txBody>
@@ -18531,7 +18531,7 @@
               </a:spcAft>
             </a:pPr>
             <a:r>
-              <a:rPr b="1" i="0" sz="1600">
+              <a:rPr b="1" i="0" sz="1550">
                 <a:solidFill>
                   <a:srgbClr val="003366"/>
                 </a:solidFill>
@@ -18553,7 +18553,7 @@
               </a:spcAft>
             </a:pPr>
             <a:r>
-              <a:rPr b="0" i="0" sz="1300">
+              <a:rPr b="0" i="0" sz="1250">
                 <a:solidFill>
                   <a:srgbClr val="333333"/>
                 </a:solidFill>
@@ -18575,7 +18575,7 @@
               </a:spcAft>
             </a:pPr>
             <a:r>
-              <a:rPr b="1" i="0" sz="1300">
+              <a:rPr b="1" i="0" sz="1250">
                 <a:solidFill>
                   <a:srgbClr val="003366"/>
                 </a:solidFill>
@@ -18584,7 +18584,7 @@
               <a:t>- Because the layer is per-deployment, cross-domain benchmarks such as Spider and BIRD do not apply:</a:t>
             </a:r>
             <a:r>
-              <a:rPr b="0" i="0" sz="1300">
+              <a:rPr b="0" i="0" sz="1250">
                 <a:solidFill>
                   <a:srgbClr val="333333"/>
                 </a:solidFill>
@@ -18606,7 +18606,7 @@
               </a:spcAft>
             </a:pPr>
             <a:r>
-              <a:rPr b="1" i="0" sz="1600">
+              <a:rPr b="1" i="0" sz="1550">
                 <a:solidFill>
                   <a:srgbClr val="003366"/>
                 </a:solidFill>
@@ -18628,7 +18628,7 @@
               </a:spcAft>
             </a:pPr>
             <a:r>
-              <a:rPr b="0" i="0" sz="1300">
+              <a:rPr b="0" i="0" sz="1250">
                 <a:solidFill>
                   <a:srgbClr val="333333"/>
                 </a:solidFill>
@@ -18650,13 +18650,13 @@
               </a:spcAft>
             </a:pPr>
             <a:r>
-              <a:rPr b="0" i="0" sz="1300">
+              <a:rPr b="0" i="0" sz="1250">
                 <a:solidFill>
                   <a:srgbClr val="333333"/>
                 </a:solidFill>
                 <a:latin typeface="Times New Roman"/>
               </a:rPr>
-              <a:t>- The gateway used for intent extraction resolves a model alias per request, so the run is not pinned to a single model. Each result row records what actually served it.</a:t>
+              <a:t>- Three of the 75 boundary questions were not declined. One was a malformed model reply; the other two are the same question phrased twice, asking to compare two named carriers. The model flagged "DHL" and "FedEx" as unmapped, and AEGIS answered by shipping method anyway — by design, because a model-reported gap is treated as evidence, not a verdict. That choice keeps false refusals low and costs exactly this.</a:t>
             </a:r>
           </a:p>
           <a:p>
@@ -18672,13 +18672,13 @@
               </a:spcAft>
             </a:pPr>
             <a:r>
-              <a:rPr b="0" i="0" sz="1300">
+              <a:rPr b="0" i="0" sz="1250">
                 <a:solidFill>
                   <a:srgbClr val="333333"/>
                 </a:solidFill>
                 <a:latin typeface="Times New Roman"/>
               </a:rPr>
-              <a:t>- Five reports differ from the platform's own output in row count or label column. No report differs in value.</a:t>
+              <a:t>- The gateway used for intent extraction resolves a model alias per request, so the run is not pinned to a single model. Each result row records what actually served it.</a:t>
             </a:r>
           </a:p>
           <a:p>
@@ -18694,13 +18694,13 @@
               </a:spcAft>
             </a:pPr>
             <a:r>
-              <a:rPr b="0" i="0" sz="1300">
+              <a:rPr b="0" i="0" sz="1250">
                 <a:solidFill>
                   <a:srgbClr val="333333"/>
                 </a:solidFill>
                 <a:latin typeface="Times New Roman"/>
               </a:rPr>
-              <a:t>- Vague, unsupported language can still be misread during intent extraction.</a:t>
+              <a:t>- Five reports differ from the platform's own output in row count or label column. No report differs in value.</a:t>
             </a:r>
           </a:p>
           <a:p>
@@ -18716,7 +18716,7 @@
               </a:spcAft>
             </a:pPr>
             <a:r>
-              <a:rPr b="0" i="0" sz="1300">
+              <a:rPr b="0" i="0" sz="1250">
                 <a:solidFill>
                   <a:srgbClr val="333333"/>
                 </a:solidFill>
@@ -18738,7 +18738,7 @@
               </a:spcAft>
             </a:pPr>
             <a:r>
-              <a:rPr b="1" i="0" sz="1600">
+              <a:rPr b="1" i="0" sz="1550">
                 <a:solidFill>
                   <a:srgbClr val="003366"/>
                 </a:solidFill>
@@ -18760,7 +18760,7 @@
               </a:spcAft>
             </a:pPr>
             <a:r>
-              <a:rPr b="0" i="0" sz="1300">
+              <a:rPr b="0" i="0" sz="1250">
                 <a:solidFill>
                   <a:srgbClr val="333333"/>
                 </a:solidFill>

--- a/docs/scripts/Md_Riaz_Final_Defense_0322310105101024.pptx
+++ b/docs/scripts/Md_Riaz_Final_Defense_0322310105101024.pptx
@@ -38,6 +38,7 @@
     <p:sldId id="283" r:id="rId34"/>
     <p:sldId id="284" r:id="rId35"/>
     <p:sldId id="285" r:id="rId36"/>
+    <p:sldId id="286" r:id="rId37"/>
   </p:sldIdLst>
   <p:sldSz cx="12192000" cy="6858000"/>
   <p:notesSz cx="6858000" cy="9144000"/>
@@ -16449,7 +16450,7 @@
               </a:defRPr>
             </a:pPr>
             <a:r>
-              <a:t>Evaluation Track 2: nopCommerce's Own 20 Admin Reports</a:t>
+              <a:t>Without the Semantic Layer: the Same Model, Unconstrained</a:t>
             </a:r>
           </a:p>
         </p:txBody>
@@ -16570,6 +16571,1101 @@
             </a:pPr>
             <a:r>
               <a:t>21</a:t>
+            </a:r>
+          </a:p>
+        </p:txBody>
+      </p:sp>
+      <p:sp>
+        <p:nvSpPr>
+          <p:cNvPr id="13" name="TextBox 12"/>
+          <p:cNvSpPr txBox="1"/>
+          <p:nvPr/>
+        </p:nvSpPr>
+        <p:spPr>
+          <a:xfrm>
+            <a:off x="777240" y="1243584"/>
+            <a:ext cx="10515600" cy="384048"/>
+          </a:xfrm>
+          <a:prstGeom prst="rect">
+            <a:avLst/>
+          </a:prstGeom>
+          <a:noFill/>
+        </p:spPr>
+        <p:txBody>
+          <a:bodyPr wrap="square" anchor="t" lIns="0" tIns="0" rIns="0">
+            <a:spAutoFit/>
+          </a:bodyPr>
+          <a:lstStyle/>
+          <a:p>
+            <a:pPr marL="0" indent="0">
+              <a:lnSpc>
+                <a:spcPct val="108000"/>
+              </a:lnSpc>
+              <a:spcBef>
+                <a:spcPts val="1200"/>
+              </a:spcBef>
+              <a:spcAft>
+                <a:spcPts val="500"/>
+              </a:spcAft>
+            </a:pPr>
+            <a:r>
+              <a:rPr b="1" i="0" sz="1650">
+                <a:solidFill>
+                  <a:srgbClr val="003366"/>
+                </a:solidFill>
+                <a:latin typeface="Times New Roman"/>
+              </a:rPr>
+              <a:t>The identical model through the identical gateway, asked to write MySQL directly for the same 500 questions.</a:t>
+            </a:r>
+          </a:p>
+        </p:txBody>
+      </p:sp>
+      <p:graphicFrame>
+        <p:nvGraphicFramePr>
+          <p:cNvPr id="14" name="Table 13"/>
+          <p:cNvGraphicFramePr>
+            <a:graphicFrameLocks noGrp="1"/>
+          </p:cNvGraphicFramePr>
+          <p:nvPr/>
+        </p:nvGraphicFramePr>
+        <p:xfrm>
+          <a:off x="777240" y="1737360"/>
+          <a:ext cx="10515600" cy="1600200"/>
+        </p:xfrm>
+        <a:graphic>
+          <a:graphicData uri="http://schemas.openxmlformats.org/drawingml/2006/table">
+            <a:tbl>
+              <a:tblPr firstRow="1" bandRow="1">
+                <a:tableStyleId>{5C22544A-7EE6-4342-B048-85BDC9FD1C3A}</a:tableStyleId>
+              </a:tblPr>
+              <a:tblGrid>
+                <a:gridCol w="4754880"/>
+                <a:gridCol w="2880360"/>
+                <a:gridCol w="2880360"/>
+              </a:tblGrid>
+              <a:tr h="400050">
+                <a:tc>
+                  <a:txBody>
+                    <a:bodyPr/>
+                    <a:lstStyle/>
+                    <a:p>
+                      <a:pPr algn="ctr">
+                        <a:lnSpc>
+                          <a:spcPct val="100000"/>
+                        </a:lnSpc>
+                        <a:defRPr sz="1200" b="1">
+                          <a:solidFill>
+                            <a:srgbClr val="FFFFFF"/>
+                          </a:solidFill>
+                          <a:latin typeface="Times New Roman"/>
+                        </a:defRPr>
+                      </a:pPr>
+                      <a:r>
+                        <a:t>Measure</a:t>
+                      </a:r>
+                    </a:p>
+                  </a:txBody>
+                  <a:tcPr marL="64008" marR="64008" marT="27432" marB="27432" anchor="ctr">
+                    <a:solidFill>
+                      <a:srgbClr val="003366"/>
+                    </a:solidFill>
+                  </a:tcPr>
+                </a:tc>
+                <a:tc>
+                  <a:txBody>
+                    <a:bodyPr/>
+                    <a:lstStyle/>
+                    <a:p>
+                      <a:pPr algn="ctr">
+                        <a:lnSpc>
+                          <a:spcPct val="100000"/>
+                        </a:lnSpc>
+                        <a:defRPr sz="1200" b="1">
+                          <a:solidFill>
+                            <a:srgbClr val="FFFFFF"/>
+                          </a:solidFill>
+                          <a:latin typeface="Times New Roman"/>
+                        </a:defRPr>
+                      </a:pPr>
+                      <a:r>
+                        <a:t>AEGIS</a:t>
+                      </a:r>
+                    </a:p>
+                  </a:txBody>
+                  <a:tcPr marL="64008" marR="64008" marT="27432" marB="27432" anchor="ctr">
+                    <a:solidFill>
+                      <a:srgbClr val="003366"/>
+                    </a:solidFill>
+                  </a:tcPr>
+                </a:tc>
+                <a:tc>
+                  <a:txBody>
+                    <a:bodyPr/>
+                    <a:lstStyle/>
+                    <a:p>
+                      <a:pPr algn="ctr">
+                        <a:lnSpc>
+                          <a:spcPct val="100000"/>
+                        </a:lnSpc>
+                        <a:defRPr sz="1200" b="1">
+                          <a:solidFill>
+                            <a:srgbClr val="FFFFFF"/>
+                          </a:solidFill>
+                          <a:latin typeface="Times New Roman"/>
+                        </a:defRPr>
+                      </a:pPr>
+                      <a:r>
+                        <a:t>Direct LLM-to-SQL</a:t>
+                      </a:r>
+                    </a:p>
+                  </a:txBody>
+                  <a:tcPr marL="64008" marR="64008" marT="27432" marB="27432" anchor="ctr">
+                    <a:solidFill>
+                      <a:srgbClr val="003366"/>
+                    </a:solidFill>
+                  </a:tcPr>
+                </a:tc>
+              </a:tr>
+              <a:tr h="400050">
+                <a:tc>
+                  <a:txBody>
+                    <a:bodyPr/>
+                    <a:lstStyle/>
+                    <a:p>
+                      <a:pPr algn="l">
+                        <a:lnSpc>
+                          <a:spcPct val="100000"/>
+                        </a:lnSpc>
+                        <a:defRPr sz="1200" b="1">
+                          <a:solidFill>
+                            <a:srgbClr val="333333"/>
+                          </a:solidFill>
+                          <a:latin typeface="Times New Roman"/>
+                        </a:defRPr>
+                      </a:pPr>
+                      <a:r>
+                        <a:t>Supported questions whose SQL executed</a:t>
+                      </a:r>
+                    </a:p>
+                  </a:txBody>
+                  <a:tcPr marL="64008" marR="64008" marT="27432" marB="27432" anchor="ctr"/>
+                </a:tc>
+                <a:tc>
+                  <a:txBody>
+                    <a:bodyPr/>
+                    <a:lstStyle/>
+                    <a:p>
+                      <a:pPr algn="ctr">
+                        <a:lnSpc>
+                          <a:spcPct val="100000"/>
+                        </a:lnSpc>
+                        <a:defRPr sz="1200" b="0">
+                          <a:solidFill>
+                            <a:srgbClr val="333333"/>
+                          </a:solidFill>
+                          <a:latin typeface="Times New Roman"/>
+                        </a:defRPr>
+                      </a:pPr>
+                      <a:r>
+                        <a:t>422/425 (99.3%)</a:t>
+                      </a:r>
+                    </a:p>
+                  </a:txBody>
+                  <a:tcPr marL="64008" marR="64008" marT="27432" marB="27432" anchor="ctr"/>
+                </a:tc>
+                <a:tc>
+                  <a:txBody>
+                    <a:bodyPr/>
+                    <a:lstStyle/>
+                    <a:p>
+                      <a:pPr algn="ctr">
+                        <a:lnSpc>
+                          <a:spcPct val="100000"/>
+                        </a:lnSpc>
+                        <a:defRPr sz="1200" b="0">
+                          <a:solidFill>
+                            <a:srgbClr val="333333"/>
+                          </a:solidFill>
+                          <a:latin typeface="Times New Roman"/>
+                        </a:defRPr>
+                      </a:pPr>
+                      <a:r>
+                        <a:t>365/425 (85.9%)</a:t>
+                      </a:r>
+                    </a:p>
+                  </a:txBody>
+                  <a:tcPr marL="64008" marR="64008" marT="27432" marB="27432" anchor="ctr"/>
+                </a:tc>
+              </a:tr>
+              <a:tr h="400050">
+                <a:tc>
+                  <a:txBody>
+                    <a:bodyPr/>
+                    <a:lstStyle/>
+                    <a:p>
+                      <a:pPr algn="l">
+                        <a:lnSpc>
+                          <a:spcPct val="100000"/>
+                        </a:lnSpc>
+                        <a:defRPr sz="1200" b="1">
+                          <a:solidFill>
+                            <a:srgbClr val="333333"/>
+                          </a:solidFill>
+                          <a:latin typeface="Times New Roman"/>
+                        </a:defRPr>
+                      </a:pPr>
+                      <a:r>
+                        <a:t>Out-of-scope questions answered anyway</a:t>
+                      </a:r>
+                    </a:p>
+                  </a:txBody>
+                  <a:tcPr marL="64008" marR="64008" marT="27432" marB="27432" anchor="ctr">
+                    <a:solidFill>
+                      <a:srgbClr val="F2F4F8"/>
+                    </a:solidFill>
+                  </a:tcPr>
+                </a:tc>
+                <a:tc>
+                  <a:txBody>
+                    <a:bodyPr/>
+                    <a:lstStyle/>
+                    <a:p>
+                      <a:pPr algn="ctr">
+                        <a:lnSpc>
+                          <a:spcPct val="100000"/>
+                        </a:lnSpc>
+                        <a:defRPr sz="1200" b="0">
+                          <a:solidFill>
+                            <a:srgbClr val="333333"/>
+                          </a:solidFill>
+                          <a:latin typeface="Times New Roman"/>
+                        </a:defRPr>
+                      </a:pPr>
+                      <a:r>
+                        <a:t>3/75 (4.0%)</a:t>
+                      </a:r>
+                    </a:p>
+                  </a:txBody>
+                  <a:tcPr marL="64008" marR="64008" marT="27432" marB="27432" anchor="ctr">
+                    <a:solidFill>
+                      <a:srgbClr val="F2F4F8"/>
+                    </a:solidFill>
+                  </a:tcPr>
+                </a:tc>
+                <a:tc>
+                  <a:txBody>
+                    <a:bodyPr/>
+                    <a:lstStyle/>
+                    <a:p>
+                      <a:pPr algn="ctr">
+                        <a:lnSpc>
+                          <a:spcPct val="100000"/>
+                        </a:lnSpc>
+                        <a:defRPr sz="1200" b="0">
+                          <a:solidFill>
+                            <a:srgbClr val="333333"/>
+                          </a:solidFill>
+                          <a:latin typeface="Times New Roman"/>
+                        </a:defRPr>
+                      </a:pPr>
+                      <a:r>
+                        <a:t>25/75 (33.3%)</a:t>
+                      </a:r>
+                    </a:p>
+                  </a:txBody>
+                  <a:tcPr marL="64008" marR="64008" marT="27432" marB="27432" anchor="ctr">
+                    <a:solidFill>
+                      <a:srgbClr val="F2F4F8"/>
+                    </a:solidFill>
+                  </a:tcPr>
+                </a:tc>
+              </a:tr>
+              <a:tr h="400050">
+                <a:tc>
+                  <a:txBody>
+                    <a:bodyPr/>
+                    <a:lstStyle/>
+                    <a:p>
+                      <a:pPr algn="l">
+                        <a:lnSpc>
+                          <a:spcPct val="100000"/>
+                        </a:lnSpc>
+                        <a:defRPr sz="1200" b="1">
+                          <a:solidFill>
+                            <a:srgbClr val="333333"/>
+                          </a:solidFill>
+                          <a:latin typeface="Times New Roman"/>
+                        </a:defRPr>
+                      </a:pPr>
+                      <a:r>
+                        <a:t>Queries containing a forbidden construct</a:t>
+                      </a:r>
+                    </a:p>
+                  </a:txBody>
+                  <a:tcPr marL="64008" marR="64008" marT="27432" marB="27432" anchor="ctr"/>
+                </a:tc>
+                <a:tc>
+                  <a:txBody>
+                    <a:bodyPr/>
+                    <a:lstStyle/>
+                    <a:p>
+                      <a:pPr algn="ctr">
+                        <a:lnSpc>
+                          <a:spcPct val="100000"/>
+                        </a:lnSpc>
+                        <a:defRPr sz="1200" b="0">
+                          <a:solidFill>
+                            <a:srgbClr val="333333"/>
+                          </a:solidFill>
+                          <a:latin typeface="Times New Roman"/>
+                        </a:defRPr>
+                      </a:pPr>
+                      <a:r>
+                        <a:t>0 — the compiler cannot emit one</a:t>
+                      </a:r>
+                    </a:p>
+                  </a:txBody>
+                  <a:tcPr marL="64008" marR="64008" marT="27432" marB="27432" anchor="ctr"/>
+                </a:tc>
+                <a:tc>
+                  <a:txBody>
+                    <a:bodyPr/>
+                    <a:lstStyle/>
+                    <a:p>
+                      <a:pPr algn="ctr">
+                        <a:lnSpc>
+                          <a:spcPct val="100000"/>
+                        </a:lnSpc>
+                        <a:defRPr sz="1200" b="0">
+                          <a:solidFill>
+                            <a:srgbClr val="333333"/>
+                          </a:solidFill>
+                          <a:latin typeface="Times New Roman"/>
+                        </a:defRPr>
+                      </a:pPr>
+                      <a:r>
+                        <a:t>2/500 (0.4%)</a:t>
+                      </a:r>
+                    </a:p>
+                  </a:txBody>
+                  <a:tcPr marL="64008" marR="64008" marT="27432" marB="27432" anchor="ctr"/>
+                </a:tc>
+              </a:tr>
+            </a:tbl>
+          </a:graphicData>
+        </a:graphic>
+      </p:graphicFrame>
+      <p:sp>
+        <p:nvSpPr>
+          <p:cNvPr id="15" name="Rounded Rectangle 14"/>
+          <p:cNvSpPr/>
+          <p:nvPr/>
+        </p:nvSpPr>
+        <p:spPr>
+          <a:xfrm>
+            <a:off x="777240" y="3493008"/>
+            <a:ext cx="10515600" cy="402336"/>
+          </a:xfrm>
+          <a:prstGeom prst="roundRect">
+            <a:avLst/>
+          </a:prstGeom>
+          <a:solidFill>
+            <a:srgbClr val="E2F0D9"/>
+          </a:solidFill>
+          <a:ln w="12700">
+            <a:solidFill>
+              <a:srgbClr val="003366"/>
+            </a:solidFill>
+          </a:ln>
+        </p:spPr>
+        <p:style>
+          <a:lnRef idx="1">
+            <a:schemeClr val="accent1"/>
+          </a:lnRef>
+          <a:fillRef idx="3">
+            <a:schemeClr val="accent1"/>
+          </a:fillRef>
+          <a:effectRef idx="2">
+            <a:schemeClr val="accent1"/>
+          </a:effectRef>
+          <a:fontRef idx="minor">
+            <a:schemeClr val="lt1"/>
+          </a:fontRef>
+        </p:style>
+        <p:txBody>
+          <a:bodyPr rtlCol="0" anchor="ctr" wrap="square" lIns="109728" rIns="109728" tIns="54864"/>
+          <a:lstStyle/>
+          <a:p>
+            <a:pPr algn="ctr">
+              <a:defRPr sz="1250" b="1">
+                <a:solidFill>
+                  <a:srgbClr val="003366"/>
+                </a:solidFill>
+                <a:latin typeface="Times New Roman"/>
+              </a:defRPr>
+            </a:pPr>
+            <a:r>
+              <a:t>What answering an unanswerable question looks like</a:t>
+            </a:r>
+          </a:p>
+        </p:txBody>
+      </p:sp>
+      <p:graphicFrame>
+        <p:nvGraphicFramePr>
+          <p:cNvPr id="16" name="Table 15"/>
+          <p:cNvGraphicFramePr>
+            <a:graphicFrameLocks noGrp="1"/>
+          </p:cNvGraphicFramePr>
+          <p:nvPr/>
+        </p:nvGraphicFramePr>
+        <p:xfrm>
+          <a:off x="777240" y="3986784"/>
+          <a:ext cx="10515600" cy="1417320"/>
+        </p:xfrm>
+        <a:graphic>
+          <a:graphicData uri="http://schemas.openxmlformats.org/drawingml/2006/table">
+            <a:tbl>
+              <a:tblPr firstRow="1" bandRow="1">
+                <a:tableStyleId>{5C22544A-7EE6-4342-B048-85BDC9FD1C3A}</a:tableStyleId>
+              </a:tblPr>
+              <a:tblGrid>
+                <a:gridCol w="4114800"/>
+                <a:gridCol w="6400800"/>
+              </a:tblGrid>
+              <a:tr h="354330">
+                <a:tc>
+                  <a:txBody>
+                    <a:bodyPr/>
+                    <a:lstStyle/>
+                    <a:p>
+                      <a:pPr algn="ctr">
+                        <a:lnSpc>
+                          <a:spcPct val="100000"/>
+                        </a:lnSpc>
+                        <a:defRPr sz="1100" b="1">
+                          <a:solidFill>
+                            <a:srgbClr val="FFFFFF"/>
+                          </a:solidFill>
+                          <a:latin typeface="Times New Roman"/>
+                        </a:defRPr>
+                      </a:pPr>
+                      <a:r>
+                        <a:t>The question</a:t>
+                      </a:r>
+                    </a:p>
+                  </a:txBody>
+                  <a:tcPr marL="54864" marR="54864" marT="18288" marB="18288" anchor="ctr">
+                    <a:solidFill>
+                      <a:srgbClr val="003366"/>
+                    </a:solidFill>
+                  </a:tcPr>
+                </a:tc>
+                <a:tc>
+                  <a:txBody>
+                    <a:bodyPr/>
+                    <a:lstStyle/>
+                    <a:p>
+                      <a:pPr algn="ctr">
+                        <a:lnSpc>
+                          <a:spcPct val="100000"/>
+                        </a:lnSpc>
+                        <a:defRPr sz="1100" b="1">
+                          <a:solidFill>
+                            <a:srgbClr val="FFFFFF"/>
+                          </a:solidFill>
+                          <a:latin typeface="Times New Roman"/>
+                        </a:defRPr>
+                      </a:pPr>
+                      <a:r>
+                        <a:t>What the unconstrained model returned</a:t>
+                      </a:r>
+                    </a:p>
+                  </a:txBody>
+                  <a:tcPr marL="54864" marR="54864" marT="18288" marB="18288" anchor="ctr">
+                    <a:solidFill>
+                      <a:srgbClr val="003366"/>
+                    </a:solidFill>
+                  </a:tcPr>
+                </a:tc>
+              </a:tr>
+              <a:tr h="354330">
+                <a:tc>
+                  <a:txBody>
+                    <a:bodyPr/>
+                    <a:lstStyle/>
+                    <a:p>
+                      <a:pPr algn="l">
+                        <a:lnSpc>
+                          <a:spcPct val="100000"/>
+                        </a:lnSpc>
+                        <a:defRPr sz="1050" b="1">
+                          <a:solidFill>
+                            <a:srgbClr val="333333"/>
+                          </a:solidFill>
+                          <a:latin typeface="Times New Roman"/>
+                        </a:defRPr>
+                      </a:pPr>
+                      <a:r>
+                        <a:t>"Forecast next month's total sales."</a:t>
+                      </a:r>
+                    </a:p>
+                  </a:txBody>
+                  <a:tcPr marL="54864" marR="54864" marT="18288" marB="18288" anchor="ctr"/>
+                </a:tc>
+                <a:tc>
+                  <a:txBody>
+                    <a:bodyPr/>
+                    <a:lstStyle/>
+                    <a:p>
+                      <a:pPr algn="l">
+                        <a:lnSpc>
+                          <a:spcPct val="100000"/>
+                        </a:lnSpc>
+                        <a:defRPr sz="1050" b="0">
+                          <a:solidFill>
+                            <a:srgbClr val="333333"/>
+                          </a:solidFill>
+                          <a:latin typeface="Times New Roman"/>
+                        </a:defRPr>
+                      </a:pPr>
+                      <a:r>
+                        <a:t>A query summing past months. It runs, returns a number, and forecasts nothing.</a:t>
+                      </a:r>
+                    </a:p>
+                  </a:txBody>
+                  <a:tcPr marL="54864" marR="54864" marT="18288" marB="18288" anchor="ctr"/>
+                </a:tc>
+              </a:tr>
+              <a:tr h="354330">
+                <a:tc>
+                  <a:txBody>
+                    <a:bodyPr/>
+                    <a:lstStyle/>
+                    <a:p>
+                      <a:pPr algn="l">
+                        <a:lnSpc>
+                          <a:spcPct val="100000"/>
+                        </a:lnSpc>
+                        <a:defRPr sz="1050" b="1">
+                          <a:solidFill>
+                            <a:srgbClr val="333333"/>
+                          </a:solidFill>
+                          <a:latin typeface="Times New Roman"/>
+                        </a:defRPr>
+                      </a:pPr>
+                      <a:r>
+                        <a:t>"Which customers are likely to churn?"</a:t>
+                      </a:r>
+                    </a:p>
+                  </a:txBody>
+                  <a:tcPr marL="54864" marR="54864" marT="18288" marB="18288" anchor="ctr">
+                    <a:solidFill>
+                      <a:srgbClr val="F2F4F8"/>
+                    </a:solidFill>
+                  </a:tcPr>
+                </a:tc>
+                <a:tc>
+                  <a:txBody>
+                    <a:bodyPr/>
+                    <a:lstStyle/>
+                    <a:p>
+                      <a:pPr algn="l">
+                        <a:lnSpc>
+                          <a:spcPct val="100000"/>
+                        </a:lnSpc>
+                        <a:defRPr sz="1050" b="0">
+                          <a:solidFill>
+                            <a:srgbClr val="333333"/>
+                          </a:solidFill>
+                          <a:latin typeface="Times New Roman"/>
+                        </a:defRPr>
+                      </a:pPr>
+                      <a:r>
+                        <a:t>A query counting each customer's past orders. No prediction is possible from it.</a:t>
+                      </a:r>
+                    </a:p>
+                  </a:txBody>
+                  <a:tcPr marL="54864" marR="54864" marT="18288" marB="18288" anchor="ctr">
+                    <a:solidFill>
+                      <a:srgbClr val="F2F4F8"/>
+                    </a:solidFill>
+                  </a:tcPr>
+                </a:tc>
+              </a:tr>
+              <a:tr h="354330">
+                <a:tc>
+                  <a:txBody>
+                    <a:bodyPr/>
+                    <a:lstStyle/>
+                    <a:p>
+                      <a:pPr algn="l">
+                        <a:lnSpc>
+                          <a:spcPct val="100000"/>
+                        </a:lnSpc>
+                        <a:defRPr sz="1050" b="1">
+                          <a:solidFill>
+                            <a:srgbClr val="333333"/>
+                          </a:solidFill>
+                          <a:latin typeface="Times New Roman"/>
+                        </a:defRPr>
+                      </a:pPr>
+                      <a:r>
+                        <a:t>"Summarize the top complaints in reviews."</a:t>
+                      </a:r>
+                    </a:p>
+                  </a:txBody>
+                  <a:tcPr marL="54864" marR="54864" marT="18288" marB="18288" anchor="ctr"/>
+                </a:tc>
+                <a:tc>
+                  <a:txBody>
+                    <a:bodyPr/>
+                    <a:lstStyle/>
+                    <a:p>
+                      <a:pPr algn="l">
+                        <a:lnSpc>
+                          <a:spcPct val="100000"/>
+                        </a:lnSpc>
+                        <a:defRPr sz="1050" b="0">
+                          <a:solidFill>
+                            <a:srgbClr val="333333"/>
+                          </a:solidFill>
+                          <a:latin typeface="Times New Roman"/>
+                        </a:defRPr>
+                      </a:pPr>
+                      <a:r>
+                        <a:t>Keyword matching over review text, joined with UNION — rejected by the safety scan.</a:t>
+                      </a:r>
+                    </a:p>
+                  </a:txBody>
+                  <a:tcPr marL="54864" marR="54864" marT="18288" marB="18288" anchor="ctr"/>
+                </a:tc>
+              </a:tr>
+            </a:tbl>
+          </a:graphicData>
+        </a:graphic>
+      </p:graphicFrame>
+      <p:sp>
+        <p:nvSpPr>
+          <p:cNvPr id="17" name="Rounded Rectangle 16"/>
+          <p:cNvSpPr/>
+          <p:nvPr/>
+        </p:nvSpPr>
+        <p:spPr>
+          <a:xfrm>
+            <a:off x="777240" y="5742432"/>
+            <a:ext cx="10515600" cy="475488"/>
+          </a:xfrm>
+          <a:prstGeom prst="roundRect">
+            <a:avLst/>
+          </a:prstGeom>
+          <a:solidFill>
+            <a:srgbClr val="F3F6FB"/>
+          </a:solidFill>
+          <a:ln w="9525">
+            <a:solidFill>
+              <a:srgbClr val="C9D6E8"/>
+            </a:solidFill>
+          </a:ln>
+        </p:spPr>
+        <p:style>
+          <a:lnRef idx="1">
+            <a:schemeClr val="accent1"/>
+          </a:lnRef>
+          <a:fillRef idx="3">
+            <a:schemeClr val="accent1"/>
+          </a:fillRef>
+          <a:effectRef idx="2">
+            <a:schemeClr val="accent1"/>
+          </a:effectRef>
+          <a:fontRef idx="minor">
+            <a:schemeClr val="lt1"/>
+          </a:fontRef>
+        </p:style>
+        <p:txBody>
+          <a:bodyPr rtlCol="0" anchor="ctr" wrap="square" lIns="128016" rIns="128016"/>
+          <a:lstStyle/>
+          <a:p>
+            <a:pPr algn="l"/>
+            <a:r>
+              <a:rPr b="1" sz="1300">
+                <a:solidFill>
+                  <a:srgbClr val="333333"/>
+                </a:solidFill>
+                <a:latin typeface="Times New Roman"/>
+              </a:rPr>
+              <a:t>In plain terms:  </a:t>
+            </a:r>
+            <a:r>
+              <a:rPr sz="1300">
+                <a:solidFill>
+                  <a:srgbClr val="333333"/>
+                </a:solidFill>
+                <a:latin typeface="Times New Roman"/>
+              </a:rPr>
+              <a:t>Asked something the data cannot answer, the unconstrained model answers anyway — and the answer looks right.</a:t>
+            </a:r>
+          </a:p>
+        </p:txBody>
+      </p:sp>
+    </p:spTree>
+  </p:cSld>
+  <p:clrMapOvr>
+    <a:masterClrMapping/>
+  </p:clrMapOvr>
+</p:sld>
+</file>
+
+<file path=ppt/slides/slide22.xml><?xml version="1.0" encoding="utf-8"?>
+<p:sld xmlns:a="http://schemas.openxmlformats.org/drawingml/2006/main" xmlns:p="http://schemas.openxmlformats.org/presentationml/2006/main" xmlns:r="http://schemas.openxmlformats.org/officeDocument/2006/relationships">
+  <p:cSld>
+    <p:spTree>
+      <p:nvGrpSpPr>
+        <p:cNvPr id="1" name=""/>
+        <p:cNvGrpSpPr/>
+        <p:nvPr/>
+      </p:nvGrpSpPr>
+      <p:grpSpPr/>
+      <p:sp>
+        <p:nvSpPr>
+          <p:cNvPr id="11" name="Rectangle 10">
+            <a:extLst>
+              <a:ext uri="{FF2B5EF4-FFF2-40B4-BE49-F238E27FC236}">
+                <a16:creationId xmlns:a16="http://schemas.microsoft.com/office/drawing/2014/main" id="{D059D760-A365-91EB-B942-587B657A477E}"/>
+              </a:ext>
+            </a:extLst>
+          </p:cNvPr>
+          <p:cNvSpPr/>
+          <p:nvPr/>
+        </p:nvSpPr>
+        <p:spPr>
+          <a:xfrm>
+            <a:off x="-1" y="1500807"/>
+            <a:ext cx="12191999" cy="18288"/>
+          </a:xfrm>
+          <a:prstGeom prst="rect">
+            <a:avLst/>
+          </a:prstGeom>
+          <a:gradFill flip="none" rotWithShape="1">
+            <a:gsLst>
+              <a:gs pos="0">
+                <a:schemeClr val="accent1">
+                  <a:lumMod val="40000"/>
+                  <a:lumOff val="60000"/>
+                </a:schemeClr>
+              </a:gs>
+              <a:gs pos="36000">
+                <a:schemeClr val="accent1">
+                  <a:lumMod val="95000"/>
+                  <a:lumOff val="5000"/>
+                </a:schemeClr>
+              </a:gs>
+              <a:gs pos="100000">
+                <a:schemeClr val="tx2">
+                  <a:lumMod val="50000"/>
+                </a:schemeClr>
+              </a:gs>
+            </a:gsLst>
+            <a:path path="circle">
+              <a:fillToRect l="50000" t="130000" r="50000" b="-30000"/>
+            </a:path>
+            <a:tileRect/>
+          </a:gradFill>
+          <a:ln>
+            <a:noFill/>
+          </a:ln>
+        </p:spPr>
+        <p:style>
+          <a:lnRef idx="2">
+            <a:schemeClr val="accent1">
+              <a:shade val="15000"/>
+            </a:schemeClr>
+          </a:lnRef>
+          <a:fillRef idx="1">
+            <a:schemeClr val="accent1"/>
+          </a:fillRef>
+          <a:effectRef idx="0">
+            <a:schemeClr val="accent1"/>
+          </a:effectRef>
+          <a:fontRef idx="minor">
+            <a:schemeClr val="lt1"/>
+          </a:fontRef>
+        </p:style>
+        <p:txBody>
+          <a:bodyPr rtlCol="0" anchor="ctr"/>
+          <a:lstStyle/>
+          <a:p>
+            <a:pPr algn="ctr"/>
+            <a:endParaRPr lang="en-US"/>
+          </a:p>
+        </p:txBody>
+      </p:sp>
+      <p:sp>
+        <p:nvSpPr>
+          <p:cNvPr id="7" name="Rectangle 6">
+            <a:extLst>
+              <a:ext uri="{FF2B5EF4-FFF2-40B4-BE49-F238E27FC236}">
+                <a16:creationId xmlns:a16="http://schemas.microsoft.com/office/drawing/2014/main" id="{37F49795-9FC6-D65C-AAE9-247F6DF3DA3F}"/>
+              </a:ext>
+            </a:extLst>
+          </p:cNvPr>
+          <p:cNvSpPr/>
+          <p:nvPr/>
+        </p:nvSpPr>
+        <p:spPr>
+          <a:xfrm>
+            <a:off x="0" y="6291468"/>
+            <a:ext cx="12192000" cy="586409"/>
+          </a:xfrm>
+          <a:prstGeom prst="rect">
+            <a:avLst/>
+          </a:prstGeom>
+          <a:solidFill>
+            <a:schemeClr val="tx2">
+              <a:lumMod val="75000"/>
+            </a:schemeClr>
+          </a:solidFill>
+          <a:ln>
+            <a:noFill/>
+          </a:ln>
+          <a:effectLst>
+            <a:outerShdw blurRad="63500" sx="102000" sy="102000" algn="ctr" rotWithShape="0">
+              <a:prstClr val="black">
+                <a:alpha val="40000"/>
+              </a:prstClr>
+            </a:outerShdw>
+          </a:effectLst>
+        </p:spPr>
+        <p:style>
+          <a:lnRef idx="2">
+            <a:schemeClr val="accent1">
+              <a:shade val="15000"/>
+            </a:schemeClr>
+          </a:lnRef>
+          <a:fillRef idx="1">
+            <a:schemeClr val="accent1"/>
+          </a:fillRef>
+          <a:effectRef idx="0">
+            <a:schemeClr val="accent1"/>
+          </a:effectRef>
+          <a:fontRef idx="minor">
+            <a:schemeClr val="lt1"/>
+          </a:fontRef>
+        </p:style>
+        <p:txBody>
+          <a:bodyPr rtlCol="0" anchor="ctr"/>
+          <a:lstStyle/>
+          <a:p>
+            <a:pPr algn="ctr"/>
+            <a:endParaRPr lang="en-US" dirty="0"/>
+          </a:p>
+        </p:txBody>
+      </p:sp>
+      <p:sp>
+        <p:nvSpPr>
+          <p:cNvPr id="3" name="Rectangle 2">
+            <a:extLst>
+              <a:ext uri="{FF2B5EF4-FFF2-40B4-BE49-F238E27FC236}">
+                <a16:creationId xmlns:a16="http://schemas.microsoft.com/office/drawing/2014/main" id="{6027AE48-C47C-33FE-8F56-0AA4260C9B62}"/>
+              </a:ext>
+            </a:extLst>
+          </p:cNvPr>
+          <p:cNvSpPr/>
+          <p:nvPr/>
+        </p:nvSpPr>
+        <p:spPr>
+          <a:xfrm>
+            <a:off x="0" y="0"/>
+            <a:ext cx="12192000" cy="1500809"/>
+          </a:xfrm>
+          <a:prstGeom prst="rect">
+            <a:avLst/>
+          </a:prstGeom>
+          <a:solidFill>
+            <a:schemeClr val="accent1">
+              <a:lumMod val="20000"/>
+              <a:lumOff val="80000"/>
+            </a:schemeClr>
+          </a:solidFill>
+          <a:ln>
+            <a:noFill/>
+          </a:ln>
+          <a:effectLst/>
+        </p:spPr>
+        <p:style>
+          <a:lnRef idx="2">
+            <a:schemeClr val="accent1">
+              <a:shade val="15000"/>
+            </a:schemeClr>
+          </a:lnRef>
+          <a:fillRef idx="1">
+            <a:schemeClr val="accent1"/>
+          </a:fillRef>
+          <a:effectRef idx="0">
+            <a:schemeClr val="accent1"/>
+          </a:effectRef>
+          <a:fontRef idx="minor">
+            <a:schemeClr val="lt1"/>
+          </a:fontRef>
+        </p:style>
+        <p:txBody>
+          <a:bodyPr rtlCol="0" anchor="ctr"/>
+          <a:lstStyle/>
+          <a:p>
+            <a:pPr algn="ctr"/>
+            <a:endParaRPr lang="en-US" dirty="0"/>
+          </a:p>
+        </p:txBody>
+      </p:sp>
+      <p:sp>
+        <p:nvSpPr>
+          <p:cNvPr id="2" name="Title 1"/>
+          <p:cNvSpPr>
+            <a:spLocks noGrp="1"/>
+          </p:cNvSpPr>
+          <p:nvPr>
+            <p:ph type="title"/>
+          </p:nvPr>
+        </p:nvSpPr>
+        <p:spPr>
+          <a:xfrm>
+            <a:off x="1188720" y="365760"/>
+            <a:ext cx="9601200" cy="731520"/>
+          </a:xfrm>
+        </p:spPr>
+        <p:txBody>
+          <a:bodyPr/>
+          <a:lstStyle/>
+          <a:p>
+            <a:pPr>
+              <a:defRPr b="1" sz="2400">
+                <a:solidFill>
+                  <a:srgbClr val="003366"/>
+                </a:solidFill>
+                <a:latin typeface="Times New Roman"/>
+              </a:defRPr>
+            </a:pPr>
+            <a:r>
+              <a:t>Evaluation Track 2: nopCommerce's Own 20 Admin Reports</a:t>
+            </a:r>
+          </a:p>
+        </p:txBody>
+      </p:sp>
+      <p:pic>
+        <p:nvPicPr>
+          <p:cNvPr id="12" name="Picture 11" descr="image.png"/>
+          <p:cNvPicPr>
+            <a:picLocks noChangeAspect="1"/>
+          </p:cNvPicPr>
+          <p:nvPr/>
+        </p:nvPicPr>
+        <p:blipFill>
+          <a:blip r:embed="rId2"/>
+          <a:stretch>
+            <a:fillRect/>
+          </a:stretch>
+        </p:blipFill>
+        <p:spPr>
+          <a:xfrm>
+            <a:off x="512874" y="457199"/>
+            <a:ext cx="592309" cy="586409"/>
+          </a:xfrm>
+          <a:prstGeom prst="rect">
+            <a:avLst/>
+          </a:prstGeom>
+        </p:spPr>
+      </p:pic>
+      <p:sp>
+        <p:nvSpPr>
+          <p:cNvPr id="4" name="Date Placeholder 3">
+            <a:extLst>
+              <a:ext uri="{FF2B5EF4-FFF2-40B4-BE49-F238E27FC236}">
+                <a16:creationId xmlns:a16="http://schemas.microsoft.com/office/drawing/2014/main" id="{4C2A3C15-2DFB-89FB-3AD7-611F4E0BA472}"/>
+              </a:ext>
+            </a:extLst>
+          </p:cNvPr>
+          <p:cNvSpPr>
+            <a:spLocks noGrp="1"/>
+          </p:cNvSpPr>
+          <p:nvPr>
+            <p:ph type="dt" sz="half" idx="10"/>
+          </p:nvPr>
+        </p:nvSpPr>
+        <p:spPr/>
+        <p:txBody>
+          <a:bodyPr/>
+          <a:lstStyle/>
+          <a:p>
+            <a:pPr>
+              <a:defRPr>
+                <a:latin typeface="Times New Roman"/>
+              </a:defRPr>
+            </a:pPr>
+            <a:r>
+              <a:t>Tuesday, August 18, 2026</a:t>
+            </a:r>
+          </a:p>
+        </p:txBody>
+      </p:sp>
+      <p:sp>
+        <p:nvSpPr>
+          <p:cNvPr id="5" name="Footer Placeholder 4">
+            <a:extLst>
+              <a:ext uri="{FF2B5EF4-FFF2-40B4-BE49-F238E27FC236}">
+                <a16:creationId xmlns:a16="http://schemas.microsoft.com/office/drawing/2014/main" id="{16B89723-33F1-15E2-783B-D602C96206A1}"/>
+              </a:ext>
+            </a:extLst>
+          </p:cNvPr>
+          <p:cNvSpPr>
+            <a:spLocks noGrp="1"/>
+          </p:cNvSpPr>
+          <p:nvPr>
+            <p:ph type="ftr" sz="quarter" idx="11"/>
+          </p:nvPr>
+        </p:nvSpPr>
+        <p:spPr/>
+        <p:txBody>
+          <a:bodyPr/>
+          <a:lstStyle/>
+          <a:p>
+            <a:pPr>
+              <a:defRPr>
+                <a:latin typeface="Times New Roman"/>
+              </a:defRPr>
+            </a:pPr>
+            <a:r>
+              <a:t>Department of Computer Science &amp; Engineering, PUB</a:t>
+            </a:r>
+          </a:p>
+        </p:txBody>
+      </p:sp>
+      <p:sp>
+        <p:nvSpPr>
+          <p:cNvPr id="6" name="Slide Number Placeholder 5">
+            <a:extLst>
+              <a:ext uri="{FF2B5EF4-FFF2-40B4-BE49-F238E27FC236}">
+                <a16:creationId xmlns:a16="http://schemas.microsoft.com/office/drawing/2014/main" id="{7104B3F8-8A1A-BE19-5C71-AE319E3DCF2B}"/>
+              </a:ext>
+            </a:extLst>
+          </p:cNvPr>
+          <p:cNvSpPr>
+            <a:spLocks noGrp="1"/>
+          </p:cNvSpPr>
+          <p:nvPr>
+            <p:ph type="sldNum" sz="quarter" idx="12"/>
+          </p:nvPr>
+        </p:nvSpPr>
+        <p:spPr/>
+        <p:txBody>
+          <a:bodyPr/>
+          <a:lstStyle/>
+          <a:p>
+            <a:pPr>
+              <a:defRPr>
+                <a:latin typeface="Times New Roman"/>
+              </a:defRPr>
+            </a:pPr>
+            <a:r>
+              <a:t>22</a:t>
             </a:r>
           </a:p>
         </p:txBody>
@@ -17307,7 +18403,7 @@
 </p:sld>
 </file>
 
-<file path=ppt/slides/slide22.xml><?xml version="1.0" encoding="utf-8"?>
+<file path=ppt/slides/slide23.xml><?xml version="1.0" encoding="utf-8"?>
 <p:sld xmlns:a="http://schemas.openxmlformats.org/drawingml/2006/main" xmlns:p="http://schemas.openxmlformats.org/presentationml/2006/main" xmlns:r="http://schemas.openxmlformats.org/officeDocument/2006/relationships">
   <p:cSld>
     <p:spTree>
@@ -17657,7 +18753,7 @@
               </a:defRPr>
             </a:pPr>
             <a:r>
-              <a:t>22</a:t>
+              <a:t>23</a:t>
             </a:r>
           </a:p>
         </p:txBody>
@@ -18142,7 +19238,7 @@
 </p:sld>
 </file>
 
-<file path=ppt/slides/slide23.xml><?xml version="1.0" encoding="utf-8"?>
+<file path=ppt/slides/slide24.xml><?xml version="1.0" encoding="utf-8"?>
 <p:sld xmlns:a="http://schemas.openxmlformats.org/drawingml/2006/main" xmlns:p="http://schemas.openxmlformats.org/presentationml/2006/main" xmlns:r="http://schemas.openxmlformats.org/officeDocument/2006/relationships">
   <p:cSld>
     <p:spTree>
@@ -18492,7 +19588,7 @@
               </a:defRPr>
             </a:pPr>
             <a:r>
-              <a:t>23</a:t>
+              <a:t>24</a:t>
             </a:r>
           </a:p>
         </p:txBody>
@@ -18779,7 +19875,7 @@
 </p:sld>
 </file>
 
-<file path=ppt/slides/slide24.xml><?xml version="1.0" encoding="utf-8"?>
+<file path=ppt/slides/slide25.xml><?xml version="1.0" encoding="utf-8"?>
 <p:sld xmlns:a="http://schemas.openxmlformats.org/drawingml/2006/main" xmlns:p="http://schemas.openxmlformats.org/presentationml/2006/main" xmlns:r="http://schemas.openxmlformats.org/officeDocument/2006/relationships">
   <p:cSld>
     <p:spTree>
@@ -19129,7 +20225,7 @@
               </a:defRPr>
             </a:pPr>
             <a:r>
-              <a:t>24</a:t>
+              <a:t>25</a:t>
             </a:r>
           </a:p>
         </p:txBody>
@@ -19319,7 +20415,7 @@
 </p:sld>
 </file>
 
-<file path=ppt/slides/slide25.xml><?xml version="1.0" encoding="utf-8"?>
+<file path=ppt/slides/slide26.xml><?xml version="1.0" encoding="utf-8"?>
 <p:sld xmlns:a="http://schemas.openxmlformats.org/drawingml/2006/main" xmlns:p="http://schemas.openxmlformats.org/presentationml/2006/main" xmlns:r="http://schemas.openxmlformats.org/officeDocument/2006/relationships">
   <p:cSld>
     <p:spTree>
@@ -19669,7 +20765,7 @@
               </a:defRPr>
             </a:pPr>
             <a:r>
-              <a:t>25</a:t>
+              <a:t>26</a:t>
             </a:r>
           </a:p>
         </p:txBody>
@@ -19837,7 +20933,7 @@
 </p:sld>
 </file>
 
-<file path=ppt/slides/slide26.xml><?xml version="1.0" encoding="utf-8"?>
+<file path=ppt/slides/slide27.xml><?xml version="1.0" encoding="utf-8"?>
 <p:sld xmlns:a="http://schemas.openxmlformats.org/drawingml/2006/main" xmlns:p="http://schemas.openxmlformats.org/presentationml/2006/main" xmlns:r="http://schemas.openxmlformats.org/officeDocument/2006/relationships">
   <p:cSld>
     <p:spTree>
@@ -20187,7 +21283,7 @@
               </a:defRPr>
             </a:pPr>
             <a:r>
-              <a:t>26</a:t>
+              <a:t>27</a:t>
             </a:r>
           </a:p>
         </p:txBody>
@@ -20356,7 +21452,7 @@
 </p:sld>
 </file>
 
-<file path=ppt/slides/slide27.xml><?xml version="1.0" encoding="utf-8"?>
+<file path=ppt/slides/slide28.xml><?xml version="1.0" encoding="utf-8"?>
 <p:sld xmlns:a="http://schemas.openxmlformats.org/drawingml/2006/main" xmlns:p="http://schemas.openxmlformats.org/presentationml/2006/main" xmlns:r="http://schemas.openxmlformats.org/officeDocument/2006/relationships">
   <p:cSld>
     <p:spTree>
@@ -20706,7 +21802,7 @@
               </a:defRPr>
             </a:pPr>
             <a:r>
-              <a:t>27</a:t>
+              <a:t>28</a:t>
             </a:r>
           </a:p>
         </p:txBody>
@@ -20768,7 +21864,7 @@
 </p:sld>
 </file>
 
-<file path=ppt/slides/slide28.xml><?xml version="1.0" encoding="utf-8"?>
+<file path=ppt/slides/slide29.xml><?xml version="1.0" encoding="utf-8"?>
 <p:sld xmlns:a="http://schemas.openxmlformats.org/drawingml/2006/main" xmlns:p="http://schemas.openxmlformats.org/presentationml/2006/main" xmlns:r="http://schemas.openxmlformats.org/officeDocument/2006/relationships">
   <p:cSld>
     <p:spTree>
@@ -21118,7 +22214,7 @@
               </a:defRPr>
             </a:pPr>
             <a:r>
-              <a:t>28</a:t>
+              <a:t>29</a:t>
             </a:r>
           </a:p>
         </p:txBody>
@@ -21720,7 +22816,7 @@
 </p:sld>
 </file>
 
-<file path=ppt/slides/slide29.xml><?xml version="1.0" encoding="utf-8"?>
+<file path=ppt/slides/slide3.xml><?xml version="1.0" encoding="utf-8"?>
 <p:sld xmlns:a="http://schemas.openxmlformats.org/drawingml/2006/main" xmlns:p="http://schemas.openxmlformats.org/presentationml/2006/main" xmlns:r="http://schemas.openxmlformats.org/officeDocument/2006/relationships">
   <p:cSld>
     <p:spTree>
@@ -21950,7 +23046,7 @@
               </a:defRPr>
             </a:pPr>
             <a:r>
-              <a:t>Appendix B: The Compiler Fills Blanks, It Does Not Write SQL</a:t>
+              <a:t>Introduction</a:t>
             </a:r>
           </a:p>
         </p:txBody>
@@ -22070,7 +23166,7 @@
               </a:defRPr>
             </a:pPr>
             <a:r>
-              <a:t>29</a:t>
+              <a:t>3</a:t>
             </a:r>
           </a:p>
         </p:txBody>
@@ -22083,8 +23179,8 @@
         </p:nvSpPr>
         <p:spPr>
           <a:xfrm>
-            <a:off x="777240" y="1243584"/>
-            <a:ext cx="10515600" cy="384048"/>
+            <a:off x="1097280" y="1481328"/>
+            <a:ext cx="10058400" cy="4736592"/>
           </a:xfrm>
           <a:prstGeom prst="rect">
             <a:avLst/>
@@ -22109,282 +23205,81 @@
               </a:spcAft>
             </a:pPr>
             <a:r>
-              <a:rPr b="1" i="0" sz="1600">
+              <a:rPr b="1" i="0" sz="1900">
                 <a:solidFill>
                   <a:srgbClr val="003366"/>
                 </a:solidFill>
                 <a:latin typeface="Times New Roman"/>
               </a:rPr>
-              <a:t>aegis/server/compiler.py — the function that builds the SELECT clause:</a:t>
-            </a:r>
-          </a:p>
-        </p:txBody>
-      </p:sp>
-      <p:sp>
-        <p:nvSpPr>
-          <p:cNvPr id="14" name="Rectangle 13"/>
-          <p:cNvSpPr/>
-          <p:nvPr/>
-        </p:nvSpPr>
-        <p:spPr>
-          <a:xfrm>
-            <a:off x="777240" y="1737360"/>
-            <a:ext cx="10515600" cy="2743200"/>
-          </a:xfrm>
-          <a:prstGeom prst="rect">
-            <a:avLst/>
-          </a:prstGeom>
-          <a:solidFill>
-            <a:srgbClr val="F7F7F7"/>
-          </a:solidFill>
-          <a:ln>
-            <a:solidFill>
-              <a:srgbClr val="B7B7B7"/>
-            </a:solidFill>
-          </a:ln>
-        </p:spPr>
-        <p:style>
-          <a:lnRef idx="1">
-            <a:schemeClr val="accent1"/>
-          </a:lnRef>
-          <a:fillRef idx="3">
-            <a:schemeClr val="accent1"/>
-          </a:fillRef>
-          <a:effectRef idx="2">
-            <a:schemeClr val="accent1"/>
-          </a:effectRef>
-          <a:fontRef idx="minor">
-            <a:schemeClr val="lt1"/>
-          </a:fontRef>
-        </p:style>
-        <p:txBody>
-          <a:bodyPr rtlCol="0" anchor="t" wrap="square" lIns="36576" tIns="73152"/>
-          <a:lstStyle/>
-          <a:p>
-            <a:pPr algn="l">
+              <a:t>Motivation:</a:t>
+            </a:r>
+          </a:p>
+          <a:p>
+            <a:pPr marL="256032" indent="-256032">
+              <a:lnSpc>
+                <a:spcPct val="108000"/>
+              </a:lnSpc>
+              <a:spcBef>
+                <a:spcPts val="300"/>
+              </a:spcBef>
               <a:spcAft>
-                <a:spcPts val="100"/>
+                <a:spcPts val="700"/>
               </a:spcAft>
-              <a:defRPr sz="1000">
-                <a:solidFill>
-                  <a:srgbClr val="505050"/>
-                </a:solidFill>
-                <a:latin typeface="Consolas"/>
-              </a:defRPr>
-            </a:pPr>
-            <a:r>
-              <a:t>def _assemble_select(self, metric, dimension, extra_metrics=None, plan=None) -&gt; str:</a:t>
-            </a:r>
-          </a:p>
-          <a:p>
-            <a:pPr algn="l">
+            </a:pPr>
+            <a:r>
+              <a:rPr b="0" i="0" sz="1600">
+                <a:solidFill>
+                  <a:srgbClr val="333333"/>
+                </a:solidFill>
+                <a:latin typeface="Times New Roman"/>
+              </a:rPr>
+              <a:t>- E-commerce systems store rich operational data, but built-in dashboards answer only a fixed set of questions.</a:t>
+            </a:r>
+          </a:p>
+          <a:p>
+            <a:pPr marL="256032" indent="-256032">
+              <a:lnSpc>
+                <a:spcPct val="108000"/>
+              </a:lnSpc>
+              <a:spcBef>
+                <a:spcPts val="300"/>
+              </a:spcBef>
               <a:spcAft>
-                <a:spcPts val="100"/>
+                <a:spcPts val="700"/>
               </a:spcAft>
-              <a:defRPr sz="1000">
-                <a:solidFill>
-                  <a:srgbClr val="505050"/>
-                </a:solidFill>
-                <a:latin typeface="Consolas"/>
-              </a:defRPr>
-            </a:pPr>
-            <a:r>
-              <a:t>    measures = [f"{metric.sql_expr} AS value"]</a:t>
-            </a:r>
-          </a:p>
-          <a:p>
-            <a:pPr algn="l">
+            </a:pPr>
+            <a:r>
+              <a:rPr b="0" i="0" sz="1600">
+                <a:solidFill>
+                  <a:srgbClr val="333333"/>
+                </a:solidFill>
+                <a:latin typeface="Times New Roman"/>
+              </a:rPr>
+              <a:t>- When users need new analytical combinations, the request usually depends on a developer or BI person to translate it into report logic.</a:t>
+            </a:r>
+          </a:p>
+          <a:p>
+            <a:pPr marL="256032" indent="-256032">
+              <a:lnSpc>
+                <a:spcPct val="108000"/>
+              </a:lnSpc>
+              <a:spcBef>
+                <a:spcPts val="300"/>
+              </a:spcBef>
               <a:spcAft>
-                <a:spcPts val="100"/>
+                <a:spcPts val="700"/>
               </a:spcAft>
-              <a:defRPr sz="1000">
-                <a:solidFill>
-                  <a:srgbClr val="505050"/>
-                </a:solidFill>
-                <a:latin typeface="Consolas"/>
-              </a:defRPr>
-            </a:pPr>
-            <a:r>
-              <a:t>    for extra in extra_metrics or []:</a:t>
-            </a:r>
-          </a:p>
-          <a:p>
-            <a:pPr algn="l">
-              <a:spcAft>
-                <a:spcPts val="100"/>
-              </a:spcAft>
-              <a:defRPr sz="1000">
-                <a:solidFill>
-                  <a:srgbClr val="505050"/>
-                </a:solidFill>
-                <a:latin typeface="Consolas"/>
-              </a:defRPr>
-            </a:pPr>
-            <a:r>
-              <a:t>        measures.append(f"{extra.sql_expr} AS `{extra.id}`")</a:t>
-            </a:r>
-          </a:p>
-          <a:p>
-            <a:pPr algn="l">
-              <a:spcAft>
-                <a:spcPts val="100"/>
-              </a:spcAft>
-              <a:defRPr sz="1000">
-                <a:solidFill>
-                  <a:srgbClr val="505050"/>
-                </a:solidFill>
-                <a:latin typeface="Consolas"/>
-              </a:defRPr>
-            </a:pPr>
-            <a:r>
-              <a:t>    projected = ", ".join(measures)</a:t>
-            </a:r>
-          </a:p>
-          <a:p>
-            <a:pPr algn="l">
-              <a:spcAft>
-                <a:spcPts val="100"/>
-              </a:spcAft>
-              <a:defRPr sz="1000">
-                <a:solidFill>
-                  <a:srgbClr val="505050"/>
-                </a:solidFill>
-                <a:latin typeface="Consolas"/>
-              </a:defRPr>
-            </a:pPr>
-          </a:p>
-          <a:p>
-            <a:pPr algn="l">
-              <a:spcAft>
-                <a:spcPts val="100"/>
-              </a:spcAft>
-              <a:defRPr sz="1000">
-                <a:solidFill>
-                  <a:srgbClr val="505050"/>
-                </a:solidFill>
-                <a:latin typeface="Consolas"/>
-              </a:defRPr>
-            </a:pPr>
-            <a:r>
-              <a:t>    if dimension:</a:t>
-            </a:r>
-          </a:p>
-          <a:p>
-            <a:pPr algn="l">
-              <a:spcAft>
-                <a:spcPts val="100"/>
-              </a:spcAft>
-              <a:defRPr sz="1000">
-                <a:solidFill>
-                  <a:srgbClr val="505050"/>
-                </a:solidFill>
-                <a:latin typeface="Consolas"/>
-              </a:defRPr>
-            </a:pPr>
-            <a:r>
-              <a:t>        dim_expr = self._dimension_select_expr(dimension, plan)</a:t>
-            </a:r>
-          </a:p>
-          <a:p>
-            <a:pPr algn="l">
-              <a:spcAft>
-                <a:spcPts val="100"/>
-              </a:spcAft>
-              <a:defRPr sz="1000">
-                <a:solidFill>
-                  <a:srgbClr val="505050"/>
-                </a:solidFill>
-                <a:latin typeface="Consolas"/>
-              </a:defRPr>
-            </a:pPr>
-            <a:r>
-              <a:t>        return f"SELECT {dim_expr} AS label, {projected}"</a:t>
-            </a:r>
-          </a:p>
-          <a:p>
-            <a:pPr algn="l">
-              <a:spcAft>
-                <a:spcPts val="100"/>
-              </a:spcAft>
-              <a:defRPr sz="1000">
-                <a:solidFill>
-                  <a:srgbClr val="505050"/>
-                </a:solidFill>
-                <a:latin typeface="Consolas"/>
-              </a:defRPr>
-            </a:pPr>
-            <a:r>
-              <a:t>    return f"SELECT {projected}"</a:t>
-            </a:r>
-          </a:p>
-          <a:p>
-            <a:pPr algn="l">
-              <a:spcAft>
-                <a:spcPts val="100"/>
-              </a:spcAft>
-              <a:defRPr sz="1000">
-                <a:solidFill>
-                  <a:srgbClr val="505050"/>
-                </a:solidFill>
-                <a:latin typeface="Consolas"/>
-              </a:defRPr>
-            </a:pPr>
-          </a:p>
-          <a:p>
-            <a:pPr algn="l">
-              <a:spcAft>
-                <a:spcPts val="100"/>
-              </a:spcAft>
-              <a:defRPr sz="1000">
-                <a:solidFill>
-                  <a:srgbClr val="505050"/>
-                </a:solidFill>
-                <a:latin typeface="Consolas"/>
-              </a:defRPr>
-            </a:pPr>
-            <a:r>
-              <a:t># Every interpolated value is an attribute of a semantic-layer object.</a:t>
-            </a:r>
-          </a:p>
-          <a:p>
-            <a:pPr algn="l">
-              <a:spcAft>
-                <a:spcPts val="100"/>
-              </a:spcAft>
-              <a:defRPr sz="1000">
-                <a:solidFill>
-                  <a:srgbClr val="505050"/>
-                </a:solidFill>
-                <a:latin typeface="Consolas"/>
-              </a:defRPr>
-            </a:pPr>
-            <a:r>
-              <a:t># No argument to this function carries user text.</a:t>
-            </a:r>
-          </a:p>
-        </p:txBody>
-      </p:sp>
-      <p:sp>
-        <p:nvSpPr>
-          <p:cNvPr id="15" name="TextBox 14"/>
-          <p:cNvSpPr txBox="1"/>
-          <p:nvPr/>
-        </p:nvSpPr>
-        <p:spPr>
-          <a:xfrm>
-            <a:off x="777240" y="4617720"/>
-            <a:ext cx="10515600" cy="868680"/>
-          </a:xfrm>
-          <a:prstGeom prst="rect">
-            <a:avLst/>
-          </a:prstGeom>
-          <a:noFill/>
-        </p:spPr>
-        <p:txBody>
-          <a:bodyPr wrap="square" anchor="t" lIns="0" tIns="0" rIns="0">
-            <a:spAutoFit/>
-          </a:bodyPr>
-          <a:lstStyle/>
+            </a:pPr>
+            <a:r>
+              <a:rPr b="0" i="0" sz="1600">
+                <a:solidFill>
+                  <a:srgbClr val="333333"/>
+                </a:solidFill>
+                <a:latin typeface="Times New Roman"/>
+              </a:rPr>
+              <a:t>- Natural language analytics can reduce that delay for managers, sales teams, and administrators.</a:t>
+            </a:r>
+          </a:p>
           <a:p>
             <a:pPr marL="0" indent="0">
               <a:lnSpc>
@@ -22398,22 +23293,123 @@
               </a:spcAft>
             </a:pPr>
             <a:r>
-              <a:rPr b="1" i="0" sz="1350">
+              <a:rPr b="1" i="0" sz="1900">
                 <a:solidFill>
                   <a:srgbClr val="003366"/>
                 </a:solidFill>
                 <a:latin typeface="Times New Roman"/>
               </a:rPr>
-              <a:t>Literal values take a separate route:</a:t>
-            </a:r>
-            <a:r>
-              <a:rPr b="0" i="0" sz="1250">
+              <a:t>Central Tension:</a:t>
+            </a:r>
+          </a:p>
+          <a:p>
+            <a:pPr marL="256032" indent="-256032">
+              <a:lnSpc>
+                <a:spcPct val="108000"/>
+              </a:lnSpc>
+              <a:spcBef>
+                <a:spcPts val="300"/>
+              </a:spcBef>
+              <a:spcAft>
+                <a:spcPts val="700"/>
+              </a:spcAft>
+            </a:pPr>
+            <a:r>
+              <a:rPr b="0" i="0" sz="1600">
                 <a:solidFill>
                   <a:srgbClr val="333333"/>
                 </a:solidFill>
                 <a:latin typeface="Times New Roman"/>
               </a:rPr>
-              <a:t> a filter compiles to a placeholder and a bound parameter (p.StockQuantity &lt; @p0 with {p0: 10}), so a value never becomes part of the SQL text. After assembly, a forbidden-pattern scan rejects any non-SELECT construct before execution.</a:t>
+              <a:t>- Direct LLM-to-SQL systems are flexible, but the model writes executable database code.</a:t>
+            </a:r>
+          </a:p>
+          <a:p>
+            <a:pPr marL="256032" indent="-256032">
+              <a:lnSpc>
+                <a:spcPct val="108000"/>
+              </a:lnSpc>
+              <a:spcBef>
+                <a:spcPts val="300"/>
+              </a:spcBef>
+              <a:spcAft>
+                <a:spcPts val="700"/>
+              </a:spcAft>
+            </a:pPr>
+            <a:r>
+              <a:rPr b="0" i="0" sz="1600">
+                <a:solidFill>
+                  <a:srgbClr val="333333"/>
+                </a:solidFill>
+                <a:latin typeface="Times New Roman"/>
+              </a:rPr>
+              <a:t>- A safe analytics system should understand the question without giving the model authority to create arbitrary SQL.</a:t>
+            </a:r>
+          </a:p>
+          <a:p>
+            <a:pPr marL="0" indent="0">
+              <a:lnSpc>
+                <a:spcPct val="108000"/>
+              </a:lnSpc>
+              <a:spcBef>
+                <a:spcPts val="1200"/>
+              </a:spcBef>
+              <a:spcAft>
+                <a:spcPts val="500"/>
+              </a:spcAft>
+            </a:pPr>
+            <a:r>
+              <a:rPr b="1" i="0" sz="1900">
+                <a:solidFill>
+                  <a:srgbClr val="003366"/>
+                </a:solidFill>
+                <a:latin typeface="Times New Roman"/>
+              </a:rPr>
+              <a:t>AEGIS Direction:</a:t>
+            </a:r>
+          </a:p>
+          <a:p>
+            <a:pPr marL="256032" indent="-256032">
+              <a:lnSpc>
+                <a:spcPct val="108000"/>
+              </a:lnSpc>
+              <a:spcBef>
+                <a:spcPts val="300"/>
+              </a:spcBef>
+              <a:spcAft>
+                <a:spcPts val="700"/>
+              </a:spcAft>
+            </a:pPr>
+            <a:r>
+              <a:rPr b="0" i="0" sz="1600">
+                <a:solidFill>
+                  <a:srgbClr val="333333"/>
+                </a:solidFill>
+                <a:latin typeface="Times New Roman"/>
+              </a:rPr>
+              <a:t>- Use the LLM for intent extraction only.</a:t>
+            </a:r>
+          </a:p>
+          <a:p>
+            <a:pPr marL="256032" indent="-256032">
+              <a:lnSpc>
+                <a:spcPct val="108000"/>
+              </a:lnSpc>
+              <a:spcBef>
+                <a:spcPts val="300"/>
+              </a:spcBef>
+              <a:spcAft>
+                <a:spcPts val="700"/>
+              </a:spcAft>
+            </a:pPr>
+            <a:r>
+              <a:rPr b="0" i="0" sz="1600">
+                <a:solidFill>
+                  <a:srgbClr val="333333"/>
+                </a:solidFill>
+                <a:latin typeface="Times New Roman"/>
+              </a:rPr>
+              <a:t>- Use deterministic semantic mapping and SQL compilation for execution.</a:t>
             </a:r>
           </a:p>
         </p:txBody>
@@ -22426,7 +23422,7 @@
 </p:sld>
 </file>
 
-<file path=ppt/slides/slide3.xml><?xml version="1.0" encoding="utf-8"?>
+<file path=ppt/slides/slide30.xml><?xml version="1.0" encoding="utf-8"?>
 <p:sld xmlns:a="http://schemas.openxmlformats.org/drawingml/2006/main" xmlns:p="http://schemas.openxmlformats.org/presentationml/2006/main" xmlns:r="http://schemas.openxmlformats.org/officeDocument/2006/relationships">
   <p:cSld>
     <p:spTree>
@@ -22656,7 +23652,7 @@
               </a:defRPr>
             </a:pPr>
             <a:r>
-              <a:t>Introduction</a:t>
+              <a:t>Appendix B: The Compiler Fills Blanks, It Does Not Write SQL</a:t>
             </a:r>
           </a:p>
         </p:txBody>
@@ -22776,7 +23772,7 @@
               </a:defRPr>
             </a:pPr>
             <a:r>
-              <a:t>3</a:t>
+              <a:t>30</a:t>
             </a:r>
           </a:p>
         </p:txBody>
@@ -22789,8 +23785,8 @@
         </p:nvSpPr>
         <p:spPr>
           <a:xfrm>
-            <a:off x="1097280" y="1481328"/>
-            <a:ext cx="10058400" cy="4736592"/>
+            <a:off x="777240" y="1243584"/>
+            <a:ext cx="10515600" cy="384048"/>
           </a:xfrm>
           <a:prstGeom prst="rect">
             <a:avLst/>
@@ -22815,81 +23811,282 @@
               </a:spcAft>
             </a:pPr>
             <a:r>
-              <a:rPr b="1" i="0" sz="1900">
+              <a:rPr b="1" i="0" sz="1600">
                 <a:solidFill>
                   <a:srgbClr val="003366"/>
                 </a:solidFill>
                 <a:latin typeface="Times New Roman"/>
               </a:rPr>
-              <a:t>Motivation:</a:t>
-            </a:r>
-          </a:p>
-          <a:p>
-            <a:pPr marL="256032" indent="-256032">
-              <a:lnSpc>
-                <a:spcPct val="108000"/>
-              </a:lnSpc>
-              <a:spcBef>
-                <a:spcPts val="300"/>
-              </a:spcBef>
+              <a:t>aegis/server/compiler.py — the function that builds the SELECT clause:</a:t>
+            </a:r>
+          </a:p>
+        </p:txBody>
+      </p:sp>
+      <p:sp>
+        <p:nvSpPr>
+          <p:cNvPr id="14" name="Rectangle 13"/>
+          <p:cNvSpPr/>
+          <p:nvPr/>
+        </p:nvSpPr>
+        <p:spPr>
+          <a:xfrm>
+            <a:off x="777240" y="1737360"/>
+            <a:ext cx="10515600" cy="2743200"/>
+          </a:xfrm>
+          <a:prstGeom prst="rect">
+            <a:avLst/>
+          </a:prstGeom>
+          <a:solidFill>
+            <a:srgbClr val="F7F7F7"/>
+          </a:solidFill>
+          <a:ln>
+            <a:solidFill>
+              <a:srgbClr val="B7B7B7"/>
+            </a:solidFill>
+          </a:ln>
+        </p:spPr>
+        <p:style>
+          <a:lnRef idx="1">
+            <a:schemeClr val="accent1"/>
+          </a:lnRef>
+          <a:fillRef idx="3">
+            <a:schemeClr val="accent1"/>
+          </a:fillRef>
+          <a:effectRef idx="2">
+            <a:schemeClr val="accent1"/>
+          </a:effectRef>
+          <a:fontRef idx="minor">
+            <a:schemeClr val="lt1"/>
+          </a:fontRef>
+        </p:style>
+        <p:txBody>
+          <a:bodyPr rtlCol="0" anchor="t" wrap="square" lIns="36576" tIns="73152"/>
+          <a:lstStyle/>
+          <a:p>
+            <a:pPr algn="l">
               <a:spcAft>
-                <a:spcPts val="700"/>
+                <a:spcPts val="100"/>
               </a:spcAft>
-            </a:pPr>
-            <a:r>
-              <a:rPr b="0" i="0" sz="1600">
-                <a:solidFill>
-                  <a:srgbClr val="333333"/>
-                </a:solidFill>
-                <a:latin typeface="Times New Roman"/>
-              </a:rPr>
-              <a:t>- E-commerce systems store rich operational data, but built-in dashboards answer only a fixed set of questions.</a:t>
-            </a:r>
-          </a:p>
-          <a:p>
-            <a:pPr marL="256032" indent="-256032">
-              <a:lnSpc>
-                <a:spcPct val="108000"/>
-              </a:lnSpc>
-              <a:spcBef>
-                <a:spcPts val="300"/>
-              </a:spcBef>
+              <a:defRPr sz="1000">
+                <a:solidFill>
+                  <a:srgbClr val="505050"/>
+                </a:solidFill>
+                <a:latin typeface="Consolas"/>
+              </a:defRPr>
+            </a:pPr>
+            <a:r>
+              <a:t>def _assemble_select(self, metric, dimension, extra_metrics=None, plan=None) -&gt; str:</a:t>
+            </a:r>
+          </a:p>
+          <a:p>
+            <a:pPr algn="l">
               <a:spcAft>
-                <a:spcPts val="700"/>
+                <a:spcPts val="100"/>
               </a:spcAft>
-            </a:pPr>
-            <a:r>
-              <a:rPr b="0" i="0" sz="1600">
-                <a:solidFill>
-                  <a:srgbClr val="333333"/>
-                </a:solidFill>
-                <a:latin typeface="Times New Roman"/>
-              </a:rPr>
-              <a:t>- When users need new analytical combinations, the request usually depends on a developer or BI person to translate it into report logic.</a:t>
-            </a:r>
-          </a:p>
-          <a:p>
-            <a:pPr marL="256032" indent="-256032">
-              <a:lnSpc>
-                <a:spcPct val="108000"/>
-              </a:lnSpc>
-              <a:spcBef>
-                <a:spcPts val="300"/>
-              </a:spcBef>
+              <a:defRPr sz="1000">
+                <a:solidFill>
+                  <a:srgbClr val="505050"/>
+                </a:solidFill>
+                <a:latin typeface="Consolas"/>
+              </a:defRPr>
+            </a:pPr>
+            <a:r>
+              <a:t>    measures = [f"{metric.sql_expr} AS value"]</a:t>
+            </a:r>
+          </a:p>
+          <a:p>
+            <a:pPr algn="l">
               <a:spcAft>
-                <a:spcPts val="700"/>
+                <a:spcPts val="100"/>
               </a:spcAft>
-            </a:pPr>
-            <a:r>
-              <a:rPr b="0" i="0" sz="1600">
-                <a:solidFill>
-                  <a:srgbClr val="333333"/>
-                </a:solidFill>
-                <a:latin typeface="Times New Roman"/>
-              </a:rPr>
-              <a:t>- Natural language analytics can reduce that delay for managers, sales teams, and administrators.</a:t>
-            </a:r>
-          </a:p>
+              <a:defRPr sz="1000">
+                <a:solidFill>
+                  <a:srgbClr val="505050"/>
+                </a:solidFill>
+                <a:latin typeface="Consolas"/>
+              </a:defRPr>
+            </a:pPr>
+            <a:r>
+              <a:t>    for extra in extra_metrics or []:</a:t>
+            </a:r>
+          </a:p>
+          <a:p>
+            <a:pPr algn="l">
+              <a:spcAft>
+                <a:spcPts val="100"/>
+              </a:spcAft>
+              <a:defRPr sz="1000">
+                <a:solidFill>
+                  <a:srgbClr val="505050"/>
+                </a:solidFill>
+                <a:latin typeface="Consolas"/>
+              </a:defRPr>
+            </a:pPr>
+            <a:r>
+              <a:t>        measures.append(f"{extra.sql_expr} AS `{extra.id}`")</a:t>
+            </a:r>
+          </a:p>
+          <a:p>
+            <a:pPr algn="l">
+              <a:spcAft>
+                <a:spcPts val="100"/>
+              </a:spcAft>
+              <a:defRPr sz="1000">
+                <a:solidFill>
+                  <a:srgbClr val="505050"/>
+                </a:solidFill>
+                <a:latin typeface="Consolas"/>
+              </a:defRPr>
+            </a:pPr>
+            <a:r>
+              <a:t>    projected = ", ".join(measures)</a:t>
+            </a:r>
+          </a:p>
+          <a:p>
+            <a:pPr algn="l">
+              <a:spcAft>
+                <a:spcPts val="100"/>
+              </a:spcAft>
+              <a:defRPr sz="1000">
+                <a:solidFill>
+                  <a:srgbClr val="505050"/>
+                </a:solidFill>
+                <a:latin typeface="Consolas"/>
+              </a:defRPr>
+            </a:pPr>
+          </a:p>
+          <a:p>
+            <a:pPr algn="l">
+              <a:spcAft>
+                <a:spcPts val="100"/>
+              </a:spcAft>
+              <a:defRPr sz="1000">
+                <a:solidFill>
+                  <a:srgbClr val="505050"/>
+                </a:solidFill>
+                <a:latin typeface="Consolas"/>
+              </a:defRPr>
+            </a:pPr>
+            <a:r>
+              <a:t>    if dimension:</a:t>
+            </a:r>
+          </a:p>
+          <a:p>
+            <a:pPr algn="l">
+              <a:spcAft>
+                <a:spcPts val="100"/>
+              </a:spcAft>
+              <a:defRPr sz="1000">
+                <a:solidFill>
+                  <a:srgbClr val="505050"/>
+                </a:solidFill>
+                <a:latin typeface="Consolas"/>
+              </a:defRPr>
+            </a:pPr>
+            <a:r>
+              <a:t>        dim_expr = self._dimension_select_expr(dimension, plan)</a:t>
+            </a:r>
+          </a:p>
+          <a:p>
+            <a:pPr algn="l">
+              <a:spcAft>
+                <a:spcPts val="100"/>
+              </a:spcAft>
+              <a:defRPr sz="1000">
+                <a:solidFill>
+                  <a:srgbClr val="505050"/>
+                </a:solidFill>
+                <a:latin typeface="Consolas"/>
+              </a:defRPr>
+            </a:pPr>
+            <a:r>
+              <a:t>        return f"SELECT {dim_expr} AS label, {projected}"</a:t>
+            </a:r>
+          </a:p>
+          <a:p>
+            <a:pPr algn="l">
+              <a:spcAft>
+                <a:spcPts val="100"/>
+              </a:spcAft>
+              <a:defRPr sz="1000">
+                <a:solidFill>
+                  <a:srgbClr val="505050"/>
+                </a:solidFill>
+                <a:latin typeface="Consolas"/>
+              </a:defRPr>
+            </a:pPr>
+            <a:r>
+              <a:t>    return f"SELECT {projected}"</a:t>
+            </a:r>
+          </a:p>
+          <a:p>
+            <a:pPr algn="l">
+              <a:spcAft>
+                <a:spcPts val="100"/>
+              </a:spcAft>
+              <a:defRPr sz="1000">
+                <a:solidFill>
+                  <a:srgbClr val="505050"/>
+                </a:solidFill>
+                <a:latin typeface="Consolas"/>
+              </a:defRPr>
+            </a:pPr>
+          </a:p>
+          <a:p>
+            <a:pPr algn="l">
+              <a:spcAft>
+                <a:spcPts val="100"/>
+              </a:spcAft>
+              <a:defRPr sz="1000">
+                <a:solidFill>
+                  <a:srgbClr val="505050"/>
+                </a:solidFill>
+                <a:latin typeface="Consolas"/>
+              </a:defRPr>
+            </a:pPr>
+            <a:r>
+              <a:t># Every interpolated value is an attribute of a semantic-layer object.</a:t>
+            </a:r>
+          </a:p>
+          <a:p>
+            <a:pPr algn="l">
+              <a:spcAft>
+                <a:spcPts val="100"/>
+              </a:spcAft>
+              <a:defRPr sz="1000">
+                <a:solidFill>
+                  <a:srgbClr val="505050"/>
+                </a:solidFill>
+                <a:latin typeface="Consolas"/>
+              </a:defRPr>
+            </a:pPr>
+            <a:r>
+              <a:t># No argument to this function carries user text.</a:t>
+            </a:r>
+          </a:p>
+        </p:txBody>
+      </p:sp>
+      <p:sp>
+        <p:nvSpPr>
+          <p:cNvPr id="15" name="TextBox 14"/>
+          <p:cNvSpPr txBox="1"/>
+          <p:nvPr/>
+        </p:nvSpPr>
+        <p:spPr>
+          <a:xfrm>
+            <a:off x="777240" y="4617720"/>
+            <a:ext cx="10515600" cy="868680"/>
+          </a:xfrm>
+          <a:prstGeom prst="rect">
+            <a:avLst/>
+          </a:prstGeom>
+          <a:noFill/>
+        </p:spPr>
+        <p:txBody>
+          <a:bodyPr wrap="square" anchor="t" lIns="0" tIns="0" rIns="0">
+            <a:spAutoFit/>
+          </a:bodyPr>
+          <a:lstStyle/>
           <a:p>
             <a:pPr marL="0" indent="0">
               <a:lnSpc>
@@ -22903,123 +24100,22 @@
               </a:spcAft>
             </a:pPr>
             <a:r>
-              <a:rPr b="1" i="0" sz="1900">
+              <a:rPr b="1" i="0" sz="1350">
                 <a:solidFill>
                   <a:srgbClr val="003366"/>
                 </a:solidFill>
                 <a:latin typeface="Times New Roman"/>
               </a:rPr>
-              <a:t>Central Tension:</a:t>
-            </a:r>
-          </a:p>
-          <a:p>
-            <a:pPr marL="256032" indent="-256032">
-              <a:lnSpc>
-                <a:spcPct val="108000"/>
-              </a:lnSpc>
-              <a:spcBef>
-                <a:spcPts val="300"/>
-              </a:spcBef>
-              <a:spcAft>
-                <a:spcPts val="700"/>
-              </a:spcAft>
-            </a:pPr>
-            <a:r>
-              <a:rPr b="0" i="0" sz="1600">
+              <a:t>Literal values take a separate route:</a:t>
+            </a:r>
+            <a:r>
+              <a:rPr b="0" i="0" sz="1250">
                 <a:solidFill>
                   <a:srgbClr val="333333"/>
                 </a:solidFill>
                 <a:latin typeface="Times New Roman"/>
               </a:rPr>
-              <a:t>- Direct LLM-to-SQL systems are flexible, but the model writes executable database code.</a:t>
-            </a:r>
-          </a:p>
-          <a:p>
-            <a:pPr marL="256032" indent="-256032">
-              <a:lnSpc>
-                <a:spcPct val="108000"/>
-              </a:lnSpc>
-              <a:spcBef>
-                <a:spcPts val="300"/>
-              </a:spcBef>
-              <a:spcAft>
-                <a:spcPts val="700"/>
-              </a:spcAft>
-            </a:pPr>
-            <a:r>
-              <a:rPr b="0" i="0" sz="1600">
-                <a:solidFill>
-                  <a:srgbClr val="333333"/>
-                </a:solidFill>
-                <a:latin typeface="Times New Roman"/>
-              </a:rPr>
-              <a:t>- A safe analytics system should understand the question without giving the model authority to create arbitrary SQL.</a:t>
-            </a:r>
-          </a:p>
-          <a:p>
-            <a:pPr marL="0" indent="0">
-              <a:lnSpc>
-                <a:spcPct val="108000"/>
-              </a:lnSpc>
-              <a:spcBef>
-                <a:spcPts val="1200"/>
-              </a:spcBef>
-              <a:spcAft>
-                <a:spcPts val="500"/>
-              </a:spcAft>
-            </a:pPr>
-            <a:r>
-              <a:rPr b="1" i="0" sz="1900">
-                <a:solidFill>
-                  <a:srgbClr val="003366"/>
-                </a:solidFill>
-                <a:latin typeface="Times New Roman"/>
-              </a:rPr>
-              <a:t>AEGIS Direction:</a:t>
-            </a:r>
-          </a:p>
-          <a:p>
-            <a:pPr marL="256032" indent="-256032">
-              <a:lnSpc>
-                <a:spcPct val="108000"/>
-              </a:lnSpc>
-              <a:spcBef>
-                <a:spcPts val="300"/>
-              </a:spcBef>
-              <a:spcAft>
-                <a:spcPts val="700"/>
-              </a:spcAft>
-            </a:pPr>
-            <a:r>
-              <a:rPr b="0" i="0" sz="1600">
-                <a:solidFill>
-                  <a:srgbClr val="333333"/>
-                </a:solidFill>
-                <a:latin typeface="Times New Roman"/>
-              </a:rPr>
-              <a:t>- Use the LLM for intent extraction only.</a:t>
-            </a:r>
-          </a:p>
-          <a:p>
-            <a:pPr marL="256032" indent="-256032">
-              <a:lnSpc>
-                <a:spcPct val="108000"/>
-              </a:lnSpc>
-              <a:spcBef>
-                <a:spcPts val="300"/>
-              </a:spcBef>
-              <a:spcAft>
-                <a:spcPts val="700"/>
-              </a:spcAft>
-            </a:pPr>
-            <a:r>
-              <a:rPr b="0" i="0" sz="1600">
-                <a:solidFill>
-                  <a:srgbClr val="333333"/>
-                </a:solidFill>
-                <a:latin typeface="Times New Roman"/>
-              </a:rPr>
-              <a:t>- Use deterministic semantic mapping and SQL compilation for execution.</a:t>
+              <a:t> a filter compiles to a placeholder and a bound parameter (p.StockQuantity &lt; @p0 with {p0: 10}), so a value never becomes part of the SQL text. After assembly, a forbidden-pattern scan rejects any non-SELECT construct before execution.</a:t>
             </a:r>
           </a:p>
         </p:txBody>
@@ -23032,7 +24128,7 @@
 </p:sld>
 </file>
 
-<file path=ppt/slides/slide30.xml><?xml version="1.0" encoding="utf-8"?>
+<file path=ppt/slides/slide31.xml><?xml version="1.0" encoding="utf-8"?>
 <p:sld xmlns:a="http://schemas.openxmlformats.org/drawingml/2006/main" xmlns:p="http://schemas.openxmlformats.org/presentationml/2006/main" xmlns:r="http://schemas.openxmlformats.org/officeDocument/2006/relationships">
   <p:cSld>
     <p:spTree>
@@ -23382,7 +24478,7 @@
               </a:defRPr>
             </a:pPr>
             <a:r>
-              <a:t>30</a:t>
+              <a:t>31</a:t>
             </a:r>
           </a:p>
         </p:txBody>

--- a/docs/scripts/Md_Riaz_Final_Defense_0322310105101024.pptx
+++ b/docs/scripts/Md_Riaz_Final_Defense_0322310105101024.pptx
@@ -5695,7 +5695,7 @@
               </a:defRPr>
             </a:pPr>
             <a:r>
-              <a:t>Stage 1 of 5</a:t>
+              <a:t>Stage 1 of 7</a:t>
             </a:r>
           </a:p>
         </p:txBody>
@@ -6999,7 +6999,7 @@
               </a:defRPr>
             </a:pPr>
             <a:r>
-              <a:t>Stage 1 to 2</a:t>
+              <a:t>Stages 1 and 2 of 7</a:t>
             </a:r>
           </a:p>
         </p:txBody>
@@ -8185,7 +8185,7 @@
               </a:defRPr>
             </a:pPr>
             <a:r>
-              <a:t>Stage 2 of 5</a:t>
+              <a:t>Stage 3 of 7</a:t>
             </a:r>
           </a:p>
         </p:txBody>
@@ -9493,7 +9493,7 @@
               </a:defRPr>
             </a:pPr>
             <a:r>
-              <a:t>Stage 3 of 5</a:t>
+              <a:t>Stage 5 of 7</a:t>
             </a:r>
           </a:p>
         </p:txBody>
@@ -10715,7 +10715,7 @@
               </a:defRPr>
             </a:pPr>
             <a:r>
-              <a:t>Stages 1 to 3</a:t>
+              <a:t>Stages 1 to 5 of 7</a:t>
             </a:r>
           </a:p>
         </p:txBody>
@@ -14942,7 +14942,7 @@
                 </a:solidFill>
                 <a:latin typeface="Times New Roman"/>
               </a:rPr>
-              <a:t>5. AEGIS Architecture (Stages 1-5)</a:t>
+              <a:t>5. AEGIS Architecture (Stages 1-7)</a:t>
             </a:r>
           </a:p>
           <a:p>
@@ -19627,7 +19627,7 @@
               </a:spcAft>
             </a:pPr>
             <a:r>
-              <a:rPr b="1" i="0" sz="1550">
+              <a:rPr b="1" i="0" sz="1400">
                 <a:solidFill>
                   <a:srgbClr val="003366"/>
                 </a:solidFill>
@@ -19649,7 +19649,7 @@
               </a:spcAft>
             </a:pPr>
             <a:r>
-              <a:rPr b="0" i="0" sz="1250">
+              <a:rPr b="0" i="0" sz="1100">
                 <a:solidFill>
                   <a:srgbClr val="333333"/>
                 </a:solidFill>
@@ -19671,7 +19671,7 @@
               </a:spcAft>
             </a:pPr>
             <a:r>
-              <a:rPr b="1" i="0" sz="1250">
+              <a:rPr b="1" i="0" sz="1100">
                 <a:solidFill>
                   <a:srgbClr val="003366"/>
                 </a:solidFill>
@@ -19680,7 +19680,7 @@
               <a:t>- Because the layer is per-deployment, cross-domain benchmarks such as Spider and BIRD do not apply:</a:t>
             </a:r>
             <a:r>
-              <a:rPr b="0" i="0" sz="1250">
+              <a:rPr b="0" i="0" sz="1100">
                 <a:solidFill>
                   <a:srgbClr val="333333"/>
                 </a:solidFill>
@@ -19702,7 +19702,7 @@
               </a:spcAft>
             </a:pPr>
             <a:r>
-              <a:rPr b="1" i="0" sz="1550">
+              <a:rPr b="1" i="0" sz="1400">
                 <a:solidFill>
                   <a:srgbClr val="003366"/>
                 </a:solidFill>
@@ -19724,7 +19724,7 @@
               </a:spcAft>
             </a:pPr>
             <a:r>
-              <a:rPr b="0" i="0" sz="1250">
+              <a:rPr b="0" i="0" sz="1100">
                 <a:solidFill>
                   <a:srgbClr val="333333"/>
                 </a:solidFill>
@@ -19746,13 +19746,22 @@
               </a:spcAft>
             </a:pPr>
             <a:r>
-              <a:rPr b="0" i="0" sz="1250">
+              <a:rPr b="1" i="0" sz="1100">
+                <a:solidFill>
+                  <a:srgbClr val="003366"/>
+                </a:solidFill>
+                <a:latin typeface="Times New Roman"/>
+              </a:rPr>
+              <a:t>- The seeded catalogue is small:</a:t>
+            </a:r>
+            <a:r>
+              <a:rPr b="0" i="0" sz="1100">
                 <a:solidFill>
                   <a:srgbClr val="333333"/>
                 </a:solidFill>
                 <a:latin typeface="Times New Roman"/>
               </a:rPr>
-              <a:t>- Three of the 75 boundary questions were not declined. One was a malformed model reply; the other two are the same question phrased twice, asking to compare two named carriers. The model flagged "DHL" and "FedEx" as unmapped, and AEGIS answered by shipping method anyway — by design, because a model-reported gap is treated as evidence, not a verdict. That choice keeps false refusals low and costs exactly this.</a:t>
+              <a:t> 17 products in 8 categories against 2,500 orders. Order-side reports are tested at realistic volume, but bestsellers and revenue-by-category agree with nopCommerce over short lists. Same compiled SQL, weaker test.</a:t>
             </a:r>
           </a:p>
           <a:p>
@@ -19768,13 +19777,13 @@
               </a:spcAft>
             </a:pPr>
             <a:r>
-              <a:rPr b="0" i="0" sz="1250">
+              <a:rPr b="0" i="0" sz="1100">
                 <a:solidFill>
                   <a:srgbClr val="333333"/>
                 </a:solidFill>
                 <a:latin typeface="Times New Roman"/>
               </a:rPr>
-              <a:t>- The gateway used for intent extraction resolves a model alias per request, so the run is not pinned to a single model. Each result row records what actually served it.</a:t>
+              <a:t>- Three of the 75 boundary questions were not declined. One was a malformed model reply; the other two are the same question phrased twice, asking to compare two named carriers. The model flagged "DHL" and "FedEx" as unmapped, and AEGIS answered by shipping method anyway — by design, because a model-reported gap is treated as evidence, not a verdict. That choice keeps false refusals low and costs exactly this.</a:t>
             </a:r>
           </a:p>
           <a:p>
@@ -19790,13 +19799,13 @@
               </a:spcAft>
             </a:pPr>
             <a:r>
-              <a:rPr b="0" i="0" sz="1250">
+              <a:rPr b="0" i="0" sz="1100">
                 <a:solidFill>
                   <a:srgbClr val="333333"/>
                 </a:solidFill>
                 <a:latin typeface="Times New Roman"/>
               </a:rPr>
-              <a:t>- Five reports differ from the platform's own output in row count or label column. No report differs in value.</a:t>
+              <a:t>- The gateway used for intent extraction resolves a model alias per request, so the run is not pinned to a single model. Each result row records what actually served it.</a:t>
             </a:r>
           </a:p>
           <a:p>
@@ -19812,7 +19821,29 @@
               </a:spcAft>
             </a:pPr>
             <a:r>
-              <a:rPr b="0" i="0" sz="1250">
+              <a:rPr b="0" i="0" sz="1100">
+                <a:solidFill>
+                  <a:srgbClr val="333333"/>
+                </a:solidFill>
+                <a:latin typeface="Times New Roman"/>
+              </a:rPr>
+              <a:t>- Five reports differ from the platform's own output in row count or label column. No report differs in value.</a:t>
+            </a:r>
+          </a:p>
+          <a:p>
+            <a:pPr marL="256032" indent="-256032">
+              <a:lnSpc>
+                <a:spcPct val="108000"/>
+              </a:lnSpc>
+              <a:spcBef>
+                <a:spcPts val="300"/>
+              </a:spcBef>
+              <a:spcAft>
+                <a:spcPts val="700"/>
+              </a:spcAft>
+            </a:pPr>
+            <a:r>
+              <a:rPr b="0" i="0" sz="1100">
                 <a:solidFill>
                   <a:srgbClr val="333333"/>
                 </a:solidFill>
@@ -19834,7 +19865,7 @@
               </a:spcAft>
             </a:pPr>
             <a:r>
-              <a:rPr b="1" i="0" sz="1550">
+              <a:rPr b="1" i="0" sz="1400">
                 <a:solidFill>
                   <a:srgbClr val="003366"/>
                 </a:solidFill>
@@ -19856,7 +19887,7 @@
               </a:spcAft>
             </a:pPr>
             <a:r>
-              <a:rPr b="0" i="0" sz="1250">
+              <a:rPr b="0" i="0" sz="1100">
                 <a:solidFill>
                   <a:srgbClr val="333333"/>
                 </a:solidFill>

--- a/docs/scripts/Md_Riaz_Final_Defense_0322310105101024.pptx
+++ b/docs/scripts/Md_Riaz_Final_Defense_0322310105101024.pptx
@@ -3941,7 +3941,7 @@
         <p:spPr>
           <a:xfrm>
             <a:off x="1523939" y="2331720"/>
-            <a:ext cx="9144000" cy="960120"/>
+            <a:ext cx="9144000" cy="1097280"/>
           </a:xfrm>
         </p:spPr>
         <p:txBody>
@@ -3960,6 +3960,7 @@
               </a:defRPr>
             </a:pPr>
             <a:r>
+              <a:rPr/>
               <a:t>AEGIS: A Constraint-Based Architecture for Safe</a:t>
             </a:r>
           </a:p>
@@ -3976,6 +3977,7 @@
               </a:defRPr>
             </a:pPr>
             <a:r>
+              <a:rPr/>
               <a:t>LLM-Assisted Natural Language Analytics</a:t>
             </a:r>
           </a:p>
@@ -4030,8 +4032,8 @@
         </p:nvSpPr>
         <p:spPr>
           <a:xfrm>
-            <a:off x="3282222" y="5413248"/>
-            <a:ext cx="5627553" cy="530352"/>
+            <a:off x="3282222" y="5504688"/>
+            <a:ext cx="5627553" cy="420624"/>
           </a:xfrm>
           <a:prstGeom prst="rect">
             <a:avLst/>
@@ -4050,6 +4052,7 @@
               </a:defRPr>
             </a:pPr>
             <a:r>
+              <a:rPr/>
               <a:t>Department of Computer Science &amp; Engineering</a:t>
             </a:r>
           </a:p>
@@ -4060,6 +4063,7 @@
               </a:defRPr>
             </a:pPr>
             <a:r>
+              <a:rPr/>
               <a:t>Pundra University of Science &amp; Technology, Bogura - 5800</a:t>
             </a:r>
           </a:p>
@@ -4093,7 +4097,8 @@
               </a:defRPr>
             </a:pPr>
             <a:r>
-              <a:t>Final Defense Presentation on</a:t>
+              <a:rPr/>
+              <a:t>Final Defense Presentation</a:t>
             </a:r>
           </a:p>
         </p:txBody>
@@ -4106,7 +4111,7 @@
         </p:nvSpPr>
         <p:spPr>
           <a:xfrm>
-            <a:off x="1527048" y="3730752"/>
+            <a:off x="1527048" y="3712463"/>
             <a:ext cx="3886200" cy="365760"/>
           </a:xfrm>
           <a:prstGeom prst="rect">
@@ -4126,6 +4131,7 @@
               </a:defRPr>
             </a:pPr>
             <a:r>
+              <a:rPr/>
               <a:t>Presented By</a:t>
             </a:r>
           </a:p>
@@ -4140,7 +4146,7 @@
         <p:spPr>
           <a:xfrm>
             <a:off x="1527048" y="4041648"/>
-            <a:ext cx="3886200" cy="1143000"/>
+            <a:ext cx="3886200" cy="1463040"/>
           </a:xfrm>
           <a:prstGeom prst="rect">
             <a:avLst/>
@@ -4155,78 +4161,84 @@
           <a:p>
             <a:pPr>
               <a:lnSpc>
-                <a:spcPct val="112000"/>
+                <a:spcPct val="105000"/>
               </a:lnSpc>
               <a:defRPr sz="2000" b="1">
                 <a:latin typeface="Times New Roman"/>
               </a:defRPr>
             </a:pPr>
             <a:r>
+              <a:rPr/>
               <a:t>Md. Riaz</a:t>
             </a:r>
           </a:p>
           <a:p>
             <a:pPr>
               <a:lnSpc>
-                <a:spcPct val="112000"/>
+                <a:spcPct val="105000"/>
               </a:lnSpc>
-              <a:defRPr sz="1600" b="0">
+              <a:defRPr sz="1400" b="0">
                 <a:latin typeface="Times New Roman"/>
               </a:defRPr>
             </a:pPr>
             <a:r>
+              <a:rPr/>
               <a:t>Program: B.Sc. in CSE (Diploma)</a:t>
             </a:r>
           </a:p>
           <a:p>
             <a:pPr>
               <a:lnSpc>
-                <a:spcPct val="112000"/>
+                <a:spcPct val="105000"/>
               </a:lnSpc>
-              <a:defRPr sz="1600" b="0">
+              <a:defRPr sz="1400" b="0">
                 <a:latin typeface="Times New Roman"/>
               </a:defRPr>
             </a:pPr>
             <a:r>
+              <a:rPr/>
               <a:t>ID: 0322310105101024</a:t>
             </a:r>
           </a:p>
           <a:p>
             <a:pPr>
               <a:lnSpc>
-                <a:spcPct val="112000"/>
+                <a:spcPct val="105000"/>
               </a:lnSpc>
-              <a:defRPr sz="1600" b="0">
+              <a:defRPr sz="1400" b="0">
                 <a:latin typeface="Times New Roman"/>
               </a:defRPr>
             </a:pPr>
             <a:r>
+              <a:rPr/>
               <a:t>Batch: 16th</a:t>
             </a:r>
           </a:p>
           <a:p>
             <a:pPr>
               <a:lnSpc>
-                <a:spcPct val="112000"/>
+                <a:spcPct val="105000"/>
               </a:lnSpc>
-              <a:defRPr sz="1600" b="0">
+              <a:defRPr sz="1400" b="0">
                 <a:latin typeface="Times New Roman"/>
               </a:defRPr>
             </a:pPr>
             <a:r>
+              <a:rPr/>
               <a:t>8th Semester / 4th Year</a:t>
             </a:r>
           </a:p>
           <a:p>
             <a:pPr>
               <a:lnSpc>
-                <a:spcPct val="112000"/>
+                <a:spcPct val="105000"/>
               </a:lnSpc>
-              <a:defRPr sz="1600" b="0">
+              <a:defRPr sz="1400" b="0">
                 <a:latin typeface="Times New Roman"/>
               </a:defRPr>
             </a:pPr>
             <a:r>
+              <a:rPr/>
               <a:t>Session: Spring - 2023</a:t>
             </a:r>
           </a:p>
@@ -4240,7 +4252,7 @@
         </p:nvSpPr>
         <p:spPr>
           <a:xfrm>
-            <a:off x="7269480" y="3767328"/>
+            <a:off x="7269480" y="3712463"/>
             <a:ext cx="3886200" cy="365760"/>
           </a:xfrm>
           <a:prstGeom prst="rect">
@@ -4260,6 +4272,7 @@
               </a:defRPr>
             </a:pPr>
             <a:r>
+              <a:rPr/>
               <a:t>Supervised By</a:t>
             </a:r>
           </a:p>
@@ -4273,8 +4286,8 @@
         </p:nvSpPr>
         <p:spPr>
           <a:xfrm>
-            <a:off x="7269480" y="4133087"/>
-            <a:ext cx="3886200" cy="1143000"/>
+            <a:off x="7269480" y="4041648"/>
+            <a:ext cx="3886200" cy="1463040"/>
           </a:xfrm>
           <a:prstGeom prst="rect">
             <a:avLst/>
@@ -4289,39 +4302,42 @@
           <a:p>
             <a:pPr>
               <a:lnSpc>
-                <a:spcPct val="112000"/>
+                <a:spcPct val="105000"/>
               </a:lnSpc>
               <a:defRPr sz="2000" b="1">
                 <a:latin typeface="Times New Roman"/>
               </a:defRPr>
             </a:pPr>
             <a:r>
+              <a:rPr/>
               <a:t>Mst. Sahela Rahman</a:t>
             </a:r>
           </a:p>
           <a:p>
             <a:pPr>
               <a:lnSpc>
-                <a:spcPct val="112000"/>
+                <a:spcPct val="105000"/>
               </a:lnSpc>
-              <a:defRPr sz="1600" b="0">
+              <a:defRPr sz="1400" b="0">
                 <a:latin typeface="Times New Roman"/>
               </a:defRPr>
             </a:pPr>
             <a:r>
+              <a:rPr/>
               <a:t>Lecturer</a:t>
             </a:r>
           </a:p>
           <a:p>
             <a:pPr>
               <a:lnSpc>
-                <a:spcPct val="112000"/>
+                <a:spcPct val="105000"/>
               </a:lnSpc>
-              <a:defRPr sz="1600" b="0">
+              <a:defRPr sz="1400" b="0">
                 <a:latin typeface="Times New Roman"/>
               </a:defRPr>
             </a:pPr>
             <a:r>
+              <a:rPr/>
               <a:t>Dept. of CSE, PUB</a:t>
             </a:r>
           </a:p>
@@ -4706,8 +4722,8 @@
         </p:blipFill>
         <p:spPr>
           <a:xfrm>
-            <a:off x="1758261" y="1097280"/>
-            <a:ext cx="8699862" cy="5074920"/>
+            <a:off x="1758261" y="1572768"/>
+            <a:ext cx="8699862" cy="4663440"/>
           </a:xfrm>
           <a:prstGeom prst="rect">
             <a:avLst/>
@@ -5708,8 +5724,8 @@
         </p:nvSpPr>
         <p:spPr>
           <a:xfrm>
-            <a:off x="658368" y="1335024"/>
-            <a:ext cx="2880360" cy="566928"/>
+            <a:off x="658368" y="1572768"/>
+            <a:ext cx="2880360" cy="547378"/>
           </a:xfrm>
           <a:prstGeom prst="roundRect">
             <a:avLst/>
@@ -5750,6 +5766,7 @@
               </a:defRPr>
             </a:pPr>
             <a:r>
+              <a:rPr/>
               <a:t>1. User asks a business question</a:t>
             </a:r>
           </a:p>
@@ -5763,8 +5780,8 @@
         </p:nvSpPr>
         <p:spPr>
           <a:xfrm>
-            <a:off x="822960" y="2048256"/>
-            <a:ext cx="2651760" cy="786384"/>
+            <a:off x="822960" y="2261405"/>
+            <a:ext cx="2651760" cy="759267"/>
           </a:xfrm>
           <a:prstGeom prst="rect">
             <a:avLst/>
@@ -5830,8 +5847,8 @@
         </p:nvSpPr>
         <p:spPr>
           <a:xfrm>
-            <a:off x="3886200" y="1335024"/>
-            <a:ext cx="3337560" cy="566928"/>
+            <a:off x="3886200" y="1572768"/>
+            <a:ext cx="3337560" cy="547378"/>
           </a:xfrm>
           <a:prstGeom prst="roundRect">
             <a:avLst/>
@@ -5872,6 +5889,7 @@
               </a:defRPr>
             </a:pPr>
             <a:r>
+              <a:rPr/>
               <a:t>2. Prompt exposes approved vocabulary</a:t>
             </a:r>
           </a:p>
@@ -5885,8 +5903,8 @@
         </p:nvSpPr>
         <p:spPr>
           <a:xfrm>
-            <a:off x="3950208" y="2011680"/>
-            <a:ext cx="3154680" cy="1298448"/>
+            <a:off x="3950208" y="2226091"/>
+            <a:ext cx="3154680" cy="1253673"/>
           </a:xfrm>
           <a:prstGeom prst="rect">
             <a:avLst/>
@@ -6023,8 +6041,8 @@
         </p:nvSpPr>
         <p:spPr>
           <a:xfrm>
-            <a:off x="7882127" y="1335024"/>
-            <a:ext cx="3200400" cy="566928"/>
+            <a:off x="7882127" y="1572768"/>
+            <a:ext cx="3200400" cy="547378"/>
           </a:xfrm>
           <a:prstGeom prst="roundRect">
             <a:avLst/>
@@ -6065,6 +6083,7 @@
               </a:defRPr>
             </a:pPr>
             <a:r>
+              <a:rPr/>
               <a:t>3. LLM returns an Intent Object</a:t>
             </a:r>
           </a:p>
@@ -6078,8 +6097,8 @@
         </p:nvSpPr>
         <p:spPr>
           <a:xfrm>
-            <a:off x="7973568" y="2011680"/>
-            <a:ext cx="2971800" cy="1536192"/>
+            <a:off x="7973568" y="2226091"/>
+            <a:ext cx="2971800" cy="1483219"/>
           </a:xfrm>
           <a:prstGeom prst="rect">
             <a:avLst/>
@@ -6123,6 +6142,7 @@
               </a:defRPr>
             </a:pPr>
             <a:r>
+              <a:rPr/>
               <a:t>{</a:t>
             </a:r>
           </a:p>
@@ -6139,6 +6159,7 @@
               </a:defRPr>
             </a:pPr>
             <a:r>
+              <a:rPr/>
               <a:t>  "intent_class": "segment",</a:t>
             </a:r>
           </a:p>
@@ -6155,6 +6176,7 @@
               </a:defRPr>
             </a:pPr>
             <a:r>
+              <a:rPr/>
               <a:t>  "metric_term": "avg_order_value",</a:t>
             </a:r>
           </a:p>
@@ -6171,6 +6193,7 @@
               </a:defRPr>
             </a:pPr>
             <a:r>
+              <a:rPr/>
               <a:t>  "dimension_term": "order_status",</a:t>
             </a:r>
           </a:p>
@@ -6187,6 +6210,7 @@
               </a:defRPr>
             </a:pPr>
             <a:r>
+              <a:rPr/>
               <a:t>  "output_shape": "table"</a:t>
             </a:r>
           </a:p>
@@ -6203,6 +6227,7 @@
               </a:defRPr>
             </a:pPr>
             <a:r>
+              <a:rPr/>
               <a:t>}</a:t>
             </a:r>
           </a:p>
@@ -6287,8 +6312,8 @@
           <p:nvPr/>
         </p:nvGraphicFramePr>
         <p:xfrm>
-          <a:off x="804672" y="4279392"/>
-          <a:ext cx="10286999" cy="1298448"/>
+          <a:off x="804672" y="4415606"/>
+          <a:ext cx="10286999" cy="1253673"/>
         </p:xfrm>
         <a:graphic>
           <a:graphicData uri="http://schemas.openxmlformats.org/drawingml/2006/table">
@@ -7012,7 +7037,7 @@
         </p:nvSpPr>
         <p:spPr>
           <a:xfrm>
-            <a:off x="658368" y="1280160"/>
+            <a:off x="658368" y="1572768"/>
             <a:ext cx="5029200" cy="457200"/>
           </a:xfrm>
           <a:prstGeom prst="roundRect">
@@ -7054,6 +7079,7 @@
               </a:defRPr>
             </a:pPr>
             <a:r>
+              <a:rPr/>
               <a:t>IntentObject  (aegis/server/models.py)</a:t>
             </a:r>
           </a:p>
@@ -7067,7 +7093,7 @@
         </p:nvSpPr>
         <p:spPr>
           <a:xfrm>
-            <a:off x="713232" y="1828800"/>
+            <a:off x="713232" y="2121408"/>
             <a:ext cx="4937760" cy="2514600"/>
           </a:xfrm>
           <a:prstGeom prst="rect">
@@ -7112,6 +7138,7 @@
               </a:defRPr>
             </a:pPr>
             <a:r>
+              <a:rPr/>
               <a:t>class IntentObject(BaseModel):</a:t>
             </a:r>
           </a:p>
@@ -7128,6 +7155,7 @@
               </a:defRPr>
             </a:pPr>
             <a:r>
+              <a:rPr/>
               <a:t>    intent_class:    IntentClass      # required, 11-value enum</a:t>
             </a:r>
           </a:p>
@@ -7144,6 +7172,7 @@
               </a:defRPr>
             </a:pPr>
             <a:r>
+              <a:rPr/>
               <a:t>    metric_term:     Optional[str]    # an approved metric id</a:t>
             </a:r>
           </a:p>
@@ -7160,6 +7189,7 @@
               </a:defRPr>
             </a:pPr>
             <a:r>
+              <a:rPr/>
               <a:t>    dimension_term:  Optional[str]    # an approved dimension id</a:t>
             </a:r>
           </a:p>
@@ -7176,6 +7206,7 @@
               </a:defRPr>
             </a:pPr>
             <a:r>
+              <a:rPr/>
               <a:t>    time_term:       Optional[str]    # a phrase, not a date</a:t>
             </a:r>
           </a:p>
@@ -7192,6 +7223,7 @@
               </a:defRPr>
             </a:pPr>
             <a:r>
+              <a:rPr/>
               <a:t>    filters:         List[Filter]     # field / operator / value</a:t>
             </a:r>
           </a:p>
@@ -7208,6 +7240,7 @@
               </a:defRPr>
             </a:pPr>
             <a:r>
+              <a:rPr/>
               <a:t>    limit:           Optional[int]</a:t>
             </a:r>
           </a:p>
@@ -7224,6 +7257,7 @@
               </a:defRPr>
             </a:pPr>
             <a:r>
+              <a:rPr/>
               <a:t>    confidence:      Confidence = LOW # absence is not confidence</a:t>
             </a:r>
           </a:p>
@@ -7240,6 +7274,7 @@
               </a:defRPr>
             </a:pPr>
             <a:r>
+              <a:rPr/>
               <a:t>    unmapped_terms:  List[str]        # what it could not account for</a:t>
             </a:r>
           </a:p>
@@ -7269,6 +7304,7 @@
               </a:defRPr>
             </a:pPr>
             <a:r>
+              <a:rPr/>
               <a:t># There is no sql field. The type cannot express one.</a:t>
             </a:r>
           </a:p>
@@ -7282,7 +7318,7 @@
         </p:nvSpPr>
         <p:spPr>
           <a:xfrm>
-            <a:off x="5989320" y="1280160"/>
+            <a:off x="5989320" y="1572768"/>
             <a:ext cx="5212080" cy="457200"/>
           </a:xfrm>
           <a:prstGeom prst="roundRect">
@@ -7324,6 +7360,7 @@
               </a:defRPr>
             </a:pPr>
             <a:r>
+              <a:rPr/>
               <a:t>intent_class selects the compilation path</a:t>
             </a:r>
           </a:p>
@@ -7338,7 +7375,7 @@
           <p:nvPr/>
         </p:nvGraphicFramePr>
         <p:xfrm>
-          <a:off x="6035040" y="1828800"/>
+          <a:off x="6035040" y="2121408"/>
           <a:ext cx="5166360" cy="2514600"/>
         </p:xfrm>
         <a:graphic>
@@ -7691,7 +7728,7 @@
         </p:nvSpPr>
         <p:spPr>
           <a:xfrm>
-            <a:off x="777240" y="4526280"/>
+            <a:off x="777240" y="4818888"/>
             <a:ext cx="10424160" cy="548640"/>
           </a:xfrm>
           <a:prstGeom prst="rect">
@@ -8198,8 +8235,8 @@
         </p:nvSpPr>
         <p:spPr>
           <a:xfrm>
-            <a:off x="749808" y="1353312"/>
-            <a:ext cx="2834640" cy="841248"/>
+            <a:off x="749808" y="1572768"/>
+            <a:ext cx="2834640" cy="807021"/>
           </a:xfrm>
           <a:prstGeom prst="roundRect">
             <a:avLst/>
@@ -8240,14 +8277,17 @@
               </a:defRPr>
             </a:pPr>
             <a:r>
+              <a:rPr/>
               <a:t>Intent Object</a:t>
             </a:r>
             <a:br/>
             <a:r>
+              <a:rPr/>
               <a:t>metric_term=avg_order_value</a:t>
             </a:r>
             <a:br/>
             <a:r>
+              <a:rPr/>
               <a:t>dimension_term=order_status</a:t>
             </a:r>
           </a:p>
@@ -8261,8 +8301,8 @@
         </p:nvSpPr>
         <p:spPr>
           <a:xfrm>
-            <a:off x="4572000" y="1353312"/>
-            <a:ext cx="2834640" cy="841248"/>
+            <a:off x="4572000" y="1572768"/>
+            <a:ext cx="2834640" cy="807021"/>
           </a:xfrm>
           <a:prstGeom prst="roundRect">
             <a:avLst/>
@@ -8303,10 +8343,12 @@
               </a:defRPr>
             </a:pPr>
             <a:r>
+              <a:rPr/>
               <a:t>Lookup in semantic layer</a:t>
             </a:r>
             <a:br/>
             <a:r>
+              <a:rPr/>
               <a:t>METRICS + DIMENSIONS</a:t>
             </a:r>
           </a:p>
@@ -8320,8 +8362,8 @@
         </p:nvSpPr>
         <p:spPr>
           <a:xfrm>
-            <a:off x="8339327" y="1353312"/>
-            <a:ext cx="2331720" cy="841248"/>
+            <a:off x="8339327" y="1572768"/>
+            <a:ext cx="2331720" cy="807021"/>
           </a:xfrm>
           <a:prstGeom prst="roundRect">
             <a:avLst/>
@@ -8362,14 +8404,17 @@
               </a:defRPr>
             </a:pPr>
             <a:r>
+              <a:rPr/>
               <a:t>Analysis Plan</a:t>
             </a:r>
             <a:br/>
             <a:r>
+              <a:rPr/>
               <a:t>pattern=segment</a:t>
             </a:r>
             <a:br/>
             <a:r>
+              <a:rPr/>
               <a:t>shape=table</a:t>
             </a:r>
           </a:p>
@@ -8454,8 +8499,8 @@
           <p:nvPr/>
         </p:nvGraphicFramePr>
         <p:xfrm>
-          <a:off x="685800" y="2606040"/>
-          <a:ext cx="10835640" cy="2148840"/>
+          <a:off x="685800" y="2774528"/>
+          <a:ext cx="10835640" cy="2061413"/>
         </p:xfrm>
         <a:graphic>
           <a:graphicData uri="http://schemas.openxmlformats.org/drawingml/2006/table">
@@ -8990,8 +9035,8 @@
         </p:nvSpPr>
         <p:spPr>
           <a:xfrm>
-            <a:off x="868680" y="4892040"/>
-            <a:ext cx="10241280" cy="731520"/>
+            <a:off x="868680" y="4967522"/>
+            <a:ext cx="10241280" cy="701757"/>
           </a:xfrm>
           <a:prstGeom prst="rect">
             <a:avLst/>
@@ -9506,8 +9551,8 @@
         </p:nvSpPr>
         <p:spPr>
           <a:xfrm>
-            <a:off x="658368" y="1298448"/>
-            <a:ext cx="3154680" cy="530352"/>
+            <a:off x="713232" y="1572768"/>
+            <a:ext cx="3886200" cy="516516"/>
           </a:xfrm>
           <a:prstGeom prst="roundRect">
             <a:avLst/>
@@ -9548,6 +9593,7 @@
               </a:defRPr>
             </a:pPr>
             <a:r>
+              <a:rPr/>
               <a:t>Compiler template</a:t>
             </a:r>
           </a:p>
@@ -9561,8 +9607,8 @@
         </p:nvSpPr>
         <p:spPr>
           <a:xfrm>
-            <a:off x="713232" y="1993392"/>
-            <a:ext cx="4526280" cy="2359152"/>
+            <a:off x="713232" y="2249583"/>
+            <a:ext cx="3886200" cy="2297608"/>
           </a:xfrm>
           <a:prstGeom prst="rect">
             <a:avLst/>
@@ -9606,6 +9652,7 @@
               </a:defRPr>
             </a:pPr>
             <a:r>
+              <a:rPr/>
               <a:t>SELECT {dimension_expr} AS label,</a:t>
             </a:r>
           </a:p>
@@ -9622,6 +9669,7 @@
               </a:defRPr>
             </a:pPr>
             <a:r>
+              <a:rPr/>
               <a:t>       {metric_expr} AS value</a:t>
             </a:r>
           </a:p>
@@ -9638,6 +9686,7 @@
               </a:defRPr>
             </a:pPr>
             <a:r>
+              <a:rPr/>
               <a:t>FROM {base_table}</a:t>
             </a:r>
           </a:p>
@@ -9654,6 +9703,7 @@
               </a:defRPr>
             </a:pPr>
             <a:r>
+              <a:rPr/>
               <a:t>{join_clauses}</a:t>
             </a:r>
           </a:p>
@@ -9670,6 +9720,7 @@
               </a:defRPr>
             </a:pPr>
             <a:r>
+              <a:rPr/>
               <a:t>WHERE {mandatory_predicates}</a:t>
             </a:r>
           </a:p>
@@ -9686,6 +9737,7 @@
               </a:defRPr>
             </a:pPr>
             <a:r>
+              <a:rPr/>
               <a:t>GROUP BY {dimension_group_expr}</a:t>
             </a:r>
           </a:p>
@@ -9702,6 +9754,7 @@
               </a:defRPr>
             </a:pPr>
             <a:r>
+              <a:rPr/>
               <a:t>ORDER BY value DESC;</a:t>
             </a:r>
           </a:p>
@@ -9715,8 +9768,8 @@
         </p:nvSpPr>
         <p:spPr>
           <a:xfrm>
-            <a:off x="5596128" y="1298448"/>
-            <a:ext cx="2606040" cy="530352"/>
+            <a:off x="4873752" y="1572768"/>
+            <a:ext cx="2331720" cy="516516"/>
           </a:xfrm>
           <a:prstGeom prst="roundRect">
             <a:avLst/>
@@ -9757,6 +9810,7 @@
               </a:defRPr>
             </a:pPr>
             <a:r>
+              <a:rPr/>
               <a:t>Filled from semantic layer</a:t>
             </a:r>
           </a:p>
@@ -9770,8 +9824,8 @@
         </p:nvSpPr>
         <p:spPr>
           <a:xfrm>
-            <a:off x="5623560" y="1938528"/>
-            <a:ext cx="2697480" cy="1965960"/>
+            <a:off x="4873752" y="2196150"/>
+            <a:ext cx="2331720" cy="1914674"/>
           </a:xfrm>
           <a:prstGeom prst="rect">
             <a:avLst/>
@@ -9948,8 +10002,8 @@
         </p:nvSpPr>
         <p:spPr>
           <a:xfrm>
-            <a:off x="8613648" y="1298448"/>
-            <a:ext cx="2560320" cy="530352"/>
+            <a:off x="7406640" y="1572768"/>
+            <a:ext cx="4114800" cy="516516"/>
           </a:xfrm>
           <a:prstGeom prst="roundRect">
             <a:avLst/>
@@ -9990,6 +10044,7 @@
               </a:defRPr>
             </a:pPr>
             <a:r>
+              <a:rPr/>
               <a:t>Compiled safe SELECT</a:t>
             </a:r>
           </a:p>
@@ -10003,8 +10058,8 @@
         </p:nvSpPr>
         <p:spPr>
           <a:xfrm>
-            <a:off x="8394192" y="1938528"/>
-            <a:ext cx="2880360" cy="2651760"/>
+            <a:off x="7406640" y="2196150"/>
+            <a:ext cx="4114800" cy="2582583"/>
           </a:xfrm>
           <a:prstGeom prst="rect">
             <a:avLst/>
@@ -10040,7 +10095,7 @@
               <a:spcAft>
                 <a:spcPts val="100"/>
               </a:spcAft>
-              <a:defRPr sz="720">
+              <a:defRPr sz="930">
                 <a:solidFill>
                   <a:srgbClr val="505050"/>
                 </a:solidFill>
@@ -10048,6 +10103,7 @@
               </a:defRPr>
             </a:pPr>
             <a:r>
+              <a:rPr/>
               <a:t>SELECT CASE o.OrderStatusId</a:t>
             </a:r>
           </a:p>
@@ -10056,7 +10112,7 @@
               <a:spcAft>
                 <a:spcPts val="100"/>
               </a:spcAft>
-              <a:defRPr sz="720">
+              <a:defRPr sz="930">
                 <a:solidFill>
                   <a:srgbClr val="505050"/>
                 </a:solidFill>
@@ -10064,6 +10120,7 @@
               </a:defRPr>
             </a:pPr>
             <a:r>
+              <a:rPr/>
               <a:t>       WHEN 10 THEN "Pending"</a:t>
             </a:r>
           </a:p>
@@ -10072,7 +10129,7 @@
               <a:spcAft>
                 <a:spcPts val="100"/>
               </a:spcAft>
-              <a:defRPr sz="720">
+              <a:defRPr sz="930">
                 <a:solidFill>
                   <a:srgbClr val="505050"/>
                 </a:solidFill>
@@ -10080,6 +10137,7 @@
               </a:defRPr>
             </a:pPr>
             <a:r>
+              <a:rPr/>
               <a:t>       WHEN 20 THEN "Processing"</a:t>
             </a:r>
           </a:p>
@@ -10088,7 +10146,7 @@
               <a:spcAft>
                 <a:spcPts val="100"/>
               </a:spcAft>
-              <a:defRPr sz="720">
+              <a:defRPr sz="930">
                 <a:solidFill>
                   <a:srgbClr val="505050"/>
                 </a:solidFill>
@@ -10096,6 +10154,7 @@
               </a:defRPr>
             </a:pPr>
             <a:r>
+              <a:rPr/>
               <a:t>       WHEN 30 THEN "Complete"</a:t>
             </a:r>
           </a:p>
@@ -10104,7 +10163,7 @@
               <a:spcAft>
                 <a:spcPts val="100"/>
               </a:spcAft>
-              <a:defRPr sz="720">
+              <a:defRPr sz="930">
                 <a:solidFill>
                   <a:srgbClr val="505050"/>
                 </a:solidFill>
@@ -10112,6 +10171,7 @@
               </a:defRPr>
             </a:pPr>
             <a:r>
+              <a:rPr/>
               <a:t>       WHEN 40 THEN "Cancelled"</a:t>
             </a:r>
           </a:p>
@@ -10120,7 +10180,7 @@
               <a:spcAft>
                 <a:spcPts val="100"/>
               </a:spcAft>
-              <a:defRPr sz="720">
+              <a:defRPr sz="930">
                 <a:solidFill>
                   <a:srgbClr val="505050"/>
                 </a:solidFill>
@@ -10128,6 +10188,7 @@
               </a:defRPr>
             </a:pPr>
             <a:r>
+              <a:rPr/>
               <a:t>       END AS label,</a:t>
             </a:r>
           </a:p>
@@ -10136,7 +10197,7 @@
               <a:spcAft>
                 <a:spcPts val="100"/>
               </a:spcAft>
-              <a:defRPr sz="720">
+              <a:defRPr sz="930">
                 <a:solidFill>
                   <a:srgbClr val="505050"/>
                 </a:solidFill>
@@ -10144,6 +10205,7 @@
               </a:defRPr>
             </a:pPr>
             <a:r>
+              <a:rPr/>
               <a:t>       AVG(COALESCE(o.OrderTotal, 0)) AS value</a:t>
             </a:r>
           </a:p>
@@ -10152,7 +10214,7 @@
               <a:spcAft>
                 <a:spcPts val="100"/>
               </a:spcAft>
-              <a:defRPr sz="720">
+              <a:defRPr sz="930">
                 <a:solidFill>
                   <a:srgbClr val="505050"/>
                 </a:solidFill>
@@ -10160,6 +10222,7 @@
               </a:defRPr>
             </a:pPr>
             <a:r>
+              <a:rPr/>
               <a:t>FROM `Order` o</a:t>
             </a:r>
           </a:p>
@@ -10168,7 +10231,7 @@
               <a:spcAft>
                 <a:spcPts val="100"/>
               </a:spcAft>
-              <a:defRPr sz="720">
+              <a:defRPr sz="930">
                 <a:solidFill>
                   <a:srgbClr val="505050"/>
                 </a:solidFill>
@@ -10176,6 +10239,7 @@
               </a:defRPr>
             </a:pPr>
             <a:r>
+              <a:rPr/>
               <a:t>WHERE o.Deleted = 0</a:t>
             </a:r>
           </a:p>
@@ -10184,7 +10248,7 @@
               <a:spcAft>
                 <a:spcPts val="100"/>
               </a:spcAft>
-              <a:defRPr sz="720">
+              <a:defRPr sz="930">
                 <a:solidFill>
                   <a:srgbClr val="505050"/>
                 </a:solidFill>
@@ -10192,6 +10256,7 @@
               </a:defRPr>
             </a:pPr>
             <a:r>
+              <a:rPr/>
               <a:t>GROUP BY CASE o.OrderStatusId ... END</a:t>
             </a:r>
           </a:p>
@@ -10200,7 +10265,7 @@
               <a:spcAft>
                 <a:spcPts val="100"/>
               </a:spcAft>
-              <a:defRPr sz="720">
+              <a:defRPr sz="930">
                 <a:solidFill>
                   <a:srgbClr val="505050"/>
                 </a:solidFill>
@@ -10208,6 +10273,7 @@
               </a:defRPr>
             </a:pPr>
             <a:r>
+              <a:rPr/>
               <a:t>ORDER BY value DESC;</a:t>
             </a:r>
           </a:p>
@@ -10221,8 +10287,8 @@
         </p:nvSpPr>
         <p:spPr>
           <a:xfrm>
-            <a:off x="822960" y="4937760"/>
-            <a:ext cx="10378440" cy="566928"/>
+            <a:off x="822960" y="5117141"/>
+            <a:ext cx="10378440" cy="552138"/>
           </a:xfrm>
           <a:prstGeom prst="rect">
             <a:avLst/>
@@ -10728,7 +10794,7 @@
         </p:nvSpPr>
         <p:spPr>
           <a:xfrm>
-            <a:off x="658368" y="1243584"/>
+            <a:off x="658368" y="1572768"/>
             <a:ext cx="10607040" cy="420624"/>
           </a:xfrm>
           <a:prstGeom prst="roundRect">
@@ -10770,6 +10836,7 @@
               </a:defRPr>
             </a:pPr>
             <a:r>
+              <a:rPr/>
               <a:t>NQ257  "Show product revenue by category."</a:t>
             </a:r>
           </a:p>
@@ -10783,7 +10850,7 @@
         </p:nvSpPr>
         <p:spPr>
           <a:xfrm>
-            <a:off x="658368" y="1783080"/>
+            <a:off x="658368" y="2112263"/>
             <a:ext cx="3931920" cy="402336"/>
           </a:xfrm>
           <a:prstGeom prst="roundRect">
@@ -10825,6 +10892,7 @@
               </a:defRPr>
             </a:pPr>
             <a:r>
+              <a:rPr/>
               <a:t>Intent Object from the model</a:t>
             </a:r>
           </a:p>
@@ -10838,7 +10906,7 @@
         </p:nvSpPr>
         <p:spPr>
           <a:xfrm>
-            <a:off x="713232" y="2249424"/>
+            <a:off x="713232" y="2578608"/>
             <a:ext cx="3840480" cy="1143000"/>
           </a:xfrm>
           <a:prstGeom prst="rect">
@@ -10883,6 +10951,7 @@
               </a:defRPr>
             </a:pPr>
             <a:r>
+              <a:rPr/>
               <a:t>{</a:t>
             </a:r>
           </a:p>
@@ -10899,6 +10968,7 @@
               </a:defRPr>
             </a:pPr>
             <a:r>
+              <a:rPr/>
               <a:t>  "intent_class": "segment",</a:t>
             </a:r>
           </a:p>
@@ -10915,6 +10985,7 @@
               </a:defRPr>
             </a:pPr>
             <a:r>
+              <a:rPr/>
               <a:t>  "metric_term": "line_item_revenue",</a:t>
             </a:r>
           </a:p>
@@ -10931,6 +11002,7 @@
               </a:defRPr>
             </a:pPr>
             <a:r>
+              <a:rPr/>
               <a:t>  "dimension_term": "category_name"</a:t>
             </a:r>
           </a:p>
@@ -10947,6 +11019,7 @@
               </a:defRPr>
             </a:pPr>
             <a:r>
+              <a:rPr/>
               <a:t>}</a:t>
             </a:r>
           </a:p>
@@ -10960,7 +11033,7 @@
         </p:nvSpPr>
         <p:spPr>
           <a:xfrm>
-            <a:off x="658368" y="3520440"/>
+            <a:off x="658368" y="3849624"/>
             <a:ext cx="3931920" cy="402336"/>
           </a:xfrm>
           <a:prstGeom prst="roundRect">
@@ -11002,6 +11075,7 @@
               </a:defRPr>
             </a:pPr>
             <a:r>
+              <a:rPr/>
               <a:t>Join path resolved by BFS, not by the model</a:t>
             </a:r>
           </a:p>
@@ -11015,7 +11089,7 @@
         </p:nvSpPr>
         <p:spPr>
           <a:xfrm>
-            <a:off x="713232" y="3986784"/>
+            <a:off x="713232" y="4315968"/>
             <a:ext cx="3840480" cy="841248"/>
           </a:xfrm>
           <a:prstGeom prst="rect">
@@ -11060,6 +11134,7 @@
               </a:defRPr>
             </a:pPr>
             <a:r>
+              <a:rPr/>
               <a:t>Product -&gt; OrderItem -&gt; Order</a:t>
             </a:r>
           </a:p>
@@ -11076,6 +11151,7 @@
               </a:defRPr>
             </a:pPr>
             <a:r>
+              <a:rPr/>
               <a:t>   -&gt; Product_Category_Mapping</a:t>
             </a:r>
           </a:p>
@@ -11092,6 +11168,7 @@
               </a:defRPr>
             </a:pPr>
             <a:r>
+              <a:rPr/>
               <a:t>   -&gt; Category</a:t>
             </a:r>
           </a:p>
@@ -11105,7 +11182,7 @@
         </p:nvSpPr>
         <p:spPr>
           <a:xfrm>
-            <a:off x="4892040" y="1783080"/>
+            <a:off x="4892040" y="2112263"/>
             <a:ext cx="6373368" cy="402336"/>
           </a:xfrm>
           <a:prstGeom prst="roundRect">
@@ -11147,6 +11224,7 @@
               </a:defRPr>
             </a:pPr>
             <a:r>
+              <a:rPr/>
               <a:t>Compiled SQL, executed read-only</a:t>
             </a:r>
           </a:p>
@@ -11160,7 +11238,7 @@
         </p:nvSpPr>
         <p:spPr>
           <a:xfrm>
-            <a:off x="4937760" y="2249424"/>
+            <a:off x="4937760" y="2578608"/>
             <a:ext cx="6309360" cy="2578608"/>
           </a:xfrm>
           <a:prstGeom prst="rect">
@@ -11205,6 +11283,7 @@
               </a:defRPr>
             </a:pPr>
             <a:r>
+              <a:rPr/>
               <a:t>SELECT c.Name AS label, SUM(oi.PriceExclTax) AS value</a:t>
             </a:r>
           </a:p>
@@ -11221,6 +11300,7 @@
               </a:defRPr>
             </a:pPr>
             <a:r>
+              <a:rPr/>
               <a:t>FROM `Order` o</a:t>
             </a:r>
           </a:p>
@@ -11237,6 +11317,7 @@
               </a:defRPr>
             </a:pPr>
             <a:r>
+              <a:rPr/>
               <a:t>LEFT JOIN `OrderItem` oi ON o.Id = oi.OrderId</a:t>
             </a:r>
           </a:p>
@@ -11253,6 +11334,7 @@
               </a:defRPr>
             </a:pPr>
             <a:r>
+              <a:rPr/>
               <a:t>LEFT JOIN `Product` p   ON oi.ProductId = p.Id</a:t>
             </a:r>
           </a:p>
@@ -11269,6 +11351,7 @@
               </a:defRPr>
             </a:pPr>
             <a:r>
+              <a:rPr/>
               <a:t>LEFT JOIN `Product_Category_Mapping` pcm ON p.Id = pcm.ProductId</a:t>
             </a:r>
           </a:p>
@@ -11285,6 +11368,7 @@
               </a:defRPr>
             </a:pPr>
             <a:r>
+              <a:rPr/>
               <a:t>LEFT JOIN `Category` c  ON pcm.CategoryId = c.Id</a:t>
             </a:r>
           </a:p>
@@ -11301,6 +11385,7 @@
               </a:defRPr>
             </a:pPr>
             <a:r>
+              <a:rPr/>
               <a:t>WHERE 1=1</a:t>
             </a:r>
           </a:p>
@@ -11317,6 +11402,7 @@
               </a:defRPr>
             </a:pPr>
             <a:r>
+              <a:rPr/>
               <a:t>  AND o.Deleted = 0</a:t>
             </a:r>
           </a:p>
@@ -11333,6 +11419,7 @@
               </a:defRPr>
             </a:pPr>
             <a:r>
+              <a:rPr/>
               <a:t>  AND p.Deleted = 0</a:t>
             </a:r>
           </a:p>
@@ -11349,6 +11436,7 @@
               </a:defRPr>
             </a:pPr>
             <a:r>
+              <a:rPr/>
               <a:t>GROUP BY c.Name</a:t>
             </a:r>
           </a:p>
@@ -11365,6 +11453,7 @@
               </a:defRPr>
             </a:pPr>
             <a:r>
+              <a:rPr/>
               <a:t>ORDER BY value DESC</a:t>
             </a:r>
           </a:p>
@@ -11381,6 +11470,7 @@
               </a:defRPr>
             </a:pPr>
             <a:r>
+              <a:rPr/>
               <a:t>LIMIT 100</a:t>
             </a:r>
           </a:p>
@@ -11395,7 +11485,7 @@
           <p:nvPr/>
         </p:nvGraphicFramePr>
         <p:xfrm>
-          <a:off x="685800" y="4956048"/>
+          <a:off x="685800" y="5285231"/>
           <a:ext cx="10607040" cy="914400"/>
         </p:xfrm>
         <a:graphic>
@@ -12599,7 +12689,7 @@
         </p:nvSpPr>
         <p:spPr>
           <a:xfrm>
-            <a:off x="868680" y="1417320"/>
+            <a:off x="868680" y="1572768"/>
             <a:ext cx="5166360" cy="3063240"/>
           </a:xfrm>
           <a:prstGeom prst="rect">
@@ -12625,7 +12715,7 @@
               </a:spcAft>
             </a:pPr>
             <a:r>
-              <a:rPr b="1" i="0" sz="1850">
+              <a:rPr b="1" i="0" sz="1750">
                 <a:solidFill>
                   <a:srgbClr val="003366"/>
                 </a:solidFill>
@@ -12647,7 +12737,7 @@
               </a:spcAft>
             </a:pPr>
             <a:r>
-              <a:rPr b="0" i="0" sz="1550">
+              <a:rPr b="0" i="0" sz="1450">
                 <a:solidFill>
                   <a:srgbClr val="333333"/>
                 </a:solidFill>
@@ -12669,7 +12759,7 @@
               </a:spcAft>
             </a:pPr>
             <a:r>
-              <a:rPr b="0" i="0" sz="1550">
+              <a:rPr b="0" i="0" sz="1450">
                 <a:solidFill>
                   <a:srgbClr val="333333"/>
                 </a:solidFill>
@@ -12691,7 +12781,7 @@
               </a:spcAft>
             </a:pPr>
             <a:r>
-              <a:rPr b="0" i="0" sz="1550">
+              <a:rPr b="0" i="0" sz="1450">
                 <a:solidFill>
                   <a:srgbClr val="333333"/>
                 </a:solidFill>
@@ -12713,7 +12803,7 @@
               </a:spcAft>
             </a:pPr>
             <a:r>
-              <a:rPr b="0" i="0" sz="1550">
+              <a:rPr b="0" i="0" sz="1450">
                 <a:solidFill>
                   <a:srgbClr val="333333"/>
                 </a:solidFill>
@@ -12735,7 +12825,7 @@
               </a:spcAft>
             </a:pPr>
             <a:r>
-              <a:rPr b="0" i="0" sz="1550">
+              <a:rPr b="0" i="0" sz="1450">
                 <a:solidFill>
                   <a:srgbClr val="333333"/>
                 </a:solidFill>
@@ -12754,7 +12844,7 @@
         </p:nvSpPr>
         <p:spPr>
           <a:xfrm>
-            <a:off x="6355080" y="1417320"/>
+            <a:off x="6355080" y="1572768"/>
             <a:ext cx="4892040" cy="256032"/>
           </a:xfrm>
           <a:prstGeom prst="rect">
@@ -12777,6 +12867,7 @@
               </a:defRPr>
             </a:pPr>
             <a:r>
+              <a:rPr/>
               <a:t>Seeded Data Used in Live Prototype</a:t>
             </a:r>
           </a:p>
@@ -12825,7 +12916,7 @@
         </p:nvSpPr>
         <p:spPr>
           <a:xfrm>
-            <a:off x="6355080" y="1984248"/>
+            <a:off x="6355080" y="2139696"/>
             <a:ext cx="1051560" cy="406908"/>
           </a:xfrm>
           <a:prstGeom prst="rect">
@@ -12848,6 +12939,7 @@
               </a:defRPr>
             </a:pPr>
             <a:r>
+              <a:rPr/>
               <a:t>Order items</a:t>
             </a:r>
           </a:p>
@@ -12861,7 +12953,7 @@
         </p:nvSpPr>
         <p:spPr>
           <a:xfrm>
-            <a:off x="7498080" y="2002536"/>
+            <a:off x="7498080" y="2157984"/>
             <a:ext cx="3137175" cy="370332"/>
           </a:xfrm>
           <a:prstGeom prst="rect">
@@ -12906,7 +12998,7 @@
         </p:nvSpPr>
         <p:spPr>
           <a:xfrm>
-            <a:off x="10690119" y="1984248"/>
+            <a:off x="10690119" y="2139696"/>
             <a:ext cx="594360" cy="406908"/>
           </a:xfrm>
           <a:prstGeom prst="rect">
@@ -12929,6 +13021,7 @@
               </a:defRPr>
             </a:pPr>
             <a:r>
+              <a:rPr/>
               <a:t>6320</a:t>
             </a:r>
           </a:p>
@@ -12942,7 +13035,7 @@
         </p:nvSpPr>
         <p:spPr>
           <a:xfrm>
-            <a:off x="6355080" y="2574036"/>
+            <a:off x="6355080" y="2729484"/>
             <a:ext cx="1051560" cy="406908"/>
           </a:xfrm>
           <a:prstGeom prst="rect">
@@ -12965,6 +13058,7 @@
               </a:defRPr>
             </a:pPr>
             <a:r>
+              <a:rPr/>
               <a:t>Orders</a:t>
             </a:r>
           </a:p>
@@ -12978,7 +13072,7 @@
         </p:nvSpPr>
         <p:spPr>
           <a:xfrm>
-            <a:off x="7498080" y="2592324"/>
+            <a:off x="7498080" y="2747772"/>
             <a:ext cx="1240971" cy="370332"/>
           </a:xfrm>
           <a:prstGeom prst="rect">
@@ -13023,7 +13117,7 @@
         </p:nvSpPr>
         <p:spPr>
           <a:xfrm>
-            <a:off x="8793915" y="2574036"/>
+            <a:off x="8793915" y="2729484"/>
             <a:ext cx="594360" cy="406908"/>
           </a:xfrm>
           <a:prstGeom prst="rect">
@@ -13046,6 +13140,7 @@
               </a:defRPr>
             </a:pPr>
             <a:r>
+              <a:rPr/>
               <a:t>2500</a:t>
             </a:r>
           </a:p>
@@ -13059,7 +13154,7 @@
         </p:nvSpPr>
         <p:spPr>
           <a:xfrm>
-            <a:off x="6355080" y="3163824"/>
+            <a:off x="6355080" y="3319272"/>
             <a:ext cx="1051560" cy="406908"/>
           </a:xfrm>
           <a:prstGeom prst="rect">
@@ -13082,6 +13177,7 @@
               </a:defRPr>
             </a:pPr>
             <a:r>
+              <a:rPr/>
               <a:t>Customers</a:t>
             </a:r>
           </a:p>
@@ -13095,7 +13191,7 @@
         </p:nvSpPr>
         <p:spPr>
           <a:xfrm>
-            <a:off x="7498080" y="3182112"/>
+            <a:off x="7498080" y="3337560"/>
             <a:ext cx="595666" cy="370332"/>
           </a:xfrm>
           <a:prstGeom prst="rect">
@@ -13140,7 +13236,7 @@
         </p:nvSpPr>
         <p:spPr>
           <a:xfrm>
-            <a:off x="8148610" y="3163824"/>
+            <a:off x="8148610" y="3319272"/>
             <a:ext cx="594360" cy="406908"/>
           </a:xfrm>
           <a:prstGeom prst="rect">
@@ -13163,6 +13259,7 @@
               </a:defRPr>
             </a:pPr>
             <a:r>
+              <a:rPr/>
               <a:t>1200</a:t>
             </a:r>
           </a:p>
@@ -13176,7 +13273,7 @@
         </p:nvSpPr>
         <p:spPr>
           <a:xfrm>
-            <a:off x="6355080" y="3753612"/>
+            <a:off x="6355080" y="3909060"/>
             <a:ext cx="1051560" cy="406908"/>
           </a:xfrm>
           <a:prstGeom prst="rect">
@@ -13199,6 +13296,7 @@
               </a:defRPr>
             </a:pPr>
             <a:r>
+              <a:rPr/>
               <a:t>Products</a:t>
             </a:r>
           </a:p>
@@ -13212,8 +13310,8 @@
         </p:nvSpPr>
         <p:spPr>
           <a:xfrm>
-            <a:off x="7498080" y="3771900"/>
-            <a:ext cx="8438" cy="370332"/>
+            <a:off x="7498080" y="3927348"/>
+            <a:ext cx="123444" cy="370332"/>
           </a:xfrm>
           <a:prstGeom prst="rect">
             <a:avLst/>
@@ -13257,7 +13355,7 @@
         </p:nvSpPr>
         <p:spPr>
           <a:xfrm>
-            <a:off x="7561382" y="3753612"/>
+            <a:off x="7676388" y="3909060"/>
             <a:ext cx="594360" cy="406908"/>
           </a:xfrm>
           <a:prstGeom prst="rect">
@@ -13280,6 +13378,7 @@
               </a:defRPr>
             </a:pPr>
             <a:r>
+              <a:rPr/>
               <a:t>17</a:t>
             </a:r>
           </a:p>
@@ -13293,8 +13392,8 @@
         </p:nvSpPr>
         <p:spPr>
           <a:xfrm>
-            <a:off x="868680" y="4736592"/>
-            <a:ext cx="10241280" cy="914400"/>
+            <a:off x="868680" y="4892040"/>
+            <a:ext cx="10241280" cy="1234440"/>
           </a:xfrm>
           <a:prstGeom prst="rect">
             <a:avLst/>
@@ -13319,7 +13418,7 @@
               </a:spcAft>
             </a:pPr>
             <a:r>
-              <a:rPr b="1" i="0" sz="1400">
+              <a:rPr b="1" i="0" sz="1750">
                 <a:solidFill>
                   <a:srgbClr val="003366"/>
                 </a:solidFill>
@@ -13341,7 +13440,7 @@
               </a:spcAft>
             </a:pPr>
             <a:r>
-              <a:rPr b="0" i="0" sz="1100">
+              <a:rPr b="0" i="0" sz="1450">
                 <a:solidFill>
                   <a:srgbClr val="333333"/>
                 </a:solidFill>
@@ -13363,7 +13462,7 @@
               </a:spcAft>
             </a:pPr>
             <a:r>
-              <a:rPr b="0" i="0" sz="1100">
+              <a:rPr b="0" i="0" sz="1450">
                 <a:solidFill>
                   <a:srgbClr val="333333"/>
                 </a:solidFill>
@@ -13745,8 +13844,8 @@
         </p:nvSpPr>
         <p:spPr>
           <a:xfrm>
-            <a:off x="777240" y="1280160"/>
-            <a:ext cx="10515600" cy="548640"/>
+            <a:off x="777240" y="1572768"/>
+            <a:ext cx="10515600" cy="540199"/>
           </a:xfrm>
           <a:prstGeom prst="rect">
             <a:avLst/>
@@ -13791,8 +13890,8 @@
           <p:nvPr/>
         </p:nvGraphicFramePr>
         <p:xfrm>
-          <a:off x="777240" y="1920240"/>
-          <a:ext cx="10515599" cy="2331720"/>
+          <a:off x="777240" y="2203000"/>
+          <a:ext cx="10515599" cy="2295847"/>
         </p:xfrm>
         <a:graphic>
           <a:graphicData uri="http://schemas.openxmlformats.org/drawingml/2006/table">
@@ -14311,8 +14410,8 @@
         </p:nvSpPr>
         <p:spPr>
           <a:xfrm>
-            <a:off x="777240" y="4389120"/>
-            <a:ext cx="10515600" cy="1051560"/>
+            <a:off x="777240" y="4633897"/>
+            <a:ext cx="10515600" cy="1035382"/>
           </a:xfrm>
           <a:prstGeom prst="rect">
             <a:avLst/>
@@ -15468,7 +15567,7 @@
         </p:nvSpPr>
         <p:spPr>
           <a:xfrm>
-            <a:off x="777240" y="1280160"/>
+            <a:off x="777240" y="1572768"/>
             <a:ext cx="10515600" cy="411480"/>
           </a:xfrm>
           <a:prstGeom prst="rect">
@@ -15514,7 +15613,7 @@
           <p:nvPr/>
         </p:nvGraphicFramePr>
         <p:xfrm>
-          <a:off x="777240" y="1810512"/>
+          <a:off x="777240" y="2103120"/>
           <a:ext cx="10515600" cy="2377440"/>
         </p:xfrm>
         <a:graphic>
@@ -16153,7 +16252,7 @@
         </p:nvSpPr>
         <p:spPr>
           <a:xfrm>
-            <a:off x="777240" y="4343400"/>
+            <a:off x="777240" y="4636008"/>
             <a:ext cx="10515600" cy="1234440"/>
           </a:xfrm>
           <a:prstGeom prst="rect">
@@ -16583,8 +16682,8 @@
         </p:nvSpPr>
         <p:spPr>
           <a:xfrm>
-            <a:off x="777240" y="1243584"/>
-            <a:ext cx="10515600" cy="384048"/>
+            <a:off x="777240" y="1572768"/>
+            <a:ext cx="10515600" cy="378139"/>
           </a:xfrm>
           <a:prstGeom prst="rect">
             <a:avLst/>
@@ -16629,8 +16728,8 @@
           <p:nvPr/>
         </p:nvGraphicFramePr>
         <p:xfrm>
-          <a:off x="777240" y="1737360"/>
-          <a:ext cx="10515600" cy="1600200"/>
+          <a:off x="777240" y="2058947"/>
+          <a:ext cx="10515600" cy="1575581"/>
         </p:xfrm>
         <a:graphic>
           <a:graphicData uri="http://schemas.openxmlformats.org/drawingml/2006/table">
@@ -16963,8 +17062,8 @@
         </p:nvSpPr>
         <p:spPr>
           <a:xfrm>
-            <a:off x="777240" y="3493008"/>
-            <a:ext cx="10515600" cy="402336"/>
+            <a:off x="777240" y="3787585"/>
+            <a:ext cx="10515600" cy="396146"/>
           </a:xfrm>
           <a:prstGeom prst="roundRect">
             <a:avLst/>
@@ -17005,6 +17104,7 @@
               </a:defRPr>
             </a:pPr>
             <a:r>
+              <a:rPr/>
               <a:t>What answering an unanswerable question looks like</a:t>
             </a:r>
           </a:p>
@@ -17019,8 +17119,8 @@
           <p:nvPr/>
         </p:nvGraphicFramePr>
         <p:xfrm>
-          <a:off x="777240" y="3986784"/>
-          <a:ext cx="10515600" cy="1417320"/>
+          <a:off x="777240" y="4273764"/>
+          <a:ext cx="10515600" cy="1395515"/>
         </p:xfrm>
         <a:graphic>
           <a:graphicData uri="http://schemas.openxmlformats.org/drawingml/2006/table">
@@ -17678,7 +17778,7 @@
         </p:nvSpPr>
         <p:spPr>
           <a:xfrm>
-            <a:off x="777240" y="1261872"/>
+            <a:off x="777240" y="1572768"/>
             <a:ext cx="10515600" cy="548640"/>
           </a:xfrm>
           <a:prstGeom prst="rect">
@@ -17724,7 +17824,7 @@
           <p:nvPr/>
         </p:nvGraphicFramePr>
         <p:xfrm>
-          <a:off x="777240" y="1901952"/>
+          <a:off x="777240" y="2212848"/>
           <a:ext cx="10515600" cy="1234440"/>
         </p:xfrm>
         <a:graphic>
@@ -18019,7 +18119,7 @@
         </p:nvSpPr>
         <p:spPr>
           <a:xfrm>
-            <a:off x="777240" y="3310128"/>
+            <a:off x="777240" y="3621024"/>
             <a:ext cx="10515600" cy="402336"/>
           </a:xfrm>
           <a:prstGeom prst="roundRect">
@@ -18061,6 +18161,7 @@
               </a:defRPr>
             </a:pPr>
             <a:r>
+              <a:rPr/>
               <a:t>The five reports that did not match, and why</a:t>
             </a:r>
           </a:p>
@@ -18075,7 +18176,7 @@
           <p:nvPr/>
         </p:nvGraphicFramePr>
         <p:xfrm>
-          <a:off x="777240" y="3803904"/>
+          <a:off x="777240" y="4114800"/>
           <a:ext cx="10515600" cy="1371600"/>
         </p:xfrm>
         <a:graphic>
@@ -18767,7 +18868,7 @@
           <p:nvPr/>
         </p:nvGraphicFramePr>
         <p:xfrm>
-          <a:off x="822960" y="1417320"/>
+          <a:off x="822960" y="1572768"/>
           <a:ext cx="10561320" cy="4160520"/>
         </p:xfrm>
         <a:graphic>
@@ -19184,7 +19285,7 @@
         </p:nvSpPr>
         <p:spPr>
           <a:xfrm>
-            <a:off x="960120" y="5650992"/>
+            <a:off x="960120" y="5806440"/>
             <a:ext cx="10149840" cy="411480"/>
           </a:xfrm>
           <a:prstGeom prst="rect">
@@ -19601,8 +19702,8 @@
         </p:nvSpPr>
         <p:spPr>
           <a:xfrm>
-            <a:off x="914400" y="1371600"/>
-            <a:ext cx="10332720" cy="4754880"/>
+            <a:off x="914400" y="1572768"/>
+            <a:ext cx="10332720" cy="4663440"/>
           </a:xfrm>
           <a:prstGeom prst="rect">
             <a:avLst/>
@@ -20269,7 +20370,7 @@
         </p:nvSpPr>
         <p:spPr>
           <a:xfrm>
-            <a:off x="1097280" y="1508760"/>
+            <a:off x="1097280" y="1572768"/>
             <a:ext cx="9966960" cy="4434840"/>
           </a:xfrm>
           <a:prstGeom prst="rect">
@@ -21869,6 +21970,7 @@
               </a:defRPr>
             </a:pPr>
             <a:r>
+              <a:rPr/>
               <a:t>THANK YOU!</a:t>
             </a:r>
           </a:p>
@@ -21882,6 +21984,7 @@
               </a:defRPr>
             </a:pPr>
             <a:r>
+              <a:rPr/>
               <a:t>Questions &amp; Final Defense Discussion</a:t>
             </a:r>
           </a:p>
@@ -22258,7 +22361,7 @@
         </p:nvSpPr>
         <p:spPr>
           <a:xfrm>
-            <a:off x="777240" y="1243584"/>
+            <a:off x="777240" y="1572768"/>
             <a:ext cx="10515600" cy="384048"/>
           </a:xfrm>
           <a:prstGeom prst="rect">
@@ -22303,7 +22406,7 @@
         </p:nvSpPr>
         <p:spPr>
           <a:xfrm>
-            <a:off x="777240" y="1737360"/>
+            <a:off x="777240" y="2066543"/>
             <a:ext cx="5120640" cy="2286000"/>
           </a:xfrm>
           <a:prstGeom prst="rect">
@@ -22348,6 +22451,7 @@
               </a:defRPr>
             </a:pPr>
             <a:r>
+              <a:rPr/>
               <a:t>Metric(</a:t>
             </a:r>
           </a:p>
@@ -22364,6 +22468,7 @@
               </a:defRPr>
             </a:pPr>
             <a:r>
+              <a:rPr/>
               <a:t>    id="avg_order_value",</a:t>
             </a:r>
           </a:p>
@@ -22380,6 +22485,7 @@
               </a:defRPr>
             </a:pPr>
             <a:r>
+              <a:rPr/>
               <a:t>    label="Average Order Value",</a:t>
             </a:r>
           </a:p>
@@ -22396,6 +22502,7 @@
               </a:defRPr>
             </a:pPr>
             <a:r>
+              <a:rPr/>
               <a:t>    description="Average revenue per order",</a:t>
             </a:r>
           </a:p>
@@ -22412,6 +22519,7 @@
               </a:defRPr>
             </a:pPr>
             <a:r>
+              <a:rPr/>
               <a:t>    sql_expr="AVG(COALESCE(o.OrderTotal, 0))",</a:t>
             </a:r>
           </a:p>
@@ -22428,6 +22536,7 @@
               </a:defRPr>
             </a:pPr>
             <a:r>
+              <a:rPr/>
               <a:t>    binding_table="Order",</a:t>
             </a:r>
           </a:p>
@@ -22444,6 +22553,7 @@
               </a:defRPr>
             </a:pPr>
             <a:r>
+              <a:rPr/>
               <a:t>    required_joins=[],</a:t>
             </a:r>
           </a:p>
@@ -22460,6 +22570,7 @@
               </a:defRPr>
             </a:pPr>
             <a:r>
+              <a:rPr/>
               <a:t>    default_visual="kpi_card",</a:t>
             </a:r>
           </a:p>
@@ -22476,6 +22587,7 @@
               </a:defRPr>
             </a:pPr>
             <a:r>
+              <a:rPr/>
               <a:t>    time_anchor="o.CreatedOnUtc",</a:t>
             </a:r>
           </a:p>
@@ -22492,6 +22604,7 @@
               </a:defRPr>
             </a:pPr>
             <a:r>
+              <a:rPr/>
               <a:t>)</a:t>
             </a:r>
           </a:p>
@@ -22505,7 +22618,7 @@
         </p:nvSpPr>
         <p:spPr>
           <a:xfrm>
-            <a:off x="6144768" y="1737360"/>
+            <a:off x="6144768" y="2066543"/>
             <a:ext cx="5120640" cy="2286000"/>
           </a:xfrm>
           <a:prstGeom prst="rect">
@@ -22550,6 +22663,7 @@
               </a:defRPr>
             </a:pPr>
             <a:r>
+              <a:rPr/>
               <a:t>Dimension(</a:t>
             </a:r>
           </a:p>
@@ -22566,6 +22680,7 @@
               </a:defRPr>
             </a:pPr>
             <a:r>
+              <a:rPr/>
               <a:t>    id="order_status",</a:t>
             </a:r>
           </a:p>
@@ -22582,6 +22697,7 @@
               </a:defRPr>
             </a:pPr>
             <a:r>
+              <a:rPr/>
               <a:t>    label="Order Status",</a:t>
             </a:r>
           </a:p>
@@ -22598,6 +22714,7 @@
               </a:defRPr>
             </a:pPr>
             <a:r>
+              <a:rPr/>
               <a:t>    sql_expr="CASE o.OrderStatusId "</a:t>
             </a:r>
           </a:p>
@@ -22614,6 +22731,7 @@
               </a:defRPr>
             </a:pPr>
             <a:r>
+              <a:rPr/>
               <a:t>             "WHEN 10 THEN 'Pending' "</a:t>
             </a:r>
           </a:p>
@@ -22630,6 +22748,7 @@
               </a:defRPr>
             </a:pPr>
             <a:r>
+              <a:rPr/>
               <a:t>             "WHEN 20 THEN 'Processing' "</a:t>
             </a:r>
           </a:p>
@@ -22646,6 +22765,7 @@
               </a:defRPr>
             </a:pPr>
             <a:r>
+              <a:rPr/>
               <a:t>             "WHEN 30 THEN 'Complete' "</a:t>
             </a:r>
           </a:p>
@@ -22662,6 +22782,7 @@
               </a:defRPr>
             </a:pPr>
             <a:r>
+              <a:rPr/>
               <a:t>             "WHEN 40 THEN 'Cancelled' "</a:t>
             </a:r>
           </a:p>
@@ -22678,6 +22799,7 @@
               </a:defRPr>
             </a:pPr>
             <a:r>
+              <a:rPr/>
               <a:t>             "ELSE 'Unknown' END",</a:t>
             </a:r>
           </a:p>
@@ -22694,6 +22816,7 @@
               </a:defRPr>
             </a:pPr>
             <a:r>
+              <a:rPr/>
               <a:t>    binding_table="Order",</a:t>
             </a:r>
           </a:p>
@@ -22710,6 +22833,7 @@
               </a:defRPr>
             </a:pPr>
             <a:r>
+              <a:rPr/>
               <a:t>    datatype="string",</a:t>
             </a:r>
           </a:p>
@@ -22726,6 +22850,7 @@
               </a:defRPr>
             </a:pPr>
             <a:r>
+              <a:rPr/>
               <a:t>)</a:t>
             </a:r>
           </a:p>
@@ -22739,7 +22864,7 @@
         </p:nvSpPr>
         <p:spPr>
           <a:xfrm>
-            <a:off x="777240" y="4160520"/>
+            <a:off x="777240" y="4489703"/>
             <a:ext cx="10515600" cy="822960"/>
           </a:xfrm>
           <a:prstGeom prst="rect">
@@ -23210,8 +23335,8 @@
         </p:nvSpPr>
         <p:spPr>
           <a:xfrm>
-            <a:off x="1097280" y="1481328"/>
-            <a:ext cx="10058400" cy="4736592"/>
+            <a:off x="1097280" y="1572768"/>
+            <a:ext cx="10058400" cy="4663440"/>
           </a:xfrm>
           <a:prstGeom prst="rect">
             <a:avLst/>
@@ -23816,7 +23941,7 @@
         </p:nvSpPr>
         <p:spPr>
           <a:xfrm>
-            <a:off x="777240" y="1243584"/>
+            <a:off x="777240" y="1572768"/>
             <a:ext cx="10515600" cy="384048"/>
           </a:xfrm>
           <a:prstGeom prst="rect">
@@ -23861,7 +23986,7 @@
         </p:nvSpPr>
         <p:spPr>
           <a:xfrm>
-            <a:off x="777240" y="1737360"/>
+            <a:off x="777240" y="2066543"/>
             <a:ext cx="10515600" cy="2743200"/>
           </a:xfrm>
           <a:prstGeom prst="rect">
@@ -23906,6 +24031,7 @@
               </a:defRPr>
             </a:pPr>
             <a:r>
+              <a:rPr/>
               <a:t>def _assemble_select(self, metric, dimension, extra_metrics=None, plan=None) -&gt; str:</a:t>
             </a:r>
           </a:p>
@@ -23922,6 +24048,7 @@
               </a:defRPr>
             </a:pPr>
             <a:r>
+              <a:rPr/>
               <a:t>    measures = [f"{metric.sql_expr} AS value"]</a:t>
             </a:r>
           </a:p>
@@ -23938,6 +24065,7 @@
               </a:defRPr>
             </a:pPr>
             <a:r>
+              <a:rPr/>
               <a:t>    for extra in extra_metrics or []:</a:t>
             </a:r>
           </a:p>
@@ -23954,6 +24082,7 @@
               </a:defRPr>
             </a:pPr>
             <a:r>
+              <a:rPr/>
               <a:t>        measures.append(f"{extra.sql_expr} AS `{extra.id}`")</a:t>
             </a:r>
           </a:p>
@@ -23970,6 +24099,7 @@
               </a:defRPr>
             </a:pPr>
             <a:r>
+              <a:rPr/>
               <a:t>    projected = ", ".join(measures)</a:t>
             </a:r>
           </a:p>
@@ -23999,6 +24129,7 @@
               </a:defRPr>
             </a:pPr>
             <a:r>
+              <a:rPr/>
               <a:t>    if dimension:</a:t>
             </a:r>
           </a:p>
@@ -24015,6 +24146,7 @@
               </a:defRPr>
             </a:pPr>
             <a:r>
+              <a:rPr/>
               <a:t>        dim_expr = self._dimension_select_expr(dimension, plan)</a:t>
             </a:r>
           </a:p>
@@ -24031,6 +24163,7 @@
               </a:defRPr>
             </a:pPr>
             <a:r>
+              <a:rPr/>
               <a:t>        return f"SELECT {dim_expr} AS label, {projected}"</a:t>
             </a:r>
           </a:p>
@@ -24047,6 +24180,7 @@
               </a:defRPr>
             </a:pPr>
             <a:r>
+              <a:rPr/>
               <a:t>    return f"SELECT {projected}"</a:t>
             </a:r>
           </a:p>
@@ -24076,6 +24210,7 @@
               </a:defRPr>
             </a:pPr>
             <a:r>
+              <a:rPr/>
               <a:t># Every interpolated value is an attribute of a semantic-layer object.</a:t>
             </a:r>
           </a:p>
@@ -24092,6 +24227,7 @@
               </a:defRPr>
             </a:pPr>
             <a:r>
+              <a:rPr/>
               <a:t># No argument to this function carries user text.</a:t>
             </a:r>
           </a:p>
@@ -24105,7 +24241,7 @@
         </p:nvSpPr>
         <p:spPr>
           <a:xfrm>
-            <a:off x="777240" y="4617720"/>
+            <a:off x="777240" y="4946903"/>
             <a:ext cx="10515600" cy="868680"/>
           </a:xfrm>
           <a:prstGeom prst="rect">
@@ -24523,7 +24659,7 @@
           <p:nvPr/>
         </p:nvGraphicFramePr>
         <p:xfrm>
-          <a:off x="777240" y="1371600"/>
+          <a:off x="777240" y="1572768"/>
           <a:ext cx="10515600" cy="2834640"/>
         </p:xfrm>
         <a:graphic>
@@ -24854,7 +24990,7 @@
         </p:nvSpPr>
         <p:spPr>
           <a:xfrm>
-            <a:off x="777240" y="4343400"/>
+            <a:off x="777240" y="4544568"/>
             <a:ext cx="10515600" cy="1234440"/>
           </a:xfrm>
           <a:prstGeom prst="rect">
@@ -25833,7 +25969,7 @@
         </p:nvSpPr>
         <p:spPr>
           <a:xfrm>
-            <a:off x="1005840" y="1371600"/>
+            <a:off x="1005840" y="1572768"/>
             <a:ext cx="10149840" cy="731520"/>
           </a:xfrm>
           <a:prstGeom prst="rect">
@@ -25878,7 +26014,7 @@
         </p:nvSpPr>
         <p:spPr>
           <a:xfrm>
-            <a:off x="1143000" y="2286000"/>
+            <a:off x="1143000" y="2487168"/>
             <a:ext cx="2743200" cy="914400"/>
           </a:xfrm>
           <a:prstGeom prst="roundRect">
@@ -25920,10 +26056,12 @@
               </a:defRPr>
             </a:pPr>
             <a:r>
+              <a:rPr/>
               <a:t>Waiter</a:t>
             </a:r>
             <a:br/>
             <a:r>
+              <a:rPr/>
               <a:t>takes the order</a:t>
             </a:r>
           </a:p>
@@ -25937,7 +26075,7 @@
         </p:nvSpPr>
         <p:spPr>
           <a:xfrm>
-            <a:off x="4572000" y="2286000"/>
+            <a:off x="4572000" y="2487168"/>
             <a:ext cx="2743200" cy="914400"/>
           </a:xfrm>
           <a:prstGeom prst="roundRect">
@@ -25979,10 +26117,12 @@
               </a:defRPr>
             </a:pPr>
             <a:r>
+              <a:rPr/>
               <a:t>Order form</a:t>
             </a:r>
             <a:br/>
             <a:r>
+              <a:rPr/>
               <a:t>fixed fields only</a:t>
             </a:r>
           </a:p>
@@ -25996,7 +26136,7 @@
         </p:nvSpPr>
         <p:spPr>
           <a:xfrm>
-            <a:off x="8001000" y="2286000"/>
+            <a:off x="8001000" y="2487168"/>
             <a:ext cx="2743200" cy="914400"/>
           </a:xfrm>
           <a:prstGeom prst="roundRect">
@@ -26038,10 +26178,12 @@
               </a:defRPr>
             </a:pPr>
             <a:r>
+              <a:rPr/>
               <a:t>Kitchen</a:t>
             </a:r>
             <a:br/>
             <a:r>
+              <a:rPr/>
               <a:t>cooks the dish</a:t>
             </a:r>
           </a:p>
@@ -26126,7 +26268,7 @@
           <p:nvPr/>
         </p:nvGraphicFramePr>
         <p:xfrm>
-          <a:off x="1143000" y="3520440"/>
+          <a:off x="1143000" y="3721608"/>
           <a:ext cx="9601200" cy="1874519"/>
         </p:xfrm>
         <a:graphic>
@@ -26887,7 +27029,7 @@
           <p:nvPr/>
         </p:nvGraphicFramePr>
         <p:xfrm>
-          <a:off x="713232" y="1417320"/>
+          <a:off x="713232" y="1572768"/>
           <a:ext cx="10744199" cy="4370832"/>
         </p:xfrm>
         <a:graphic>
@@ -28518,7 +28660,7 @@
           <p:nvPr/>
         </p:nvGraphicFramePr>
         <p:xfrm>
-          <a:off x="822960" y="1325880"/>
+          <a:off x="822960" y="1572768"/>
           <a:ext cx="10561320" cy="4572000"/>
         </p:xfrm>
         <a:graphic>

--- a/docs/scripts/Md_Riaz_Final_Defense_0322310105101024.pptx
+++ b/docs/scripts/Md_Riaz_Final_Defense_0322310105101024.pptx
@@ -39,6 +39,7 @@
     <p:sldId id="284" r:id="rId35"/>
     <p:sldId id="285" r:id="rId36"/>
     <p:sldId id="286" r:id="rId37"/>
+    <p:sldId id="287" r:id="rId38"/>
   </p:sldIdLst>
   <p:sldSz cx="12192000" cy="6858000"/>
   <p:notesSz cx="6858000" cy="9144000"/>
@@ -5781,7 +5782,7 @@
         <p:spPr>
           <a:xfrm>
             <a:off x="822960" y="2261405"/>
-            <a:ext cx="2651760" cy="759267"/>
+            <a:ext cx="2651760" cy="1280160"/>
           </a:xfrm>
           <a:prstGeom prst="rect">
             <a:avLst/>
@@ -5806,7 +5807,7 @@
               </a:spcAft>
             </a:pPr>
             <a:r>
-              <a:rPr b="1" i="0" sz="1650">
+              <a:rPr b="1" i="0" sz="1800">
                 <a:solidFill>
                   <a:srgbClr val="003366"/>
                 </a:solidFill>
@@ -5828,7 +5829,7 @@
               </a:spcAft>
             </a:pPr>
             <a:r>
-              <a:rPr b="1" i="0" sz="1650">
+              <a:rPr b="1" i="0" sz="1800">
                 <a:solidFill>
                   <a:srgbClr val="003366"/>
                 </a:solidFill>
@@ -5904,7 +5905,7 @@
         <p:spPr>
           <a:xfrm>
             <a:off x="3950208" y="2226091"/>
-            <a:ext cx="3154680" cy="1253673"/>
+            <a:ext cx="3154680" cy="1809880"/>
           </a:xfrm>
           <a:prstGeom prst="rect">
             <a:avLst/>
@@ -5929,7 +5930,7 @@
               </a:spcAft>
             </a:pPr>
             <a:r>
-              <a:rPr b="1" i="0" sz="1370">
+              <a:rPr b="1" i="0" sz="1700">
                 <a:solidFill>
                   <a:srgbClr val="003366"/>
                 </a:solidFill>
@@ -5951,7 +5952,7 @@
               </a:spcAft>
             </a:pPr>
             <a:r>
-              <a:rPr b="1" i="0" sz="1070">
+              <a:rPr b="1" i="0" sz="1400">
                 <a:solidFill>
                   <a:srgbClr val="003366"/>
                 </a:solidFill>
@@ -5960,7 +5961,7 @@
               <a:t>- Metrics:</a:t>
             </a:r>
             <a:r>
-              <a:rPr b="0" i="0" sz="1070">
+              <a:rPr b="0" i="0" sz="1400">
                 <a:solidFill>
                   <a:srgbClr val="333333"/>
                 </a:solidFill>
@@ -5982,7 +5983,7 @@
               </a:spcAft>
             </a:pPr>
             <a:r>
-              <a:rPr b="1" i="0" sz="1070">
+              <a:rPr b="1" i="0" sz="1400">
                 <a:solidFill>
                   <a:srgbClr val="003366"/>
                 </a:solidFill>
@@ -5991,7 +5992,7 @@
               <a:t>- Dimensions:</a:t>
             </a:r>
             <a:r>
-              <a:rPr b="0" i="0" sz="1070">
+              <a:rPr b="0" i="0" sz="1400">
                 <a:solidFill>
                   <a:srgbClr val="333333"/>
                 </a:solidFill>
@@ -6013,7 +6014,7 @@
               </a:spcAft>
             </a:pPr>
             <a:r>
-              <a:rPr b="1" i="0" sz="1070">
+              <a:rPr b="1" i="0" sz="1400">
                 <a:solidFill>
                   <a:srgbClr val="003366"/>
                 </a:solidFill>
@@ -6022,7 +6023,7 @@
               <a:t>- Output:</a:t>
             </a:r>
             <a:r>
-              <a:rPr b="0" i="0" sz="1070">
+              <a:rPr b="0" i="0" sz="1400">
                 <a:solidFill>
                   <a:srgbClr val="333333"/>
                 </a:solidFill>
@@ -6134,7 +6135,7 @@
               <a:spcAft>
                 <a:spcPts val="100"/>
               </a:spcAft>
-              <a:defRPr sz="969">
+              <a:defRPr sz="1000">
                 <a:solidFill>
                   <a:srgbClr val="505050"/>
                 </a:solidFill>
@@ -6151,7 +6152,7 @@
               <a:spcAft>
                 <a:spcPts val="100"/>
               </a:spcAft>
-              <a:defRPr sz="969">
+              <a:defRPr sz="1000">
                 <a:solidFill>
                   <a:srgbClr val="505050"/>
                 </a:solidFill>
@@ -6168,7 +6169,7 @@
               <a:spcAft>
                 <a:spcPts val="100"/>
               </a:spcAft>
-              <a:defRPr sz="969">
+              <a:defRPr sz="1000">
                 <a:solidFill>
                   <a:srgbClr val="505050"/>
                 </a:solidFill>
@@ -6185,7 +6186,7 @@
               <a:spcAft>
                 <a:spcPts val="100"/>
               </a:spcAft>
-              <a:defRPr sz="969">
+              <a:defRPr sz="1000">
                 <a:solidFill>
                   <a:srgbClr val="505050"/>
                 </a:solidFill>
@@ -6202,7 +6203,7 @@
               <a:spcAft>
                 <a:spcPts val="100"/>
               </a:spcAft>
-              <a:defRPr sz="969">
+              <a:defRPr sz="1000">
                 <a:solidFill>
                   <a:srgbClr val="505050"/>
                 </a:solidFill>
@@ -6219,7 +6220,7 @@
               <a:spcAft>
                 <a:spcPts val="100"/>
               </a:spcAft>
-              <a:defRPr sz="969">
+              <a:defRPr sz="1000">
                 <a:solidFill>
                   <a:srgbClr val="505050"/>
                 </a:solidFill>
@@ -6336,7 +6337,7 @@
                         <a:lnSpc>
                           <a:spcPct val="100000"/>
                         </a:lnSpc>
-                        <a:defRPr sz="1150" b="1">
+                        <a:defRPr sz="1200" b="1">
                           <a:solidFill>
                             <a:srgbClr val="FFFFFF"/>
                           </a:solidFill>
@@ -6363,7 +6364,7 @@
                         <a:lnSpc>
                           <a:spcPct val="100000"/>
                         </a:lnSpc>
-                        <a:defRPr sz="1150" b="1">
+                        <a:defRPr sz="1200" b="1">
                           <a:solidFill>
                             <a:srgbClr val="FFFFFF"/>
                           </a:solidFill>
@@ -6390,7 +6391,7 @@
                         <a:lnSpc>
                           <a:spcPct val="100000"/>
                         </a:lnSpc>
-                        <a:defRPr sz="1150" b="1">
+                        <a:defRPr sz="1200" b="1">
                           <a:solidFill>
                             <a:srgbClr val="FFFFFF"/>
                           </a:solidFill>
@@ -6419,7 +6420,7 @@
                         <a:lnSpc>
                           <a:spcPct val="100000"/>
                         </a:lnSpc>
-                        <a:defRPr sz="1060" b="1">
+                        <a:defRPr sz="1200" b="1">
                           <a:solidFill>
                             <a:srgbClr val="333333"/>
                           </a:solidFill>
@@ -6442,7 +6443,7 @@
                         <a:lnSpc>
                           <a:spcPct val="100000"/>
                         </a:lnSpc>
-                        <a:defRPr sz="1060" b="0">
+                        <a:defRPr sz="1200" b="0">
                           <a:solidFill>
                             <a:srgbClr val="333333"/>
                           </a:solidFill>
@@ -6465,7 +6466,7 @@
                         <a:lnSpc>
                           <a:spcPct val="100000"/>
                         </a:lnSpc>
-                        <a:defRPr sz="1060" b="0">
+                        <a:defRPr sz="1200" b="0">
                           <a:solidFill>
                             <a:srgbClr val="333333"/>
                           </a:solidFill>
@@ -6490,7 +6491,7 @@
                         <a:lnSpc>
                           <a:spcPct val="100000"/>
                         </a:lnSpc>
-                        <a:defRPr sz="1060" b="1">
+                        <a:defRPr sz="1200" b="1">
                           <a:solidFill>
                             <a:srgbClr val="333333"/>
                           </a:solidFill>
@@ -6517,7 +6518,7 @@
                         <a:lnSpc>
                           <a:spcPct val="100000"/>
                         </a:lnSpc>
-                        <a:defRPr sz="1060" b="0">
+                        <a:defRPr sz="1200" b="0">
                           <a:solidFill>
                             <a:srgbClr val="333333"/>
                           </a:solidFill>
@@ -6544,7 +6545,7 @@
                         <a:lnSpc>
                           <a:spcPct val="100000"/>
                         </a:lnSpc>
-                        <a:defRPr sz="1060" b="0">
+                        <a:defRPr sz="1200" b="0">
                           <a:solidFill>
                             <a:srgbClr val="333333"/>
                           </a:solidFill>
@@ -7038,7 +7039,7 @@
         <p:spPr>
           <a:xfrm>
             <a:off x="658368" y="1572768"/>
-            <a:ext cx="5029200" cy="457200"/>
+            <a:ext cx="5029200" cy="455168"/>
           </a:xfrm>
           <a:prstGeom prst="roundRect">
             <a:avLst/>
@@ -7093,8 +7094,8 @@
         </p:nvSpPr>
         <p:spPr>
           <a:xfrm>
-            <a:off x="713232" y="2121408"/>
-            <a:ext cx="4937760" cy="2514600"/>
+            <a:off x="713232" y="2118969"/>
+            <a:ext cx="4937760" cy="2503424"/>
           </a:xfrm>
           <a:prstGeom prst="rect">
             <a:avLst/>
@@ -7130,7 +7131,7 @@
               <a:spcAft>
                 <a:spcPts val="100"/>
               </a:spcAft>
-              <a:defRPr sz="900">
+              <a:defRPr sz="1000">
                 <a:solidFill>
                   <a:srgbClr val="505050"/>
                 </a:solidFill>
@@ -7147,7 +7148,7 @@
               <a:spcAft>
                 <a:spcPts val="100"/>
               </a:spcAft>
-              <a:defRPr sz="900">
+              <a:defRPr sz="1000">
                 <a:solidFill>
                   <a:srgbClr val="505050"/>
                 </a:solidFill>
@@ -7164,7 +7165,7 @@
               <a:spcAft>
                 <a:spcPts val="100"/>
               </a:spcAft>
-              <a:defRPr sz="900">
+              <a:defRPr sz="1000">
                 <a:solidFill>
                   <a:srgbClr val="505050"/>
                 </a:solidFill>
@@ -7181,7 +7182,7 @@
               <a:spcAft>
                 <a:spcPts val="100"/>
               </a:spcAft>
-              <a:defRPr sz="900">
+              <a:defRPr sz="1000">
                 <a:solidFill>
                   <a:srgbClr val="505050"/>
                 </a:solidFill>
@@ -7198,7 +7199,7 @@
               <a:spcAft>
                 <a:spcPts val="100"/>
               </a:spcAft>
-              <a:defRPr sz="900">
+              <a:defRPr sz="1000">
                 <a:solidFill>
                   <a:srgbClr val="505050"/>
                 </a:solidFill>
@@ -7215,7 +7216,7 @@
               <a:spcAft>
                 <a:spcPts val="100"/>
               </a:spcAft>
-              <a:defRPr sz="900">
+              <a:defRPr sz="1000">
                 <a:solidFill>
                   <a:srgbClr val="505050"/>
                 </a:solidFill>
@@ -7232,7 +7233,7 @@
               <a:spcAft>
                 <a:spcPts val="100"/>
               </a:spcAft>
-              <a:defRPr sz="900">
+              <a:defRPr sz="1000">
                 <a:solidFill>
                   <a:srgbClr val="505050"/>
                 </a:solidFill>
@@ -7249,7 +7250,7 @@
               <a:spcAft>
                 <a:spcPts val="100"/>
               </a:spcAft>
-              <a:defRPr sz="900">
+              <a:defRPr sz="1000">
                 <a:solidFill>
                   <a:srgbClr val="505050"/>
                 </a:solidFill>
@@ -7266,7 +7267,7 @@
               <a:spcAft>
                 <a:spcPts val="100"/>
               </a:spcAft>
-              <a:defRPr sz="900">
+              <a:defRPr sz="1000">
                 <a:solidFill>
                   <a:srgbClr val="505050"/>
                 </a:solidFill>
@@ -7283,7 +7284,7 @@
               <a:spcAft>
                 <a:spcPts val="100"/>
               </a:spcAft>
-              <a:defRPr sz="900">
+              <a:defRPr sz="1000">
                 <a:solidFill>
                   <a:srgbClr val="505050"/>
                 </a:solidFill>
@@ -7296,7 +7297,7 @@
               <a:spcAft>
                 <a:spcPts val="100"/>
               </a:spcAft>
-              <a:defRPr sz="900">
+              <a:defRPr sz="1000">
                 <a:solidFill>
                   <a:srgbClr val="505050"/>
                 </a:solidFill>
@@ -7319,7 +7320,7 @@
         <p:spPr>
           <a:xfrm>
             <a:off x="5989320" y="1572768"/>
-            <a:ext cx="5212080" cy="457200"/>
+            <a:ext cx="5212080" cy="455168"/>
           </a:xfrm>
           <a:prstGeom prst="roundRect">
             <a:avLst/>
@@ -7375,8 +7376,8 @@
           <p:nvPr/>
         </p:nvGraphicFramePr>
         <p:xfrm>
-          <a:off x="6035040" y="2121408"/>
-          <a:ext cx="5166360" cy="2514600"/>
+          <a:off x="6035040" y="2118969"/>
+          <a:ext cx="5166360" cy="2503424"/>
         </p:xfrm>
         <a:graphic>
           <a:graphicData uri="http://schemas.openxmlformats.org/drawingml/2006/table">
@@ -7398,7 +7399,7 @@
                         <a:lnSpc>
                           <a:spcPct val="100000"/>
                         </a:lnSpc>
-                        <a:defRPr sz="1100" b="1">
+                        <a:defRPr sz="1200" b="1">
                           <a:solidFill>
                             <a:srgbClr val="FFFFFF"/>
                           </a:solidFill>
@@ -7425,7 +7426,7 @@
                         <a:lnSpc>
                           <a:spcPct val="100000"/>
                         </a:lnSpc>
-                        <a:defRPr sz="1100" b="1">
+                        <a:defRPr sz="1200" b="1">
                           <a:solidFill>
                             <a:srgbClr val="FFFFFF"/>
                           </a:solidFill>
@@ -7454,7 +7455,7 @@
                         <a:lnSpc>
                           <a:spcPct val="100000"/>
                         </a:lnSpc>
-                        <a:defRPr sz="1000" b="1">
+                        <a:defRPr sz="1200" b="1">
                           <a:solidFill>
                             <a:srgbClr val="333333"/>
                           </a:solidFill>
@@ -7477,7 +7478,7 @@
                         <a:lnSpc>
                           <a:spcPct val="100000"/>
                         </a:lnSpc>
-                        <a:defRPr sz="1000" b="0">
+                        <a:defRPr sz="1200" b="0">
                           <a:solidFill>
                             <a:srgbClr val="333333"/>
                           </a:solidFill>
@@ -7502,7 +7503,7 @@
                         <a:lnSpc>
                           <a:spcPct val="100000"/>
                         </a:lnSpc>
-                        <a:defRPr sz="1000" b="1">
+                        <a:defRPr sz="1200" b="1">
                           <a:solidFill>
                             <a:srgbClr val="333333"/>
                           </a:solidFill>
@@ -7518,7 +7519,7 @@
                         <a:lnSpc>
                           <a:spcPct val="100000"/>
                         </a:lnSpc>
-                        <a:defRPr sz="1000" b="1">
+                        <a:defRPr sz="1200" b="1">
                           <a:solidFill>
                             <a:srgbClr val="333333"/>
                           </a:solidFill>
@@ -7545,7 +7546,7 @@
                         <a:lnSpc>
                           <a:spcPct val="100000"/>
                         </a:lnSpc>
-                        <a:defRPr sz="1000" b="0">
+                        <a:defRPr sz="1200" b="0">
                           <a:solidFill>
                             <a:srgbClr val="333333"/>
                           </a:solidFill>
@@ -7574,7 +7575,7 @@
                         <a:lnSpc>
                           <a:spcPct val="100000"/>
                         </a:lnSpc>
-                        <a:defRPr sz="1000" b="1">
+                        <a:defRPr sz="1200" b="1">
                           <a:solidFill>
                             <a:srgbClr val="333333"/>
                           </a:solidFill>
@@ -7597,7 +7598,7 @@
                         <a:lnSpc>
                           <a:spcPct val="100000"/>
                         </a:lnSpc>
-                        <a:defRPr sz="1000" b="0">
+                        <a:defRPr sz="1200" b="0">
                           <a:solidFill>
                             <a:srgbClr val="333333"/>
                           </a:solidFill>
@@ -7622,7 +7623,7 @@
                         <a:lnSpc>
                           <a:spcPct val="100000"/>
                         </a:lnSpc>
-                        <a:defRPr sz="1000" b="1">
+                        <a:defRPr sz="1200" b="1">
                           <a:solidFill>
                             <a:srgbClr val="333333"/>
                           </a:solidFill>
@@ -7649,7 +7650,7 @@
                         <a:lnSpc>
                           <a:spcPct val="100000"/>
                         </a:lnSpc>
-                        <a:defRPr sz="1000" b="0">
+                        <a:defRPr sz="1200" b="0">
                           <a:solidFill>
                             <a:srgbClr val="333333"/>
                           </a:solidFill>
@@ -7678,7 +7679,7 @@
                         <a:lnSpc>
                           <a:spcPct val="100000"/>
                         </a:lnSpc>
-                        <a:defRPr sz="1000" b="1">
+                        <a:defRPr sz="1200" b="1">
                           <a:solidFill>
                             <a:srgbClr val="333333"/>
                           </a:solidFill>
@@ -7701,7 +7702,7 @@
                         <a:lnSpc>
                           <a:spcPct val="100000"/>
                         </a:lnSpc>
-                        <a:defRPr sz="1000" b="0">
+                        <a:defRPr sz="1200" b="0">
                           <a:solidFill>
                             <a:srgbClr val="333333"/>
                           </a:solidFill>
@@ -7728,8 +7729,8 @@
         </p:nvSpPr>
         <p:spPr>
           <a:xfrm>
-            <a:off x="777240" y="4818888"/>
-            <a:ext cx="10424160" cy="548640"/>
+            <a:off x="777240" y="4804460"/>
+            <a:ext cx="10424160" cy="864819"/>
           </a:xfrm>
           <a:prstGeom prst="rect">
             <a:avLst/>
@@ -7754,7 +7755,7 @@
               </a:spcAft>
             </a:pPr>
             <a:r>
-              <a:rPr b="1" i="0" sz="1450">
+              <a:rPr b="1" i="0" sz="1700">
                 <a:solidFill>
                   <a:srgbClr val="003366"/>
                 </a:solidFill>
@@ -8525,7 +8526,7 @@
                         <a:lnSpc>
                           <a:spcPct val="100000"/>
                         </a:lnSpc>
-                        <a:defRPr sz="1050" b="1">
+                        <a:defRPr sz="1200" b="1">
                           <a:solidFill>
                             <a:srgbClr val="FFFFFF"/>
                           </a:solidFill>
@@ -8552,7 +8553,7 @@
                         <a:lnSpc>
                           <a:spcPct val="100000"/>
                         </a:lnSpc>
-                        <a:defRPr sz="1050" b="1">
+                        <a:defRPr sz="1200" b="1">
                           <a:solidFill>
                             <a:srgbClr val="FFFFFF"/>
                           </a:solidFill>
@@ -8579,7 +8580,7 @@
                         <a:lnSpc>
                           <a:spcPct val="100000"/>
                         </a:lnSpc>
-                        <a:defRPr sz="1050" b="1">
+                        <a:defRPr sz="1200" b="1">
                           <a:solidFill>
                             <a:srgbClr val="FFFFFF"/>
                           </a:solidFill>
@@ -8606,7 +8607,7 @@
                         <a:lnSpc>
                           <a:spcPct val="100000"/>
                         </a:lnSpc>
-                        <a:defRPr sz="1050" b="1">
+                        <a:defRPr sz="1200" b="1">
                           <a:solidFill>
                             <a:srgbClr val="FFFFFF"/>
                           </a:solidFill>
@@ -8633,7 +8634,7 @@
                         <a:lnSpc>
                           <a:spcPct val="100000"/>
                         </a:lnSpc>
-                        <a:defRPr sz="1050" b="1">
+                        <a:defRPr sz="1200" b="1">
                           <a:solidFill>
                             <a:srgbClr val="FFFFFF"/>
                           </a:solidFill>
@@ -8662,7 +8663,7 @@
                         <a:lnSpc>
                           <a:spcPct val="100000"/>
                         </a:lnSpc>
-                        <a:defRPr sz="980" b="1">
+                        <a:defRPr sz="1200" b="1">
                           <a:solidFill>
                             <a:srgbClr val="333333"/>
                           </a:solidFill>
@@ -8685,7 +8686,7 @@
                         <a:lnSpc>
                           <a:spcPct val="100000"/>
                         </a:lnSpc>
-                        <a:defRPr sz="980" b="0">
+                        <a:defRPr sz="1200" b="0">
                           <a:solidFill>
                             <a:srgbClr val="333333"/>
                           </a:solidFill>
@@ -8708,7 +8709,7 @@
                         <a:lnSpc>
                           <a:spcPct val="100000"/>
                         </a:lnSpc>
-                        <a:defRPr sz="980" b="0">
+                        <a:defRPr sz="1200" b="0">
                           <a:solidFill>
                             <a:srgbClr val="333333"/>
                           </a:solidFill>
@@ -8731,7 +8732,7 @@
                         <a:lnSpc>
                           <a:spcPct val="100000"/>
                         </a:lnSpc>
-                        <a:defRPr sz="980" b="0">
+                        <a:defRPr sz="1200" b="0">
                           <a:solidFill>
                             <a:srgbClr val="333333"/>
                           </a:solidFill>
@@ -8754,7 +8755,7 @@
                         <a:lnSpc>
                           <a:spcPct val="100000"/>
                         </a:lnSpc>
-                        <a:defRPr sz="980" b="0">
+                        <a:defRPr sz="1200" b="0">
                           <a:solidFill>
                             <a:srgbClr val="333333"/>
                           </a:solidFill>
@@ -8779,7 +8780,7 @@
                         <a:lnSpc>
                           <a:spcPct val="100000"/>
                         </a:lnSpc>
-                        <a:defRPr sz="980" b="1">
+                        <a:defRPr sz="1200" b="1">
                           <a:solidFill>
                             <a:srgbClr val="333333"/>
                           </a:solidFill>
@@ -8806,7 +8807,7 @@
                         <a:lnSpc>
                           <a:spcPct val="100000"/>
                         </a:lnSpc>
-                        <a:defRPr sz="980" b="0">
+                        <a:defRPr sz="1200" b="0">
                           <a:solidFill>
                             <a:srgbClr val="333333"/>
                           </a:solidFill>
@@ -8833,7 +8834,7 @@
                         <a:lnSpc>
                           <a:spcPct val="100000"/>
                         </a:lnSpc>
-                        <a:defRPr sz="980" b="0">
+                        <a:defRPr sz="1200" b="0">
                           <a:solidFill>
                             <a:srgbClr val="333333"/>
                           </a:solidFill>
@@ -8860,7 +8861,7 @@
                         <a:lnSpc>
                           <a:spcPct val="100000"/>
                         </a:lnSpc>
-                        <a:defRPr sz="980" b="0">
+                        <a:defRPr sz="1200" b="0">
                           <a:solidFill>
                             <a:srgbClr val="333333"/>
                           </a:solidFill>
@@ -8887,7 +8888,7 @@
                         <a:lnSpc>
                           <a:spcPct val="100000"/>
                         </a:lnSpc>
-                        <a:defRPr sz="980" b="0">
+                        <a:defRPr sz="1200" b="0">
                           <a:solidFill>
                             <a:srgbClr val="333333"/>
                           </a:solidFill>
@@ -8916,7 +8917,7 @@
                         <a:lnSpc>
                           <a:spcPct val="100000"/>
                         </a:lnSpc>
-                        <a:defRPr sz="980" b="1">
+                        <a:defRPr sz="1200" b="1">
                           <a:solidFill>
                             <a:srgbClr val="333333"/>
                           </a:solidFill>
@@ -8939,7 +8940,7 @@
                         <a:lnSpc>
                           <a:spcPct val="100000"/>
                         </a:lnSpc>
-                        <a:defRPr sz="980" b="0">
+                        <a:defRPr sz="1200" b="0">
                           <a:solidFill>
                             <a:srgbClr val="333333"/>
                           </a:solidFill>
@@ -8962,7 +8963,7 @@
                         <a:lnSpc>
                           <a:spcPct val="100000"/>
                         </a:lnSpc>
-                        <a:defRPr sz="980" b="0">
+                        <a:defRPr sz="1200" b="0">
                           <a:solidFill>
                             <a:srgbClr val="333333"/>
                           </a:solidFill>
@@ -8985,7 +8986,7 @@
                         <a:lnSpc>
                           <a:spcPct val="100000"/>
                         </a:lnSpc>
-                        <a:defRPr sz="980" b="0">
+                        <a:defRPr sz="1200" b="0">
                           <a:solidFill>
                             <a:srgbClr val="333333"/>
                           </a:solidFill>
@@ -9008,7 +9009,7 @@
                         <a:lnSpc>
                           <a:spcPct val="100000"/>
                         </a:lnSpc>
-                        <a:defRPr sz="980" b="0">
+                        <a:defRPr sz="1200" b="0">
                           <a:solidFill>
                             <a:srgbClr val="333333"/>
                           </a:solidFill>
@@ -9061,7 +9062,7 @@
               </a:spcAft>
             </a:pPr>
             <a:r>
-              <a:rPr b="1" i="0" sz="1350">
+              <a:rPr b="1" i="0" sz="1500">
                 <a:solidFill>
                   <a:srgbClr val="003366"/>
                 </a:solidFill>
@@ -9070,7 +9071,7 @@
               <a:t>Intent Object vs Analysis Plan:</a:t>
             </a:r>
             <a:r>
-              <a:rPr b="0" i="0" sz="1250">
+              <a:rPr b="0" i="0" sz="1400">
                 <a:solidFill>
                   <a:srgbClr val="333333"/>
                 </a:solidFill>
@@ -9552,7 +9553,7 @@
         <p:spPr>
           <a:xfrm>
             <a:off x="713232" y="1572768"/>
-            <a:ext cx="3886200" cy="516516"/>
+            <a:ext cx="3886200" cy="507687"/>
           </a:xfrm>
           <a:prstGeom prst="roundRect">
             <a:avLst/>
@@ -9607,8 +9608,8 @@
         </p:nvSpPr>
         <p:spPr>
           <a:xfrm>
-            <a:off x="713232" y="2249583"/>
-            <a:ext cx="3886200" cy="2297608"/>
+            <a:off x="713232" y="2238013"/>
+            <a:ext cx="3886200" cy="2258333"/>
           </a:xfrm>
           <a:prstGeom prst="rect">
             <a:avLst/>
@@ -9644,7 +9645,7 @@
               <a:spcAft>
                 <a:spcPts val="100"/>
               </a:spcAft>
-              <a:defRPr sz="930">
+              <a:defRPr sz="1000">
                 <a:solidFill>
                   <a:srgbClr val="505050"/>
                 </a:solidFill>
@@ -9661,7 +9662,7 @@
               <a:spcAft>
                 <a:spcPts val="100"/>
               </a:spcAft>
-              <a:defRPr sz="930">
+              <a:defRPr sz="1000">
                 <a:solidFill>
                   <a:srgbClr val="505050"/>
                 </a:solidFill>
@@ -9678,7 +9679,7 @@
               <a:spcAft>
                 <a:spcPts val="100"/>
               </a:spcAft>
-              <a:defRPr sz="930">
+              <a:defRPr sz="1000">
                 <a:solidFill>
                   <a:srgbClr val="505050"/>
                 </a:solidFill>
@@ -9695,7 +9696,7 @@
               <a:spcAft>
                 <a:spcPts val="100"/>
               </a:spcAft>
-              <a:defRPr sz="930">
+              <a:defRPr sz="1000">
                 <a:solidFill>
                   <a:srgbClr val="505050"/>
                 </a:solidFill>
@@ -9712,7 +9713,7 @@
               <a:spcAft>
                 <a:spcPts val="100"/>
               </a:spcAft>
-              <a:defRPr sz="930">
+              <a:defRPr sz="1000">
                 <a:solidFill>
                   <a:srgbClr val="505050"/>
                 </a:solidFill>
@@ -9729,7 +9730,7 @@
               <a:spcAft>
                 <a:spcPts val="100"/>
               </a:spcAft>
-              <a:defRPr sz="930">
+              <a:defRPr sz="1000">
                 <a:solidFill>
                   <a:srgbClr val="505050"/>
                 </a:solidFill>
@@ -9746,7 +9747,7 @@
               <a:spcAft>
                 <a:spcPts val="100"/>
               </a:spcAft>
-              <a:defRPr sz="930">
+              <a:defRPr sz="1000">
                 <a:solidFill>
                   <a:srgbClr val="505050"/>
                 </a:solidFill>
@@ -9769,7 +9770,7 @@
         <p:spPr>
           <a:xfrm>
             <a:off x="4873752" y="1572768"/>
-            <a:ext cx="2331720" cy="516516"/>
+            <a:ext cx="2331720" cy="507687"/>
           </a:xfrm>
           <a:prstGeom prst="roundRect">
             <a:avLst/>
@@ -9824,8 +9825,8 @@
         </p:nvSpPr>
         <p:spPr>
           <a:xfrm>
-            <a:off x="4873752" y="2196150"/>
-            <a:ext cx="2331720" cy="1914674"/>
+            <a:off x="4873752" y="2185494"/>
+            <a:ext cx="2331720" cy="2275840"/>
           </a:xfrm>
           <a:prstGeom prst="rect">
             <a:avLst/>
@@ -9850,7 +9851,7 @@
               </a:spcAft>
             </a:pPr>
             <a:r>
-              <a:rPr b="1" i="0" sz="1120">
+              <a:rPr b="1" i="0" sz="1400">
                 <a:solidFill>
                   <a:srgbClr val="003366"/>
                 </a:solidFill>
@@ -9859,7 +9860,7 @@
               <a:t>- dimension_expr:</a:t>
             </a:r>
             <a:r>
-              <a:rPr b="0" i="0" sz="1120">
+              <a:rPr b="0" i="0" sz="1400">
                 <a:solidFill>
                   <a:srgbClr val="333333"/>
                 </a:solidFill>
@@ -9881,7 +9882,7 @@
               </a:spcAft>
             </a:pPr>
             <a:r>
-              <a:rPr b="1" i="0" sz="1120">
+              <a:rPr b="1" i="0" sz="1400">
                 <a:solidFill>
                   <a:srgbClr val="003366"/>
                 </a:solidFill>
@@ -9890,7 +9891,7 @@
               <a:t>- metric_expr:</a:t>
             </a:r>
             <a:r>
-              <a:rPr b="0" i="0" sz="1120">
+              <a:rPr b="0" i="0" sz="1400">
                 <a:solidFill>
                   <a:srgbClr val="333333"/>
                 </a:solidFill>
@@ -9912,7 +9913,7 @@
               </a:spcAft>
             </a:pPr>
             <a:r>
-              <a:rPr b="1" i="0" sz="1120">
+              <a:rPr b="1" i="0" sz="1400">
                 <a:solidFill>
                   <a:srgbClr val="003366"/>
                 </a:solidFill>
@@ -9921,7 +9922,7 @@
               <a:t>- base_table:</a:t>
             </a:r>
             <a:r>
-              <a:rPr b="0" i="0" sz="1120">
+              <a:rPr b="0" i="0" sz="1400">
                 <a:solidFill>
                   <a:srgbClr val="333333"/>
                 </a:solidFill>
@@ -9943,7 +9944,7 @@
               </a:spcAft>
             </a:pPr>
             <a:r>
-              <a:rPr b="1" i="0" sz="1120">
+              <a:rPr b="1" i="0" sz="1400">
                 <a:solidFill>
                   <a:srgbClr val="003366"/>
                 </a:solidFill>
@@ -9952,7 +9953,7 @@
               <a:t>- joins:</a:t>
             </a:r>
             <a:r>
-              <a:rPr b="0" i="0" sz="1120">
+              <a:rPr b="0" i="0" sz="1400">
                 <a:solidFill>
                   <a:srgbClr val="333333"/>
                 </a:solidFill>
@@ -9974,7 +9975,7 @@
               </a:spcAft>
             </a:pPr>
             <a:r>
-              <a:rPr b="1" i="0" sz="1120">
+              <a:rPr b="1" i="0" sz="1400">
                 <a:solidFill>
                   <a:srgbClr val="003366"/>
                 </a:solidFill>
@@ -9983,7 +9984,7 @@
               <a:t>- predicates:</a:t>
             </a:r>
             <a:r>
-              <a:rPr b="0" i="0" sz="1120">
+              <a:rPr b="0" i="0" sz="1400">
                 <a:solidFill>
                   <a:srgbClr val="333333"/>
                 </a:solidFill>
@@ -10003,7 +10004,7 @@
         <p:spPr>
           <a:xfrm>
             <a:off x="7406640" y="1572768"/>
-            <a:ext cx="4114800" cy="516516"/>
+            <a:ext cx="4114800" cy="507687"/>
           </a:xfrm>
           <a:prstGeom prst="roundRect">
             <a:avLst/>
@@ -10058,8 +10059,8 @@
         </p:nvSpPr>
         <p:spPr>
           <a:xfrm>
-            <a:off x="7406640" y="2196150"/>
-            <a:ext cx="4114800" cy="2582583"/>
+            <a:off x="7406640" y="2185494"/>
+            <a:ext cx="4114800" cy="2538436"/>
           </a:xfrm>
           <a:prstGeom prst="rect">
             <a:avLst/>
@@ -10095,7 +10096,7 @@
               <a:spcAft>
                 <a:spcPts val="100"/>
               </a:spcAft>
-              <a:defRPr sz="930">
+              <a:defRPr sz="1000">
                 <a:solidFill>
                   <a:srgbClr val="505050"/>
                 </a:solidFill>
@@ -10112,7 +10113,7 @@
               <a:spcAft>
                 <a:spcPts val="100"/>
               </a:spcAft>
-              <a:defRPr sz="930">
+              <a:defRPr sz="1000">
                 <a:solidFill>
                   <a:srgbClr val="505050"/>
                 </a:solidFill>
@@ -10129,7 +10130,7 @@
               <a:spcAft>
                 <a:spcPts val="100"/>
               </a:spcAft>
-              <a:defRPr sz="930">
+              <a:defRPr sz="1000">
                 <a:solidFill>
                   <a:srgbClr val="505050"/>
                 </a:solidFill>
@@ -10146,7 +10147,7 @@
               <a:spcAft>
                 <a:spcPts val="100"/>
               </a:spcAft>
-              <a:defRPr sz="930">
+              <a:defRPr sz="1000">
                 <a:solidFill>
                   <a:srgbClr val="505050"/>
                 </a:solidFill>
@@ -10163,7 +10164,7 @@
               <a:spcAft>
                 <a:spcPts val="100"/>
               </a:spcAft>
-              <a:defRPr sz="930">
+              <a:defRPr sz="1000">
                 <a:solidFill>
                   <a:srgbClr val="505050"/>
                 </a:solidFill>
@@ -10180,7 +10181,7 @@
               <a:spcAft>
                 <a:spcPts val="100"/>
               </a:spcAft>
-              <a:defRPr sz="930">
+              <a:defRPr sz="1000">
                 <a:solidFill>
                   <a:srgbClr val="505050"/>
                 </a:solidFill>
@@ -10197,7 +10198,7 @@
               <a:spcAft>
                 <a:spcPts val="100"/>
               </a:spcAft>
-              <a:defRPr sz="930">
+              <a:defRPr sz="1000">
                 <a:solidFill>
                   <a:srgbClr val="505050"/>
                 </a:solidFill>
@@ -10214,7 +10215,7 @@
               <a:spcAft>
                 <a:spcPts val="100"/>
               </a:spcAft>
-              <a:defRPr sz="930">
+              <a:defRPr sz="1000">
                 <a:solidFill>
                   <a:srgbClr val="505050"/>
                 </a:solidFill>
@@ -10231,7 +10232,7 @@
               <a:spcAft>
                 <a:spcPts val="100"/>
               </a:spcAft>
-              <a:defRPr sz="930">
+              <a:defRPr sz="1000">
                 <a:solidFill>
                   <a:srgbClr val="505050"/>
                 </a:solidFill>
@@ -10248,7 +10249,7 @@
               <a:spcAft>
                 <a:spcPts val="100"/>
               </a:spcAft>
-              <a:defRPr sz="930">
+              <a:defRPr sz="1000">
                 <a:solidFill>
                   <a:srgbClr val="505050"/>
                 </a:solidFill>
@@ -10265,7 +10266,7 @@
               <a:spcAft>
                 <a:spcPts val="100"/>
               </a:spcAft>
-              <a:defRPr sz="930">
+              <a:defRPr sz="1000">
                 <a:solidFill>
                   <a:srgbClr val="505050"/>
                 </a:solidFill>
@@ -10287,8 +10288,8 @@
         </p:nvSpPr>
         <p:spPr>
           <a:xfrm>
-            <a:off x="822960" y="5117141"/>
-            <a:ext cx="10378440" cy="552138"/>
+            <a:off x="822960" y="5021540"/>
+            <a:ext cx="10378440" cy="647739"/>
           </a:xfrm>
           <a:prstGeom prst="rect">
             <a:avLst/>
@@ -10313,7 +10314,7 @@
               </a:spcAft>
             </a:pPr>
             <a:r>
-              <a:rPr b="1" i="0" sz="1500">
+              <a:rPr b="1" i="0" sz="1700">
                 <a:solidFill>
                   <a:srgbClr val="003366"/>
                 </a:solidFill>
@@ -10943,7 +10944,7 @@
               <a:spcAft>
                 <a:spcPts val="100"/>
               </a:spcAft>
-              <a:defRPr sz="930">
+              <a:defRPr sz="1000">
                 <a:solidFill>
                   <a:srgbClr val="505050"/>
                 </a:solidFill>
@@ -10960,7 +10961,7 @@
               <a:spcAft>
                 <a:spcPts val="100"/>
               </a:spcAft>
-              <a:defRPr sz="930">
+              <a:defRPr sz="1000">
                 <a:solidFill>
                   <a:srgbClr val="505050"/>
                 </a:solidFill>
@@ -10977,7 +10978,7 @@
               <a:spcAft>
                 <a:spcPts val="100"/>
               </a:spcAft>
-              <a:defRPr sz="930">
+              <a:defRPr sz="1000">
                 <a:solidFill>
                   <a:srgbClr val="505050"/>
                 </a:solidFill>
@@ -10994,7 +10995,7 @@
               <a:spcAft>
                 <a:spcPts val="100"/>
               </a:spcAft>
-              <a:defRPr sz="930">
+              <a:defRPr sz="1000">
                 <a:solidFill>
                   <a:srgbClr val="505050"/>
                 </a:solidFill>
@@ -11011,7 +11012,7 @@
               <a:spcAft>
                 <a:spcPts val="100"/>
               </a:spcAft>
-              <a:defRPr sz="930">
+              <a:defRPr sz="1000">
                 <a:solidFill>
                   <a:srgbClr val="505050"/>
                 </a:solidFill>
@@ -11067,7 +11068,7 @@
           <a:lstStyle/>
           <a:p>
             <a:pPr algn="ctr">
-              <a:defRPr sz="1150" b="1">
+              <a:defRPr sz="1200" b="1">
                 <a:solidFill>
                   <a:srgbClr val="003366"/>
                 </a:solidFill>
@@ -11126,7 +11127,7 @@
               <a:spcAft>
                 <a:spcPts val="100"/>
               </a:spcAft>
-              <a:defRPr sz="930">
+              <a:defRPr sz="1000">
                 <a:solidFill>
                   <a:srgbClr val="505050"/>
                 </a:solidFill>
@@ -11143,7 +11144,7 @@
               <a:spcAft>
                 <a:spcPts val="100"/>
               </a:spcAft>
-              <a:defRPr sz="930">
+              <a:defRPr sz="1000">
                 <a:solidFill>
                   <a:srgbClr val="505050"/>
                 </a:solidFill>
@@ -11160,7 +11161,7 @@
               <a:spcAft>
                 <a:spcPts val="100"/>
               </a:spcAft>
-              <a:defRPr sz="930">
+              <a:defRPr sz="1000">
                 <a:solidFill>
                   <a:srgbClr val="505050"/>
                 </a:solidFill>
@@ -11275,7 +11276,7 @@
               <a:spcAft>
                 <a:spcPts val="100"/>
               </a:spcAft>
-              <a:defRPr sz="860">
+              <a:defRPr sz="1000">
                 <a:solidFill>
                   <a:srgbClr val="505050"/>
                 </a:solidFill>
@@ -11292,7 +11293,7 @@
               <a:spcAft>
                 <a:spcPts val="100"/>
               </a:spcAft>
-              <a:defRPr sz="860">
+              <a:defRPr sz="1000">
                 <a:solidFill>
                   <a:srgbClr val="505050"/>
                 </a:solidFill>
@@ -11309,7 +11310,7 @@
               <a:spcAft>
                 <a:spcPts val="100"/>
               </a:spcAft>
-              <a:defRPr sz="860">
+              <a:defRPr sz="1000">
                 <a:solidFill>
                   <a:srgbClr val="505050"/>
                 </a:solidFill>
@@ -11326,7 +11327,7 @@
               <a:spcAft>
                 <a:spcPts val="100"/>
               </a:spcAft>
-              <a:defRPr sz="860">
+              <a:defRPr sz="1000">
                 <a:solidFill>
                   <a:srgbClr val="505050"/>
                 </a:solidFill>
@@ -11343,7 +11344,7 @@
               <a:spcAft>
                 <a:spcPts val="100"/>
               </a:spcAft>
-              <a:defRPr sz="860">
+              <a:defRPr sz="1000">
                 <a:solidFill>
                   <a:srgbClr val="505050"/>
                 </a:solidFill>
@@ -11360,7 +11361,7 @@
               <a:spcAft>
                 <a:spcPts val="100"/>
               </a:spcAft>
-              <a:defRPr sz="860">
+              <a:defRPr sz="1000">
                 <a:solidFill>
                   <a:srgbClr val="505050"/>
                 </a:solidFill>
@@ -11377,7 +11378,7 @@
               <a:spcAft>
                 <a:spcPts val="100"/>
               </a:spcAft>
-              <a:defRPr sz="860">
+              <a:defRPr sz="1000">
                 <a:solidFill>
                   <a:srgbClr val="505050"/>
                 </a:solidFill>
@@ -11394,7 +11395,7 @@
               <a:spcAft>
                 <a:spcPts val="100"/>
               </a:spcAft>
-              <a:defRPr sz="860">
+              <a:defRPr sz="1000">
                 <a:solidFill>
                   <a:srgbClr val="505050"/>
                 </a:solidFill>
@@ -11411,7 +11412,7 @@
               <a:spcAft>
                 <a:spcPts val="100"/>
               </a:spcAft>
-              <a:defRPr sz="860">
+              <a:defRPr sz="1000">
                 <a:solidFill>
                   <a:srgbClr val="505050"/>
                 </a:solidFill>
@@ -11428,7 +11429,7 @@
               <a:spcAft>
                 <a:spcPts val="100"/>
               </a:spcAft>
-              <a:defRPr sz="860">
+              <a:defRPr sz="1000">
                 <a:solidFill>
                   <a:srgbClr val="505050"/>
                 </a:solidFill>
@@ -11445,7 +11446,7 @@
               <a:spcAft>
                 <a:spcPts val="100"/>
               </a:spcAft>
-              <a:defRPr sz="860">
+              <a:defRPr sz="1000">
                 <a:solidFill>
                   <a:srgbClr val="505050"/>
                 </a:solidFill>
@@ -11462,7 +11463,7 @@
               <a:spcAft>
                 <a:spcPts val="100"/>
               </a:spcAft>
-              <a:defRPr sz="860">
+              <a:defRPr sz="1000">
                 <a:solidFill>
                   <a:srgbClr val="505050"/>
                 </a:solidFill>
@@ -11509,7 +11510,7 @@
                         <a:lnSpc>
                           <a:spcPct val="100000"/>
                         </a:lnSpc>
-                        <a:defRPr sz="1100" b="1">
+                        <a:defRPr sz="1200" b="1">
                           <a:solidFill>
                             <a:srgbClr val="FFFFFF"/>
                           </a:solidFill>
@@ -11536,7 +11537,7 @@
                         <a:lnSpc>
                           <a:spcPct val="100000"/>
                         </a:lnSpc>
-                        <a:defRPr sz="1100" b="1">
+                        <a:defRPr sz="1200" b="1">
                           <a:solidFill>
                             <a:srgbClr val="FFFFFF"/>
                           </a:solidFill>
@@ -11563,7 +11564,7 @@
                         <a:lnSpc>
                           <a:spcPct val="100000"/>
                         </a:lnSpc>
-                        <a:defRPr sz="1100" b="1">
+                        <a:defRPr sz="1200" b="1">
                           <a:solidFill>
                             <a:srgbClr val="FFFFFF"/>
                           </a:solidFill>
@@ -11592,7 +11593,7 @@
                         <a:lnSpc>
                           <a:spcPct val="100000"/>
                         </a:lnSpc>
-                        <a:defRPr sz="1000" b="1">
+                        <a:defRPr sz="1200" b="1">
                           <a:solidFill>
                             <a:srgbClr val="333333"/>
                           </a:solidFill>
@@ -11615,7 +11616,7 @@
                         <a:lnSpc>
                           <a:spcPct val="100000"/>
                         </a:lnSpc>
-                        <a:defRPr sz="1000" b="0">
+                        <a:defRPr sz="1200" b="0">
                           <a:solidFill>
                             <a:srgbClr val="333333"/>
                           </a:solidFill>
@@ -11638,7 +11639,7 @@
                         <a:lnSpc>
                           <a:spcPct val="100000"/>
                         </a:lnSpc>
-                        <a:defRPr sz="1000" b="0">
+                        <a:defRPr sz="1200" b="0">
                           <a:solidFill>
                             <a:srgbClr val="333333"/>
                           </a:solidFill>
@@ -11663,7 +11664,7 @@
                         <a:lnSpc>
                           <a:spcPct val="100000"/>
                         </a:lnSpc>
-                        <a:defRPr sz="1000" b="1">
+                        <a:defRPr sz="1200" b="1">
                           <a:solidFill>
                             <a:srgbClr val="333333"/>
                           </a:solidFill>
@@ -11690,7 +11691,7 @@
                         <a:lnSpc>
                           <a:spcPct val="100000"/>
                         </a:lnSpc>
-                        <a:defRPr sz="1000" b="0">
+                        <a:defRPr sz="1200" b="0">
                           <a:solidFill>
                             <a:srgbClr val="333333"/>
                           </a:solidFill>
@@ -11717,7 +11718,7 @@
                         <a:lnSpc>
                           <a:spcPct val="100000"/>
                         </a:lnSpc>
-                        <a:defRPr sz="1000" b="0">
+                        <a:defRPr sz="1200" b="0">
                           <a:solidFill>
                             <a:srgbClr val="333333"/>
                           </a:solidFill>
@@ -12931,7 +12932,7 @@
           <a:lstStyle/>
           <a:p>
             <a:pPr algn="r">
-              <a:defRPr sz="1000">
+              <a:defRPr sz="1200">
                 <a:solidFill>
                   <a:srgbClr val="333333"/>
                 </a:solidFill>
@@ -13013,7 +13014,7 @@
           <a:lstStyle/>
           <a:p>
             <a:pPr>
-              <a:defRPr sz="1000" b="1">
+              <a:defRPr sz="1200" b="1">
                 <a:solidFill>
                   <a:srgbClr val="333333"/>
                 </a:solidFill>
@@ -13050,7 +13051,7 @@
           <a:lstStyle/>
           <a:p>
             <a:pPr algn="r">
-              <a:defRPr sz="1000">
+              <a:defRPr sz="1200">
                 <a:solidFill>
                   <a:srgbClr val="333333"/>
                 </a:solidFill>
@@ -13132,7 +13133,7 @@
           <a:lstStyle/>
           <a:p>
             <a:pPr>
-              <a:defRPr sz="1000" b="1">
+              <a:defRPr sz="1200" b="1">
                 <a:solidFill>
                   <a:srgbClr val="333333"/>
                 </a:solidFill>
@@ -13169,7 +13170,7 @@
           <a:lstStyle/>
           <a:p>
             <a:pPr algn="r">
-              <a:defRPr sz="1000">
+              <a:defRPr sz="1200">
                 <a:solidFill>
                   <a:srgbClr val="333333"/>
                 </a:solidFill>
@@ -13251,7 +13252,7 @@
           <a:lstStyle/>
           <a:p>
             <a:pPr>
-              <a:defRPr sz="1000" b="1">
+              <a:defRPr sz="1200" b="1">
                 <a:solidFill>
                   <a:srgbClr val="333333"/>
                 </a:solidFill>
@@ -13288,7 +13289,7 @@
           <a:lstStyle/>
           <a:p>
             <a:pPr algn="r">
-              <a:defRPr sz="1000">
+              <a:defRPr sz="1200">
                 <a:solidFill>
                   <a:srgbClr val="333333"/>
                 </a:solidFill>
@@ -13370,7 +13371,7 @@
           <a:lstStyle/>
           <a:p>
             <a:pPr>
-              <a:defRPr sz="1000" b="1">
+              <a:defRPr sz="1200" b="1">
                 <a:solidFill>
                   <a:srgbClr val="333333"/>
                 </a:solidFill>
@@ -13845,7 +13846,7 @@
         <p:spPr>
           <a:xfrm>
             <a:off x="777240" y="1572768"/>
-            <a:ext cx="10515600" cy="540199"/>
+            <a:ext cx="10515600" cy="648239"/>
           </a:xfrm>
           <a:prstGeom prst="rect">
             <a:avLst/>
@@ -13870,7 +13871,7 @@
               </a:spcAft>
             </a:pPr>
             <a:r>
-              <a:rPr b="1" i="0" sz="1450">
+              <a:rPr b="1" i="0" sz="1700">
                 <a:solidFill>
                   <a:srgbClr val="003366"/>
                 </a:solidFill>
@@ -13914,7 +13915,7 @@
                         <a:lnSpc>
                           <a:spcPct val="100000"/>
                         </a:lnSpc>
-                        <a:defRPr sz="1100" b="1">
+                        <a:defRPr sz="1200" b="1">
                           <a:solidFill>
                             <a:srgbClr val="FFFFFF"/>
                           </a:solidFill>
@@ -13941,7 +13942,7 @@
                         <a:lnSpc>
                           <a:spcPct val="100000"/>
                         </a:lnSpc>
-                        <a:defRPr sz="1100" b="1">
+                        <a:defRPr sz="1200" b="1">
                           <a:solidFill>
                             <a:srgbClr val="FFFFFF"/>
                           </a:solidFill>
@@ -13957,7 +13958,7 @@
                         <a:lnSpc>
                           <a:spcPct val="100000"/>
                         </a:lnSpc>
-                        <a:defRPr sz="1100" b="1">
+                        <a:defRPr sz="1200" b="1">
                           <a:solidFill>
                             <a:srgbClr val="FFFFFF"/>
                           </a:solidFill>
@@ -13984,7 +13985,7 @@
                         <a:lnSpc>
                           <a:spcPct val="100000"/>
                         </a:lnSpc>
-                        <a:defRPr sz="1100" b="1">
+                        <a:defRPr sz="1200" b="1">
                           <a:solidFill>
                             <a:srgbClr val="FFFFFF"/>
                           </a:solidFill>
@@ -14000,7 +14001,7 @@
                         <a:lnSpc>
                           <a:spcPct val="100000"/>
                         </a:lnSpc>
-                        <a:defRPr sz="1100" b="1">
+                        <a:defRPr sz="1200" b="1">
                           <a:solidFill>
                             <a:srgbClr val="FFFFFF"/>
                           </a:solidFill>
@@ -14029,7 +14030,7 @@
                         <a:lnSpc>
                           <a:spcPct val="100000"/>
                         </a:lnSpc>
-                        <a:defRPr sz="1100" b="1">
+                        <a:defRPr sz="1200" b="1">
                           <a:solidFill>
                             <a:srgbClr val="333333"/>
                           </a:solidFill>
@@ -14052,7 +14053,7 @@
                         <a:lnSpc>
                           <a:spcPct val="100000"/>
                         </a:lnSpc>
-                        <a:defRPr sz="1100" b="0">
+                        <a:defRPr sz="1200" b="0">
                           <a:solidFill>
                             <a:srgbClr val="333333"/>
                           </a:solidFill>
@@ -14075,7 +14076,7 @@
                         <a:lnSpc>
                           <a:spcPct val="100000"/>
                         </a:lnSpc>
-                        <a:defRPr sz="1100" b="0">
+                        <a:defRPr sz="1200" b="0">
                           <a:solidFill>
                             <a:srgbClr val="333333"/>
                           </a:solidFill>
@@ -14100,7 +14101,7 @@
                         <a:lnSpc>
                           <a:spcPct val="100000"/>
                         </a:lnSpc>
-                        <a:defRPr sz="1100" b="1">
+                        <a:defRPr sz="1200" b="1">
                           <a:solidFill>
                             <a:srgbClr val="333333"/>
                           </a:solidFill>
@@ -14127,7 +14128,7 @@
                         <a:lnSpc>
                           <a:spcPct val="100000"/>
                         </a:lnSpc>
-                        <a:defRPr sz="1100" b="0">
+                        <a:defRPr sz="1200" b="0">
                           <a:solidFill>
                             <a:srgbClr val="333333"/>
                           </a:solidFill>
@@ -14154,7 +14155,7 @@
                         <a:lnSpc>
                           <a:spcPct val="100000"/>
                         </a:lnSpc>
-                        <a:defRPr sz="1100" b="0">
+                        <a:defRPr sz="1200" b="0">
                           <a:solidFill>
                             <a:srgbClr val="333333"/>
                           </a:solidFill>
@@ -14183,7 +14184,7 @@
                         <a:lnSpc>
                           <a:spcPct val="100000"/>
                         </a:lnSpc>
-                        <a:defRPr sz="1100" b="1">
+                        <a:defRPr sz="1200" b="1">
                           <a:solidFill>
                             <a:srgbClr val="333333"/>
                           </a:solidFill>
@@ -14206,7 +14207,7 @@
                         <a:lnSpc>
                           <a:spcPct val="100000"/>
                         </a:lnSpc>
-                        <a:defRPr sz="1100" b="0">
+                        <a:defRPr sz="1200" b="0">
                           <a:solidFill>
                             <a:srgbClr val="333333"/>
                           </a:solidFill>
@@ -14229,7 +14230,7 @@
                         <a:lnSpc>
                           <a:spcPct val="100000"/>
                         </a:lnSpc>
-                        <a:defRPr sz="1100" b="0">
+                        <a:defRPr sz="1200" b="0">
                           <a:solidFill>
                             <a:srgbClr val="333333"/>
                           </a:solidFill>
@@ -14254,7 +14255,7 @@
                         <a:lnSpc>
                           <a:spcPct val="100000"/>
                         </a:lnSpc>
-                        <a:defRPr sz="1100" b="1">
+                        <a:defRPr sz="1200" b="1">
                           <a:solidFill>
                             <a:srgbClr val="333333"/>
                           </a:solidFill>
@@ -14281,7 +14282,7 @@
                         <a:lnSpc>
                           <a:spcPct val="100000"/>
                         </a:lnSpc>
-                        <a:defRPr sz="1100" b="0">
+                        <a:defRPr sz="1200" b="0">
                           <a:solidFill>
                             <a:srgbClr val="333333"/>
                           </a:solidFill>
@@ -14308,7 +14309,7 @@
                         <a:lnSpc>
                           <a:spcPct val="100000"/>
                         </a:lnSpc>
-                        <a:defRPr sz="1100" b="0">
+                        <a:defRPr sz="1200" b="0">
                           <a:solidFill>
                             <a:srgbClr val="333333"/>
                           </a:solidFill>
@@ -14337,7 +14338,7 @@
                         <a:lnSpc>
                           <a:spcPct val="100000"/>
                         </a:lnSpc>
-                        <a:defRPr sz="1100" b="1">
+                        <a:defRPr sz="1200" b="1">
                           <a:solidFill>
                             <a:srgbClr val="333333"/>
                           </a:solidFill>
@@ -14360,7 +14361,7 @@
                         <a:lnSpc>
                           <a:spcPct val="100000"/>
                         </a:lnSpc>
-                        <a:defRPr sz="1100" b="0">
+                        <a:defRPr sz="1200" b="0">
                           <a:solidFill>
                             <a:srgbClr val="333333"/>
                           </a:solidFill>
@@ -14383,7 +14384,7 @@
                         <a:lnSpc>
                           <a:spcPct val="100000"/>
                         </a:lnSpc>
-                        <a:defRPr sz="1100" b="0">
+                        <a:defRPr sz="1200" b="0">
                           <a:solidFill>
                             <a:srgbClr val="333333"/>
                           </a:solidFill>
@@ -14436,7 +14437,7 @@
               </a:spcAft>
             </a:pPr>
             <a:r>
-              <a:rPr b="1" i="0" sz="1350">
+              <a:rPr b="1" i="0" sz="1500">
                 <a:solidFill>
                   <a:srgbClr val="003366"/>
                 </a:solidFill>
@@ -14445,7 +14446,7 @@
               <a:t>The left column has no model in it:</a:t>
             </a:r>
             <a:r>
-              <a:rPr b="0" i="0" sz="1250">
+              <a:rPr b="0" i="0" sz="1400">
                 <a:solidFill>
                   <a:srgbClr val="333333"/>
                 </a:solidFill>
@@ -14467,7 +14468,7 @@
               </a:spcAft>
             </a:pPr>
             <a:r>
-              <a:rPr b="1" i="0" sz="1350">
+              <a:rPr b="1" i="0" sz="1500">
                 <a:solidFill>
                   <a:srgbClr val="003366"/>
                 </a:solidFill>
@@ -14476,7 +14477,7 @@
               <a:t>Declining is only meaningful next to answering:</a:t>
             </a:r>
             <a:r>
-              <a:rPr b="0" i="0" sz="1250">
+              <a:rPr b="0" i="0" sz="1400">
                 <a:solidFill>
                   <a:srgbClr val="333333"/>
                 </a:solidFill>
@@ -15593,7 +15594,7 @@
               </a:spcAft>
             </a:pPr>
             <a:r>
-              <a:rPr b="1" i="0" sz="1650">
+              <a:rPr b="1" i="0" sz="1700">
                 <a:solidFill>
                   <a:srgbClr val="003366"/>
                 </a:solidFill>
@@ -15638,7 +15639,7 @@
                         <a:lnSpc>
                           <a:spcPct val="100000"/>
                         </a:lnSpc>
-                        <a:defRPr sz="1150" b="1">
+                        <a:defRPr sz="1200" b="1">
                           <a:solidFill>
                             <a:srgbClr val="FFFFFF"/>
                           </a:solidFill>
@@ -15665,7 +15666,7 @@
                         <a:lnSpc>
                           <a:spcPct val="100000"/>
                         </a:lnSpc>
-                        <a:defRPr sz="1150" b="1">
+                        <a:defRPr sz="1200" b="1">
                           <a:solidFill>
                             <a:srgbClr val="FFFFFF"/>
                           </a:solidFill>
@@ -15692,7 +15693,7 @@
                         <a:lnSpc>
                           <a:spcPct val="100000"/>
                         </a:lnSpc>
-                        <a:defRPr sz="1150" b="1">
+                        <a:defRPr sz="1200" b="1">
                           <a:solidFill>
                             <a:srgbClr val="FFFFFF"/>
                           </a:solidFill>
@@ -15719,7 +15720,7 @@
                         <a:lnSpc>
                           <a:spcPct val="100000"/>
                         </a:lnSpc>
-                        <a:defRPr sz="1150" b="1">
+                        <a:defRPr sz="1200" b="1">
                           <a:solidFill>
                             <a:srgbClr val="FFFFFF"/>
                           </a:solidFill>
@@ -15748,7 +15749,7 @@
                         <a:lnSpc>
                           <a:spcPct val="100000"/>
                         </a:lnSpc>
-                        <a:defRPr sz="1150" b="1">
+                        <a:defRPr sz="1200" b="1">
                           <a:solidFill>
                             <a:srgbClr val="333333"/>
                           </a:solidFill>
@@ -15771,7 +15772,7 @@
                         <a:lnSpc>
                           <a:spcPct val="100000"/>
                         </a:lnSpc>
-                        <a:defRPr sz="1150" b="0">
+                        <a:defRPr sz="1200" b="0">
                           <a:solidFill>
                             <a:srgbClr val="333333"/>
                           </a:solidFill>
@@ -15794,7 +15795,7 @@
                         <a:lnSpc>
                           <a:spcPct val="100000"/>
                         </a:lnSpc>
-                        <a:defRPr sz="1150" b="0">
+                        <a:defRPr sz="1200" b="0">
                           <a:solidFill>
                             <a:srgbClr val="333333"/>
                           </a:solidFill>
@@ -15817,7 +15818,7 @@
                         <a:lnSpc>
                           <a:spcPct val="100000"/>
                         </a:lnSpc>
-                        <a:defRPr sz="1150" b="0">
+                        <a:defRPr sz="1200" b="0">
                           <a:solidFill>
                             <a:srgbClr val="333333"/>
                           </a:solidFill>
@@ -15842,7 +15843,7 @@
                         <a:lnSpc>
                           <a:spcPct val="100000"/>
                         </a:lnSpc>
-                        <a:defRPr sz="1150" b="1">
+                        <a:defRPr sz="1200" b="1">
                           <a:solidFill>
                             <a:srgbClr val="333333"/>
                           </a:solidFill>
@@ -15869,7 +15870,7 @@
                         <a:lnSpc>
                           <a:spcPct val="100000"/>
                         </a:lnSpc>
-                        <a:defRPr sz="1150" b="0">
+                        <a:defRPr sz="1200" b="0">
                           <a:solidFill>
                             <a:srgbClr val="333333"/>
                           </a:solidFill>
@@ -15896,7 +15897,7 @@
                         <a:lnSpc>
                           <a:spcPct val="100000"/>
                         </a:lnSpc>
-                        <a:defRPr sz="1150" b="0">
+                        <a:defRPr sz="1200" b="0">
                           <a:solidFill>
                             <a:srgbClr val="333333"/>
                           </a:solidFill>
@@ -15923,7 +15924,7 @@
                         <a:lnSpc>
                           <a:spcPct val="100000"/>
                         </a:lnSpc>
-                        <a:defRPr sz="1150" b="0">
+                        <a:defRPr sz="1200" b="0">
                           <a:solidFill>
                             <a:srgbClr val="333333"/>
                           </a:solidFill>
@@ -15952,7 +15953,7 @@
                         <a:lnSpc>
                           <a:spcPct val="100000"/>
                         </a:lnSpc>
-                        <a:defRPr sz="1150" b="1">
+                        <a:defRPr sz="1200" b="1">
                           <a:solidFill>
                             <a:srgbClr val="333333"/>
                           </a:solidFill>
@@ -15975,7 +15976,7 @@
                         <a:lnSpc>
                           <a:spcPct val="100000"/>
                         </a:lnSpc>
-                        <a:defRPr sz="1150" b="0">
+                        <a:defRPr sz="1200" b="0">
                           <a:solidFill>
                             <a:srgbClr val="333333"/>
                           </a:solidFill>
@@ -15998,7 +15999,7 @@
                         <a:lnSpc>
                           <a:spcPct val="100000"/>
                         </a:lnSpc>
-                        <a:defRPr sz="1150" b="0">
+                        <a:defRPr sz="1200" b="0">
                           <a:solidFill>
                             <a:srgbClr val="333333"/>
                           </a:solidFill>
@@ -16021,7 +16022,7 @@
                         <a:lnSpc>
                           <a:spcPct val="100000"/>
                         </a:lnSpc>
-                        <a:defRPr sz="1150" b="0">
+                        <a:defRPr sz="1200" b="0">
                           <a:solidFill>
                             <a:srgbClr val="333333"/>
                           </a:solidFill>
@@ -16046,7 +16047,7 @@
                         <a:lnSpc>
                           <a:spcPct val="100000"/>
                         </a:lnSpc>
-                        <a:defRPr sz="1150" b="1">
+                        <a:defRPr sz="1200" b="1">
                           <a:solidFill>
                             <a:srgbClr val="333333"/>
                           </a:solidFill>
@@ -16073,7 +16074,7 @@
                         <a:lnSpc>
                           <a:spcPct val="100000"/>
                         </a:lnSpc>
-                        <a:defRPr sz="1150" b="0">
+                        <a:defRPr sz="1200" b="0">
                           <a:solidFill>
                             <a:srgbClr val="333333"/>
                           </a:solidFill>
@@ -16100,7 +16101,7 @@
                         <a:lnSpc>
                           <a:spcPct val="100000"/>
                         </a:lnSpc>
-                        <a:defRPr sz="1150" b="0">
+                        <a:defRPr sz="1200" b="0">
                           <a:solidFill>
                             <a:srgbClr val="333333"/>
                           </a:solidFill>
@@ -16127,7 +16128,7 @@
                         <a:lnSpc>
                           <a:spcPct val="100000"/>
                         </a:lnSpc>
-                        <a:defRPr sz="1150" b="0">
+                        <a:defRPr sz="1200" b="0">
                           <a:solidFill>
                             <a:srgbClr val="333333"/>
                           </a:solidFill>
@@ -16156,7 +16157,7 @@
                         <a:lnSpc>
                           <a:spcPct val="100000"/>
                         </a:lnSpc>
-                        <a:defRPr sz="1150" b="1">
+                        <a:defRPr sz="1200" b="1">
                           <a:solidFill>
                             <a:srgbClr val="333333"/>
                           </a:solidFill>
@@ -16179,7 +16180,7 @@
                         <a:lnSpc>
                           <a:spcPct val="100000"/>
                         </a:lnSpc>
-                        <a:defRPr sz="1150" b="1">
+                        <a:defRPr sz="1200" b="1">
                           <a:solidFill>
                             <a:srgbClr val="333333"/>
                           </a:solidFill>
@@ -16202,7 +16203,7 @@
                         <a:lnSpc>
                           <a:spcPct val="100000"/>
                         </a:lnSpc>
-                        <a:defRPr sz="1150" b="1">
+                        <a:defRPr sz="1200" b="1">
                           <a:solidFill>
                             <a:srgbClr val="333333"/>
                           </a:solidFill>
@@ -16225,7 +16226,7 @@
                         <a:lnSpc>
                           <a:spcPct val="100000"/>
                         </a:lnSpc>
-                        <a:defRPr sz="1150" b="1">
+                        <a:defRPr sz="1200" b="1">
                           <a:solidFill>
                             <a:srgbClr val="333333"/>
                           </a:solidFill>
@@ -16253,7 +16254,7 @@
         <p:spPr>
           <a:xfrm>
             <a:off x="777240" y="4636008"/>
-            <a:ext cx="10515600" cy="1234440"/>
+            <a:ext cx="10515600" cy="1572768"/>
           </a:xfrm>
           <a:prstGeom prst="rect">
             <a:avLst/>
@@ -16278,7 +16279,7 @@
               </a:spcAft>
             </a:pPr>
             <a:r>
-              <a:rPr b="1" i="0" sz="1450">
+              <a:rPr b="1" i="0" sz="1700">
                 <a:solidFill>
                   <a:srgbClr val="003366"/>
                 </a:solidFill>
@@ -16300,7 +16301,7 @@
               </a:spcAft>
             </a:pPr>
             <a:r>
-              <a:rPr b="1" i="0" sz="1450">
+              <a:rPr b="1" i="0" sz="1700">
                 <a:solidFill>
                   <a:srgbClr val="003366"/>
                 </a:solidFill>
@@ -16708,7 +16709,7 @@
               </a:spcAft>
             </a:pPr>
             <a:r>
-              <a:rPr b="1" i="0" sz="1650">
+              <a:rPr b="1" i="0" sz="1700">
                 <a:solidFill>
                   <a:srgbClr val="003366"/>
                 </a:solidFill>
@@ -17142,7 +17143,7 @@
                         <a:lnSpc>
                           <a:spcPct val="100000"/>
                         </a:lnSpc>
-                        <a:defRPr sz="1100" b="1">
+                        <a:defRPr sz="1200" b="1">
                           <a:solidFill>
                             <a:srgbClr val="FFFFFF"/>
                           </a:solidFill>
@@ -17169,7 +17170,7 @@
                         <a:lnSpc>
                           <a:spcPct val="100000"/>
                         </a:lnSpc>
-                        <a:defRPr sz="1100" b="1">
+                        <a:defRPr sz="1200" b="1">
                           <a:solidFill>
                             <a:srgbClr val="FFFFFF"/>
                           </a:solidFill>
@@ -17198,7 +17199,7 @@
                         <a:lnSpc>
                           <a:spcPct val="100000"/>
                         </a:lnSpc>
-                        <a:defRPr sz="1050" b="1">
+                        <a:defRPr sz="1200" b="1">
                           <a:solidFill>
                             <a:srgbClr val="333333"/>
                           </a:solidFill>
@@ -17221,7 +17222,7 @@
                         <a:lnSpc>
                           <a:spcPct val="100000"/>
                         </a:lnSpc>
-                        <a:defRPr sz="1050" b="0">
+                        <a:defRPr sz="1200" b="0">
                           <a:solidFill>
                             <a:srgbClr val="333333"/>
                           </a:solidFill>
@@ -17246,7 +17247,7 @@
                         <a:lnSpc>
                           <a:spcPct val="100000"/>
                         </a:lnSpc>
-                        <a:defRPr sz="1050" b="1">
+                        <a:defRPr sz="1200" b="1">
                           <a:solidFill>
                             <a:srgbClr val="333333"/>
                           </a:solidFill>
@@ -17273,7 +17274,7 @@
                         <a:lnSpc>
                           <a:spcPct val="100000"/>
                         </a:lnSpc>
-                        <a:defRPr sz="1050" b="0">
+                        <a:defRPr sz="1200" b="0">
                           <a:solidFill>
                             <a:srgbClr val="333333"/>
                           </a:solidFill>
@@ -17302,7 +17303,7 @@
                         <a:lnSpc>
                           <a:spcPct val="100000"/>
                         </a:lnSpc>
-                        <a:defRPr sz="1050" b="1">
+                        <a:defRPr sz="1200" b="1">
                           <a:solidFill>
                             <a:srgbClr val="333333"/>
                           </a:solidFill>
@@ -17325,7 +17326,7 @@
                         <a:lnSpc>
                           <a:spcPct val="100000"/>
                         </a:lnSpc>
-                        <a:defRPr sz="1050" b="0">
+                        <a:defRPr sz="1200" b="0">
                           <a:solidFill>
                             <a:srgbClr val="333333"/>
                           </a:solidFill>
@@ -17779,7 +17780,7 @@
         <p:spPr>
           <a:xfrm>
             <a:off x="777240" y="1572768"/>
-            <a:ext cx="10515600" cy="548640"/>
+            <a:ext cx="10515600" cy="658368"/>
           </a:xfrm>
           <a:prstGeom prst="rect">
             <a:avLst/>
@@ -17804,7 +17805,7 @@
               </a:spcAft>
             </a:pPr>
             <a:r>
-              <a:rPr b="1" i="0" sz="1450">
+              <a:rPr b="1" i="0" sz="1700">
                 <a:solidFill>
                   <a:srgbClr val="003366"/>
                 </a:solidFill>
@@ -17848,7 +17849,7 @@
                         <a:lnSpc>
                           <a:spcPct val="100000"/>
                         </a:lnSpc>
-                        <a:defRPr sz="1150" b="1">
+                        <a:defRPr sz="1200" b="1">
                           <a:solidFill>
                             <a:srgbClr val="FFFFFF"/>
                           </a:solidFill>
@@ -17875,7 +17876,7 @@
                         <a:lnSpc>
                           <a:spcPct val="100000"/>
                         </a:lnSpc>
-                        <a:defRPr sz="1150" b="1">
+                        <a:defRPr sz="1200" b="1">
                           <a:solidFill>
                             <a:srgbClr val="FFFFFF"/>
                           </a:solidFill>
@@ -17902,7 +17903,7 @@
                         <a:lnSpc>
                           <a:spcPct val="100000"/>
                         </a:lnSpc>
-                        <a:defRPr sz="1150" b="1">
+                        <a:defRPr sz="1200" b="1">
                           <a:solidFill>
                             <a:srgbClr val="FFFFFF"/>
                           </a:solidFill>
@@ -17931,7 +17932,7 @@
                         <a:lnSpc>
                           <a:spcPct val="100000"/>
                         </a:lnSpc>
-                        <a:defRPr sz="1100" b="0">
+                        <a:defRPr sz="1200" b="0">
                           <a:solidFill>
                             <a:srgbClr val="333333"/>
                           </a:solidFill>
@@ -17947,7 +17948,7 @@
                         <a:lnSpc>
                           <a:spcPct val="100000"/>
                         </a:lnSpc>
-                        <a:defRPr sz="1100" b="0">
+                        <a:defRPr sz="1200" b="0">
                           <a:solidFill>
                             <a:srgbClr val="333333"/>
                           </a:solidFill>
@@ -17970,7 +17971,7 @@
                         <a:lnSpc>
                           <a:spcPct val="100000"/>
                         </a:lnSpc>
-                        <a:defRPr sz="1100" b="1">
+                        <a:defRPr sz="1200" b="1">
                           <a:solidFill>
                             <a:srgbClr val="333333"/>
                           </a:solidFill>
@@ -17993,7 +17994,7 @@
                         <a:lnSpc>
                           <a:spcPct val="100000"/>
                         </a:lnSpc>
-                        <a:defRPr sz="1100" b="0">
+                        <a:defRPr sz="1200" b="0">
                           <a:solidFill>
                             <a:srgbClr val="333333"/>
                           </a:solidFill>
@@ -18018,7 +18019,7 @@
                         <a:lnSpc>
                           <a:spcPct val="100000"/>
                         </a:lnSpc>
-                        <a:defRPr sz="1100" b="0">
+                        <a:defRPr sz="1200" b="0">
                           <a:solidFill>
                             <a:srgbClr val="333333"/>
                           </a:solidFill>
@@ -18034,7 +18035,7 @@
                         <a:lnSpc>
                           <a:spcPct val="100000"/>
                         </a:lnSpc>
-                        <a:defRPr sz="1100" b="0">
+                        <a:defRPr sz="1200" b="0">
                           <a:solidFill>
                             <a:srgbClr val="333333"/>
                           </a:solidFill>
@@ -18061,7 +18062,7 @@
                         <a:lnSpc>
                           <a:spcPct val="100000"/>
                         </a:lnSpc>
-                        <a:defRPr sz="1100" b="1">
+                        <a:defRPr sz="1200" b="1">
                           <a:solidFill>
                             <a:srgbClr val="333333"/>
                           </a:solidFill>
@@ -18088,7 +18089,7 @@
                         <a:lnSpc>
                           <a:spcPct val="100000"/>
                         </a:lnSpc>
-                        <a:defRPr sz="1100" b="0">
+                        <a:defRPr sz="1200" b="0">
                           <a:solidFill>
                             <a:srgbClr val="333333"/>
                           </a:solidFill>
@@ -18199,7 +18200,7 @@
                         <a:lnSpc>
                           <a:spcPct val="100000"/>
                         </a:lnSpc>
-                        <a:defRPr sz="1100" b="1">
+                        <a:defRPr sz="1200" b="1">
                           <a:solidFill>
                             <a:srgbClr val="FFFFFF"/>
                           </a:solidFill>
@@ -18226,7 +18227,7 @@
                         <a:lnSpc>
                           <a:spcPct val="100000"/>
                         </a:lnSpc>
-                        <a:defRPr sz="1100" b="1">
+                        <a:defRPr sz="1200" b="1">
                           <a:solidFill>
                             <a:srgbClr val="FFFFFF"/>
                           </a:solidFill>
@@ -18255,7 +18256,7 @@
                         <a:lnSpc>
                           <a:spcPct val="100000"/>
                         </a:lnSpc>
-                        <a:defRPr sz="1050" b="0">
+                        <a:defRPr sz="1200" b="0">
                           <a:solidFill>
                             <a:srgbClr val="333333"/>
                           </a:solidFill>
@@ -18271,7 +18272,7 @@
                         <a:lnSpc>
                           <a:spcPct val="100000"/>
                         </a:lnSpc>
-                        <a:defRPr sz="1050" b="0">
+                        <a:defRPr sz="1200" b="0">
                           <a:solidFill>
                             <a:srgbClr val="333333"/>
                           </a:solidFill>
@@ -18294,7 +18295,7 @@
                         <a:lnSpc>
                           <a:spcPct val="100000"/>
                         </a:lnSpc>
-                        <a:defRPr sz="1050" b="0">
+                        <a:defRPr sz="1200" b="0">
                           <a:solidFill>
                             <a:srgbClr val="333333"/>
                           </a:solidFill>
@@ -18319,7 +18320,7 @@
                         <a:lnSpc>
                           <a:spcPct val="100000"/>
                         </a:lnSpc>
-                        <a:defRPr sz="1050" b="0">
+                        <a:defRPr sz="1200" b="0">
                           <a:solidFill>
                             <a:srgbClr val="333333"/>
                           </a:solidFill>
@@ -18335,7 +18336,7 @@
                         <a:lnSpc>
                           <a:spcPct val="100000"/>
                         </a:lnSpc>
-                        <a:defRPr sz="1050" b="0">
+                        <a:defRPr sz="1200" b="0">
                           <a:solidFill>
                             <a:srgbClr val="333333"/>
                           </a:solidFill>
@@ -18362,7 +18363,7 @@
                         <a:lnSpc>
                           <a:spcPct val="100000"/>
                         </a:lnSpc>
-                        <a:defRPr sz="1050" b="0">
+                        <a:defRPr sz="1200" b="0">
                           <a:solidFill>
                             <a:srgbClr val="333333"/>
                           </a:solidFill>
@@ -18391,7 +18392,7 @@
                         <a:lnSpc>
                           <a:spcPct val="100000"/>
                         </a:lnSpc>
-                        <a:defRPr sz="1050" b="1">
+                        <a:defRPr sz="1200" b="1">
                           <a:solidFill>
                             <a:srgbClr val="333333"/>
                           </a:solidFill>
@@ -18414,7 +18415,7 @@
                         <a:lnSpc>
                           <a:spcPct val="100000"/>
                         </a:lnSpc>
-                        <a:defRPr sz="1050" b="1">
+                        <a:defRPr sz="1200" b="1">
                           <a:solidFill>
                             <a:srgbClr val="333333"/>
                           </a:solidFill>
@@ -18869,7 +18870,7 @@
         </p:nvGraphicFramePr>
         <p:xfrm>
           <a:off x="822960" y="1572768"/>
-          <a:ext cx="10561320" cy="4160520"/>
+          <a:ext cx="10561320" cy="4041648"/>
         </p:xfrm>
         <a:graphic>
           <a:graphicData uri="http://schemas.openxmlformats.org/drawingml/2006/table">
@@ -18975,7 +18976,7 @@
                         <a:lnSpc>
                           <a:spcPct val="100000"/>
                         </a:lnSpc>
-                        <a:defRPr sz="1150" b="1">
+                        <a:defRPr sz="1200" b="1">
                           <a:solidFill>
                             <a:srgbClr val="333333"/>
                           </a:solidFill>
@@ -18998,7 +18999,7 @@
                         <a:lnSpc>
                           <a:spcPct val="100000"/>
                         </a:lnSpc>
-                        <a:defRPr sz="1150" b="0">
+                        <a:defRPr sz="1200" b="0">
                           <a:solidFill>
                             <a:srgbClr val="333333"/>
                           </a:solidFill>
@@ -19021,7 +19022,7 @@
                         <a:lnSpc>
                           <a:spcPct val="100000"/>
                         </a:lnSpc>
-                        <a:defRPr sz="1150" b="0">
+                        <a:defRPr sz="1200" b="0">
                           <a:solidFill>
                             <a:srgbClr val="333333"/>
                           </a:solidFill>
@@ -19046,7 +19047,7 @@
                         <a:lnSpc>
                           <a:spcPct val="100000"/>
                         </a:lnSpc>
-                        <a:defRPr sz="1150" b="1">
+                        <a:defRPr sz="1200" b="1">
                           <a:solidFill>
                             <a:srgbClr val="333333"/>
                           </a:solidFill>
@@ -19073,7 +19074,7 @@
                         <a:lnSpc>
                           <a:spcPct val="100000"/>
                         </a:lnSpc>
-                        <a:defRPr sz="1150" b="0">
+                        <a:defRPr sz="1200" b="0">
                           <a:solidFill>
                             <a:srgbClr val="333333"/>
                           </a:solidFill>
@@ -19100,7 +19101,7 @@
                         <a:lnSpc>
                           <a:spcPct val="100000"/>
                         </a:lnSpc>
-                        <a:defRPr sz="1150" b="0">
+                        <a:defRPr sz="1200" b="0">
                           <a:solidFill>
                             <a:srgbClr val="333333"/>
                           </a:solidFill>
@@ -19129,7 +19130,7 @@
                         <a:lnSpc>
                           <a:spcPct val="100000"/>
                         </a:lnSpc>
-                        <a:defRPr sz="1150" b="1">
+                        <a:defRPr sz="1200" b="1">
                           <a:solidFill>
                             <a:srgbClr val="333333"/>
                           </a:solidFill>
@@ -19152,7 +19153,7 @@
                         <a:lnSpc>
                           <a:spcPct val="100000"/>
                         </a:lnSpc>
-                        <a:defRPr sz="1150" b="0">
+                        <a:defRPr sz="1200" b="0">
                           <a:solidFill>
                             <a:srgbClr val="333333"/>
                           </a:solidFill>
@@ -19175,7 +19176,7 @@
                         <a:lnSpc>
                           <a:spcPct val="100000"/>
                         </a:lnSpc>
-                        <a:defRPr sz="1150" b="0">
+                        <a:defRPr sz="1200" b="0">
                           <a:solidFill>
                             <a:srgbClr val="333333"/>
                           </a:solidFill>
@@ -19200,7 +19201,7 @@
                         <a:lnSpc>
                           <a:spcPct val="100000"/>
                         </a:lnSpc>
-                        <a:defRPr sz="1150" b="1">
+                        <a:defRPr sz="1200" b="1">
                           <a:solidFill>
                             <a:srgbClr val="333333"/>
                           </a:solidFill>
@@ -19227,7 +19228,7 @@
                         <a:lnSpc>
                           <a:spcPct val="100000"/>
                         </a:lnSpc>
-                        <a:defRPr sz="1150" b="0">
+                        <a:defRPr sz="1200" b="0">
                           <a:solidFill>
                             <a:srgbClr val="333333"/>
                           </a:solidFill>
@@ -19254,7 +19255,7 @@
                         <a:lnSpc>
                           <a:spcPct val="100000"/>
                         </a:lnSpc>
-                        <a:defRPr sz="1150" b="0">
+                        <a:defRPr sz="1200" b="0">
                           <a:solidFill>
                             <a:srgbClr val="333333"/>
                           </a:solidFill>
@@ -19285,8 +19286,8 @@
         </p:nvSpPr>
         <p:spPr>
           <a:xfrm>
-            <a:off x="960120" y="5806440"/>
-            <a:ext cx="10149840" cy="411480"/>
+            <a:off x="960120" y="5614416"/>
+            <a:ext cx="10149840" cy="621792"/>
           </a:xfrm>
           <a:prstGeom prst="rect">
             <a:avLst/>
@@ -19311,7 +19312,7 @@
               </a:spcAft>
             </a:pPr>
             <a:r>
-              <a:rPr b="1" i="0" sz="1350">
+              <a:rPr b="1" i="0" sz="1500">
                 <a:solidFill>
                   <a:srgbClr val="003366"/>
                 </a:solidFill>
@@ -19320,7 +19321,7 @@
               <a:t>Expected impact:</a:t>
             </a:r>
             <a:r>
-              <a:rPr b="0" i="0" sz="1250">
+              <a:rPr b="0" i="0" sz="1400">
                 <a:solidFill>
                   <a:srgbClr val="333333"/>
                 </a:solidFill>
@@ -19569,7 +19570,7 @@
               </a:defRPr>
             </a:pPr>
             <a:r>
-              <a:t>Scope and Limitations</a:t>
+              <a:t>Scope of the Evaluation</a:t>
             </a:r>
           </a:p>
         </p:txBody>
@@ -19728,7 +19729,7 @@
               </a:spcAft>
             </a:pPr>
             <a:r>
-              <a:rPr b="1" i="0" sz="1400">
+              <a:rPr b="1" i="0" sz="1800">
                 <a:solidFill>
                   <a:srgbClr val="003366"/>
                 </a:solidFill>
@@ -19750,7 +19751,7 @@
               </a:spcAft>
             </a:pPr>
             <a:r>
-              <a:rPr b="0" i="0" sz="1100">
+              <a:rPr b="0" i="0" sz="1500">
                 <a:solidFill>
                   <a:srgbClr val="333333"/>
                 </a:solidFill>
@@ -19772,22 +19773,44 @@
               </a:spcAft>
             </a:pPr>
             <a:r>
-              <a:rPr b="1" i="0" sz="1100">
+              <a:rPr b="1" i="0" sz="1500">
                 <a:solidFill>
                   <a:srgbClr val="003366"/>
                 </a:solidFill>
                 <a:latin typeface="Times New Roman"/>
               </a:rPr>
-              <a:t>- Because the layer is per-deployment, cross-domain benchmarks such as Spider and BIRD do not apply:</a:t>
-            </a:r>
-            <a:r>
-              <a:rPr b="0" i="0" sz="1100">
+              <a:t>- The layer is per-deployment, so cross-domain benchmarks such as Spider and BIRD do not apply:</a:t>
+            </a:r>
+            <a:r>
+              <a:rPr b="0" i="0" sz="1500">
                 <a:solidFill>
                   <a:srgbClr val="333333"/>
                 </a:solidFill>
                 <a:latin typeface="Times New Roman"/>
               </a:rPr>
               <a:t> they test generalisation to unseen schemas, which this architecture does not attempt.</a:t>
+            </a:r>
+          </a:p>
+          <a:p>
+            <a:pPr marL="256032" indent="-256032">
+              <a:lnSpc>
+                <a:spcPct val="108000"/>
+              </a:lnSpc>
+              <a:spcBef>
+                <a:spcPts val="300"/>
+              </a:spcBef>
+              <a:spcAft>
+                <a:spcPts val="700"/>
+              </a:spcAft>
+            </a:pPr>
+            <a:r>
+              <a:rPr b="0" i="0" sz="1500">
+                <a:solidFill>
+                  <a:srgbClr val="333333"/>
+                </a:solidFill>
+                <a:latin typeface="Times New Roman"/>
+              </a:rPr>
+              <a:t>- The gateway resolves a model alias per request, so the run is not pinned to one model. Each result row records what served it.</a:t>
             </a:r>
           </a:p>
           <a:p>
@@ -19803,13 +19826,13 @@
               </a:spcAft>
             </a:pPr>
             <a:r>
-              <a:rPr b="1" i="0" sz="1400">
+              <a:rPr b="1" i="0" sz="1800">
                 <a:solidFill>
                   <a:srgbClr val="003366"/>
                 </a:solidFill>
                 <a:latin typeface="Times New Roman"/>
               </a:rPr>
-              <a:t>Limitations I would raise before the committee does:</a:t>
+              <a:t>Not a thesis limitation:</a:t>
             </a:r>
           </a:p>
           <a:p>
@@ -19825,170 +19848,7 @@
               </a:spcAft>
             </a:pPr>
             <a:r>
-              <a:rPr b="0" i="0" sz="1100">
-                <a:solidFill>
-                  <a:srgbClr val="333333"/>
-                </a:solidFill>
-                <a:latin typeface="Times New Roman"/>
-              </a:rPr>
-              <a:t>- Correctness at scale is measured on the 20 reports, not on all 425 supported questions. For those, I show that the SQL runs — not that every answer is right.</a:t>
-            </a:r>
-          </a:p>
-          <a:p>
-            <a:pPr marL="256032" indent="-256032">
-              <a:lnSpc>
-                <a:spcPct val="108000"/>
-              </a:lnSpc>
-              <a:spcBef>
-                <a:spcPts val="300"/>
-              </a:spcBef>
-              <a:spcAft>
-                <a:spcPts val="700"/>
-              </a:spcAft>
-            </a:pPr>
-            <a:r>
-              <a:rPr b="1" i="0" sz="1100">
-                <a:solidFill>
-                  <a:srgbClr val="003366"/>
-                </a:solidFill>
-                <a:latin typeface="Times New Roman"/>
-              </a:rPr>
-              <a:t>- The seeded catalogue is small:</a:t>
-            </a:r>
-            <a:r>
-              <a:rPr b="0" i="0" sz="1100">
-                <a:solidFill>
-                  <a:srgbClr val="333333"/>
-                </a:solidFill>
-                <a:latin typeface="Times New Roman"/>
-              </a:rPr>
-              <a:t> 17 products in 8 categories against 2,500 orders. Order-side reports are tested at realistic volume, but bestsellers and revenue-by-category agree with nopCommerce over short lists. Same compiled SQL, weaker test.</a:t>
-            </a:r>
-          </a:p>
-          <a:p>
-            <a:pPr marL="256032" indent="-256032">
-              <a:lnSpc>
-                <a:spcPct val="108000"/>
-              </a:lnSpc>
-              <a:spcBef>
-                <a:spcPts val="300"/>
-              </a:spcBef>
-              <a:spcAft>
-                <a:spcPts val="700"/>
-              </a:spcAft>
-            </a:pPr>
-            <a:r>
-              <a:rPr b="0" i="0" sz="1100">
-                <a:solidFill>
-                  <a:srgbClr val="333333"/>
-                </a:solidFill>
-                <a:latin typeface="Times New Roman"/>
-              </a:rPr>
-              <a:t>- Three of the 75 boundary questions were not declined. One was a malformed model reply; the other two are the same question phrased twice, asking to compare two named carriers. The model flagged "DHL" and "FedEx" as unmapped, and AEGIS answered by shipping method anyway — by design, because a model-reported gap is treated as evidence, not a verdict. That choice keeps false refusals low and costs exactly this.</a:t>
-            </a:r>
-          </a:p>
-          <a:p>
-            <a:pPr marL="256032" indent="-256032">
-              <a:lnSpc>
-                <a:spcPct val="108000"/>
-              </a:lnSpc>
-              <a:spcBef>
-                <a:spcPts val="300"/>
-              </a:spcBef>
-              <a:spcAft>
-                <a:spcPts val="700"/>
-              </a:spcAft>
-            </a:pPr>
-            <a:r>
-              <a:rPr b="0" i="0" sz="1100">
-                <a:solidFill>
-                  <a:srgbClr val="333333"/>
-                </a:solidFill>
-                <a:latin typeface="Times New Roman"/>
-              </a:rPr>
-              <a:t>- The gateway used for intent extraction resolves a model alias per request, so the run is not pinned to a single model. Each result row records what actually served it.</a:t>
-            </a:r>
-          </a:p>
-          <a:p>
-            <a:pPr marL="256032" indent="-256032">
-              <a:lnSpc>
-                <a:spcPct val="108000"/>
-              </a:lnSpc>
-              <a:spcBef>
-                <a:spcPts val="300"/>
-              </a:spcBef>
-              <a:spcAft>
-                <a:spcPts val="700"/>
-              </a:spcAft>
-            </a:pPr>
-            <a:r>
-              <a:rPr b="0" i="0" sz="1100">
-                <a:solidFill>
-                  <a:srgbClr val="333333"/>
-                </a:solidFill>
-                <a:latin typeface="Times New Roman"/>
-              </a:rPr>
-              <a:t>- Five reports differ from the platform's own output in row count or label column. No report differs in value.</a:t>
-            </a:r>
-          </a:p>
-          <a:p>
-            <a:pPr marL="256032" indent="-256032">
-              <a:lnSpc>
-                <a:spcPct val="108000"/>
-              </a:lnSpc>
-              <a:spcBef>
-                <a:spcPts val="300"/>
-              </a:spcBef>
-              <a:spcAft>
-                <a:spcPts val="700"/>
-              </a:spcAft>
-            </a:pPr>
-            <a:r>
-              <a:rPr b="0" i="0" sz="1100">
-                <a:solidFill>
-                  <a:srgbClr val="333333"/>
-                </a:solidFill>
-                <a:latin typeface="Times New Roman"/>
-              </a:rPr>
-              <a:t>- Other SQL dialects require compiler extensions.</a:t>
-            </a:r>
-          </a:p>
-          <a:p>
-            <a:pPr marL="0" indent="0">
-              <a:lnSpc>
-                <a:spcPct val="108000"/>
-              </a:lnSpc>
-              <a:spcBef>
-                <a:spcPts val="1200"/>
-              </a:spcBef>
-              <a:spcAft>
-                <a:spcPts val="500"/>
-              </a:spcAft>
-            </a:pPr>
-            <a:r>
-              <a:rPr b="1" i="0" sz="1400">
-                <a:solidFill>
-                  <a:srgbClr val="003366"/>
-                </a:solidFill>
-                <a:latin typeface="Times New Roman"/>
-              </a:rPr>
-              <a:t>Not a thesis limitation:</a:t>
-            </a:r>
-          </a:p>
-          <a:p>
-            <a:pPr marL="256032" indent="-256032">
-              <a:lnSpc>
-                <a:spcPct val="108000"/>
-              </a:lnSpc>
-              <a:spcBef>
-                <a:spcPts val="300"/>
-              </a:spcBef>
-              <a:spcAft>
-                <a:spcPts val="700"/>
-              </a:spcAft>
-            </a:pPr>
-            <a:r>
-              <a:rPr b="0" i="0" sz="1100">
+              <a:rPr b="0" i="0" sz="1500">
                 <a:solidFill>
                   <a:srgbClr val="333333"/>
                 </a:solidFill>
@@ -20237,7 +20097,7 @@
               </a:defRPr>
             </a:pPr>
             <a:r>
-              <a:t>Conclusion</a:t>
+              <a:t>Limitations I Would Raise First</a:t>
             </a:r>
           </a:p>
         </p:txBody>
@@ -20370,8 +20230,8 @@
         </p:nvSpPr>
         <p:spPr>
           <a:xfrm>
-            <a:off x="1097280" y="1572768"/>
-            <a:ext cx="9966960" cy="4434840"/>
+            <a:off x="914400" y="1572768"/>
+            <a:ext cx="10332720" cy="4663440"/>
           </a:xfrm>
           <a:prstGeom prst="rect">
             <a:avLst/>
@@ -20383,28 +20243,6 @@
             <a:spAutoFit/>
           </a:bodyPr>
           <a:lstStyle/>
-          <a:p>
-            <a:pPr marL="0" indent="0">
-              <a:lnSpc>
-                <a:spcPct val="108000"/>
-              </a:lnSpc>
-              <a:spcBef>
-                <a:spcPts val="1200"/>
-              </a:spcBef>
-              <a:spcAft>
-                <a:spcPts val="500"/>
-              </a:spcAft>
-            </a:pPr>
-            <a:r>
-              <a:rPr b="1" i="0" sz="2000">
-                <a:solidFill>
-                  <a:srgbClr val="003366"/>
-                </a:solidFill>
-                <a:latin typeface="Times New Roman"/>
-              </a:rPr>
-              <a:t>Conclusion:</a:t>
-            </a:r>
-          </a:p>
           <a:p>
             <a:pPr marL="256032" indent="-256032">
               <a:lnSpc>
@@ -20418,13 +20256,13 @@
               </a:spcAft>
             </a:pPr>
             <a:r>
-              <a:rPr b="0" i="0" sz="1700">
+              <a:rPr b="0" i="0" sz="1500">
                 <a:solidFill>
                   <a:srgbClr val="333333"/>
                 </a:solidFill>
                 <a:latin typeface="Times New Roman"/>
               </a:rPr>
-              <a:t>- AEGIS keeps the LLM useful for language understanding while removing SQL-authoring authority from the model.</a:t>
+              <a:t>- Correctness at scale is measured on the 20 reports, not on all 425 supported questions. For those I show the SQL runs — not that every answer is right.</a:t>
             </a:r>
           </a:p>
           <a:p>
@@ -20440,13 +20278,22 @@
               </a:spcAft>
             </a:pPr>
             <a:r>
-              <a:rPr b="0" i="0" sz="1700">
+              <a:rPr b="1" i="0" sz="1500">
+                <a:solidFill>
+                  <a:srgbClr val="003366"/>
+                </a:solidFill>
+                <a:latin typeface="Times New Roman"/>
+              </a:rPr>
+              <a:t>- The seeded catalogue is small:</a:t>
+            </a:r>
+            <a:r>
+              <a:rPr b="0" i="0" sz="1500">
                 <a:solidFill>
                   <a:srgbClr val="333333"/>
                 </a:solidFill>
                 <a:latin typeface="Times New Roman"/>
               </a:rPr>
-              <a:t>- The semantic layer makes analytics definitions explicit, auditable, and reusable for a target system.</a:t>
+              <a:t> 17 products in 8 categories against 2,500 orders. Order-side reports run at realistic volume, but bestsellers and revenue-by-category agree with nopCommerce over short lists — same compiled SQL, weaker test.</a:t>
             </a:r>
           </a:p>
           <a:p>
@@ -20462,13 +20309,22 @@
               </a:spcAft>
             </a:pPr>
             <a:r>
-              <a:rPr b="0" i="0" sz="1700">
+              <a:rPr b="1" i="0" sz="1500">
+                <a:solidFill>
+                  <a:srgbClr val="003366"/>
+                </a:solidFill>
+                <a:latin typeface="Times New Roman"/>
+              </a:rPr>
+              <a:t>- Three of the 75 boundary questions were not declined:</a:t>
+            </a:r>
+            <a:r>
+              <a:rPr b="0" i="0" sz="1500">
                 <a:solidFill>
                   <a:srgbClr val="333333"/>
                 </a:solidFill>
                 <a:latin typeface="Times New Roman"/>
               </a:rPr>
-              <a:t>- The compiler produces read-only SQL from approved definitions and blocks unsupported execution paths.</a:t>
+              <a:t> one malformed model reply, and the same carrier-comparison question phrased twice. The model flagged "DHL" and "FedEx" as unmapped and AEGIS answered by shipping method anyway — by design, because a model-reported gap is evidence, not a verdict. That keeps false refusals low and costs exactly this.</a:t>
             </a:r>
           </a:p>
           <a:p>
@@ -20484,35 +20340,13 @@
               </a:spcAft>
             </a:pPr>
             <a:r>
-              <a:rPr b="0" i="0" sz="1700">
+              <a:rPr b="0" i="0" sz="1500">
                 <a:solidFill>
                   <a:srgbClr val="333333"/>
                 </a:solidFill>
                 <a:latin typeface="Times New Roman"/>
               </a:rPr>
-              <a:t>- The nopCommerce [7] prototype, the 500-question corpus, and the differential against the platform's own report logic show that the approach can be implemented and evaluated practically.</a:t>
-            </a:r>
-          </a:p>
-          <a:p>
-            <a:pPr marL="0" indent="0">
-              <a:lnSpc>
-                <a:spcPct val="108000"/>
-              </a:lnSpc>
-              <a:spcBef>
-                <a:spcPts val="1200"/>
-              </a:spcBef>
-              <a:spcAft>
-                <a:spcPts val="500"/>
-              </a:spcAft>
-            </a:pPr>
-            <a:r>
-              <a:rPr b="1" i="0" sz="2000">
-                <a:solidFill>
-                  <a:srgbClr val="003366"/>
-                </a:solidFill>
-                <a:latin typeface="Times New Roman"/>
-              </a:rPr>
-              <a:t>Main contribution:</a:t>
+              <a:t>- Five reports differ from the platform's own output in row count or label column. No report differs in value.</a:t>
             </a:r>
           </a:p>
           <a:p>
@@ -20528,13 +20362,13 @@
               </a:spcAft>
             </a:pPr>
             <a:r>
-              <a:rPr b="0" i="0" sz="1700">
+              <a:rPr b="0" i="0" sz="1500">
                 <a:solidFill>
                   <a:srgbClr val="333333"/>
                 </a:solidFill>
                 <a:latin typeface="Times New Roman"/>
               </a:rPr>
-              <a:t>- A constraint-based architecture for safe LLM-assisted natural language analytics.</a:t>
+              <a:t>- Other SQL dialects require compiler extensions.</a:t>
             </a:r>
           </a:p>
         </p:txBody>
@@ -20777,7 +20611,7 @@
               </a:defRPr>
             </a:pPr>
             <a:r>
-              <a:t>Future Work</a:t>
+              <a:t>Conclusion</a:t>
             </a:r>
           </a:p>
         </p:txBody>
@@ -20910,8 +20744,8 @@
         </p:nvSpPr>
         <p:spPr>
           <a:xfrm>
-            <a:off x="1143000" y="1645920"/>
-            <a:ext cx="9784080" cy="3977639"/>
+            <a:off x="1097280" y="1572768"/>
+            <a:ext cx="9966960" cy="4434840"/>
           </a:xfrm>
           <a:prstGeom prst="rect">
             <a:avLst/>
@@ -20936,13 +20770,13 @@
               </a:spcAft>
             </a:pPr>
             <a:r>
-              <a:rPr b="1" i="0" sz="2100">
+              <a:rPr b="1" i="0" sz="2000">
                 <a:solidFill>
                   <a:srgbClr val="003366"/>
                 </a:solidFill>
                 <a:latin typeface="Times New Roman"/>
               </a:rPr>
-              <a:t>Possible extensions:</a:t>
+              <a:t>Conclusion:</a:t>
             </a:r>
           </a:p>
           <a:p>
@@ -20958,13 +20792,13 @@
               </a:spcAft>
             </a:pPr>
             <a:r>
-              <a:rPr b="0" i="0" sz="1800">
+              <a:rPr b="0" i="0" sz="1700">
                 <a:solidFill>
                   <a:srgbClr val="333333"/>
                 </a:solidFill>
                 <a:latin typeface="Times New Roman"/>
               </a:rPr>
-              <a:t>- Evaluate AEGIS on another e-commerce system by replacing only the semantic layer.</a:t>
+              <a:t>- AEGIS keeps the LLM useful for language understanding while removing SQL-authoring authority from the model.</a:t>
             </a:r>
           </a:p>
           <a:p>
@@ -20980,13 +20814,13 @@
               </a:spcAft>
             </a:pPr>
             <a:r>
-              <a:rPr b="0" i="0" sz="1800">
+              <a:rPr b="0" i="0" sz="1700">
                 <a:solidFill>
                   <a:srgbClr val="333333"/>
                 </a:solidFill>
                 <a:latin typeface="Times New Roman"/>
               </a:rPr>
-              <a:t>- Add more oracle reports from real admin and business workflows.</a:t>
+              <a:t>- The semantic layer makes analytics definitions explicit, auditable, and reusable for a target system.</a:t>
             </a:r>
           </a:p>
           <a:p>
@@ -21002,13 +20836,13 @@
               </a:spcAft>
             </a:pPr>
             <a:r>
-              <a:rPr b="0" i="0" sz="1800">
+              <a:rPr b="0" i="0" sz="1700">
                 <a:solidFill>
                   <a:srgbClr val="333333"/>
                 </a:solidFill>
                 <a:latin typeface="Times New Roman"/>
               </a:rPr>
-              <a:t>- Extend compiler modules for PostgreSQL and SQL Server.</a:t>
+              <a:t>- The compiler produces read-only SQL from approved definitions and blocks unsupported execution paths.</a:t>
             </a:r>
           </a:p>
           <a:p>
@@ -21024,13 +20858,35 @@
               </a:spcAft>
             </a:pPr>
             <a:r>
-              <a:rPr b="0" i="0" sz="1800">
+              <a:rPr b="0" i="0" sz="1700">
                 <a:solidFill>
                   <a:srgbClr val="333333"/>
                 </a:solidFill>
                 <a:latin typeface="Times New Roman"/>
               </a:rPr>
-              <a:t>- Improve clarification behavior for ambiguous but answerable user questions.</a:t>
+              <a:t>- The nopCommerce [7] prototype, the 500-question corpus, and the differential against the platform's own report logic show that the approach can be implemented and evaluated practically.</a:t>
+            </a:r>
+          </a:p>
+          <a:p>
+            <a:pPr marL="0" indent="0">
+              <a:lnSpc>
+                <a:spcPct val="108000"/>
+              </a:lnSpc>
+              <a:spcBef>
+                <a:spcPts val="1200"/>
+              </a:spcBef>
+              <a:spcAft>
+                <a:spcPts val="500"/>
+              </a:spcAft>
+            </a:pPr>
+            <a:r>
+              <a:rPr b="1" i="0" sz="2000">
+                <a:solidFill>
+                  <a:srgbClr val="003366"/>
+                </a:solidFill>
+                <a:latin typeface="Times New Roman"/>
+              </a:rPr>
+              <a:t>Main contribution:</a:t>
             </a:r>
           </a:p>
           <a:p>
@@ -21046,13 +20902,13 @@
               </a:spcAft>
             </a:pPr>
             <a:r>
-              <a:rPr b="0" i="0" sz="1800">
+              <a:rPr b="0" i="0" sz="1700">
                 <a:solidFill>
                   <a:srgbClr val="333333"/>
                 </a:solidFill>
                 <a:latin typeface="Times New Roman"/>
               </a:rPr>
-              <a:t>- Add richer chart recommendation while keeping SQL generation deterministic.</a:t>
+              <a:t>- A constraint-based architecture for safe LLM-assisted natural language analytics.</a:t>
             </a:r>
           </a:p>
         </p:txBody>
@@ -21295,7 +21151,7 @@
               </a:defRPr>
             </a:pPr>
             <a:r>
-              <a:t>References</a:t>
+              <a:t>Future Work</a:t>
             </a:r>
           </a:p>
         </p:txBody>
@@ -21428,8 +21284,8 @@
         </p:nvSpPr>
         <p:spPr>
           <a:xfrm>
-            <a:off x="731520" y="1627632"/>
-            <a:ext cx="10744200" cy="4389120"/>
+            <a:off x="1143000" y="1645920"/>
+            <a:ext cx="9784080" cy="3977639"/>
           </a:xfrm>
           <a:prstGeom prst="rect">
             <a:avLst/>
@@ -21437,141 +21293,140 @@
           <a:noFill/>
         </p:spPr>
         <p:txBody>
-          <a:bodyPr wrap="square">
+          <a:bodyPr wrap="square" anchor="t" lIns="0" tIns="0" rIns="0">
             <a:spAutoFit/>
           </a:bodyPr>
           <a:lstStyle/>
           <a:p>
-            <a:pPr marL="274320" indent="-274320">
+            <a:pPr marL="0" indent="0">
               <a:lnSpc>
-                <a:spcPct val="105000"/>
+                <a:spcPct val="108000"/>
               </a:lnSpc>
+              <a:spcBef>
+                <a:spcPts val="1200"/>
+              </a:spcBef>
               <a:spcAft>
-                <a:spcPts val="900"/>
+                <a:spcPts val="500"/>
               </a:spcAft>
             </a:pPr>
             <a:r>
-              <a:rPr sz="1200">
+              <a:rPr b="1" i="0" sz="2100">
+                <a:solidFill>
+                  <a:srgbClr val="003366"/>
+                </a:solidFill>
+                <a:latin typeface="Times New Roman"/>
+              </a:rPr>
+              <a:t>Possible extensions:</a:t>
+            </a:r>
+          </a:p>
+          <a:p>
+            <a:pPr marL="256032" indent="-256032">
+              <a:lnSpc>
+                <a:spcPct val="108000"/>
+              </a:lnSpc>
+              <a:spcBef>
+                <a:spcPts val="300"/>
+              </a:spcBef>
+              <a:spcAft>
+                <a:spcPts val="700"/>
+              </a:spcAft>
+            </a:pPr>
+            <a:r>
+              <a:rPr b="0" i="0" sz="1800">
                 <a:solidFill>
                   <a:srgbClr val="333333"/>
                 </a:solidFill>
                 <a:latin typeface="Times New Roman"/>
               </a:rPr>
-              <a:t>[1] Li, F., &amp; Jagadish, H. V. (2014). Constructing an interactive natural language interface for relational databases. PVLDB.</a:t>
-            </a:r>
-          </a:p>
-          <a:p>
-            <a:pPr marL="274320" indent="-274320">
+              <a:t>- Evaluate AEGIS on another e-commerce system by replacing only the semantic layer.</a:t>
+            </a:r>
+          </a:p>
+          <a:p>
+            <a:pPr marL="256032" indent="-256032">
               <a:lnSpc>
-                <a:spcPct val="105000"/>
+                <a:spcPct val="108000"/>
               </a:lnSpc>
+              <a:spcBef>
+                <a:spcPts val="300"/>
+              </a:spcBef>
               <a:spcAft>
-                <a:spcPts val="900"/>
+                <a:spcPts val="700"/>
               </a:spcAft>
             </a:pPr>
             <a:r>
-              <a:rPr sz="1200">
+              <a:rPr b="0" i="0" sz="1800">
                 <a:solidFill>
                   <a:srgbClr val="333333"/>
                 </a:solidFill>
                 <a:latin typeface="Times New Roman"/>
               </a:rPr>
-              <a:t>[2] Narechania, A., Srinivasan, A., &amp; Stasko, J. (2021). nl4dv: A toolkit for generating analytic specifications from natural language. IEEE TVCG.</a:t>
-            </a:r>
-          </a:p>
-          <a:p>
-            <a:pPr marL="274320" indent="-274320">
+              <a:t>- Add more oracle reports from real admin and business workflows.</a:t>
+            </a:r>
+          </a:p>
+          <a:p>
+            <a:pPr marL="256032" indent="-256032">
               <a:lnSpc>
-                <a:spcPct val="105000"/>
+                <a:spcPct val="108000"/>
               </a:lnSpc>
+              <a:spcBef>
+                <a:spcPts val="300"/>
+              </a:spcBef>
               <a:spcAft>
-                <a:spcPts val="900"/>
+                <a:spcPts val="700"/>
               </a:spcAft>
             </a:pPr>
             <a:r>
-              <a:rPr sz="1200">
+              <a:rPr b="0" i="0" sz="1800">
                 <a:solidFill>
                   <a:srgbClr val="333333"/>
                 </a:solidFill>
                 <a:latin typeface="Times New Roman"/>
               </a:rPr>
-              <a:t>[3] Deng, D., Wu, A., Qu, H., &amp; Wu, Y. (2023). DashBot: Insight-driven dashboard generation. IEEE TVCG.</a:t>
-            </a:r>
-          </a:p>
-          <a:p>
-            <a:pPr marL="274320" indent="-274320">
+              <a:t>- Extend compiler modules for PostgreSQL and SQL Server.</a:t>
+            </a:r>
+          </a:p>
+          <a:p>
+            <a:pPr marL="256032" indent="-256032">
               <a:lnSpc>
-                <a:spcPct val="105000"/>
+                <a:spcPct val="108000"/>
               </a:lnSpc>
+              <a:spcBef>
+                <a:spcPts val="300"/>
+              </a:spcBef>
               <a:spcAft>
-                <a:spcPts val="900"/>
+                <a:spcPts val="700"/>
               </a:spcAft>
             </a:pPr>
             <a:r>
-              <a:rPr sz="1200">
+              <a:rPr b="0" i="0" sz="1800">
                 <a:solidFill>
                   <a:srgbClr val="333333"/>
                 </a:solidFill>
                 <a:latin typeface="Times New Roman"/>
               </a:rPr>
-              <a:t>[4] Scholak, T., Schucher, N., &amp; Bahdanau, D. (2021). PICARD: Parsing incrementally for constrained auto-regressive decoding. EMNLP.</a:t>
-            </a:r>
-          </a:p>
-          <a:p>
-            <a:pPr marL="274320" indent="-274320">
+              <a:t>- Improve clarification behavior for ambiguous but answerable user questions.</a:t>
+            </a:r>
+          </a:p>
+          <a:p>
+            <a:pPr marL="256032" indent="-256032">
               <a:lnSpc>
-                <a:spcPct val="105000"/>
+                <a:spcPct val="108000"/>
               </a:lnSpc>
+              <a:spcBef>
+                <a:spcPts val="300"/>
+              </a:spcBef>
               <a:spcAft>
-                <a:spcPts val="900"/>
+                <a:spcPts val="700"/>
               </a:spcAft>
             </a:pPr>
             <a:r>
-              <a:rPr sz="1200">
+              <a:rPr b="0" i="0" sz="1800">
                 <a:solidFill>
                   <a:srgbClr val="333333"/>
                 </a:solidFill>
                 <a:latin typeface="Times New Roman"/>
               </a:rPr>
-              <a:t>[5] Shalaan, H. S. et al. (2025). G-SQL: A schema-aware and rule-guided approach for robust natural language to SQL translation. IEEE Access.</a:t>
-            </a:r>
-          </a:p>
-          <a:p>
-            <a:pPr marL="274320" indent="-274320">
-              <a:lnSpc>
-                <a:spcPct val="105000"/>
-              </a:lnSpc>
-              <a:spcAft>
-                <a:spcPts val="900"/>
-              </a:spcAft>
-            </a:pPr>
-            <a:r>
-              <a:rPr sz="1200">
-                <a:solidFill>
-                  <a:srgbClr val="333333"/>
-                </a:solidFill>
-                <a:latin typeface="Times New Roman"/>
-              </a:rPr>
-              <a:t>[6] Su, X. et al. (2026). A robust natural language text-to-SQL generation framework with dynamic strategies based on LLMs. Scientific Reports.</a:t>
-            </a:r>
-          </a:p>
-          <a:p>
-            <a:pPr marL="274320" indent="-274320">
-              <a:lnSpc>
-                <a:spcPct val="105000"/>
-              </a:lnSpc>
-              <a:spcAft>
-                <a:spcPts val="900"/>
-              </a:spcAft>
-            </a:pPr>
-            <a:r>
-              <a:rPr sz="1200">
-                <a:solidFill>
-                  <a:srgbClr val="333333"/>
-                </a:solidFill>
-                <a:latin typeface="Times New Roman"/>
-              </a:rPr>
-              <a:t>[7] nopSolutions. nopCommerce open-source e-commerce platform. GitHub repository.</a:t>
+              <a:t>- Add richer chart recommendation while keeping SQL generation deterministic.</a:t>
             </a:r>
           </a:p>
         </p:txBody>
@@ -21814,7 +21669,7 @@
               </a:defRPr>
             </a:pPr>
             <a:r>
-              <a:t>Thank You &amp; Discussion</a:t>
+              <a:t>References</a:t>
             </a:r>
           </a:p>
         </p:txBody>
@@ -21947,8 +21802,8 @@
         </p:nvSpPr>
         <p:spPr>
           <a:xfrm>
-            <a:off x="914400" y="2377440"/>
-            <a:ext cx="10332720" cy="1828800"/>
+            <a:off x="731520" y="1627632"/>
+            <a:ext cx="10744200" cy="4389120"/>
           </a:xfrm>
           <a:prstGeom prst="rect">
             <a:avLst/>
@@ -21956,36 +21811,141 @@
           <a:noFill/>
         </p:spPr>
         <p:txBody>
-          <a:bodyPr wrap="none">
+          <a:bodyPr wrap="square">
             <a:spAutoFit/>
           </a:bodyPr>
           <a:lstStyle/>
           <a:p>
-            <a:pPr algn="ctr">
-              <a:defRPr sz="3600" b="1">
-                <a:solidFill>
-                  <a:srgbClr val="003366"/>
-                </a:solidFill>
-                <a:latin typeface="Times New Roman"/>
-              </a:defRPr>
-            </a:pPr>
-            <a:r>
-              <a:rPr/>
-              <a:t>THANK YOU!</a:t>
-            </a:r>
-          </a:p>
-          <a:p>
-            <a:pPr algn="ctr">
-              <a:defRPr sz="2000" i="1">
-                <a:solidFill>
-                  <a:srgbClr val="464646"/>
-                </a:solidFill>
-                <a:latin typeface="Times New Roman"/>
-              </a:defRPr>
-            </a:pPr>
-            <a:r>
-              <a:rPr/>
-              <a:t>Questions &amp; Final Defense Discussion</a:t>
+            <a:pPr marL="274320" indent="-274320">
+              <a:lnSpc>
+                <a:spcPct val="105000"/>
+              </a:lnSpc>
+              <a:spcAft>
+                <a:spcPts val="900"/>
+              </a:spcAft>
+            </a:pPr>
+            <a:r>
+              <a:rPr sz="1200">
+                <a:solidFill>
+                  <a:srgbClr val="333333"/>
+                </a:solidFill>
+                <a:latin typeface="Times New Roman"/>
+              </a:rPr>
+              <a:t>[1] Li, F., &amp; Jagadish, H. V. (2014). Constructing an interactive natural language interface for relational databases. PVLDB.</a:t>
+            </a:r>
+          </a:p>
+          <a:p>
+            <a:pPr marL="274320" indent="-274320">
+              <a:lnSpc>
+                <a:spcPct val="105000"/>
+              </a:lnSpc>
+              <a:spcAft>
+                <a:spcPts val="900"/>
+              </a:spcAft>
+            </a:pPr>
+            <a:r>
+              <a:rPr sz="1200">
+                <a:solidFill>
+                  <a:srgbClr val="333333"/>
+                </a:solidFill>
+                <a:latin typeface="Times New Roman"/>
+              </a:rPr>
+              <a:t>[2] Narechania, A., Srinivasan, A., &amp; Stasko, J. (2021). nl4dv: A toolkit for generating analytic specifications from natural language. IEEE TVCG.</a:t>
+            </a:r>
+          </a:p>
+          <a:p>
+            <a:pPr marL="274320" indent="-274320">
+              <a:lnSpc>
+                <a:spcPct val="105000"/>
+              </a:lnSpc>
+              <a:spcAft>
+                <a:spcPts val="900"/>
+              </a:spcAft>
+            </a:pPr>
+            <a:r>
+              <a:rPr sz="1200">
+                <a:solidFill>
+                  <a:srgbClr val="333333"/>
+                </a:solidFill>
+                <a:latin typeface="Times New Roman"/>
+              </a:rPr>
+              <a:t>[3] Deng, D., Wu, A., Qu, H., &amp; Wu, Y. (2023). DashBot: Insight-driven dashboard generation. IEEE TVCG.</a:t>
+            </a:r>
+          </a:p>
+          <a:p>
+            <a:pPr marL="274320" indent="-274320">
+              <a:lnSpc>
+                <a:spcPct val="105000"/>
+              </a:lnSpc>
+              <a:spcAft>
+                <a:spcPts val="900"/>
+              </a:spcAft>
+            </a:pPr>
+            <a:r>
+              <a:rPr sz="1200">
+                <a:solidFill>
+                  <a:srgbClr val="333333"/>
+                </a:solidFill>
+                <a:latin typeface="Times New Roman"/>
+              </a:rPr>
+              <a:t>[4] Scholak, T., Schucher, N., &amp; Bahdanau, D. (2021). PICARD: Parsing incrementally for constrained auto-regressive decoding. EMNLP.</a:t>
+            </a:r>
+          </a:p>
+          <a:p>
+            <a:pPr marL="274320" indent="-274320">
+              <a:lnSpc>
+                <a:spcPct val="105000"/>
+              </a:lnSpc>
+              <a:spcAft>
+                <a:spcPts val="900"/>
+              </a:spcAft>
+            </a:pPr>
+            <a:r>
+              <a:rPr sz="1200">
+                <a:solidFill>
+                  <a:srgbClr val="333333"/>
+                </a:solidFill>
+                <a:latin typeface="Times New Roman"/>
+              </a:rPr>
+              <a:t>[5] Shalaan, H. S. et al. (2025). G-SQL: A schema-aware and rule-guided approach for robust natural language to SQL translation. IEEE Access.</a:t>
+            </a:r>
+          </a:p>
+          <a:p>
+            <a:pPr marL="274320" indent="-274320">
+              <a:lnSpc>
+                <a:spcPct val="105000"/>
+              </a:lnSpc>
+              <a:spcAft>
+                <a:spcPts val="900"/>
+              </a:spcAft>
+            </a:pPr>
+            <a:r>
+              <a:rPr sz="1200">
+                <a:solidFill>
+                  <a:srgbClr val="333333"/>
+                </a:solidFill>
+                <a:latin typeface="Times New Roman"/>
+              </a:rPr>
+              <a:t>[6] Su, X. et al. (2026). A robust natural language text-to-SQL generation framework with dynamic strategies based on LLMs. Scientific Reports.</a:t>
+            </a:r>
+          </a:p>
+          <a:p>
+            <a:pPr marL="274320" indent="-274320">
+              <a:lnSpc>
+                <a:spcPct val="105000"/>
+              </a:lnSpc>
+              <a:spcAft>
+                <a:spcPts val="900"/>
+              </a:spcAft>
+            </a:pPr>
+            <a:r>
+              <a:rPr sz="1200">
+                <a:solidFill>
+                  <a:srgbClr val="333333"/>
+                </a:solidFill>
+                <a:latin typeface="Times New Roman"/>
+              </a:rPr>
+              <a:t>[7] nopSolutions. nopCommerce open-source e-commerce platform. GitHub repository.</a:t>
             </a:r>
           </a:p>
         </p:txBody>
@@ -22228,7 +22188,7 @@
               </a:defRPr>
             </a:pPr>
             <a:r>
-              <a:t>Appendix A: The Semantic Layer Is a File I Wrote</a:t>
+              <a:t>Thank You &amp; Discussion</a:t>
             </a:r>
           </a:p>
         </p:txBody>
@@ -22361,8 +22321,8 @@
         </p:nvSpPr>
         <p:spPr>
           <a:xfrm>
-            <a:off x="777240" y="1572768"/>
-            <a:ext cx="10515600" cy="384048"/>
+            <a:off x="914400" y="2377440"/>
+            <a:ext cx="10332720" cy="1828800"/>
           </a:xfrm>
           <a:prstGeom prst="rect">
             <a:avLst/>
@@ -22370,596 +22330,36 @@
           <a:noFill/>
         </p:spPr>
         <p:txBody>
-          <a:bodyPr wrap="square" anchor="t" lIns="0" tIns="0" rIns="0">
+          <a:bodyPr wrap="none">
             <a:spAutoFit/>
           </a:bodyPr>
           <a:lstStyle/>
           <a:p>
-            <a:pPr marL="0" indent="0">
-              <a:lnSpc>
-                <a:spcPct val="108000"/>
-              </a:lnSpc>
-              <a:spcBef>
-                <a:spcPts val="1200"/>
-              </a:spcBef>
-              <a:spcAft>
-                <a:spcPts val="500"/>
-              </a:spcAft>
-            </a:pPr>
-            <a:r>
-              <a:rPr b="1" i="0" sz="1600">
+            <a:pPr algn="ctr">
+              <a:defRPr sz="3600" b="1">
                 <a:solidFill>
                   <a:srgbClr val="003366"/>
                 </a:solidFill>
                 <a:latin typeface="Times New Roman"/>
-              </a:rPr>
-              <a:t>aegis/server/semantic_layer.py — two of the objects the model is allowed to name:</a:t>
-            </a:r>
-          </a:p>
-        </p:txBody>
-      </p:sp>
-      <p:sp>
-        <p:nvSpPr>
-          <p:cNvPr id="14" name="Rectangle 13"/>
-          <p:cNvSpPr/>
-          <p:nvPr/>
-        </p:nvSpPr>
-        <p:spPr>
-          <a:xfrm>
-            <a:off x="777240" y="2066543"/>
-            <a:ext cx="5120640" cy="2286000"/>
-          </a:xfrm>
-          <a:prstGeom prst="rect">
-            <a:avLst/>
-          </a:prstGeom>
-          <a:solidFill>
-            <a:srgbClr val="F7F7F7"/>
-          </a:solidFill>
-          <a:ln>
-            <a:solidFill>
-              <a:srgbClr val="B7B7B7"/>
-            </a:solidFill>
-          </a:ln>
-        </p:spPr>
-        <p:style>
-          <a:lnRef idx="1">
-            <a:schemeClr val="accent1"/>
-          </a:lnRef>
-          <a:fillRef idx="3">
-            <a:schemeClr val="accent1"/>
-          </a:fillRef>
-          <a:effectRef idx="2">
-            <a:schemeClr val="accent1"/>
-          </a:effectRef>
-          <a:fontRef idx="minor">
-            <a:schemeClr val="lt1"/>
-          </a:fontRef>
-        </p:style>
-        <p:txBody>
-          <a:bodyPr rtlCol="0" anchor="t" wrap="square" lIns="36576" tIns="73152"/>
-          <a:lstStyle/>
-          <a:p>
-            <a:pPr algn="l">
-              <a:spcAft>
-                <a:spcPts val="100"/>
-              </a:spcAft>
-              <a:defRPr sz="950">
-                <a:solidFill>
-                  <a:srgbClr val="505050"/>
-                </a:solidFill>
-                <a:latin typeface="Consolas"/>
               </a:defRPr>
             </a:pPr>
             <a:r>
               <a:rPr/>
-              <a:t>Metric(</a:t>
-            </a:r>
-          </a:p>
-          <a:p>
-            <a:pPr algn="l">
-              <a:spcAft>
-                <a:spcPts val="100"/>
-              </a:spcAft>
-              <a:defRPr sz="950">
-                <a:solidFill>
-                  <a:srgbClr val="505050"/>
-                </a:solidFill>
-                <a:latin typeface="Consolas"/>
+              <a:t>THANK YOU!</a:t>
+            </a:r>
+          </a:p>
+          <a:p>
+            <a:pPr algn="ctr">
+              <a:defRPr sz="2000" i="1">
+                <a:solidFill>
+                  <a:srgbClr val="464646"/>
+                </a:solidFill>
+                <a:latin typeface="Times New Roman"/>
               </a:defRPr>
             </a:pPr>
             <a:r>
               <a:rPr/>
-              <a:t>    id="avg_order_value",</a:t>
-            </a:r>
-          </a:p>
-          <a:p>
-            <a:pPr algn="l">
-              <a:spcAft>
-                <a:spcPts val="100"/>
-              </a:spcAft>
-              <a:defRPr sz="950">
-                <a:solidFill>
-                  <a:srgbClr val="505050"/>
-                </a:solidFill>
-                <a:latin typeface="Consolas"/>
-              </a:defRPr>
-            </a:pPr>
-            <a:r>
-              <a:rPr/>
-              <a:t>    label="Average Order Value",</a:t>
-            </a:r>
-          </a:p>
-          <a:p>
-            <a:pPr algn="l">
-              <a:spcAft>
-                <a:spcPts val="100"/>
-              </a:spcAft>
-              <a:defRPr sz="950">
-                <a:solidFill>
-                  <a:srgbClr val="505050"/>
-                </a:solidFill>
-                <a:latin typeface="Consolas"/>
-              </a:defRPr>
-            </a:pPr>
-            <a:r>
-              <a:rPr/>
-              <a:t>    description="Average revenue per order",</a:t>
-            </a:r>
-          </a:p>
-          <a:p>
-            <a:pPr algn="l">
-              <a:spcAft>
-                <a:spcPts val="100"/>
-              </a:spcAft>
-              <a:defRPr sz="950">
-                <a:solidFill>
-                  <a:srgbClr val="505050"/>
-                </a:solidFill>
-                <a:latin typeface="Consolas"/>
-              </a:defRPr>
-            </a:pPr>
-            <a:r>
-              <a:rPr/>
-              <a:t>    sql_expr="AVG(COALESCE(o.OrderTotal, 0))",</a:t>
-            </a:r>
-          </a:p>
-          <a:p>
-            <a:pPr algn="l">
-              <a:spcAft>
-                <a:spcPts val="100"/>
-              </a:spcAft>
-              <a:defRPr sz="950">
-                <a:solidFill>
-                  <a:srgbClr val="505050"/>
-                </a:solidFill>
-                <a:latin typeface="Consolas"/>
-              </a:defRPr>
-            </a:pPr>
-            <a:r>
-              <a:rPr/>
-              <a:t>    binding_table="Order",</a:t>
-            </a:r>
-          </a:p>
-          <a:p>
-            <a:pPr algn="l">
-              <a:spcAft>
-                <a:spcPts val="100"/>
-              </a:spcAft>
-              <a:defRPr sz="950">
-                <a:solidFill>
-                  <a:srgbClr val="505050"/>
-                </a:solidFill>
-                <a:latin typeface="Consolas"/>
-              </a:defRPr>
-            </a:pPr>
-            <a:r>
-              <a:rPr/>
-              <a:t>    required_joins=[],</a:t>
-            </a:r>
-          </a:p>
-          <a:p>
-            <a:pPr algn="l">
-              <a:spcAft>
-                <a:spcPts val="100"/>
-              </a:spcAft>
-              <a:defRPr sz="950">
-                <a:solidFill>
-                  <a:srgbClr val="505050"/>
-                </a:solidFill>
-                <a:latin typeface="Consolas"/>
-              </a:defRPr>
-            </a:pPr>
-            <a:r>
-              <a:rPr/>
-              <a:t>    default_visual="kpi_card",</a:t>
-            </a:r>
-          </a:p>
-          <a:p>
-            <a:pPr algn="l">
-              <a:spcAft>
-                <a:spcPts val="100"/>
-              </a:spcAft>
-              <a:defRPr sz="950">
-                <a:solidFill>
-                  <a:srgbClr val="505050"/>
-                </a:solidFill>
-                <a:latin typeface="Consolas"/>
-              </a:defRPr>
-            </a:pPr>
-            <a:r>
-              <a:rPr/>
-              <a:t>    time_anchor="o.CreatedOnUtc",</a:t>
-            </a:r>
-          </a:p>
-          <a:p>
-            <a:pPr algn="l">
-              <a:spcAft>
-                <a:spcPts val="100"/>
-              </a:spcAft>
-              <a:defRPr sz="950">
-                <a:solidFill>
-                  <a:srgbClr val="505050"/>
-                </a:solidFill>
-                <a:latin typeface="Consolas"/>
-              </a:defRPr>
-            </a:pPr>
-            <a:r>
-              <a:rPr/>
-              <a:t>)</a:t>
-            </a:r>
-          </a:p>
-        </p:txBody>
-      </p:sp>
-      <p:sp>
-        <p:nvSpPr>
-          <p:cNvPr id="15" name="Rectangle 14"/>
-          <p:cNvSpPr/>
-          <p:nvPr/>
-        </p:nvSpPr>
-        <p:spPr>
-          <a:xfrm>
-            <a:off x="6144768" y="2066543"/>
-            <a:ext cx="5120640" cy="2286000"/>
-          </a:xfrm>
-          <a:prstGeom prst="rect">
-            <a:avLst/>
-          </a:prstGeom>
-          <a:solidFill>
-            <a:srgbClr val="F7F7F7"/>
-          </a:solidFill>
-          <a:ln>
-            <a:solidFill>
-              <a:srgbClr val="B7B7B7"/>
-            </a:solidFill>
-          </a:ln>
-        </p:spPr>
-        <p:style>
-          <a:lnRef idx="1">
-            <a:schemeClr val="accent1"/>
-          </a:lnRef>
-          <a:fillRef idx="3">
-            <a:schemeClr val="accent1"/>
-          </a:fillRef>
-          <a:effectRef idx="2">
-            <a:schemeClr val="accent1"/>
-          </a:effectRef>
-          <a:fontRef idx="minor">
-            <a:schemeClr val="lt1"/>
-          </a:fontRef>
-        </p:style>
-        <p:txBody>
-          <a:bodyPr rtlCol="0" anchor="t" wrap="square" lIns="36576" tIns="73152"/>
-          <a:lstStyle/>
-          <a:p>
-            <a:pPr algn="l">
-              <a:spcAft>
-                <a:spcPts val="100"/>
-              </a:spcAft>
-              <a:defRPr sz="950">
-                <a:solidFill>
-                  <a:srgbClr val="505050"/>
-                </a:solidFill>
-                <a:latin typeface="Consolas"/>
-              </a:defRPr>
-            </a:pPr>
-            <a:r>
-              <a:rPr/>
-              <a:t>Dimension(</a:t>
-            </a:r>
-          </a:p>
-          <a:p>
-            <a:pPr algn="l">
-              <a:spcAft>
-                <a:spcPts val="100"/>
-              </a:spcAft>
-              <a:defRPr sz="950">
-                <a:solidFill>
-                  <a:srgbClr val="505050"/>
-                </a:solidFill>
-                <a:latin typeface="Consolas"/>
-              </a:defRPr>
-            </a:pPr>
-            <a:r>
-              <a:rPr/>
-              <a:t>    id="order_status",</a:t>
-            </a:r>
-          </a:p>
-          <a:p>
-            <a:pPr algn="l">
-              <a:spcAft>
-                <a:spcPts val="100"/>
-              </a:spcAft>
-              <a:defRPr sz="950">
-                <a:solidFill>
-                  <a:srgbClr val="505050"/>
-                </a:solidFill>
-                <a:latin typeface="Consolas"/>
-              </a:defRPr>
-            </a:pPr>
-            <a:r>
-              <a:rPr/>
-              <a:t>    label="Order Status",</a:t>
-            </a:r>
-          </a:p>
-          <a:p>
-            <a:pPr algn="l">
-              <a:spcAft>
-                <a:spcPts val="100"/>
-              </a:spcAft>
-              <a:defRPr sz="950">
-                <a:solidFill>
-                  <a:srgbClr val="505050"/>
-                </a:solidFill>
-                <a:latin typeface="Consolas"/>
-              </a:defRPr>
-            </a:pPr>
-            <a:r>
-              <a:rPr/>
-              <a:t>    sql_expr="CASE o.OrderStatusId "</a:t>
-            </a:r>
-          </a:p>
-          <a:p>
-            <a:pPr algn="l">
-              <a:spcAft>
-                <a:spcPts val="100"/>
-              </a:spcAft>
-              <a:defRPr sz="950">
-                <a:solidFill>
-                  <a:srgbClr val="505050"/>
-                </a:solidFill>
-                <a:latin typeface="Consolas"/>
-              </a:defRPr>
-            </a:pPr>
-            <a:r>
-              <a:rPr/>
-              <a:t>             "WHEN 10 THEN 'Pending' "</a:t>
-            </a:r>
-          </a:p>
-          <a:p>
-            <a:pPr algn="l">
-              <a:spcAft>
-                <a:spcPts val="100"/>
-              </a:spcAft>
-              <a:defRPr sz="950">
-                <a:solidFill>
-                  <a:srgbClr val="505050"/>
-                </a:solidFill>
-                <a:latin typeface="Consolas"/>
-              </a:defRPr>
-            </a:pPr>
-            <a:r>
-              <a:rPr/>
-              <a:t>             "WHEN 20 THEN 'Processing' "</a:t>
-            </a:r>
-          </a:p>
-          <a:p>
-            <a:pPr algn="l">
-              <a:spcAft>
-                <a:spcPts val="100"/>
-              </a:spcAft>
-              <a:defRPr sz="950">
-                <a:solidFill>
-                  <a:srgbClr val="505050"/>
-                </a:solidFill>
-                <a:latin typeface="Consolas"/>
-              </a:defRPr>
-            </a:pPr>
-            <a:r>
-              <a:rPr/>
-              <a:t>             "WHEN 30 THEN 'Complete' "</a:t>
-            </a:r>
-          </a:p>
-          <a:p>
-            <a:pPr algn="l">
-              <a:spcAft>
-                <a:spcPts val="100"/>
-              </a:spcAft>
-              <a:defRPr sz="950">
-                <a:solidFill>
-                  <a:srgbClr val="505050"/>
-                </a:solidFill>
-                <a:latin typeface="Consolas"/>
-              </a:defRPr>
-            </a:pPr>
-            <a:r>
-              <a:rPr/>
-              <a:t>             "WHEN 40 THEN 'Cancelled' "</a:t>
-            </a:r>
-          </a:p>
-          <a:p>
-            <a:pPr algn="l">
-              <a:spcAft>
-                <a:spcPts val="100"/>
-              </a:spcAft>
-              <a:defRPr sz="950">
-                <a:solidFill>
-                  <a:srgbClr val="505050"/>
-                </a:solidFill>
-                <a:latin typeface="Consolas"/>
-              </a:defRPr>
-            </a:pPr>
-            <a:r>
-              <a:rPr/>
-              <a:t>             "ELSE 'Unknown' END",</a:t>
-            </a:r>
-          </a:p>
-          <a:p>
-            <a:pPr algn="l">
-              <a:spcAft>
-                <a:spcPts val="100"/>
-              </a:spcAft>
-              <a:defRPr sz="950">
-                <a:solidFill>
-                  <a:srgbClr val="505050"/>
-                </a:solidFill>
-                <a:latin typeface="Consolas"/>
-              </a:defRPr>
-            </a:pPr>
-            <a:r>
-              <a:rPr/>
-              <a:t>    binding_table="Order",</a:t>
-            </a:r>
-          </a:p>
-          <a:p>
-            <a:pPr algn="l">
-              <a:spcAft>
-                <a:spcPts val="100"/>
-              </a:spcAft>
-              <a:defRPr sz="950">
-                <a:solidFill>
-                  <a:srgbClr val="505050"/>
-                </a:solidFill>
-                <a:latin typeface="Consolas"/>
-              </a:defRPr>
-            </a:pPr>
-            <a:r>
-              <a:rPr/>
-              <a:t>    datatype="string",</a:t>
-            </a:r>
-          </a:p>
-          <a:p>
-            <a:pPr algn="l">
-              <a:spcAft>
-                <a:spcPts val="100"/>
-              </a:spcAft>
-              <a:defRPr sz="950">
-                <a:solidFill>
-                  <a:srgbClr val="505050"/>
-                </a:solidFill>
-                <a:latin typeface="Consolas"/>
-              </a:defRPr>
-            </a:pPr>
-            <a:r>
-              <a:rPr/>
-              <a:t>)</a:t>
-            </a:r>
-          </a:p>
-        </p:txBody>
-      </p:sp>
-      <p:sp>
-        <p:nvSpPr>
-          <p:cNvPr id="16" name="TextBox 15"/>
-          <p:cNvSpPr txBox="1"/>
-          <p:nvPr/>
-        </p:nvSpPr>
-        <p:spPr>
-          <a:xfrm>
-            <a:off x="777240" y="4489703"/>
-            <a:ext cx="10515600" cy="822960"/>
-          </a:xfrm>
-          <a:prstGeom prst="rect">
-            <a:avLst/>
-          </a:prstGeom>
-          <a:noFill/>
-        </p:spPr>
-        <p:txBody>
-          <a:bodyPr wrap="square" anchor="t" lIns="0" tIns="0" rIns="0">
-            <a:spAutoFit/>
-          </a:bodyPr>
-          <a:lstStyle/>
-          <a:p>
-            <a:pPr marL="0" indent="0">
-              <a:lnSpc>
-                <a:spcPct val="108000"/>
-              </a:lnSpc>
-              <a:spcBef>
-                <a:spcPts val="1200"/>
-              </a:spcBef>
-              <a:spcAft>
-                <a:spcPts val="500"/>
-              </a:spcAft>
-            </a:pPr>
-            <a:r>
-              <a:rPr b="1" i="0" sz="1600">
-                <a:solidFill>
-                  <a:srgbClr val="003366"/>
-                </a:solidFill>
-                <a:latin typeface="Times New Roman"/>
-              </a:rPr>
-              <a:t>The model may return the string "avg_order_value". It cannot return the expression, the table, or the join. Deploying AEGIS on another system means writing this file again — and nothing else.</a:t>
-            </a:r>
-          </a:p>
-        </p:txBody>
-      </p:sp>
-      <p:sp>
-        <p:nvSpPr>
-          <p:cNvPr id="17" name="Rounded Rectangle 16"/>
-          <p:cNvSpPr/>
-          <p:nvPr/>
-        </p:nvSpPr>
-        <p:spPr>
-          <a:xfrm>
-            <a:off x="777240" y="5742432"/>
-            <a:ext cx="10515600" cy="475488"/>
-          </a:xfrm>
-          <a:prstGeom prst="roundRect">
-            <a:avLst/>
-          </a:prstGeom>
-          <a:solidFill>
-            <a:srgbClr val="F3F6FB"/>
-          </a:solidFill>
-          <a:ln w="9525">
-            <a:solidFill>
-              <a:srgbClr val="C9D6E8"/>
-            </a:solidFill>
-          </a:ln>
-        </p:spPr>
-        <p:style>
-          <a:lnRef idx="1">
-            <a:schemeClr val="accent1"/>
-          </a:lnRef>
-          <a:fillRef idx="3">
-            <a:schemeClr val="accent1"/>
-          </a:fillRef>
-          <a:effectRef idx="2">
-            <a:schemeClr val="accent1"/>
-          </a:effectRef>
-          <a:fontRef idx="minor">
-            <a:schemeClr val="lt1"/>
-          </a:fontRef>
-        </p:style>
-        <p:txBody>
-          <a:bodyPr rtlCol="0" anchor="ctr" wrap="square" lIns="128016" rIns="128016"/>
-          <a:lstStyle/>
-          <a:p>
-            <a:pPr algn="l"/>
-            <a:r>
-              <a:rPr b="1" sz="1300">
-                <a:solidFill>
-                  <a:srgbClr val="333333"/>
-                </a:solidFill>
-                <a:latin typeface="Times New Roman"/>
-              </a:rPr>
-              <a:t>In plain terms:  </a:t>
-            </a:r>
-            <a:r>
-              <a:rPr sz="1300">
-                <a:solidFill>
-                  <a:srgbClr val="333333"/>
-                </a:solidFill>
-                <a:latin typeface="Times New Roman"/>
-              </a:rPr>
-              <a:t>This list is the whole vocabulary. Anything not written here cannot be asked for.</a:t>
+              <a:t>Questions &amp; Final Defense Discussion</a:t>
             </a:r>
           </a:p>
         </p:txBody>
@@ -23808,7 +23208,7 @@
               </a:defRPr>
             </a:pPr>
             <a:r>
-              <a:t>Appendix B: The Compiler Fills Blanks, It Does Not Write SQL</a:t>
+              <a:t>Appendix A: The Semantic Layer Is a File I Wrote</a:t>
             </a:r>
           </a:p>
         </p:txBody>
@@ -23967,13 +23367,13 @@
               </a:spcAft>
             </a:pPr>
             <a:r>
-              <a:rPr b="1" i="0" sz="1600">
+              <a:rPr b="1" i="0" sz="1700">
                 <a:solidFill>
                   <a:srgbClr val="003366"/>
                 </a:solidFill>
                 <a:latin typeface="Times New Roman"/>
               </a:rPr>
-              <a:t>aegis/server/compiler.py — the function that builds the SELECT clause:</a:t>
+              <a:t>aegis/server/semantic_layer.py — two of the objects the model is allowed to name:</a:t>
             </a:r>
           </a:p>
         </p:txBody>
@@ -23987,7 +23387,7 @@
         <p:spPr>
           <a:xfrm>
             <a:off x="777240" y="2066543"/>
-            <a:ext cx="10515600" cy="2743200"/>
+            <a:ext cx="5120640" cy="2286000"/>
           </a:xfrm>
           <a:prstGeom prst="rect">
             <a:avLst/>
@@ -24032,7 +23432,7 @@
             </a:pPr>
             <a:r>
               <a:rPr/>
-              <a:t>def _assemble_select(self, metric, dimension, extra_metrics=None, plan=None) -&gt; str:</a:t>
+              <a:t>Metric(</a:t>
             </a:r>
           </a:p>
           <a:p>
@@ -24049,7 +23449,7 @@
             </a:pPr>
             <a:r>
               <a:rPr/>
-              <a:t>    measures = [f"{metric.sql_expr} AS value"]</a:t>
+              <a:t>    id="avg_order_value",</a:t>
             </a:r>
           </a:p>
           <a:p>
@@ -24066,7 +23466,7 @@
             </a:pPr>
             <a:r>
               <a:rPr/>
-              <a:t>    for extra in extra_metrics or []:</a:t>
+              <a:t>    label="Average Order Value",</a:t>
             </a:r>
           </a:p>
           <a:p>
@@ -24083,7 +23483,7 @@
             </a:pPr>
             <a:r>
               <a:rPr/>
-              <a:t>        measures.append(f"{extra.sql_expr} AS `{extra.id}`")</a:t>
+              <a:t>    description="Average revenue per order",</a:t>
             </a:r>
           </a:p>
           <a:p>
@@ -24100,7 +23500,7 @@
             </a:pPr>
             <a:r>
               <a:rPr/>
-              <a:t>    projected = ", ".join(measures)</a:t>
+              <a:t>    sql_expr="AVG(COALESCE(o.OrderTotal, 0))",</a:t>
             </a:r>
           </a:p>
           <a:p>
@@ -24115,6 +23515,10 @@
                 <a:latin typeface="Consolas"/>
               </a:defRPr>
             </a:pPr>
+            <a:r>
+              <a:rPr/>
+              <a:t>    binding_table="Order",</a:t>
+            </a:r>
           </a:p>
           <a:p>
             <a:pPr algn="l">
@@ -24130,7 +23534,7 @@
             </a:pPr>
             <a:r>
               <a:rPr/>
-              <a:t>    if dimension:</a:t>
+              <a:t>    required_joins=[],</a:t>
             </a:r>
           </a:p>
           <a:p>
@@ -24147,7 +23551,7 @@
             </a:pPr>
             <a:r>
               <a:rPr/>
-              <a:t>        dim_expr = self._dimension_select_expr(dimension, plan)</a:t>
+              <a:t>    default_visual="kpi_card",</a:t>
             </a:r>
           </a:p>
           <a:p>
@@ -24164,7 +23568,7 @@
             </a:pPr>
             <a:r>
               <a:rPr/>
-              <a:t>        return f"SELECT {dim_expr} AS label, {projected}"</a:t>
+              <a:t>    time_anchor="o.CreatedOnUtc",</a:t>
             </a:r>
           </a:p>
           <a:p>
@@ -24181,9 +23585,51 @@
             </a:pPr>
             <a:r>
               <a:rPr/>
-              <a:t>    return f"SELECT {projected}"</a:t>
-            </a:r>
-          </a:p>
+              <a:t>)</a:t>
+            </a:r>
+          </a:p>
+        </p:txBody>
+      </p:sp>
+      <p:sp>
+        <p:nvSpPr>
+          <p:cNvPr id="15" name="Rectangle 14"/>
+          <p:cNvSpPr/>
+          <p:nvPr/>
+        </p:nvSpPr>
+        <p:spPr>
+          <a:xfrm>
+            <a:off x="6144768" y="2066543"/>
+            <a:ext cx="5120640" cy="2286000"/>
+          </a:xfrm>
+          <a:prstGeom prst="rect">
+            <a:avLst/>
+          </a:prstGeom>
+          <a:solidFill>
+            <a:srgbClr val="F7F7F7"/>
+          </a:solidFill>
+          <a:ln>
+            <a:solidFill>
+              <a:srgbClr val="B7B7B7"/>
+            </a:solidFill>
+          </a:ln>
+        </p:spPr>
+        <p:style>
+          <a:lnRef idx="1">
+            <a:schemeClr val="accent1"/>
+          </a:lnRef>
+          <a:fillRef idx="3">
+            <a:schemeClr val="accent1"/>
+          </a:fillRef>
+          <a:effectRef idx="2">
+            <a:schemeClr val="accent1"/>
+          </a:effectRef>
+          <a:fontRef idx="minor">
+            <a:schemeClr val="lt1"/>
+          </a:fontRef>
+        </p:style>
+        <p:txBody>
+          <a:bodyPr rtlCol="0" anchor="t" wrap="square" lIns="36576" tIns="73152"/>
+          <a:lstStyle/>
           <a:p>
             <a:pPr algn="l">
               <a:spcAft>
@@ -24196,6 +23642,10 @@
                 <a:latin typeface="Consolas"/>
               </a:defRPr>
             </a:pPr>
+            <a:r>
+              <a:rPr/>
+              <a:t>Dimension(</a:t>
+            </a:r>
           </a:p>
           <a:p>
             <a:pPr algn="l">
@@ -24211,7 +23661,7 @@
             </a:pPr>
             <a:r>
               <a:rPr/>
-              <a:t># Every interpolated value is an attribute of a semantic-layer object.</a:t>
+              <a:t>    id="order_status",</a:t>
             </a:r>
           </a:p>
           <a:p>
@@ -24228,21 +23678,174 @@
             </a:pPr>
             <a:r>
               <a:rPr/>
-              <a:t># No argument to this function carries user text.</a:t>
-            </a:r>
-          </a:p>
-        </p:txBody>
-      </p:sp>
-      <p:sp>
-        <p:nvSpPr>
-          <p:cNvPr id="15" name="TextBox 14"/>
+              <a:t>    label="Order Status",</a:t>
+            </a:r>
+          </a:p>
+          <a:p>
+            <a:pPr algn="l">
+              <a:spcAft>
+                <a:spcPts val="100"/>
+              </a:spcAft>
+              <a:defRPr sz="1000">
+                <a:solidFill>
+                  <a:srgbClr val="505050"/>
+                </a:solidFill>
+                <a:latin typeface="Consolas"/>
+              </a:defRPr>
+            </a:pPr>
+            <a:r>
+              <a:rPr/>
+              <a:t>    sql_expr="CASE o.OrderStatusId "</a:t>
+            </a:r>
+          </a:p>
+          <a:p>
+            <a:pPr algn="l">
+              <a:spcAft>
+                <a:spcPts val="100"/>
+              </a:spcAft>
+              <a:defRPr sz="1000">
+                <a:solidFill>
+                  <a:srgbClr val="505050"/>
+                </a:solidFill>
+                <a:latin typeface="Consolas"/>
+              </a:defRPr>
+            </a:pPr>
+            <a:r>
+              <a:rPr/>
+              <a:t>             "WHEN 10 THEN 'Pending' "</a:t>
+            </a:r>
+          </a:p>
+          <a:p>
+            <a:pPr algn="l">
+              <a:spcAft>
+                <a:spcPts val="100"/>
+              </a:spcAft>
+              <a:defRPr sz="1000">
+                <a:solidFill>
+                  <a:srgbClr val="505050"/>
+                </a:solidFill>
+                <a:latin typeface="Consolas"/>
+              </a:defRPr>
+            </a:pPr>
+            <a:r>
+              <a:rPr/>
+              <a:t>             "WHEN 20 THEN 'Processing' "</a:t>
+            </a:r>
+          </a:p>
+          <a:p>
+            <a:pPr algn="l">
+              <a:spcAft>
+                <a:spcPts val="100"/>
+              </a:spcAft>
+              <a:defRPr sz="1000">
+                <a:solidFill>
+                  <a:srgbClr val="505050"/>
+                </a:solidFill>
+                <a:latin typeface="Consolas"/>
+              </a:defRPr>
+            </a:pPr>
+            <a:r>
+              <a:rPr/>
+              <a:t>             "WHEN 30 THEN 'Complete' "</a:t>
+            </a:r>
+          </a:p>
+          <a:p>
+            <a:pPr algn="l">
+              <a:spcAft>
+                <a:spcPts val="100"/>
+              </a:spcAft>
+              <a:defRPr sz="1000">
+                <a:solidFill>
+                  <a:srgbClr val="505050"/>
+                </a:solidFill>
+                <a:latin typeface="Consolas"/>
+              </a:defRPr>
+            </a:pPr>
+            <a:r>
+              <a:rPr/>
+              <a:t>             "WHEN 40 THEN 'Cancelled' "</a:t>
+            </a:r>
+          </a:p>
+          <a:p>
+            <a:pPr algn="l">
+              <a:spcAft>
+                <a:spcPts val="100"/>
+              </a:spcAft>
+              <a:defRPr sz="1000">
+                <a:solidFill>
+                  <a:srgbClr val="505050"/>
+                </a:solidFill>
+                <a:latin typeface="Consolas"/>
+              </a:defRPr>
+            </a:pPr>
+            <a:r>
+              <a:rPr/>
+              <a:t>             "ELSE 'Unknown' END",</a:t>
+            </a:r>
+          </a:p>
+          <a:p>
+            <a:pPr algn="l">
+              <a:spcAft>
+                <a:spcPts val="100"/>
+              </a:spcAft>
+              <a:defRPr sz="1000">
+                <a:solidFill>
+                  <a:srgbClr val="505050"/>
+                </a:solidFill>
+                <a:latin typeface="Consolas"/>
+              </a:defRPr>
+            </a:pPr>
+            <a:r>
+              <a:rPr/>
+              <a:t>    binding_table="Order",</a:t>
+            </a:r>
+          </a:p>
+          <a:p>
+            <a:pPr algn="l">
+              <a:spcAft>
+                <a:spcPts val="100"/>
+              </a:spcAft>
+              <a:defRPr sz="1000">
+                <a:solidFill>
+                  <a:srgbClr val="505050"/>
+                </a:solidFill>
+                <a:latin typeface="Consolas"/>
+              </a:defRPr>
+            </a:pPr>
+            <a:r>
+              <a:rPr/>
+              <a:t>    datatype="string",</a:t>
+            </a:r>
+          </a:p>
+          <a:p>
+            <a:pPr algn="l">
+              <a:spcAft>
+                <a:spcPts val="100"/>
+              </a:spcAft>
+              <a:defRPr sz="1000">
+                <a:solidFill>
+                  <a:srgbClr val="505050"/>
+                </a:solidFill>
+                <a:latin typeface="Consolas"/>
+              </a:defRPr>
+            </a:pPr>
+            <a:r>
+              <a:rPr/>
+              <a:t>)</a:t>
+            </a:r>
+          </a:p>
+        </p:txBody>
+      </p:sp>
+      <p:sp>
+        <p:nvSpPr>
+          <p:cNvPr id="16" name="TextBox 15"/>
           <p:cNvSpPr txBox="1"/>
           <p:nvPr/>
         </p:nvSpPr>
         <p:spPr>
           <a:xfrm>
-            <a:off x="777240" y="4946903"/>
-            <a:ext cx="10515600" cy="868680"/>
+            <a:off x="777240" y="4489703"/>
+            <a:ext cx="10515600" cy="822960"/>
           </a:xfrm>
           <a:prstGeom prst="rect">
             <a:avLst/>
@@ -24267,22 +23870,76 @@
               </a:spcAft>
             </a:pPr>
             <a:r>
-              <a:rPr b="1" i="0" sz="1350">
+              <a:rPr b="1" i="0" sz="1700">
                 <a:solidFill>
                   <a:srgbClr val="003366"/>
                 </a:solidFill>
                 <a:latin typeface="Times New Roman"/>
               </a:rPr>
-              <a:t>Literal values take a separate route:</a:t>
-            </a:r>
-            <a:r>
-              <a:rPr b="0" i="0" sz="1250">
+              <a:t>The model may return the string "avg_order_value". It cannot return the expression, the table, or the join. Deploying AEGIS on another system means writing this file again — and nothing else.</a:t>
+            </a:r>
+          </a:p>
+        </p:txBody>
+      </p:sp>
+      <p:sp>
+        <p:nvSpPr>
+          <p:cNvPr id="17" name="Rounded Rectangle 16"/>
+          <p:cNvSpPr/>
+          <p:nvPr/>
+        </p:nvSpPr>
+        <p:spPr>
+          <a:xfrm>
+            <a:off x="777240" y="5742432"/>
+            <a:ext cx="10515600" cy="475488"/>
+          </a:xfrm>
+          <a:prstGeom prst="roundRect">
+            <a:avLst/>
+          </a:prstGeom>
+          <a:solidFill>
+            <a:srgbClr val="F3F6FB"/>
+          </a:solidFill>
+          <a:ln w="9525">
+            <a:solidFill>
+              <a:srgbClr val="C9D6E8"/>
+            </a:solidFill>
+          </a:ln>
+        </p:spPr>
+        <p:style>
+          <a:lnRef idx="1">
+            <a:schemeClr val="accent1"/>
+          </a:lnRef>
+          <a:fillRef idx="3">
+            <a:schemeClr val="accent1"/>
+          </a:fillRef>
+          <a:effectRef idx="2">
+            <a:schemeClr val="accent1"/>
+          </a:effectRef>
+          <a:fontRef idx="minor">
+            <a:schemeClr val="lt1"/>
+          </a:fontRef>
+        </p:style>
+        <p:txBody>
+          <a:bodyPr rtlCol="0" anchor="ctr" wrap="square" lIns="128016" rIns="128016"/>
+          <a:lstStyle/>
+          <a:p>
+            <a:pPr algn="l"/>
+            <a:r>
+              <a:rPr b="1" sz="1300">
                 <a:solidFill>
                   <a:srgbClr val="333333"/>
                 </a:solidFill>
                 <a:latin typeface="Times New Roman"/>
               </a:rPr>
-              <a:t> a filter compiles to a placeholder and a bound parameter (p.StockQuantity &lt; @p0 with {p0: 10}), so a value never becomes part of the SQL text. After assembly, a forbidden-pattern scan rejects any non-SELECT construct before execution.</a:t>
+              <a:t>In plain terms:  </a:t>
+            </a:r>
+            <a:r>
+              <a:rPr sz="1300">
+                <a:solidFill>
+                  <a:srgbClr val="333333"/>
+                </a:solidFill>
+                <a:latin typeface="Times New Roman"/>
+              </a:rPr>
+              <a:t>This list is the whole vocabulary. Anything not written here cannot be asked for.</a:t>
             </a:r>
           </a:p>
         </p:txBody>
@@ -24525,7 +24182,7 @@
               </a:defRPr>
             </a:pPr>
             <a:r>
-              <a:t>Appendix C: Why Templates Instead of Constrained Decoding</a:t>
+              <a:t>Appendix B: The Compiler Fills Blanks, It Does Not Write SQL</a:t>
             </a:r>
           </a:p>
         </p:txBody>
@@ -24646,6 +24303,723 @@
             </a:pPr>
             <a:r>
               <a:t>31</a:t>
+            </a:r>
+          </a:p>
+        </p:txBody>
+      </p:sp>
+      <p:sp>
+        <p:nvSpPr>
+          <p:cNvPr id="13" name="TextBox 12"/>
+          <p:cNvSpPr txBox="1"/>
+          <p:nvPr/>
+        </p:nvSpPr>
+        <p:spPr>
+          <a:xfrm>
+            <a:off x="777240" y="1572768"/>
+            <a:ext cx="10515600" cy="384048"/>
+          </a:xfrm>
+          <a:prstGeom prst="rect">
+            <a:avLst/>
+          </a:prstGeom>
+          <a:noFill/>
+        </p:spPr>
+        <p:txBody>
+          <a:bodyPr wrap="square" anchor="t" lIns="0" tIns="0" rIns="0">
+            <a:spAutoFit/>
+          </a:bodyPr>
+          <a:lstStyle/>
+          <a:p>
+            <a:pPr marL="0" indent="0">
+              <a:lnSpc>
+                <a:spcPct val="108000"/>
+              </a:lnSpc>
+              <a:spcBef>
+                <a:spcPts val="1200"/>
+              </a:spcBef>
+              <a:spcAft>
+                <a:spcPts val="500"/>
+              </a:spcAft>
+            </a:pPr>
+            <a:r>
+              <a:rPr b="1" i="0" sz="1700">
+                <a:solidFill>
+                  <a:srgbClr val="003366"/>
+                </a:solidFill>
+                <a:latin typeface="Times New Roman"/>
+              </a:rPr>
+              <a:t>aegis/server/compiler.py — the function that builds the SELECT clause:</a:t>
+            </a:r>
+          </a:p>
+        </p:txBody>
+      </p:sp>
+      <p:sp>
+        <p:nvSpPr>
+          <p:cNvPr id="14" name="Rectangle 13"/>
+          <p:cNvSpPr/>
+          <p:nvPr/>
+        </p:nvSpPr>
+        <p:spPr>
+          <a:xfrm>
+            <a:off x="777240" y="2066543"/>
+            <a:ext cx="10515600" cy="2743200"/>
+          </a:xfrm>
+          <a:prstGeom prst="rect">
+            <a:avLst/>
+          </a:prstGeom>
+          <a:solidFill>
+            <a:srgbClr val="F7F7F7"/>
+          </a:solidFill>
+          <a:ln>
+            <a:solidFill>
+              <a:srgbClr val="B7B7B7"/>
+            </a:solidFill>
+          </a:ln>
+        </p:spPr>
+        <p:style>
+          <a:lnRef idx="1">
+            <a:schemeClr val="accent1"/>
+          </a:lnRef>
+          <a:fillRef idx="3">
+            <a:schemeClr val="accent1"/>
+          </a:fillRef>
+          <a:effectRef idx="2">
+            <a:schemeClr val="accent1"/>
+          </a:effectRef>
+          <a:fontRef idx="minor">
+            <a:schemeClr val="lt1"/>
+          </a:fontRef>
+        </p:style>
+        <p:txBody>
+          <a:bodyPr rtlCol="0" anchor="t" wrap="square" lIns="36576" tIns="73152"/>
+          <a:lstStyle/>
+          <a:p>
+            <a:pPr algn="l">
+              <a:spcAft>
+                <a:spcPts val="100"/>
+              </a:spcAft>
+              <a:defRPr sz="1000">
+                <a:solidFill>
+                  <a:srgbClr val="505050"/>
+                </a:solidFill>
+                <a:latin typeface="Consolas"/>
+              </a:defRPr>
+            </a:pPr>
+            <a:r>
+              <a:rPr/>
+              <a:t>def _assemble_select(self, metric, dimension, extra_metrics=None, plan=None) -&gt; str:</a:t>
+            </a:r>
+          </a:p>
+          <a:p>
+            <a:pPr algn="l">
+              <a:spcAft>
+                <a:spcPts val="100"/>
+              </a:spcAft>
+              <a:defRPr sz="1000">
+                <a:solidFill>
+                  <a:srgbClr val="505050"/>
+                </a:solidFill>
+                <a:latin typeface="Consolas"/>
+              </a:defRPr>
+            </a:pPr>
+            <a:r>
+              <a:rPr/>
+              <a:t>    measures = [f"{metric.sql_expr} AS value"]</a:t>
+            </a:r>
+          </a:p>
+          <a:p>
+            <a:pPr algn="l">
+              <a:spcAft>
+                <a:spcPts val="100"/>
+              </a:spcAft>
+              <a:defRPr sz="1000">
+                <a:solidFill>
+                  <a:srgbClr val="505050"/>
+                </a:solidFill>
+                <a:latin typeface="Consolas"/>
+              </a:defRPr>
+            </a:pPr>
+            <a:r>
+              <a:rPr/>
+              <a:t>    for extra in extra_metrics or []:</a:t>
+            </a:r>
+          </a:p>
+          <a:p>
+            <a:pPr algn="l">
+              <a:spcAft>
+                <a:spcPts val="100"/>
+              </a:spcAft>
+              <a:defRPr sz="1000">
+                <a:solidFill>
+                  <a:srgbClr val="505050"/>
+                </a:solidFill>
+                <a:latin typeface="Consolas"/>
+              </a:defRPr>
+            </a:pPr>
+            <a:r>
+              <a:rPr/>
+              <a:t>        measures.append(f"{extra.sql_expr} AS `{extra.id}`")</a:t>
+            </a:r>
+          </a:p>
+          <a:p>
+            <a:pPr algn="l">
+              <a:spcAft>
+                <a:spcPts val="100"/>
+              </a:spcAft>
+              <a:defRPr sz="1000">
+                <a:solidFill>
+                  <a:srgbClr val="505050"/>
+                </a:solidFill>
+                <a:latin typeface="Consolas"/>
+              </a:defRPr>
+            </a:pPr>
+            <a:r>
+              <a:rPr/>
+              <a:t>    projected = ", ".join(measures)</a:t>
+            </a:r>
+          </a:p>
+          <a:p>
+            <a:pPr algn="l">
+              <a:spcAft>
+                <a:spcPts val="100"/>
+              </a:spcAft>
+              <a:defRPr sz="1000">
+                <a:solidFill>
+                  <a:srgbClr val="505050"/>
+                </a:solidFill>
+                <a:latin typeface="Consolas"/>
+              </a:defRPr>
+            </a:pPr>
+          </a:p>
+          <a:p>
+            <a:pPr algn="l">
+              <a:spcAft>
+                <a:spcPts val="100"/>
+              </a:spcAft>
+              <a:defRPr sz="1000">
+                <a:solidFill>
+                  <a:srgbClr val="505050"/>
+                </a:solidFill>
+                <a:latin typeface="Consolas"/>
+              </a:defRPr>
+            </a:pPr>
+            <a:r>
+              <a:rPr/>
+              <a:t>    if dimension:</a:t>
+            </a:r>
+          </a:p>
+          <a:p>
+            <a:pPr algn="l">
+              <a:spcAft>
+                <a:spcPts val="100"/>
+              </a:spcAft>
+              <a:defRPr sz="1000">
+                <a:solidFill>
+                  <a:srgbClr val="505050"/>
+                </a:solidFill>
+                <a:latin typeface="Consolas"/>
+              </a:defRPr>
+            </a:pPr>
+            <a:r>
+              <a:rPr/>
+              <a:t>        dim_expr = self._dimension_select_expr(dimension, plan)</a:t>
+            </a:r>
+          </a:p>
+          <a:p>
+            <a:pPr algn="l">
+              <a:spcAft>
+                <a:spcPts val="100"/>
+              </a:spcAft>
+              <a:defRPr sz="1000">
+                <a:solidFill>
+                  <a:srgbClr val="505050"/>
+                </a:solidFill>
+                <a:latin typeface="Consolas"/>
+              </a:defRPr>
+            </a:pPr>
+            <a:r>
+              <a:rPr/>
+              <a:t>        return f"SELECT {dim_expr} AS label, {projected}"</a:t>
+            </a:r>
+          </a:p>
+          <a:p>
+            <a:pPr algn="l">
+              <a:spcAft>
+                <a:spcPts val="100"/>
+              </a:spcAft>
+              <a:defRPr sz="1000">
+                <a:solidFill>
+                  <a:srgbClr val="505050"/>
+                </a:solidFill>
+                <a:latin typeface="Consolas"/>
+              </a:defRPr>
+            </a:pPr>
+            <a:r>
+              <a:rPr/>
+              <a:t>    return f"SELECT {projected}"</a:t>
+            </a:r>
+          </a:p>
+          <a:p>
+            <a:pPr algn="l">
+              <a:spcAft>
+                <a:spcPts val="100"/>
+              </a:spcAft>
+              <a:defRPr sz="1000">
+                <a:solidFill>
+                  <a:srgbClr val="505050"/>
+                </a:solidFill>
+                <a:latin typeface="Consolas"/>
+              </a:defRPr>
+            </a:pPr>
+          </a:p>
+          <a:p>
+            <a:pPr algn="l">
+              <a:spcAft>
+                <a:spcPts val="100"/>
+              </a:spcAft>
+              <a:defRPr sz="1000">
+                <a:solidFill>
+                  <a:srgbClr val="505050"/>
+                </a:solidFill>
+                <a:latin typeface="Consolas"/>
+              </a:defRPr>
+            </a:pPr>
+            <a:r>
+              <a:rPr/>
+              <a:t># Every interpolated value is an attribute of a semantic-layer object.</a:t>
+            </a:r>
+          </a:p>
+          <a:p>
+            <a:pPr algn="l">
+              <a:spcAft>
+                <a:spcPts val="100"/>
+              </a:spcAft>
+              <a:defRPr sz="1000">
+                <a:solidFill>
+                  <a:srgbClr val="505050"/>
+                </a:solidFill>
+                <a:latin typeface="Consolas"/>
+              </a:defRPr>
+            </a:pPr>
+            <a:r>
+              <a:rPr/>
+              <a:t># No argument to this function carries user text.</a:t>
+            </a:r>
+          </a:p>
+        </p:txBody>
+      </p:sp>
+      <p:sp>
+        <p:nvSpPr>
+          <p:cNvPr id="15" name="TextBox 14"/>
+          <p:cNvSpPr txBox="1"/>
+          <p:nvPr/>
+        </p:nvSpPr>
+        <p:spPr>
+          <a:xfrm>
+            <a:off x="777240" y="4946903"/>
+            <a:ext cx="10515600" cy="868680"/>
+          </a:xfrm>
+          <a:prstGeom prst="rect">
+            <a:avLst/>
+          </a:prstGeom>
+          <a:noFill/>
+        </p:spPr>
+        <p:txBody>
+          <a:bodyPr wrap="square" anchor="t" lIns="0" tIns="0" rIns="0">
+            <a:spAutoFit/>
+          </a:bodyPr>
+          <a:lstStyle/>
+          <a:p>
+            <a:pPr marL="0" indent="0">
+              <a:lnSpc>
+                <a:spcPct val="108000"/>
+              </a:lnSpc>
+              <a:spcBef>
+                <a:spcPts val="1200"/>
+              </a:spcBef>
+              <a:spcAft>
+                <a:spcPts val="500"/>
+              </a:spcAft>
+            </a:pPr>
+            <a:r>
+              <a:rPr b="1" i="0" sz="1500">
+                <a:solidFill>
+                  <a:srgbClr val="003366"/>
+                </a:solidFill>
+                <a:latin typeface="Times New Roman"/>
+              </a:rPr>
+              <a:t>Literal values take a separate route:</a:t>
+            </a:r>
+            <a:r>
+              <a:rPr b="0" i="0" sz="1400">
+                <a:solidFill>
+                  <a:srgbClr val="333333"/>
+                </a:solidFill>
+                <a:latin typeface="Times New Roman"/>
+              </a:rPr>
+              <a:t> a filter compiles to a placeholder and a bound parameter (p.StockQuantity &lt; @p0 with {p0: 10}), so a value never becomes part of the SQL text. After assembly, a forbidden-pattern scan rejects any non-SELECT construct before execution.</a:t>
+            </a:r>
+          </a:p>
+        </p:txBody>
+      </p:sp>
+    </p:spTree>
+  </p:cSld>
+  <p:clrMapOvr>
+    <a:masterClrMapping/>
+  </p:clrMapOvr>
+</p:sld>
+</file>
+
+<file path=ppt/slides/slide32.xml><?xml version="1.0" encoding="utf-8"?>
+<p:sld xmlns:a="http://schemas.openxmlformats.org/drawingml/2006/main" xmlns:p="http://schemas.openxmlformats.org/presentationml/2006/main" xmlns:r="http://schemas.openxmlformats.org/officeDocument/2006/relationships">
+  <p:cSld>
+    <p:spTree>
+      <p:nvGrpSpPr>
+        <p:cNvPr id="1" name=""/>
+        <p:cNvGrpSpPr/>
+        <p:nvPr/>
+      </p:nvGrpSpPr>
+      <p:grpSpPr/>
+      <p:sp>
+        <p:nvSpPr>
+          <p:cNvPr id="11" name="Rectangle 10">
+            <a:extLst>
+              <a:ext uri="{FF2B5EF4-FFF2-40B4-BE49-F238E27FC236}">
+                <a16:creationId xmlns:a16="http://schemas.microsoft.com/office/drawing/2014/main" id="{D059D760-A365-91EB-B942-587B657A477E}"/>
+              </a:ext>
+            </a:extLst>
+          </p:cNvPr>
+          <p:cNvSpPr/>
+          <p:nvPr/>
+        </p:nvSpPr>
+        <p:spPr>
+          <a:xfrm>
+            <a:off x="-1" y="1500807"/>
+            <a:ext cx="12191999" cy="18288"/>
+          </a:xfrm>
+          <a:prstGeom prst="rect">
+            <a:avLst/>
+          </a:prstGeom>
+          <a:gradFill flip="none" rotWithShape="1">
+            <a:gsLst>
+              <a:gs pos="0">
+                <a:schemeClr val="accent1">
+                  <a:lumMod val="40000"/>
+                  <a:lumOff val="60000"/>
+                </a:schemeClr>
+              </a:gs>
+              <a:gs pos="36000">
+                <a:schemeClr val="accent1">
+                  <a:lumMod val="95000"/>
+                  <a:lumOff val="5000"/>
+                </a:schemeClr>
+              </a:gs>
+              <a:gs pos="100000">
+                <a:schemeClr val="tx2">
+                  <a:lumMod val="50000"/>
+                </a:schemeClr>
+              </a:gs>
+            </a:gsLst>
+            <a:path path="circle">
+              <a:fillToRect l="50000" t="130000" r="50000" b="-30000"/>
+            </a:path>
+            <a:tileRect/>
+          </a:gradFill>
+          <a:ln>
+            <a:noFill/>
+          </a:ln>
+        </p:spPr>
+        <p:style>
+          <a:lnRef idx="2">
+            <a:schemeClr val="accent1">
+              <a:shade val="15000"/>
+            </a:schemeClr>
+          </a:lnRef>
+          <a:fillRef idx="1">
+            <a:schemeClr val="accent1"/>
+          </a:fillRef>
+          <a:effectRef idx="0">
+            <a:schemeClr val="accent1"/>
+          </a:effectRef>
+          <a:fontRef idx="minor">
+            <a:schemeClr val="lt1"/>
+          </a:fontRef>
+        </p:style>
+        <p:txBody>
+          <a:bodyPr rtlCol="0" anchor="ctr"/>
+          <a:lstStyle/>
+          <a:p>
+            <a:pPr algn="ctr"/>
+            <a:endParaRPr lang="en-US"/>
+          </a:p>
+        </p:txBody>
+      </p:sp>
+      <p:sp>
+        <p:nvSpPr>
+          <p:cNvPr id="7" name="Rectangle 6">
+            <a:extLst>
+              <a:ext uri="{FF2B5EF4-FFF2-40B4-BE49-F238E27FC236}">
+                <a16:creationId xmlns:a16="http://schemas.microsoft.com/office/drawing/2014/main" id="{37F49795-9FC6-D65C-AAE9-247F6DF3DA3F}"/>
+              </a:ext>
+            </a:extLst>
+          </p:cNvPr>
+          <p:cNvSpPr/>
+          <p:nvPr/>
+        </p:nvSpPr>
+        <p:spPr>
+          <a:xfrm>
+            <a:off x="0" y="6291468"/>
+            <a:ext cx="12192000" cy="586409"/>
+          </a:xfrm>
+          <a:prstGeom prst="rect">
+            <a:avLst/>
+          </a:prstGeom>
+          <a:solidFill>
+            <a:schemeClr val="tx2">
+              <a:lumMod val="75000"/>
+            </a:schemeClr>
+          </a:solidFill>
+          <a:ln>
+            <a:noFill/>
+          </a:ln>
+          <a:effectLst>
+            <a:outerShdw blurRad="63500" sx="102000" sy="102000" algn="ctr" rotWithShape="0">
+              <a:prstClr val="black">
+                <a:alpha val="40000"/>
+              </a:prstClr>
+            </a:outerShdw>
+          </a:effectLst>
+        </p:spPr>
+        <p:style>
+          <a:lnRef idx="2">
+            <a:schemeClr val="accent1">
+              <a:shade val="15000"/>
+            </a:schemeClr>
+          </a:lnRef>
+          <a:fillRef idx="1">
+            <a:schemeClr val="accent1"/>
+          </a:fillRef>
+          <a:effectRef idx="0">
+            <a:schemeClr val="accent1"/>
+          </a:effectRef>
+          <a:fontRef idx="minor">
+            <a:schemeClr val="lt1"/>
+          </a:fontRef>
+        </p:style>
+        <p:txBody>
+          <a:bodyPr rtlCol="0" anchor="ctr"/>
+          <a:lstStyle/>
+          <a:p>
+            <a:pPr algn="ctr"/>
+            <a:endParaRPr lang="en-US" dirty="0"/>
+          </a:p>
+        </p:txBody>
+      </p:sp>
+      <p:sp>
+        <p:nvSpPr>
+          <p:cNvPr id="3" name="Rectangle 2">
+            <a:extLst>
+              <a:ext uri="{FF2B5EF4-FFF2-40B4-BE49-F238E27FC236}">
+                <a16:creationId xmlns:a16="http://schemas.microsoft.com/office/drawing/2014/main" id="{6027AE48-C47C-33FE-8F56-0AA4260C9B62}"/>
+              </a:ext>
+            </a:extLst>
+          </p:cNvPr>
+          <p:cNvSpPr/>
+          <p:nvPr/>
+        </p:nvSpPr>
+        <p:spPr>
+          <a:xfrm>
+            <a:off x="0" y="0"/>
+            <a:ext cx="12192000" cy="1500809"/>
+          </a:xfrm>
+          <a:prstGeom prst="rect">
+            <a:avLst/>
+          </a:prstGeom>
+          <a:solidFill>
+            <a:schemeClr val="accent1">
+              <a:lumMod val="20000"/>
+              <a:lumOff val="80000"/>
+            </a:schemeClr>
+          </a:solidFill>
+          <a:ln>
+            <a:noFill/>
+          </a:ln>
+          <a:effectLst/>
+        </p:spPr>
+        <p:style>
+          <a:lnRef idx="2">
+            <a:schemeClr val="accent1">
+              <a:shade val="15000"/>
+            </a:schemeClr>
+          </a:lnRef>
+          <a:fillRef idx="1">
+            <a:schemeClr val="accent1"/>
+          </a:fillRef>
+          <a:effectRef idx="0">
+            <a:schemeClr val="accent1"/>
+          </a:effectRef>
+          <a:fontRef idx="minor">
+            <a:schemeClr val="lt1"/>
+          </a:fontRef>
+        </p:style>
+        <p:txBody>
+          <a:bodyPr rtlCol="0" anchor="ctr"/>
+          <a:lstStyle/>
+          <a:p>
+            <a:pPr algn="ctr"/>
+            <a:endParaRPr lang="en-US" dirty="0"/>
+          </a:p>
+        </p:txBody>
+      </p:sp>
+      <p:sp>
+        <p:nvSpPr>
+          <p:cNvPr id="2" name="Title 1"/>
+          <p:cNvSpPr>
+            <a:spLocks noGrp="1"/>
+          </p:cNvSpPr>
+          <p:nvPr>
+            <p:ph type="title"/>
+          </p:nvPr>
+        </p:nvSpPr>
+        <p:spPr>
+          <a:xfrm>
+            <a:off x="1188720" y="365760"/>
+            <a:ext cx="9601200" cy="731520"/>
+          </a:xfrm>
+        </p:spPr>
+        <p:txBody>
+          <a:bodyPr/>
+          <a:lstStyle/>
+          <a:p>
+            <a:pPr>
+              <a:defRPr b="1" sz="2400">
+                <a:solidFill>
+                  <a:srgbClr val="003366"/>
+                </a:solidFill>
+                <a:latin typeface="Times New Roman"/>
+              </a:defRPr>
+            </a:pPr>
+            <a:r>
+              <a:t>Appendix C: Why Templates Instead of Constrained Decoding</a:t>
+            </a:r>
+          </a:p>
+        </p:txBody>
+      </p:sp>
+      <p:pic>
+        <p:nvPicPr>
+          <p:cNvPr id="12" name="Picture 11" descr="image.png"/>
+          <p:cNvPicPr>
+            <a:picLocks noChangeAspect="1"/>
+          </p:cNvPicPr>
+          <p:nvPr/>
+        </p:nvPicPr>
+        <p:blipFill>
+          <a:blip r:embed="rId2"/>
+          <a:stretch>
+            <a:fillRect/>
+          </a:stretch>
+        </p:blipFill>
+        <p:spPr>
+          <a:xfrm>
+            <a:off x="512874" y="457199"/>
+            <a:ext cx="592309" cy="586409"/>
+          </a:xfrm>
+          <a:prstGeom prst="rect">
+            <a:avLst/>
+          </a:prstGeom>
+        </p:spPr>
+      </p:pic>
+      <p:sp>
+        <p:nvSpPr>
+          <p:cNvPr id="4" name="Date Placeholder 3">
+            <a:extLst>
+              <a:ext uri="{FF2B5EF4-FFF2-40B4-BE49-F238E27FC236}">
+                <a16:creationId xmlns:a16="http://schemas.microsoft.com/office/drawing/2014/main" id="{4C2A3C15-2DFB-89FB-3AD7-611F4E0BA472}"/>
+              </a:ext>
+            </a:extLst>
+          </p:cNvPr>
+          <p:cNvSpPr>
+            <a:spLocks noGrp="1"/>
+          </p:cNvSpPr>
+          <p:nvPr>
+            <p:ph type="dt" sz="half" idx="10"/>
+          </p:nvPr>
+        </p:nvSpPr>
+        <p:spPr/>
+        <p:txBody>
+          <a:bodyPr/>
+          <a:lstStyle/>
+          <a:p>
+            <a:pPr>
+              <a:defRPr>
+                <a:latin typeface="Times New Roman"/>
+              </a:defRPr>
+            </a:pPr>
+            <a:r>
+              <a:t>Tuesday, August 18, 2026</a:t>
+            </a:r>
+          </a:p>
+        </p:txBody>
+      </p:sp>
+      <p:sp>
+        <p:nvSpPr>
+          <p:cNvPr id="5" name="Footer Placeholder 4">
+            <a:extLst>
+              <a:ext uri="{FF2B5EF4-FFF2-40B4-BE49-F238E27FC236}">
+                <a16:creationId xmlns:a16="http://schemas.microsoft.com/office/drawing/2014/main" id="{16B89723-33F1-15E2-783B-D602C96206A1}"/>
+              </a:ext>
+            </a:extLst>
+          </p:cNvPr>
+          <p:cNvSpPr>
+            <a:spLocks noGrp="1"/>
+          </p:cNvSpPr>
+          <p:nvPr>
+            <p:ph type="ftr" sz="quarter" idx="11"/>
+          </p:nvPr>
+        </p:nvSpPr>
+        <p:spPr/>
+        <p:txBody>
+          <a:bodyPr/>
+          <a:lstStyle/>
+          <a:p>
+            <a:pPr>
+              <a:defRPr>
+                <a:latin typeface="Times New Roman"/>
+              </a:defRPr>
+            </a:pPr>
+            <a:r>
+              <a:t>Department of Computer Science &amp; Engineering, PUB</a:t>
+            </a:r>
+          </a:p>
+        </p:txBody>
+      </p:sp>
+      <p:sp>
+        <p:nvSpPr>
+          <p:cNvPr id="6" name="Slide Number Placeholder 5">
+            <a:extLst>
+              <a:ext uri="{FF2B5EF4-FFF2-40B4-BE49-F238E27FC236}">
+                <a16:creationId xmlns:a16="http://schemas.microsoft.com/office/drawing/2014/main" id="{7104B3F8-8A1A-BE19-5C71-AE319E3DCF2B}"/>
+              </a:ext>
+            </a:extLst>
+          </p:cNvPr>
+          <p:cNvSpPr>
+            <a:spLocks noGrp="1"/>
+          </p:cNvSpPr>
+          <p:nvPr>
+            <p:ph type="sldNum" sz="quarter" idx="12"/>
+          </p:nvPr>
+        </p:nvSpPr>
+        <p:spPr/>
+        <p:txBody>
+          <a:bodyPr/>
+          <a:lstStyle/>
+          <a:p>
+            <a:pPr>
+              <a:defRPr>
+                <a:latin typeface="Times New Roman"/>
+              </a:defRPr>
+            </a:pPr>
+            <a:r>
+              <a:t>32</a:t>
             </a:r>
           </a:p>
         </p:txBody>
@@ -24991,7 +25365,7 @@
         <p:spPr>
           <a:xfrm>
             <a:off x="777240" y="4544568"/>
-            <a:ext cx="10515600" cy="1234440"/>
+            <a:ext cx="10515600" cy="1691640"/>
           </a:xfrm>
           <a:prstGeom prst="rect">
             <a:avLst/>
@@ -25016,7 +25390,7 @@
               </a:spcAft>
             </a:pPr>
             <a:r>
-              <a:rPr b="1" i="0" sz="1450">
+              <a:rPr b="1" i="0" sz="1700">
                 <a:solidFill>
                   <a:srgbClr val="003366"/>
                 </a:solidFill>
@@ -25038,7 +25412,7 @@
               </a:spcAft>
             </a:pPr>
             <a:r>
-              <a:rPr b="1" i="0" sz="1250">
+              <a:rPr b="1" i="0" sz="1500">
                 <a:solidFill>
                   <a:srgbClr val="003366"/>
                 </a:solidFill>
@@ -25047,7 +25421,7 @@
               <a:t>The trade is real and worth stating plainly:</a:t>
             </a:r>
             <a:r>
-              <a:rPr b="0" i="0" sz="1150">
+              <a:rPr b="0" i="0" sz="1400">
                 <a:solidFill>
                   <a:srgbClr val="333333"/>
                 </a:solidFill>

--- a/docs/scripts/Md_Riaz_Final_Defense_0322310105101024.pptx
+++ b/docs/scripts/Md_Riaz_Final_Defense_0322310105101024.pptx
@@ -39,6 +39,7 @@
     <p:sldId id="284" r:id="rId35"/>
     <p:sldId id="285" r:id="rId36"/>
     <p:sldId id="286" r:id="rId37"/>
+    <p:sldId id="287" r:id="rId38"/>
   </p:sldIdLst>
   <p:sldSz cx="12192000" cy="6858000"/>
   <p:notesSz cx="6858000" cy="9144000"/>
@@ -3941,7 +3942,7 @@
         <p:spPr>
           <a:xfrm>
             <a:off x="1523939" y="2331720"/>
-            <a:ext cx="9144000" cy="960120"/>
+            <a:ext cx="9144000" cy="1097280"/>
           </a:xfrm>
         </p:spPr>
         <p:txBody>
@@ -3960,6 +3961,7 @@
               </a:defRPr>
             </a:pPr>
             <a:r>
+              <a:rPr/>
               <a:t>AEGIS: A Constraint-Based Architecture for Safe</a:t>
             </a:r>
           </a:p>
@@ -3976,6 +3978,7 @@
               </a:defRPr>
             </a:pPr>
             <a:r>
+              <a:rPr/>
               <a:t>LLM-Assisted Natural Language Analytics</a:t>
             </a:r>
           </a:p>
@@ -4030,8 +4033,8 @@
         </p:nvSpPr>
         <p:spPr>
           <a:xfrm>
-            <a:off x="3282222" y="5413248"/>
-            <a:ext cx="5627553" cy="530352"/>
+            <a:off x="3282222" y="5504688"/>
+            <a:ext cx="5627553" cy="420624"/>
           </a:xfrm>
           <a:prstGeom prst="rect">
             <a:avLst/>
@@ -4050,6 +4053,7 @@
               </a:defRPr>
             </a:pPr>
             <a:r>
+              <a:rPr/>
               <a:t>Department of Computer Science &amp; Engineering</a:t>
             </a:r>
           </a:p>
@@ -4060,6 +4064,7 @@
               </a:defRPr>
             </a:pPr>
             <a:r>
+              <a:rPr/>
               <a:t>Pundra University of Science &amp; Technology, Bogura - 5800</a:t>
             </a:r>
           </a:p>
@@ -4093,7 +4098,8 @@
               </a:defRPr>
             </a:pPr>
             <a:r>
-              <a:t>Final Defense Presentation on</a:t>
+              <a:rPr/>
+              <a:t>Final Defense Presentation</a:t>
             </a:r>
           </a:p>
         </p:txBody>
@@ -4106,7 +4112,7 @@
         </p:nvSpPr>
         <p:spPr>
           <a:xfrm>
-            <a:off x="1527048" y="3730752"/>
+            <a:off x="1527048" y="3712463"/>
             <a:ext cx="3886200" cy="365760"/>
           </a:xfrm>
           <a:prstGeom prst="rect">
@@ -4126,6 +4132,7 @@
               </a:defRPr>
             </a:pPr>
             <a:r>
+              <a:rPr/>
               <a:t>Presented By</a:t>
             </a:r>
           </a:p>
@@ -4140,7 +4147,7 @@
         <p:spPr>
           <a:xfrm>
             <a:off x="1527048" y="4041648"/>
-            <a:ext cx="3886200" cy="1143000"/>
+            <a:ext cx="3886200" cy="1463040"/>
           </a:xfrm>
           <a:prstGeom prst="rect">
             <a:avLst/>
@@ -4155,78 +4162,84 @@
           <a:p>
             <a:pPr>
               <a:lnSpc>
-                <a:spcPct val="112000"/>
+                <a:spcPct val="105000"/>
               </a:lnSpc>
               <a:defRPr sz="2000" b="1">
                 <a:latin typeface="Times New Roman"/>
               </a:defRPr>
             </a:pPr>
             <a:r>
+              <a:rPr/>
               <a:t>Md. Riaz</a:t>
             </a:r>
           </a:p>
           <a:p>
             <a:pPr>
               <a:lnSpc>
-                <a:spcPct val="112000"/>
+                <a:spcPct val="105000"/>
               </a:lnSpc>
-              <a:defRPr sz="1600" b="0">
+              <a:defRPr sz="1400" b="0">
                 <a:latin typeface="Times New Roman"/>
               </a:defRPr>
             </a:pPr>
             <a:r>
+              <a:rPr/>
               <a:t>Program: B.Sc. in CSE (Diploma)</a:t>
             </a:r>
           </a:p>
           <a:p>
             <a:pPr>
               <a:lnSpc>
-                <a:spcPct val="112000"/>
+                <a:spcPct val="105000"/>
               </a:lnSpc>
-              <a:defRPr sz="1600" b="0">
+              <a:defRPr sz="1400" b="0">
                 <a:latin typeface="Times New Roman"/>
               </a:defRPr>
             </a:pPr>
             <a:r>
+              <a:rPr/>
               <a:t>ID: 0322310105101024</a:t>
             </a:r>
           </a:p>
           <a:p>
             <a:pPr>
               <a:lnSpc>
-                <a:spcPct val="112000"/>
+                <a:spcPct val="105000"/>
               </a:lnSpc>
-              <a:defRPr sz="1600" b="0">
+              <a:defRPr sz="1400" b="0">
                 <a:latin typeface="Times New Roman"/>
               </a:defRPr>
             </a:pPr>
             <a:r>
+              <a:rPr/>
               <a:t>Batch: 16th</a:t>
             </a:r>
           </a:p>
           <a:p>
             <a:pPr>
               <a:lnSpc>
-                <a:spcPct val="112000"/>
+                <a:spcPct val="105000"/>
               </a:lnSpc>
-              <a:defRPr sz="1600" b="0">
+              <a:defRPr sz="1400" b="0">
                 <a:latin typeface="Times New Roman"/>
               </a:defRPr>
             </a:pPr>
             <a:r>
+              <a:rPr/>
               <a:t>8th Semester / 4th Year</a:t>
             </a:r>
           </a:p>
           <a:p>
             <a:pPr>
               <a:lnSpc>
-                <a:spcPct val="112000"/>
+                <a:spcPct val="105000"/>
               </a:lnSpc>
-              <a:defRPr sz="1600" b="0">
+              <a:defRPr sz="1400" b="0">
                 <a:latin typeface="Times New Roman"/>
               </a:defRPr>
             </a:pPr>
             <a:r>
+              <a:rPr/>
               <a:t>Session: Spring - 2023</a:t>
             </a:r>
           </a:p>
@@ -4240,7 +4253,7 @@
         </p:nvSpPr>
         <p:spPr>
           <a:xfrm>
-            <a:off x="7269480" y="3767328"/>
+            <a:off x="7269480" y="3712463"/>
             <a:ext cx="3886200" cy="365760"/>
           </a:xfrm>
           <a:prstGeom prst="rect">
@@ -4260,6 +4273,7 @@
               </a:defRPr>
             </a:pPr>
             <a:r>
+              <a:rPr/>
               <a:t>Supervised By</a:t>
             </a:r>
           </a:p>
@@ -4273,8 +4287,8 @@
         </p:nvSpPr>
         <p:spPr>
           <a:xfrm>
-            <a:off x="7269480" y="4133087"/>
-            <a:ext cx="3886200" cy="1143000"/>
+            <a:off x="7269480" y="4041648"/>
+            <a:ext cx="3886200" cy="1463040"/>
           </a:xfrm>
           <a:prstGeom prst="rect">
             <a:avLst/>
@@ -4289,39 +4303,42 @@
           <a:p>
             <a:pPr>
               <a:lnSpc>
-                <a:spcPct val="112000"/>
+                <a:spcPct val="105000"/>
               </a:lnSpc>
               <a:defRPr sz="2000" b="1">
                 <a:latin typeface="Times New Roman"/>
               </a:defRPr>
             </a:pPr>
             <a:r>
+              <a:rPr/>
               <a:t>Mst. Sahela Rahman</a:t>
             </a:r>
           </a:p>
           <a:p>
             <a:pPr>
               <a:lnSpc>
-                <a:spcPct val="112000"/>
+                <a:spcPct val="105000"/>
               </a:lnSpc>
-              <a:defRPr sz="1600" b="0">
+              <a:defRPr sz="1400" b="0">
                 <a:latin typeface="Times New Roman"/>
               </a:defRPr>
             </a:pPr>
             <a:r>
+              <a:rPr/>
               <a:t>Lecturer</a:t>
             </a:r>
           </a:p>
           <a:p>
             <a:pPr>
               <a:lnSpc>
-                <a:spcPct val="112000"/>
+                <a:spcPct val="105000"/>
               </a:lnSpc>
-              <a:defRPr sz="1600" b="0">
+              <a:defRPr sz="1400" b="0">
                 <a:latin typeface="Times New Roman"/>
               </a:defRPr>
             </a:pPr>
             <a:r>
+              <a:rPr/>
               <a:t>Dept. of CSE, PUB</a:t>
             </a:r>
           </a:p>
@@ -4706,8 +4723,8 @@
         </p:blipFill>
         <p:spPr>
           <a:xfrm>
-            <a:off x="1758261" y="1097280"/>
-            <a:ext cx="8699862" cy="5074920"/>
+            <a:off x="1758261" y="1572768"/>
+            <a:ext cx="8699862" cy="4663440"/>
           </a:xfrm>
           <a:prstGeom prst="rect">
             <a:avLst/>
@@ -5708,8 +5725,8 @@
         </p:nvSpPr>
         <p:spPr>
           <a:xfrm>
-            <a:off x="658368" y="1335024"/>
-            <a:ext cx="2880360" cy="566928"/>
+            <a:off x="658368" y="1572768"/>
+            <a:ext cx="2880360" cy="547378"/>
           </a:xfrm>
           <a:prstGeom prst="roundRect">
             <a:avLst/>
@@ -5750,6 +5767,7 @@
               </a:defRPr>
             </a:pPr>
             <a:r>
+              <a:rPr/>
               <a:t>1. User asks a business question</a:t>
             </a:r>
           </a:p>
@@ -5763,8 +5781,8 @@
         </p:nvSpPr>
         <p:spPr>
           <a:xfrm>
-            <a:off x="822960" y="2048256"/>
-            <a:ext cx="2651760" cy="786384"/>
+            <a:off x="822960" y="2261405"/>
+            <a:ext cx="2651760" cy="1280160"/>
           </a:xfrm>
           <a:prstGeom prst="rect">
             <a:avLst/>
@@ -5789,7 +5807,7 @@
               </a:spcAft>
             </a:pPr>
             <a:r>
-              <a:rPr b="1" i="0" sz="1650">
+              <a:rPr b="1" i="0" sz="1800">
                 <a:solidFill>
                   <a:srgbClr val="003366"/>
                 </a:solidFill>
@@ -5811,7 +5829,7 @@
               </a:spcAft>
             </a:pPr>
             <a:r>
-              <a:rPr b="1" i="0" sz="1650">
+              <a:rPr b="1" i="0" sz="1800">
                 <a:solidFill>
                   <a:srgbClr val="003366"/>
                 </a:solidFill>
@@ -5830,8 +5848,8 @@
         </p:nvSpPr>
         <p:spPr>
           <a:xfrm>
-            <a:off x="3886200" y="1335024"/>
-            <a:ext cx="3337560" cy="566928"/>
+            <a:off x="3886200" y="1572768"/>
+            <a:ext cx="3337560" cy="547378"/>
           </a:xfrm>
           <a:prstGeom prst="roundRect">
             <a:avLst/>
@@ -5872,6 +5890,7 @@
               </a:defRPr>
             </a:pPr>
             <a:r>
+              <a:rPr/>
               <a:t>2. Prompt exposes approved vocabulary</a:t>
             </a:r>
           </a:p>
@@ -5885,8 +5904,8 @@
         </p:nvSpPr>
         <p:spPr>
           <a:xfrm>
-            <a:off x="3950208" y="2011680"/>
-            <a:ext cx="3154680" cy="1298448"/>
+            <a:off x="3950208" y="2226091"/>
+            <a:ext cx="3154680" cy="1809880"/>
           </a:xfrm>
           <a:prstGeom prst="rect">
             <a:avLst/>
@@ -5911,7 +5930,7 @@
               </a:spcAft>
             </a:pPr>
             <a:r>
-              <a:rPr b="1" i="0" sz="1370">
+              <a:rPr b="1" i="0" sz="1700">
                 <a:solidFill>
                   <a:srgbClr val="003366"/>
                 </a:solidFill>
@@ -5933,7 +5952,7 @@
               </a:spcAft>
             </a:pPr>
             <a:r>
-              <a:rPr b="1" i="0" sz="1070">
+              <a:rPr b="1" i="0" sz="1400">
                 <a:solidFill>
                   <a:srgbClr val="003366"/>
                 </a:solidFill>
@@ -5942,7 +5961,7 @@
               <a:t>- Metrics:</a:t>
             </a:r>
             <a:r>
-              <a:rPr b="0" i="0" sz="1070">
+              <a:rPr b="0" i="0" sz="1400">
                 <a:solidFill>
                   <a:srgbClr val="333333"/>
                 </a:solidFill>
@@ -5964,7 +5983,7 @@
               </a:spcAft>
             </a:pPr>
             <a:r>
-              <a:rPr b="1" i="0" sz="1070">
+              <a:rPr b="1" i="0" sz="1400">
                 <a:solidFill>
                   <a:srgbClr val="003366"/>
                 </a:solidFill>
@@ -5973,7 +5992,7 @@
               <a:t>- Dimensions:</a:t>
             </a:r>
             <a:r>
-              <a:rPr b="0" i="0" sz="1070">
+              <a:rPr b="0" i="0" sz="1400">
                 <a:solidFill>
                   <a:srgbClr val="333333"/>
                 </a:solidFill>
@@ -5995,7 +6014,7 @@
               </a:spcAft>
             </a:pPr>
             <a:r>
-              <a:rPr b="1" i="0" sz="1070">
+              <a:rPr b="1" i="0" sz="1400">
                 <a:solidFill>
                   <a:srgbClr val="003366"/>
                 </a:solidFill>
@@ -6004,7 +6023,7 @@
               <a:t>- Output:</a:t>
             </a:r>
             <a:r>
-              <a:rPr b="0" i="0" sz="1070">
+              <a:rPr b="0" i="0" sz="1400">
                 <a:solidFill>
                   <a:srgbClr val="333333"/>
                 </a:solidFill>
@@ -6023,8 +6042,8 @@
         </p:nvSpPr>
         <p:spPr>
           <a:xfrm>
-            <a:off x="7882127" y="1335024"/>
-            <a:ext cx="3200400" cy="566928"/>
+            <a:off x="7882127" y="1572768"/>
+            <a:ext cx="3200400" cy="547378"/>
           </a:xfrm>
           <a:prstGeom prst="roundRect">
             <a:avLst/>
@@ -6065,6 +6084,7 @@
               </a:defRPr>
             </a:pPr>
             <a:r>
+              <a:rPr/>
               <a:t>3. LLM returns an Intent Object</a:t>
             </a:r>
           </a:p>
@@ -6078,8 +6098,8 @@
         </p:nvSpPr>
         <p:spPr>
           <a:xfrm>
-            <a:off x="7973568" y="2011680"/>
-            <a:ext cx="2971800" cy="1536192"/>
+            <a:off x="7973568" y="2226091"/>
+            <a:ext cx="2971800" cy="1483219"/>
           </a:xfrm>
           <a:prstGeom prst="rect">
             <a:avLst/>
@@ -6115,7 +6135,7 @@
               <a:spcAft>
                 <a:spcPts val="100"/>
               </a:spcAft>
-              <a:defRPr sz="969">
+              <a:defRPr sz="1000">
                 <a:solidFill>
                   <a:srgbClr val="505050"/>
                 </a:solidFill>
@@ -6123,6 +6143,7 @@
               </a:defRPr>
             </a:pPr>
             <a:r>
+              <a:rPr/>
               <a:t>{</a:t>
             </a:r>
           </a:p>
@@ -6131,7 +6152,7 @@
               <a:spcAft>
                 <a:spcPts val="100"/>
               </a:spcAft>
-              <a:defRPr sz="969">
+              <a:defRPr sz="1000">
                 <a:solidFill>
                   <a:srgbClr val="505050"/>
                 </a:solidFill>
@@ -6139,6 +6160,7 @@
               </a:defRPr>
             </a:pPr>
             <a:r>
+              <a:rPr/>
               <a:t>  "intent_class": "segment",</a:t>
             </a:r>
           </a:p>
@@ -6147,7 +6169,7 @@
               <a:spcAft>
                 <a:spcPts val="100"/>
               </a:spcAft>
-              <a:defRPr sz="969">
+              <a:defRPr sz="1000">
                 <a:solidFill>
                   <a:srgbClr val="505050"/>
                 </a:solidFill>
@@ -6155,6 +6177,7 @@
               </a:defRPr>
             </a:pPr>
             <a:r>
+              <a:rPr/>
               <a:t>  "metric_term": "avg_order_value",</a:t>
             </a:r>
           </a:p>
@@ -6163,7 +6186,7 @@
               <a:spcAft>
                 <a:spcPts val="100"/>
               </a:spcAft>
-              <a:defRPr sz="969">
+              <a:defRPr sz="1000">
                 <a:solidFill>
                   <a:srgbClr val="505050"/>
                 </a:solidFill>
@@ -6171,6 +6194,7 @@
               </a:defRPr>
             </a:pPr>
             <a:r>
+              <a:rPr/>
               <a:t>  "dimension_term": "order_status",</a:t>
             </a:r>
           </a:p>
@@ -6179,7 +6203,7 @@
               <a:spcAft>
                 <a:spcPts val="100"/>
               </a:spcAft>
-              <a:defRPr sz="969">
+              <a:defRPr sz="1000">
                 <a:solidFill>
                   <a:srgbClr val="505050"/>
                 </a:solidFill>
@@ -6187,6 +6211,7 @@
               </a:defRPr>
             </a:pPr>
             <a:r>
+              <a:rPr/>
               <a:t>  "output_shape": "table"</a:t>
             </a:r>
           </a:p>
@@ -6195,7 +6220,7 @@
               <a:spcAft>
                 <a:spcPts val="100"/>
               </a:spcAft>
-              <a:defRPr sz="969">
+              <a:defRPr sz="1000">
                 <a:solidFill>
                   <a:srgbClr val="505050"/>
                 </a:solidFill>
@@ -6203,6 +6228,7 @@
               </a:defRPr>
             </a:pPr>
             <a:r>
+              <a:rPr/>
               <a:t>}</a:t>
             </a:r>
           </a:p>
@@ -6287,8 +6313,8 @@
           <p:nvPr/>
         </p:nvGraphicFramePr>
         <p:xfrm>
-          <a:off x="804672" y="4279392"/>
-          <a:ext cx="10286999" cy="1298448"/>
+          <a:off x="804672" y="4415606"/>
+          <a:ext cx="10286999" cy="1253673"/>
         </p:xfrm>
         <a:graphic>
           <a:graphicData uri="http://schemas.openxmlformats.org/drawingml/2006/table">
@@ -6311,7 +6337,7 @@
                         <a:lnSpc>
                           <a:spcPct val="100000"/>
                         </a:lnSpc>
-                        <a:defRPr sz="1150" b="1">
+                        <a:defRPr sz="1200" b="1">
                           <a:solidFill>
                             <a:srgbClr val="FFFFFF"/>
                           </a:solidFill>
@@ -6338,7 +6364,7 @@
                         <a:lnSpc>
                           <a:spcPct val="100000"/>
                         </a:lnSpc>
-                        <a:defRPr sz="1150" b="1">
+                        <a:defRPr sz="1200" b="1">
                           <a:solidFill>
                             <a:srgbClr val="FFFFFF"/>
                           </a:solidFill>
@@ -6365,7 +6391,7 @@
                         <a:lnSpc>
                           <a:spcPct val="100000"/>
                         </a:lnSpc>
-                        <a:defRPr sz="1150" b="1">
+                        <a:defRPr sz="1200" b="1">
                           <a:solidFill>
                             <a:srgbClr val="FFFFFF"/>
                           </a:solidFill>
@@ -6394,7 +6420,7 @@
                         <a:lnSpc>
                           <a:spcPct val="100000"/>
                         </a:lnSpc>
-                        <a:defRPr sz="1060" b="1">
+                        <a:defRPr sz="1200" b="1">
                           <a:solidFill>
                             <a:srgbClr val="333333"/>
                           </a:solidFill>
@@ -6417,7 +6443,7 @@
                         <a:lnSpc>
                           <a:spcPct val="100000"/>
                         </a:lnSpc>
-                        <a:defRPr sz="1060" b="0">
+                        <a:defRPr sz="1200" b="0">
                           <a:solidFill>
                             <a:srgbClr val="333333"/>
                           </a:solidFill>
@@ -6440,7 +6466,7 @@
                         <a:lnSpc>
                           <a:spcPct val="100000"/>
                         </a:lnSpc>
-                        <a:defRPr sz="1060" b="0">
+                        <a:defRPr sz="1200" b="0">
                           <a:solidFill>
                             <a:srgbClr val="333333"/>
                           </a:solidFill>
@@ -6465,7 +6491,7 @@
                         <a:lnSpc>
                           <a:spcPct val="100000"/>
                         </a:lnSpc>
-                        <a:defRPr sz="1060" b="1">
+                        <a:defRPr sz="1200" b="1">
                           <a:solidFill>
                             <a:srgbClr val="333333"/>
                           </a:solidFill>
@@ -6492,7 +6518,7 @@
                         <a:lnSpc>
                           <a:spcPct val="100000"/>
                         </a:lnSpc>
-                        <a:defRPr sz="1060" b="0">
+                        <a:defRPr sz="1200" b="0">
                           <a:solidFill>
                             <a:srgbClr val="333333"/>
                           </a:solidFill>
@@ -6519,7 +6545,7 @@
                         <a:lnSpc>
                           <a:spcPct val="100000"/>
                         </a:lnSpc>
-                        <a:defRPr sz="1060" b="0">
+                        <a:defRPr sz="1200" b="0">
                           <a:solidFill>
                             <a:srgbClr val="333333"/>
                           </a:solidFill>
@@ -7012,8 +7038,8 @@
         </p:nvSpPr>
         <p:spPr>
           <a:xfrm>
-            <a:off x="658368" y="1280160"/>
-            <a:ext cx="5029200" cy="457200"/>
+            <a:off x="658368" y="1572768"/>
+            <a:ext cx="5029200" cy="455168"/>
           </a:xfrm>
           <a:prstGeom prst="roundRect">
             <a:avLst/>
@@ -7054,6 +7080,7 @@
               </a:defRPr>
             </a:pPr>
             <a:r>
+              <a:rPr/>
               <a:t>IntentObject  (aegis/server/models.py)</a:t>
             </a:r>
           </a:p>
@@ -7067,8 +7094,8 @@
         </p:nvSpPr>
         <p:spPr>
           <a:xfrm>
-            <a:off x="713232" y="1828800"/>
-            <a:ext cx="4937760" cy="2514600"/>
+            <a:off x="713232" y="2118969"/>
+            <a:ext cx="4937760" cy="2503424"/>
           </a:xfrm>
           <a:prstGeom prst="rect">
             <a:avLst/>
@@ -7104,7 +7131,7 @@
               <a:spcAft>
                 <a:spcPts val="100"/>
               </a:spcAft>
-              <a:defRPr sz="900">
+              <a:defRPr sz="1000">
                 <a:solidFill>
                   <a:srgbClr val="505050"/>
                 </a:solidFill>
@@ -7112,6 +7139,7 @@
               </a:defRPr>
             </a:pPr>
             <a:r>
+              <a:rPr/>
               <a:t>class IntentObject(BaseModel):</a:t>
             </a:r>
           </a:p>
@@ -7120,7 +7148,7 @@
               <a:spcAft>
                 <a:spcPts val="100"/>
               </a:spcAft>
-              <a:defRPr sz="900">
+              <a:defRPr sz="1000">
                 <a:solidFill>
                   <a:srgbClr val="505050"/>
                 </a:solidFill>
@@ -7128,6 +7156,7 @@
               </a:defRPr>
             </a:pPr>
             <a:r>
+              <a:rPr/>
               <a:t>    intent_class:    IntentClass      # required, 11-value enum</a:t>
             </a:r>
           </a:p>
@@ -7136,7 +7165,7 @@
               <a:spcAft>
                 <a:spcPts val="100"/>
               </a:spcAft>
-              <a:defRPr sz="900">
+              <a:defRPr sz="1000">
                 <a:solidFill>
                   <a:srgbClr val="505050"/>
                 </a:solidFill>
@@ -7144,6 +7173,7 @@
               </a:defRPr>
             </a:pPr>
             <a:r>
+              <a:rPr/>
               <a:t>    metric_term:     Optional[str]    # an approved metric id</a:t>
             </a:r>
           </a:p>
@@ -7152,7 +7182,7 @@
               <a:spcAft>
                 <a:spcPts val="100"/>
               </a:spcAft>
-              <a:defRPr sz="900">
+              <a:defRPr sz="1000">
                 <a:solidFill>
                   <a:srgbClr val="505050"/>
                 </a:solidFill>
@@ -7160,6 +7190,7 @@
               </a:defRPr>
             </a:pPr>
             <a:r>
+              <a:rPr/>
               <a:t>    dimension_term:  Optional[str]    # an approved dimension id</a:t>
             </a:r>
           </a:p>
@@ -7168,7 +7199,7 @@
               <a:spcAft>
                 <a:spcPts val="100"/>
               </a:spcAft>
-              <a:defRPr sz="900">
+              <a:defRPr sz="1000">
                 <a:solidFill>
                   <a:srgbClr val="505050"/>
                 </a:solidFill>
@@ -7176,6 +7207,7 @@
               </a:defRPr>
             </a:pPr>
             <a:r>
+              <a:rPr/>
               <a:t>    time_term:       Optional[str]    # a phrase, not a date</a:t>
             </a:r>
           </a:p>
@@ -7184,7 +7216,7 @@
               <a:spcAft>
                 <a:spcPts val="100"/>
               </a:spcAft>
-              <a:defRPr sz="900">
+              <a:defRPr sz="1000">
                 <a:solidFill>
                   <a:srgbClr val="505050"/>
                 </a:solidFill>
@@ -7192,6 +7224,7 @@
               </a:defRPr>
             </a:pPr>
             <a:r>
+              <a:rPr/>
               <a:t>    filters:         List[Filter]     # field / operator / value</a:t>
             </a:r>
           </a:p>
@@ -7200,7 +7233,7 @@
               <a:spcAft>
                 <a:spcPts val="100"/>
               </a:spcAft>
-              <a:defRPr sz="900">
+              <a:defRPr sz="1000">
                 <a:solidFill>
                   <a:srgbClr val="505050"/>
                 </a:solidFill>
@@ -7208,6 +7241,7 @@
               </a:defRPr>
             </a:pPr>
             <a:r>
+              <a:rPr/>
               <a:t>    limit:           Optional[int]</a:t>
             </a:r>
           </a:p>
@@ -7216,7 +7250,7 @@
               <a:spcAft>
                 <a:spcPts val="100"/>
               </a:spcAft>
-              <a:defRPr sz="900">
+              <a:defRPr sz="1000">
                 <a:solidFill>
                   <a:srgbClr val="505050"/>
                 </a:solidFill>
@@ -7224,6 +7258,7 @@
               </a:defRPr>
             </a:pPr>
             <a:r>
+              <a:rPr/>
               <a:t>    confidence:      Confidence = LOW # absence is not confidence</a:t>
             </a:r>
           </a:p>
@@ -7232,7 +7267,7 @@
               <a:spcAft>
                 <a:spcPts val="100"/>
               </a:spcAft>
-              <a:defRPr sz="900">
+              <a:defRPr sz="1000">
                 <a:solidFill>
                   <a:srgbClr val="505050"/>
                 </a:solidFill>
@@ -7240,6 +7275,7 @@
               </a:defRPr>
             </a:pPr>
             <a:r>
+              <a:rPr/>
               <a:t>    unmapped_terms:  List[str]        # what it could not account for</a:t>
             </a:r>
           </a:p>
@@ -7248,7 +7284,7 @@
               <a:spcAft>
                 <a:spcPts val="100"/>
               </a:spcAft>
-              <a:defRPr sz="900">
+              <a:defRPr sz="1000">
                 <a:solidFill>
                   <a:srgbClr val="505050"/>
                 </a:solidFill>
@@ -7261,7 +7297,7 @@
               <a:spcAft>
                 <a:spcPts val="100"/>
               </a:spcAft>
-              <a:defRPr sz="900">
+              <a:defRPr sz="1000">
                 <a:solidFill>
                   <a:srgbClr val="505050"/>
                 </a:solidFill>
@@ -7269,6 +7305,7 @@
               </a:defRPr>
             </a:pPr>
             <a:r>
+              <a:rPr/>
               <a:t># There is no sql field. The type cannot express one.</a:t>
             </a:r>
           </a:p>
@@ -7282,8 +7319,8 @@
         </p:nvSpPr>
         <p:spPr>
           <a:xfrm>
-            <a:off x="5989320" y="1280160"/>
-            <a:ext cx="5212080" cy="457200"/>
+            <a:off x="5989320" y="1572768"/>
+            <a:ext cx="5212080" cy="455168"/>
           </a:xfrm>
           <a:prstGeom prst="roundRect">
             <a:avLst/>
@@ -7324,6 +7361,7 @@
               </a:defRPr>
             </a:pPr>
             <a:r>
+              <a:rPr/>
               <a:t>intent_class selects the compilation path</a:t>
             </a:r>
           </a:p>
@@ -7338,8 +7376,8 @@
           <p:nvPr/>
         </p:nvGraphicFramePr>
         <p:xfrm>
-          <a:off x="6035040" y="1828800"/>
-          <a:ext cx="5166360" cy="2514600"/>
+          <a:off x="6035040" y="2118969"/>
+          <a:ext cx="5166360" cy="2503424"/>
         </p:xfrm>
         <a:graphic>
           <a:graphicData uri="http://schemas.openxmlformats.org/drawingml/2006/table">
@@ -7361,7 +7399,7 @@
                         <a:lnSpc>
                           <a:spcPct val="100000"/>
                         </a:lnSpc>
-                        <a:defRPr sz="1100" b="1">
+                        <a:defRPr sz="1200" b="1">
                           <a:solidFill>
                             <a:srgbClr val="FFFFFF"/>
                           </a:solidFill>
@@ -7388,7 +7426,7 @@
                         <a:lnSpc>
                           <a:spcPct val="100000"/>
                         </a:lnSpc>
-                        <a:defRPr sz="1100" b="1">
+                        <a:defRPr sz="1200" b="1">
                           <a:solidFill>
                             <a:srgbClr val="FFFFFF"/>
                           </a:solidFill>
@@ -7417,7 +7455,7 @@
                         <a:lnSpc>
                           <a:spcPct val="100000"/>
                         </a:lnSpc>
-                        <a:defRPr sz="1000" b="1">
+                        <a:defRPr sz="1200" b="1">
                           <a:solidFill>
                             <a:srgbClr val="333333"/>
                           </a:solidFill>
@@ -7440,7 +7478,7 @@
                         <a:lnSpc>
                           <a:spcPct val="100000"/>
                         </a:lnSpc>
-                        <a:defRPr sz="1000" b="0">
+                        <a:defRPr sz="1200" b="0">
                           <a:solidFill>
                             <a:srgbClr val="333333"/>
                           </a:solidFill>
@@ -7465,7 +7503,7 @@
                         <a:lnSpc>
                           <a:spcPct val="100000"/>
                         </a:lnSpc>
-                        <a:defRPr sz="1000" b="1">
+                        <a:defRPr sz="1200" b="1">
                           <a:solidFill>
                             <a:srgbClr val="333333"/>
                           </a:solidFill>
@@ -7481,7 +7519,7 @@
                         <a:lnSpc>
                           <a:spcPct val="100000"/>
                         </a:lnSpc>
-                        <a:defRPr sz="1000" b="1">
+                        <a:defRPr sz="1200" b="1">
                           <a:solidFill>
                             <a:srgbClr val="333333"/>
                           </a:solidFill>
@@ -7508,7 +7546,7 @@
                         <a:lnSpc>
                           <a:spcPct val="100000"/>
                         </a:lnSpc>
-                        <a:defRPr sz="1000" b="0">
+                        <a:defRPr sz="1200" b="0">
                           <a:solidFill>
                             <a:srgbClr val="333333"/>
                           </a:solidFill>
@@ -7537,7 +7575,7 @@
                         <a:lnSpc>
                           <a:spcPct val="100000"/>
                         </a:lnSpc>
-                        <a:defRPr sz="1000" b="1">
+                        <a:defRPr sz="1200" b="1">
                           <a:solidFill>
                             <a:srgbClr val="333333"/>
                           </a:solidFill>
@@ -7560,7 +7598,7 @@
                         <a:lnSpc>
                           <a:spcPct val="100000"/>
                         </a:lnSpc>
-                        <a:defRPr sz="1000" b="0">
+                        <a:defRPr sz="1200" b="0">
                           <a:solidFill>
                             <a:srgbClr val="333333"/>
                           </a:solidFill>
@@ -7585,7 +7623,7 @@
                         <a:lnSpc>
                           <a:spcPct val="100000"/>
                         </a:lnSpc>
-                        <a:defRPr sz="1000" b="1">
+                        <a:defRPr sz="1200" b="1">
                           <a:solidFill>
                             <a:srgbClr val="333333"/>
                           </a:solidFill>
@@ -7612,7 +7650,7 @@
                         <a:lnSpc>
                           <a:spcPct val="100000"/>
                         </a:lnSpc>
-                        <a:defRPr sz="1000" b="0">
+                        <a:defRPr sz="1200" b="0">
                           <a:solidFill>
                             <a:srgbClr val="333333"/>
                           </a:solidFill>
@@ -7641,7 +7679,7 @@
                         <a:lnSpc>
                           <a:spcPct val="100000"/>
                         </a:lnSpc>
-                        <a:defRPr sz="1000" b="1">
+                        <a:defRPr sz="1200" b="1">
                           <a:solidFill>
                             <a:srgbClr val="333333"/>
                           </a:solidFill>
@@ -7664,7 +7702,7 @@
                         <a:lnSpc>
                           <a:spcPct val="100000"/>
                         </a:lnSpc>
-                        <a:defRPr sz="1000" b="0">
+                        <a:defRPr sz="1200" b="0">
                           <a:solidFill>
                             <a:srgbClr val="333333"/>
                           </a:solidFill>
@@ -7691,8 +7729,8 @@
         </p:nvSpPr>
         <p:spPr>
           <a:xfrm>
-            <a:off x="777240" y="4526280"/>
-            <a:ext cx="10424160" cy="548640"/>
+            <a:off x="777240" y="4804460"/>
+            <a:ext cx="10424160" cy="864819"/>
           </a:xfrm>
           <a:prstGeom prst="rect">
             <a:avLst/>
@@ -7717,7 +7755,7 @@
               </a:spcAft>
             </a:pPr>
             <a:r>
-              <a:rPr b="1" i="0" sz="1450">
+              <a:rPr b="1" i="0" sz="1700">
                 <a:solidFill>
                   <a:srgbClr val="003366"/>
                 </a:solidFill>
@@ -8198,8 +8236,8 @@
         </p:nvSpPr>
         <p:spPr>
           <a:xfrm>
-            <a:off x="749808" y="1353312"/>
-            <a:ext cx="2834640" cy="841248"/>
+            <a:off x="749808" y="1572768"/>
+            <a:ext cx="2834640" cy="807021"/>
           </a:xfrm>
           <a:prstGeom prst="roundRect">
             <a:avLst/>
@@ -8240,14 +8278,17 @@
               </a:defRPr>
             </a:pPr>
             <a:r>
+              <a:rPr/>
               <a:t>Intent Object</a:t>
             </a:r>
             <a:br/>
             <a:r>
+              <a:rPr/>
               <a:t>metric_term=avg_order_value</a:t>
             </a:r>
             <a:br/>
             <a:r>
+              <a:rPr/>
               <a:t>dimension_term=order_status</a:t>
             </a:r>
           </a:p>
@@ -8261,8 +8302,8 @@
         </p:nvSpPr>
         <p:spPr>
           <a:xfrm>
-            <a:off x="4572000" y="1353312"/>
-            <a:ext cx="2834640" cy="841248"/>
+            <a:off x="4572000" y="1572768"/>
+            <a:ext cx="2834640" cy="807021"/>
           </a:xfrm>
           <a:prstGeom prst="roundRect">
             <a:avLst/>
@@ -8303,10 +8344,12 @@
               </a:defRPr>
             </a:pPr>
             <a:r>
+              <a:rPr/>
               <a:t>Lookup in semantic layer</a:t>
             </a:r>
             <a:br/>
             <a:r>
+              <a:rPr/>
               <a:t>METRICS + DIMENSIONS</a:t>
             </a:r>
           </a:p>
@@ -8320,8 +8363,8 @@
         </p:nvSpPr>
         <p:spPr>
           <a:xfrm>
-            <a:off x="8339327" y="1353312"/>
-            <a:ext cx="2331720" cy="841248"/>
+            <a:off x="8339327" y="1572768"/>
+            <a:ext cx="2331720" cy="807021"/>
           </a:xfrm>
           <a:prstGeom prst="roundRect">
             <a:avLst/>
@@ -8362,14 +8405,17 @@
               </a:defRPr>
             </a:pPr>
             <a:r>
+              <a:rPr/>
               <a:t>Analysis Plan</a:t>
             </a:r>
             <a:br/>
             <a:r>
+              <a:rPr/>
               <a:t>pattern=segment</a:t>
             </a:r>
             <a:br/>
             <a:r>
+              <a:rPr/>
               <a:t>shape=table</a:t>
             </a:r>
           </a:p>
@@ -8454,8 +8500,8 @@
           <p:nvPr/>
         </p:nvGraphicFramePr>
         <p:xfrm>
-          <a:off x="685800" y="2606040"/>
-          <a:ext cx="10835640" cy="2148840"/>
+          <a:off x="685800" y="2774528"/>
+          <a:ext cx="10835640" cy="2061413"/>
         </p:xfrm>
         <a:graphic>
           <a:graphicData uri="http://schemas.openxmlformats.org/drawingml/2006/table">
@@ -8480,7 +8526,7 @@
                         <a:lnSpc>
                           <a:spcPct val="100000"/>
                         </a:lnSpc>
-                        <a:defRPr sz="1050" b="1">
+                        <a:defRPr sz="1200" b="1">
                           <a:solidFill>
                             <a:srgbClr val="FFFFFF"/>
                           </a:solidFill>
@@ -8507,7 +8553,7 @@
                         <a:lnSpc>
                           <a:spcPct val="100000"/>
                         </a:lnSpc>
-                        <a:defRPr sz="1050" b="1">
+                        <a:defRPr sz="1200" b="1">
                           <a:solidFill>
                             <a:srgbClr val="FFFFFF"/>
                           </a:solidFill>
@@ -8534,7 +8580,7 @@
                         <a:lnSpc>
                           <a:spcPct val="100000"/>
                         </a:lnSpc>
-                        <a:defRPr sz="1050" b="1">
+                        <a:defRPr sz="1200" b="1">
                           <a:solidFill>
                             <a:srgbClr val="FFFFFF"/>
                           </a:solidFill>
@@ -8561,7 +8607,7 @@
                         <a:lnSpc>
                           <a:spcPct val="100000"/>
                         </a:lnSpc>
-                        <a:defRPr sz="1050" b="1">
+                        <a:defRPr sz="1200" b="1">
                           <a:solidFill>
                             <a:srgbClr val="FFFFFF"/>
                           </a:solidFill>
@@ -8588,7 +8634,7 @@
                         <a:lnSpc>
                           <a:spcPct val="100000"/>
                         </a:lnSpc>
-                        <a:defRPr sz="1050" b="1">
+                        <a:defRPr sz="1200" b="1">
                           <a:solidFill>
                             <a:srgbClr val="FFFFFF"/>
                           </a:solidFill>
@@ -8617,7 +8663,7 @@
                         <a:lnSpc>
                           <a:spcPct val="100000"/>
                         </a:lnSpc>
-                        <a:defRPr sz="980" b="1">
+                        <a:defRPr sz="1200" b="1">
                           <a:solidFill>
                             <a:srgbClr val="333333"/>
                           </a:solidFill>
@@ -8640,7 +8686,7 @@
                         <a:lnSpc>
                           <a:spcPct val="100000"/>
                         </a:lnSpc>
-                        <a:defRPr sz="980" b="0">
+                        <a:defRPr sz="1200" b="0">
                           <a:solidFill>
                             <a:srgbClr val="333333"/>
                           </a:solidFill>
@@ -8663,7 +8709,7 @@
                         <a:lnSpc>
                           <a:spcPct val="100000"/>
                         </a:lnSpc>
-                        <a:defRPr sz="980" b="0">
+                        <a:defRPr sz="1200" b="0">
                           <a:solidFill>
                             <a:srgbClr val="333333"/>
                           </a:solidFill>
@@ -8686,7 +8732,7 @@
                         <a:lnSpc>
                           <a:spcPct val="100000"/>
                         </a:lnSpc>
-                        <a:defRPr sz="980" b="0">
+                        <a:defRPr sz="1200" b="0">
                           <a:solidFill>
                             <a:srgbClr val="333333"/>
                           </a:solidFill>
@@ -8709,7 +8755,7 @@
                         <a:lnSpc>
                           <a:spcPct val="100000"/>
                         </a:lnSpc>
-                        <a:defRPr sz="980" b="0">
+                        <a:defRPr sz="1200" b="0">
                           <a:solidFill>
                             <a:srgbClr val="333333"/>
                           </a:solidFill>
@@ -8734,7 +8780,7 @@
                         <a:lnSpc>
                           <a:spcPct val="100000"/>
                         </a:lnSpc>
-                        <a:defRPr sz="980" b="1">
+                        <a:defRPr sz="1200" b="1">
                           <a:solidFill>
                             <a:srgbClr val="333333"/>
                           </a:solidFill>
@@ -8761,7 +8807,7 @@
                         <a:lnSpc>
                           <a:spcPct val="100000"/>
                         </a:lnSpc>
-                        <a:defRPr sz="980" b="0">
+                        <a:defRPr sz="1200" b="0">
                           <a:solidFill>
                             <a:srgbClr val="333333"/>
                           </a:solidFill>
@@ -8788,7 +8834,7 @@
                         <a:lnSpc>
                           <a:spcPct val="100000"/>
                         </a:lnSpc>
-                        <a:defRPr sz="980" b="0">
+                        <a:defRPr sz="1200" b="0">
                           <a:solidFill>
                             <a:srgbClr val="333333"/>
                           </a:solidFill>
@@ -8815,7 +8861,7 @@
                         <a:lnSpc>
                           <a:spcPct val="100000"/>
                         </a:lnSpc>
-                        <a:defRPr sz="980" b="0">
+                        <a:defRPr sz="1200" b="0">
                           <a:solidFill>
                             <a:srgbClr val="333333"/>
                           </a:solidFill>
@@ -8842,7 +8888,7 @@
                         <a:lnSpc>
                           <a:spcPct val="100000"/>
                         </a:lnSpc>
-                        <a:defRPr sz="980" b="0">
+                        <a:defRPr sz="1200" b="0">
                           <a:solidFill>
                             <a:srgbClr val="333333"/>
                           </a:solidFill>
@@ -8871,7 +8917,7 @@
                         <a:lnSpc>
                           <a:spcPct val="100000"/>
                         </a:lnSpc>
-                        <a:defRPr sz="980" b="1">
+                        <a:defRPr sz="1200" b="1">
                           <a:solidFill>
                             <a:srgbClr val="333333"/>
                           </a:solidFill>
@@ -8894,7 +8940,7 @@
                         <a:lnSpc>
                           <a:spcPct val="100000"/>
                         </a:lnSpc>
-                        <a:defRPr sz="980" b="0">
+                        <a:defRPr sz="1200" b="0">
                           <a:solidFill>
                             <a:srgbClr val="333333"/>
                           </a:solidFill>
@@ -8917,7 +8963,7 @@
                         <a:lnSpc>
                           <a:spcPct val="100000"/>
                         </a:lnSpc>
-                        <a:defRPr sz="980" b="0">
+                        <a:defRPr sz="1200" b="0">
                           <a:solidFill>
                             <a:srgbClr val="333333"/>
                           </a:solidFill>
@@ -8940,7 +8986,7 @@
                         <a:lnSpc>
                           <a:spcPct val="100000"/>
                         </a:lnSpc>
-                        <a:defRPr sz="980" b="0">
+                        <a:defRPr sz="1200" b="0">
                           <a:solidFill>
                             <a:srgbClr val="333333"/>
                           </a:solidFill>
@@ -8963,7 +9009,7 @@
                         <a:lnSpc>
                           <a:spcPct val="100000"/>
                         </a:lnSpc>
-                        <a:defRPr sz="980" b="0">
+                        <a:defRPr sz="1200" b="0">
                           <a:solidFill>
                             <a:srgbClr val="333333"/>
                           </a:solidFill>
@@ -8990,8 +9036,8 @@
         </p:nvSpPr>
         <p:spPr>
           <a:xfrm>
-            <a:off x="868680" y="4892040"/>
-            <a:ext cx="10241280" cy="731520"/>
+            <a:off x="868680" y="4967522"/>
+            <a:ext cx="10241280" cy="701757"/>
           </a:xfrm>
           <a:prstGeom prst="rect">
             <a:avLst/>
@@ -9016,7 +9062,7 @@
               </a:spcAft>
             </a:pPr>
             <a:r>
-              <a:rPr b="1" i="0" sz="1350">
+              <a:rPr b="1" i="0" sz="1500">
                 <a:solidFill>
                   <a:srgbClr val="003366"/>
                 </a:solidFill>
@@ -9025,7 +9071,7 @@
               <a:t>Intent Object vs Analysis Plan:</a:t>
             </a:r>
             <a:r>
-              <a:rPr b="0" i="0" sz="1250">
+              <a:rPr b="0" i="0" sz="1400">
                 <a:solidFill>
                   <a:srgbClr val="333333"/>
                 </a:solidFill>
@@ -9506,8 +9552,8 @@
         </p:nvSpPr>
         <p:spPr>
           <a:xfrm>
-            <a:off x="658368" y="1298448"/>
-            <a:ext cx="3154680" cy="530352"/>
+            <a:off x="713232" y="1572768"/>
+            <a:ext cx="3886200" cy="507687"/>
           </a:xfrm>
           <a:prstGeom prst="roundRect">
             <a:avLst/>
@@ -9548,6 +9594,7 @@
               </a:defRPr>
             </a:pPr>
             <a:r>
+              <a:rPr/>
               <a:t>Compiler template</a:t>
             </a:r>
           </a:p>
@@ -9561,8 +9608,8 @@
         </p:nvSpPr>
         <p:spPr>
           <a:xfrm>
-            <a:off x="713232" y="1993392"/>
-            <a:ext cx="4526280" cy="2359152"/>
+            <a:off x="713232" y="2238013"/>
+            <a:ext cx="3886200" cy="2258333"/>
           </a:xfrm>
           <a:prstGeom prst="rect">
             <a:avLst/>
@@ -9598,7 +9645,7 @@
               <a:spcAft>
                 <a:spcPts val="100"/>
               </a:spcAft>
-              <a:defRPr sz="930">
+              <a:defRPr sz="1000">
                 <a:solidFill>
                   <a:srgbClr val="505050"/>
                 </a:solidFill>
@@ -9606,6 +9653,7 @@
               </a:defRPr>
             </a:pPr>
             <a:r>
+              <a:rPr/>
               <a:t>SELECT {dimension_expr} AS label,</a:t>
             </a:r>
           </a:p>
@@ -9614,7 +9662,7 @@
               <a:spcAft>
                 <a:spcPts val="100"/>
               </a:spcAft>
-              <a:defRPr sz="930">
+              <a:defRPr sz="1000">
                 <a:solidFill>
                   <a:srgbClr val="505050"/>
                 </a:solidFill>
@@ -9622,6 +9670,7 @@
               </a:defRPr>
             </a:pPr>
             <a:r>
+              <a:rPr/>
               <a:t>       {metric_expr} AS value</a:t>
             </a:r>
           </a:p>
@@ -9630,7 +9679,7 @@
               <a:spcAft>
                 <a:spcPts val="100"/>
               </a:spcAft>
-              <a:defRPr sz="930">
+              <a:defRPr sz="1000">
                 <a:solidFill>
                   <a:srgbClr val="505050"/>
                 </a:solidFill>
@@ -9638,6 +9687,7 @@
               </a:defRPr>
             </a:pPr>
             <a:r>
+              <a:rPr/>
               <a:t>FROM {base_table}</a:t>
             </a:r>
           </a:p>
@@ -9646,7 +9696,7 @@
               <a:spcAft>
                 <a:spcPts val="100"/>
               </a:spcAft>
-              <a:defRPr sz="930">
+              <a:defRPr sz="1000">
                 <a:solidFill>
                   <a:srgbClr val="505050"/>
                 </a:solidFill>
@@ -9654,6 +9704,7 @@
               </a:defRPr>
             </a:pPr>
             <a:r>
+              <a:rPr/>
               <a:t>{join_clauses}</a:t>
             </a:r>
           </a:p>
@@ -9662,7 +9713,7 @@
               <a:spcAft>
                 <a:spcPts val="100"/>
               </a:spcAft>
-              <a:defRPr sz="930">
+              <a:defRPr sz="1000">
                 <a:solidFill>
                   <a:srgbClr val="505050"/>
                 </a:solidFill>
@@ -9670,6 +9721,7 @@
               </a:defRPr>
             </a:pPr>
             <a:r>
+              <a:rPr/>
               <a:t>WHERE {mandatory_predicates}</a:t>
             </a:r>
           </a:p>
@@ -9678,7 +9730,7 @@
               <a:spcAft>
                 <a:spcPts val="100"/>
               </a:spcAft>
-              <a:defRPr sz="930">
+              <a:defRPr sz="1000">
                 <a:solidFill>
                   <a:srgbClr val="505050"/>
                 </a:solidFill>
@@ -9686,6 +9738,7 @@
               </a:defRPr>
             </a:pPr>
             <a:r>
+              <a:rPr/>
               <a:t>GROUP BY {dimension_group_expr}</a:t>
             </a:r>
           </a:p>
@@ -9694,7 +9747,7 @@
               <a:spcAft>
                 <a:spcPts val="100"/>
               </a:spcAft>
-              <a:defRPr sz="930">
+              <a:defRPr sz="1000">
                 <a:solidFill>
                   <a:srgbClr val="505050"/>
                 </a:solidFill>
@@ -9702,6 +9755,7 @@
               </a:defRPr>
             </a:pPr>
             <a:r>
+              <a:rPr/>
               <a:t>ORDER BY value DESC;</a:t>
             </a:r>
           </a:p>
@@ -9715,8 +9769,8 @@
         </p:nvSpPr>
         <p:spPr>
           <a:xfrm>
-            <a:off x="5596128" y="1298448"/>
-            <a:ext cx="2606040" cy="530352"/>
+            <a:off x="4873752" y="1572768"/>
+            <a:ext cx="2331720" cy="507687"/>
           </a:xfrm>
           <a:prstGeom prst="roundRect">
             <a:avLst/>
@@ -9757,6 +9811,7 @@
               </a:defRPr>
             </a:pPr>
             <a:r>
+              <a:rPr/>
               <a:t>Filled from semantic layer</a:t>
             </a:r>
           </a:p>
@@ -9770,8 +9825,8 @@
         </p:nvSpPr>
         <p:spPr>
           <a:xfrm>
-            <a:off x="5623560" y="1938528"/>
-            <a:ext cx="2697480" cy="1965960"/>
+            <a:off x="4873752" y="2185494"/>
+            <a:ext cx="2331720" cy="2275840"/>
           </a:xfrm>
           <a:prstGeom prst="rect">
             <a:avLst/>
@@ -9796,7 +9851,7 @@
               </a:spcAft>
             </a:pPr>
             <a:r>
-              <a:rPr b="1" i="0" sz="1120">
+              <a:rPr b="1" i="0" sz="1400">
                 <a:solidFill>
                   <a:srgbClr val="003366"/>
                 </a:solidFill>
@@ -9805,7 +9860,7 @@
               <a:t>- dimension_expr:</a:t>
             </a:r>
             <a:r>
-              <a:rPr b="0" i="0" sz="1120">
+              <a:rPr b="0" i="0" sz="1400">
                 <a:solidFill>
                   <a:srgbClr val="333333"/>
                 </a:solidFill>
@@ -9827,7 +9882,7 @@
               </a:spcAft>
             </a:pPr>
             <a:r>
-              <a:rPr b="1" i="0" sz="1120">
+              <a:rPr b="1" i="0" sz="1400">
                 <a:solidFill>
                   <a:srgbClr val="003366"/>
                 </a:solidFill>
@@ -9836,7 +9891,7 @@
               <a:t>- metric_expr:</a:t>
             </a:r>
             <a:r>
-              <a:rPr b="0" i="0" sz="1120">
+              <a:rPr b="0" i="0" sz="1400">
                 <a:solidFill>
                   <a:srgbClr val="333333"/>
                 </a:solidFill>
@@ -9858,7 +9913,7 @@
               </a:spcAft>
             </a:pPr>
             <a:r>
-              <a:rPr b="1" i="0" sz="1120">
+              <a:rPr b="1" i="0" sz="1400">
                 <a:solidFill>
                   <a:srgbClr val="003366"/>
                 </a:solidFill>
@@ -9867,7 +9922,7 @@
               <a:t>- base_table:</a:t>
             </a:r>
             <a:r>
-              <a:rPr b="0" i="0" sz="1120">
+              <a:rPr b="0" i="0" sz="1400">
                 <a:solidFill>
                   <a:srgbClr val="333333"/>
                 </a:solidFill>
@@ -9889,7 +9944,7 @@
               </a:spcAft>
             </a:pPr>
             <a:r>
-              <a:rPr b="1" i="0" sz="1120">
+              <a:rPr b="1" i="0" sz="1400">
                 <a:solidFill>
                   <a:srgbClr val="003366"/>
                 </a:solidFill>
@@ -9898,7 +9953,7 @@
               <a:t>- joins:</a:t>
             </a:r>
             <a:r>
-              <a:rPr b="0" i="0" sz="1120">
+              <a:rPr b="0" i="0" sz="1400">
                 <a:solidFill>
                   <a:srgbClr val="333333"/>
                 </a:solidFill>
@@ -9920,7 +9975,7 @@
               </a:spcAft>
             </a:pPr>
             <a:r>
-              <a:rPr b="1" i="0" sz="1120">
+              <a:rPr b="1" i="0" sz="1400">
                 <a:solidFill>
                   <a:srgbClr val="003366"/>
                 </a:solidFill>
@@ -9929,7 +9984,7 @@
               <a:t>- predicates:</a:t>
             </a:r>
             <a:r>
-              <a:rPr b="0" i="0" sz="1120">
+              <a:rPr b="0" i="0" sz="1400">
                 <a:solidFill>
                   <a:srgbClr val="333333"/>
                 </a:solidFill>
@@ -9948,8 +10003,8 @@
         </p:nvSpPr>
         <p:spPr>
           <a:xfrm>
-            <a:off x="8613648" y="1298448"/>
-            <a:ext cx="2560320" cy="530352"/>
+            <a:off x="7406640" y="1572768"/>
+            <a:ext cx="4114800" cy="507687"/>
           </a:xfrm>
           <a:prstGeom prst="roundRect">
             <a:avLst/>
@@ -9990,6 +10045,7 @@
               </a:defRPr>
             </a:pPr>
             <a:r>
+              <a:rPr/>
               <a:t>Compiled safe SELECT</a:t>
             </a:r>
           </a:p>
@@ -10003,8 +10059,8 @@
         </p:nvSpPr>
         <p:spPr>
           <a:xfrm>
-            <a:off x="8394192" y="1938528"/>
-            <a:ext cx="2880360" cy="2651760"/>
+            <a:off x="7406640" y="2185494"/>
+            <a:ext cx="4114800" cy="2538436"/>
           </a:xfrm>
           <a:prstGeom prst="rect">
             <a:avLst/>
@@ -10040,7 +10096,7 @@
               <a:spcAft>
                 <a:spcPts val="100"/>
               </a:spcAft>
-              <a:defRPr sz="720">
+              <a:defRPr sz="1000">
                 <a:solidFill>
                   <a:srgbClr val="505050"/>
                 </a:solidFill>
@@ -10048,6 +10104,7 @@
               </a:defRPr>
             </a:pPr>
             <a:r>
+              <a:rPr/>
               <a:t>SELECT CASE o.OrderStatusId</a:t>
             </a:r>
           </a:p>
@@ -10056,7 +10113,7 @@
               <a:spcAft>
                 <a:spcPts val="100"/>
               </a:spcAft>
-              <a:defRPr sz="720">
+              <a:defRPr sz="1000">
                 <a:solidFill>
                   <a:srgbClr val="505050"/>
                 </a:solidFill>
@@ -10064,6 +10121,7 @@
               </a:defRPr>
             </a:pPr>
             <a:r>
+              <a:rPr/>
               <a:t>       WHEN 10 THEN "Pending"</a:t>
             </a:r>
           </a:p>
@@ -10072,7 +10130,7 @@
               <a:spcAft>
                 <a:spcPts val="100"/>
               </a:spcAft>
-              <a:defRPr sz="720">
+              <a:defRPr sz="1000">
                 <a:solidFill>
                   <a:srgbClr val="505050"/>
                 </a:solidFill>
@@ -10080,6 +10138,7 @@
               </a:defRPr>
             </a:pPr>
             <a:r>
+              <a:rPr/>
               <a:t>       WHEN 20 THEN "Processing"</a:t>
             </a:r>
           </a:p>
@@ -10088,7 +10147,7 @@
               <a:spcAft>
                 <a:spcPts val="100"/>
               </a:spcAft>
-              <a:defRPr sz="720">
+              <a:defRPr sz="1000">
                 <a:solidFill>
                   <a:srgbClr val="505050"/>
                 </a:solidFill>
@@ -10096,6 +10155,7 @@
               </a:defRPr>
             </a:pPr>
             <a:r>
+              <a:rPr/>
               <a:t>       WHEN 30 THEN "Complete"</a:t>
             </a:r>
           </a:p>
@@ -10104,7 +10164,7 @@
               <a:spcAft>
                 <a:spcPts val="100"/>
               </a:spcAft>
-              <a:defRPr sz="720">
+              <a:defRPr sz="1000">
                 <a:solidFill>
                   <a:srgbClr val="505050"/>
                 </a:solidFill>
@@ -10112,6 +10172,7 @@
               </a:defRPr>
             </a:pPr>
             <a:r>
+              <a:rPr/>
               <a:t>       WHEN 40 THEN "Cancelled"</a:t>
             </a:r>
           </a:p>
@@ -10120,7 +10181,7 @@
               <a:spcAft>
                 <a:spcPts val="100"/>
               </a:spcAft>
-              <a:defRPr sz="720">
+              <a:defRPr sz="1000">
                 <a:solidFill>
                   <a:srgbClr val="505050"/>
                 </a:solidFill>
@@ -10128,6 +10189,7 @@
               </a:defRPr>
             </a:pPr>
             <a:r>
+              <a:rPr/>
               <a:t>       END AS label,</a:t>
             </a:r>
           </a:p>
@@ -10136,7 +10198,7 @@
               <a:spcAft>
                 <a:spcPts val="100"/>
               </a:spcAft>
-              <a:defRPr sz="720">
+              <a:defRPr sz="1000">
                 <a:solidFill>
                   <a:srgbClr val="505050"/>
                 </a:solidFill>
@@ -10144,6 +10206,7 @@
               </a:defRPr>
             </a:pPr>
             <a:r>
+              <a:rPr/>
               <a:t>       AVG(COALESCE(o.OrderTotal, 0)) AS value</a:t>
             </a:r>
           </a:p>
@@ -10152,7 +10215,7 @@
               <a:spcAft>
                 <a:spcPts val="100"/>
               </a:spcAft>
-              <a:defRPr sz="720">
+              <a:defRPr sz="1000">
                 <a:solidFill>
                   <a:srgbClr val="505050"/>
                 </a:solidFill>
@@ -10160,6 +10223,7 @@
               </a:defRPr>
             </a:pPr>
             <a:r>
+              <a:rPr/>
               <a:t>FROM `Order` o</a:t>
             </a:r>
           </a:p>
@@ -10168,7 +10232,7 @@
               <a:spcAft>
                 <a:spcPts val="100"/>
               </a:spcAft>
-              <a:defRPr sz="720">
+              <a:defRPr sz="1000">
                 <a:solidFill>
                   <a:srgbClr val="505050"/>
                 </a:solidFill>
@@ -10176,6 +10240,7 @@
               </a:defRPr>
             </a:pPr>
             <a:r>
+              <a:rPr/>
               <a:t>WHERE o.Deleted = 0</a:t>
             </a:r>
           </a:p>
@@ -10184,7 +10249,7 @@
               <a:spcAft>
                 <a:spcPts val="100"/>
               </a:spcAft>
-              <a:defRPr sz="720">
+              <a:defRPr sz="1000">
                 <a:solidFill>
                   <a:srgbClr val="505050"/>
                 </a:solidFill>
@@ -10192,6 +10257,7 @@
               </a:defRPr>
             </a:pPr>
             <a:r>
+              <a:rPr/>
               <a:t>GROUP BY CASE o.OrderStatusId ... END</a:t>
             </a:r>
           </a:p>
@@ -10200,7 +10266,7 @@
               <a:spcAft>
                 <a:spcPts val="100"/>
               </a:spcAft>
-              <a:defRPr sz="720">
+              <a:defRPr sz="1000">
                 <a:solidFill>
                   <a:srgbClr val="505050"/>
                 </a:solidFill>
@@ -10208,6 +10274,7 @@
               </a:defRPr>
             </a:pPr>
             <a:r>
+              <a:rPr/>
               <a:t>ORDER BY value DESC;</a:t>
             </a:r>
           </a:p>
@@ -10221,8 +10288,8 @@
         </p:nvSpPr>
         <p:spPr>
           <a:xfrm>
-            <a:off x="822960" y="4937760"/>
-            <a:ext cx="10378440" cy="566928"/>
+            <a:off x="822960" y="5021540"/>
+            <a:ext cx="10378440" cy="647739"/>
           </a:xfrm>
           <a:prstGeom prst="rect">
             <a:avLst/>
@@ -10247,7 +10314,7 @@
               </a:spcAft>
             </a:pPr>
             <a:r>
-              <a:rPr b="1" i="0" sz="1500">
+              <a:rPr b="1" i="0" sz="1700">
                 <a:solidFill>
                   <a:srgbClr val="003366"/>
                 </a:solidFill>
@@ -10728,7 +10795,7 @@
         </p:nvSpPr>
         <p:spPr>
           <a:xfrm>
-            <a:off x="658368" y="1243584"/>
+            <a:off x="658368" y="1572768"/>
             <a:ext cx="10607040" cy="420624"/>
           </a:xfrm>
           <a:prstGeom prst="roundRect">
@@ -10770,6 +10837,7 @@
               </a:defRPr>
             </a:pPr>
             <a:r>
+              <a:rPr/>
               <a:t>NQ257  "Show product revenue by category."</a:t>
             </a:r>
           </a:p>
@@ -10783,7 +10851,7 @@
         </p:nvSpPr>
         <p:spPr>
           <a:xfrm>
-            <a:off x="658368" y="1783080"/>
+            <a:off x="658368" y="2112263"/>
             <a:ext cx="3931920" cy="402336"/>
           </a:xfrm>
           <a:prstGeom prst="roundRect">
@@ -10825,6 +10893,7 @@
               </a:defRPr>
             </a:pPr>
             <a:r>
+              <a:rPr/>
               <a:t>Intent Object from the model</a:t>
             </a:r>
           </a:p>
@@ -10838,7 +10907,7 @@
         </p:nvSpPr>
         <p:spPr>
           <a:xfrm>
-            <a:off x="713232" y="2249424"/>
+            <a:off x="713232" y="2578608"/>
             <a:ext cx="3840480" cy="1143000"/>
           </a:xfrm>
           <a:prstGeom prst="rect">
@@ -10875,7 +10944,7 @@
               <a:spcAft>
                 <a:spcPts val="100"/>
               </a:spcAft>
-              <a:defRPr sz="930">
+              <a:defRPr sz="1000">
                 <a:solidFill>
                   <a:srgbClr val="505050"/>
                 </a:solidFill>
@@ -10883,6 +10952,7 @@
               </a:defRPr>
             </a:pPr>
             <a:r>
+              <a:rPr/>
               <a:t>{</a:t>
             </a:r>
           </a:p>
@@ -10891,7 +10961,7 @@
               <a:spcAft>
                 <a:spcPts val="100"/>
               </a:spcAft>
-              <a:defRPr sz="930">
+              <a:defRPr sz="1000">
                 <a:solidFill>
                   <a:srgbClr val="505050"/>
                 </a:solidFill>
@@ -10899,6 +10969,7 @@
               </a:defRPr>
             </a:pPr>
             <a:r>
+              <a:rPr/>
               <a:t>  "intent_class": "segment",</a:t>
             </a:r>
           </a:p>
@@ -10907,7 +10978,7 @@
               <a:spcAft>
                 <a:spcPts val="100"/>
               </a:spcAft>
-              <a:defRPr sz="930">
+              <a:defRPr sz="1000">
                 <a:solidFill>
                   <a:srgbClr val="505050"/>
                 </a:solidFill>
@@ -10915,6 +10986,7 @@
               </a:defRPr>
             </a:pPr>
             <a:r>
+              <a:rPr/>
               <a:t>  "metric_term": "line_item_revenue",</a:t>
             </a:r>
           </a:p>
@@ -10923,7 +10995,7 @@
               <a:spcAft>
                 <a:spcPts val="100"/>
               </a:spcAft>
-              <a:defRPr sz="930">
+              <a:defRPr sz="1000">
                 <a:solidFill>
                   <a:srgbClr val="505050"/>
                 </a:solidFill>
@@ -10931,6 +11003,7 @@
               </a:defRPr>
             </a:pPr>
             <a:r>
+              <a:rPr/>
               <a:t>  "dimension_term": "category_name"</a:t>
             </a:r>
           </a:p>
@@ -10939,7 +11012,7 @@
               <a:spcAft>
                 <a:spcPts val="100"/>
               </a:spcAft>
-              <a:defRPr sz="930">
+              <a:defRPr sz="1000">
                 <a:solidFill>
                   <a:srgbClr val="505050"/>
                 </a:solidFill>
@@ -10947,6 +11020,7 @@
               </a:defRPr>
             </a:pPr>
             <a:r>
+              <a:rPr/>
               <a:t>}</a:t>
             </a:r>
           </a:p>
@@ -10960,7 +11034,7 @@
         </p:nvSpPr>
         <p:spPr>
           <a:xfrm>
-            <a:off x="658368" y="3520440"/>
+            <a:off x="658368" y="3849624"/>
             <a:ext cx="3931920" cy="402336"/>
           </a:xfrm>
           <a:prstGeom prst="roundRect">
@@ -10994,7 +11068,7 @@
           <a:lstStyle/>
           <a:p>
             <a:pPr algn="ctr">
-              <a:defRPr sz="1150" b="1">
+              <a:defRPr sz="1200" b="1">
                 <a:solidFill>
                   <a:srgbClr val="003366"/>
                 </a:solidFill>
@@ -11002,6 +11076,7 @@
               </a:defRPr>
             </a:pPr>
             <a:r>
+              <a:rPr/>
               <a:t>Join path resolved by BFS, not by the model</a:t>
             </a:r>
           </a:p>
@@ -11015,7 +11090,7 @@
         </p:nvSpPr>
         <p:spPr>
           <a:xfrm>
-            <a:off x="713232" y="3986784"/>
+            <a:off x="713232" y="4315968"/>
             <a:ext cx="3840480" cy="841248"/>
           </a:xfrm>
           <a:prstGeom prst="rect">
@@ -11052,7 +11127,7 @@
               <a:spcAft>
                 <a:spcPts val="100"/>
               </a:spcAft>
-              <a:defRPr sz="930">
+              <a:defRPr sz="1000">
                 <a:solidFill>
                   <a:srgbClr val="505050"/>
                 </a:solidFill>
@@ -11060,6 +11135,7 @@
               </a:defRPr>
             </a:pPr>
             <a:r>
+              <a:rPr/>
               <a:t>Product -&gt; OrderItem -&gt; Order</a:t>
             </a:r>
           </a:p>
@@ -11068,7 +11144,7 @@
               <a:spcAft>
                 <a:spcPts val="100"/>
               </a:spcAft>
-              <a:defRPr sz="930">
+              <a:defRPr sz="1000">
                 <a:solidFill>
                   <a:srgbClr val="505050"/>
                 </a:solidFill>
@@ -11076,6 +11152,7 @@
               </a:defRPr>
             </a:pPr>
             <a:r>
+              <a:rPr/>
               <a:t>   -&gt; Product_Category_Mapping</a:t>
             </a:r>
           </a:p>
@@ -11084,7 +11161,7 @@
               <a:spcAft>
                 <a:spcPts val="100"/>
               </a:spcAft>
-              <a:defRPr sz="930">
+              <a:defRPr sz="1000">
                 <a:solidFill>
                   <a:srgbClr val="505050"/>
                 </a:solidFill>
@@ -11092,6 +11169,7 @@
               </a:defRPr>
             </a:pPr>
             <a:r>
+              <a:rPr/>
               <a:t>   -&gt; Category</a:t>
             </a:r>
           </a:p>
@@ -11105,7 +11183,7 @@
         </p:nvSpPr>
         <p:spPr>
           <a:xfrm>
-            <a:off x="4892040" y="1783080"/>
+            <a:off x="4892040" y="2112263"/>
             <a:ext cx="6373368" cy="402336"/>
           </a:xfrm>
           <a:prstGeom prst="roundRect">
@@ -11147,6 +11225,7 @@
               </a:defRPr>
             </a:pPr>
             <a:r>
+              <a:rPr/>
               <a:t>Compiled SQL, executed read-only</a:t>
             </a:r>
           </a:p>
@@ -11160,7 +11239,7 @@
         </p:nvSpPr>
         <p:spPr>
           <a:xfrm>
-            <a:off x="4937760" y="2249424"/>
+            <a:off x="4937760" y="2578608"/>
             <a:ext cx="6309360" cy="2578608"/>
           </a:xfrm>
           <a:prstGeom prst="rect">
@@ -11197,7 +11276,7 @@
               <a:spcAft>
                 <a:spcPts val="100"/>
               </a:spcAft>
-              <a:defRPr sz="860">
+              <a:defRPr sz="1000">
                 <a:solidFill>
                   <a:srgbClr val="505050"/>
                 </a:solidFill>
@@ -11205,6 +11284,7 @@
               </a:defRPr>
             </a:pPr>
             <a:r>
+              <a:rPr/>
               <a:t>SELECT c.Name AS label, SUM(oi.PriceExclTax) AS value</a:t>
             </a:r>
           </a:p>
@@ -11213,7 +11293,7 @@
               <a:spcAft>
                 <a:spcPts val="100"/>
               </a:spcAft>
-              <a:defRPr sz="860">
+              <a:defRPr sz="1000">
                 <a:solidFill>
                   <a:srgbClr val="505050"/>
                 </a:solidFill>
@@ -11221,6 +11301,7 @@
               </a:defRPr>
             </a:pPr>
             <a:r>
+              <a:rPr/>
               <a:t>FROM `Order` o</a:t>
             </a:r>
           </a:p>
@@ -11229,7 +11310,7 @@
               <a:spcAft>
                 <a:spcPts val="100"/>
               </a:spcAft>
-              <a:defRPr sz="860">
+              <a:defRPr sz="1000">
                 <a:solidFill>
                   <a:srgbClr val="505050"/>
                 </a:solidFill>
@@ -11237,6 +11318,7 @@
               </a:defRPr>
             </a:pPr>
             <a:r>
+              <a:rPr/>
               <a:t>LEFT JOIN `OrderItem` oi ON o.Id = oi.OrderId</a:t>
             </a:r>
           </a:p>
@@ -11245,7 +11327,7 @@
               <a:spcAft>
                 <a:spcPts val="100"/>
               </a:spcAft>
-              <a:defRPr sz="860">
+              <a:defRPr sz="1000">
                 <a:solidFill>
                   <a:srgbClr val="505050"/>
                 </a:solidFill>
@@ -11253,6 +11335,7 @@
               </a:defRPr>
             </a:pPr>
             <a:r>
+              <a:rPr/>
               <a:t>LEFT JOIN `Product` p   ON oi.ProductId = p.Id</a:t>
             </a:r>
           </a:p>
@@ -11261,7 +11344,7 @@
               <a:spcAft>
                 <a:spcPts val="100"/>
               </a:spcAft>
-              <a:defRPr sz="860">
+              <a:defRPr sz="1000">
                 <a:solidFill>
                   <a:srgbClr val="505050"/>
                 </a:solidFill>
@@ -11269,6 +11352,7 @@
               </a:defRPr>
             </a:pPr>
             <a:r>
+              <a:rPr/>
               <a:t>LEFT JOIN `Product_Category_Mapping` pcm ON p.Id = pcm.ProductId</a:t>
             </a:r>
           </a:p>
@@ -11277,7 +11361,7 @@
               <a:spcAft>
                 <a:spcPts val="100"/>
               </a:spcAft>
-              <a:defRPr sz="860">
+              <a:defRPr sz="1000">
                 <a:solidFill>
                   <a:srgbClr val="505050"/>
                 </a:solidFill>
@@ -11285,6 +11369,7 @@
               </a:defRPr>
             </a:pPr>
             <a:r>
+              <a:rPr/>
               <a:t>LEFT JOIN `Category` c  ON pcm.CategoryId = c.Id</a:t>
             </a:r>
           </a:p>
@@ -11293,7 +11378,7 @@
               <a:spcAft>
                 <a:spcPts val="100"/>
               </a:spcAft>
-              <a:defRPr sz="860">
+              <a:defRPr sz="1000">
                 <a:solidFill>
                   <a:srgbClr val="505050"/>
                 </a:solidFill>
@@ -11301,6 +11386,7 @@
               </a:defRPr>
             </a:pPr>
             <a:r>
+              <a:rPr/>
               <a:t>WHERE 1=1</a:t>
             </a:r>
           </a:p>
@@ -11309,7 +11395,7 @@
               <a:spcAft>
                 <a:spcPts val="100"/>
               </a:spcAft>
-              <a:defRPr sz="860">
+              <a:defRPr sz="1000">
                 <a:solidFill>
                   <a:srgbClr val="505050"/>
                 </a:solidFill>
@@ -11317,6 +11403,7 @@
               </a:defRPr>
             </a:pPr>
             <a:r>
+              <a:rPr/>
               <a:t>  AND o.Deleted = 0</a:t>
             </a:r>
           </a:p>
@@ -11325,7 +11412,7 @@
               <a:spcAft>
                 <a:spcPts val="100"/>
               </a:spcAft>
-              <a:defRPr sz="860">
+              <a:defRPr sz="1000">
                 <a:solidFill>
                   <a:srgbClr val="505050"/>
                 </a:solidFill>
@@ -11333,6 +11420,7 @@
               </a:defRPr>
             </a:pPr>
             <a:r>
+              <a:rPr/>
               <a:t>  AND p.Deleted = 0</a:t>
             </a:r>
           </a:p>
@@ -11341,7 +11429,7 @@
               <a:spcAft>
                 <a:spcPts val="100"/>
               </a:spcAft>
-              <a:defRPr sz="860">
+              <a:defRPr sz="1000">
                 <a:solidFill>
                   <a:srgbClr val="505050"/>
                 </a:solidFill>
@@ -11349,6 +11437,7 @@
               </a:defRPr>
             </a:pPr>
             <a:r>
+              <a:rPr/>
               <a:t>GROUP BY c.Name</a:t>
             </a:r>
           </a:p>
@@ -11357,7 +11446,7 @@
               <a:spcAft>
                 <a:spcPts val="100"/>
               </a:spcAft>
-              <a:defRPr sz="860">
+              <a:defRPr sz="1000">
                 <a:solidFill>
                   <a:srgbClr val="505050"/>
                 </a:solidFill>
@@ -11365,6 +11454,7 @@
               </a:defRPr>
             </a:pPr>
             <a:r>
+              <a:rPr/>
               <a:t>ORDER BY value DESC</a:t>
             </a:r>
           </a:p>
@@ -11373,7 +11463,7 @@
               <a:spcAft>
                 <a:spcPts val="100"/>
               </a:spcAft>
-              <a:defRPr sz="860">
+              <a:defRPr sz="1000">
                 <a:solidFill>
                   <a:srgbClr val="505050"/>
                 </a:solidFill>
@@ -11381,6 +11471,7 @@
               </a:defRPr>
             </a:pPr>
             <a:r>
+              <a:rPr/>
               <a:t>LIMIT 100</a:t>
             </a:r>
           </a:p>
@@ -11395,7 +11486,7 @@
           <p:nvPr/>
         </p:nvGraphicFramePr>
         <p:xfrm>
-          <a:off x="685800" y="4956048"/>
+          <a:off x="685800" y="5285231"/>
           <a:ext cx="10607040" cy="914400"/>
         </p:xfrm>
         <a:graphic>
@@ -11419,7 +11510,7 @@
                         <a:lnSpc>
                           <a:spcPct val="100000"/>
                         </a:lnSpc>
-                        <a:defRPr sz="1100" b="1">
+                        <a:defRPr sz="1200" b="1">
                           <a:solidFill>
                             <a:srgbClr val="FFFFFF"/>
                           </a:solidFill>
@@ -11446,7 +11537,7 @@
                         <a:lnSpc>
                           <a:spcPct val="100000"/>
                         </a:lnSpc>
-                        <a:defRPr sz="1100" b="1">
+                        <a:defRPr sz="1200" b="1">
                           <a:solidFill>
                             <a:srgbClr val="FFFFFF"/>
                           </a:solidFill>
@@ -11473,7 +11564,7 @@
                         <a:lnSpc>
                           <a:spcPct val="100000"/>
                         </a:lnSpc>
-                        <a:defRPr sz="1100" b="1">
+                        <a:defRPr sz="1200" b="1">
                           <a:solidFill>
                             <a:srgbClr val="FFFFFF"/>
                           </a:solidFill>
@@ -11502,7 +11593,7 @@
                         <a:lnSpc>
                           <a:spcPct val="100000"/>
                         </a:lnSpc>
-                        <a:defRPr sz="1000" b="1">
+                        <a:defRPr sz="1200" b="1">
                           <a:solidFill>
                             <a:srgbClr val="333333"/>
                           </a:solidFill>
@@ -11525,7 +11616,7 @@
                         <a:lnSpc>
                           <a:spcPct val="100000"/>
                         </a:lnSpc>
-                        <a:defRPr sz="1000" b="0">
+                        <a:defRPr sz="1200" b="0">
                           <a:solidFill>
                             <a:srgbClr val="333333"/>
                           </a:solidFill>
@@ -11548,7 +11639,7 @@
                         <a:lnSpc>
                           <a:spcPct val="100000"/>
                         </a:lnSpc>
-                        <a:defRPr sz="1000" b="0">
+                        <a:defRPr sz="1200" b="0">
                           <a:solidFill>
                             <a:srgbClr val="333333"/>
                           </a:solidFill>
@@ -11573,7 +11664,7 @@
                         <a:lnSpc>
                           <a:spcPct val="100000"/>
                         </a:lnSpc>
-                        <a:defRPr sz="1000" b="1">
+                        <a:defRPr sz="1200" b="1">
                           <a:solidFill>
                             <a:srgbClr val="333333"/>
                           </a:solidFill>
@@ -11600,7 +11691,7 @@
                         <a:lnSpc>
                           <a:spcPct val="100000"/>
                         </a:lnSpc>
-                        <a:defRPr sz="1000" b="0">
+                        <a:defRPr sz="1200" b="0">
                           <a:solidFill>
                             <a:srgbClr val="333333"/>
                           </a:solidFill>
@@ -11627,7 +11718,7 @@
                         <a:lnSpc>
                           <a:spcPct val="100000"/>
                         </a:lnSpc>
-                        <a:defRPr sz="1000" b="0">
+                        <a:defRPr sz="1200" b="0">
                           <a:solidFill>
                             <a:srgbClr val="333333"/>
                           </a:solidFill>
@@ -12599,7 +12690,7 @@
         </p:nvSpPr>
         <p:spPr>
           <a:xfrm>
-            <a:off x="868680" y="1417320"/>
+            <a:off x="868680" y="1572768"/>
             <a:ext cx="5166360" cy="3063240"/>
           </a:xfrm>
           <a:prstGeom prst="rect">
@@ -12625,7 +12716,7 @@
               </a:spcAft>
             </a:pPr>
             <a:r>
-              <a:rPr b="1" i="0" sz="1850">
+              <a:rPr b="1" i="0" sz="1750">
                 <a:solidFill>
                   <a:srgbClr val="003366"/>
                 </a:solidFill>
@@ -12647,7 +12738,7 @@
               </a:spcAft>
             </a:pPr>
             <a:r>
-              <a:rPr b="0" i="0" sz="1550">
+              <a:rPr b="0" i="0" sz="1450">
                 <a:solidFill>
                   <a:srgbClr val="333333"/>
                 </a:solidFill>
@@ -12669,7 +12760,7 @@
               </a:spcAft>
             </a:pPr>
             <a:r>
-              <a:rPr b="0" i="0" sz="1550">
+              <a:rPr b="0" i="0" sz="1450">
                 <a:solidFill>
                   <a:srgbClr val="333333"/>
                 </a:solidFill>
@@ -12691,7 +12782,7 @@
               </a:spcAft>
             </a:pPr>
             <a:r>
-              <a:rPr b="0" i="0" sz="1550">
+              <a:rPr b="0" i="0" sz="1450">
                 <a:solidFill>
                   <a:srgbClr val="333333"/>
                 </a:solidFill>
@@ -12713,7 +12804,7 @@
               </a:spcAft>
             </a:pPr>
             <a:r>
-              <a:rPr b="0" i="0" sz="1550">
+              <a:rPr b="0" i="0" sz="1450">
                 <a:solidFill>
                   <a:srgbClr val="333333"/>
                 </a:solidFill>
@@ -12735,7 +12826,7 @@
               </a:spcAft>
             </a:pPr>
             <a:r>
-              <a:rPr b="0" i="0" sz="1550">
+              <a:rPr b="0" i="0" sz="1450">
                 <a:solidFill>
                   <a:srgbClr val="333333"/>
                 </a:solidFill>
@@ -12754,7 +12845,7 @@
         </p:nvSpPr>
         <p:spPr>
           <a:xfrm>
-            <a:off x="6355080" y="1417320"/>
+            <a:off x="6355080" y="1572768"/>
             <a:ext cx="4892040" cy="256032"/>
           </a:xfrm>
           <a:prstGeom prst="rect">
@@ -12777,6 +12868,7 @@
               </a:defRPr>
             </a:pPr>
             <a:r>
+              <a:rPr/>
               <a:t>Seeded Data Used in Live Prototype</a:t>
             </a:r>
           </a:p>
@@ -12825,7 +12917,7 @@
         </p:nvSpPr>
         <p:spPr>
           <a:xfrm>
-            <a:off x="6355080" y="1984248"/>
+            <a:off x="6355080" y="2139696"/>
             <a:ext cx="1051560" cy="406908"/>
           </a:xfrm>
           <a:prstGeom prst="rect">
@@ -12840,7 +12932,7 @@
           <a:lstStyle/>
           <a:p>
             <a:pPr algn="r">
-              <a:defRPr sz="1000">
+              <a:defRPr sz="1200">
                 <a:solidFill>
                   <a:srgbClr val="333333"/>
                 </a:solidFill>
@@ -12848,6 +12940,7 @@
               </a:defRPr>
             </a:pPr>
             <a:r>
+              <a:rPr/>
               <a:t>Order items</a:t>
             </a:r>
           </a:p>
@@ -12861,7 +12954,7 @@
         </p:nvSpPr>
         <p:spPr>
           <a:xfrm>
-            <a:off x="7498080" y="2002536"/>
+            <a:off x="7498080" y="2157984"/>
             <a:ext cx="3137175" cy="370332"/>
           </a:xfrm>
           <a:prstGeom prst="rect">
@@ -12906,7 +12999,7 @@
         </p:nvSpPr>
         <p:spPr>
           <a:xfrm>
-            <a:off x="10690119" y="1984248"/>
+            <a:off x="10690119" y="2139696"/>
             <a:ext cx="594360" cy="406908"/>
           </a:xfrm>
           <a:prstGeom prst="rect">
@@ -12921,7 +13014,7 @@
           <a:lstStyle/>
           <a:p>
             <a:pPr>
-              <a:defRPr sz="1000" b="1">
+              <a:defRPr sz="1200" b="1">
                 <a:solidFill>
                   <a:srgbClr val="333333"/>
                 </a:solidFill>
@@ -12929,6 +13022,7 @@
               </a:defRPr>
             </a:pPr>
             <a:r>
+              <a:rPr/>
               <a:t>6320</a:t>
             </a:r>
           </a:p>
@@ -12942,7 +13036,7 @@
         </p:nvSpPr>
         <p:spPr>
           <a:xfrm>
-            <a:off x="6355080" y="2574036"/>
+            <a:off x="6355080" y="2729484"/>
             <a:ext cx="1051560" cy="406908"/>
           </a:xfrm>
           <a:prstGeom prst="rect">
@@ -12957,7 +13051,7 @@
           <a:lstStyle/>
           <a:p>
             <a:pPr algn="r">
-              <a:defRPr sz="1000">
+              <a:defRPr sz="1200">
                 <a:solidFill>
                   <a:srgbClr val="333333"/>
                 </a:solidFill>
@@ -12965,6 +13059,7 @@
               </a:defRPr>
             </a:pPr>
             <a:r>
+              <a:rPr/>
               <a:t>Orders</a:t>
             </a:r>
           </a:p>
@@ -12978,7 +13073,7 @@
         </p:nvSpPr>
         <p:spPr>
           <a:xfrm>
-            <a:off x="7498080" y="2592324"/>
+            <a:off x="7498080" y="2747772"/>
             <a:ext cx="1240971" cy="370332"/>
           </a:xfrm>
           <a:prstGeom prst="rect">
@@ -13023,7 +13118,7 @@
         </p:nvSpPr>
         <p:spPr>
           <a:xfrm>
-            <a:off x="8793915" y="2574036"/>
+            <a:off x="8793915" y="2729484"/>
             <a:ext cx="594360" cy="406908"/>
           </a:xfrm>
           <a:prstGeom prst="rect">
@@ -13038,7 +13133,7 @@
           <a:lstStyle/>
           <a:p>
             <a:pPr>
-              <a:defRPr sz="1000" b="1">
+              <a:defRPr sz="1200" b="1">
                 <a:solidFill>
                   <a:srgbClr val="333333"/>
                 </a:solidFill>
@@ -13046,6 +13141,7 @@
               </a:defRPr>
             </a:pPr>
             <a:r>
+              <a:rPr/>
               <a:t>2500</a:t>
             </a:r>
           </a:p>
@@ -13059,7 +13155,7 @@
         </p:nvSpPr>
         <p:spPr>
           <a:xfrm>
-            <a:off x="6355080" y="3163824"/>
+            <a:off x="6355080" y="3319272"/>
             <a:ext cx="1051560" cy="406908"/>
           </a:xfrm>
           <a:prstGeom prst="rect">
@@ -13074,7 +13170,7 @@
           <a:lstStyle/>
           <a:p>
             <a:pPr algn="r">
-              <a:defRPr sz="1000">
+              <a:defRPr sz="1200">
                 <a:solidFill>
                   <a:srgbClr val="333333"/>
                 </a:solidFill>
@@ -13082,6 +13178,7 @@
               </a:defRPr>
             </a:pPr>
             <a:r>
+              <a:rPr/>
               <a:t>Customers</a:t>
             </a:r>
           </a:p>
@@ -13095,7 +13192,7 @@
         </p:nvSpPr>
         <p:spPr>
           <a:xfrm>
-            <a:off x="7498080" y="3182112"/>
+            <a:off x="7498080" y="3337560"/>
             <a:ext cx="595666" cy="370332"/>
           </a:xfrm>
           <a:prstGeom prst="rect">
@@ -13140,7 +13237,7 @@
         </p:nvSpPr>
         <p:spPr>
           <a:xfrm>
-            <a:off x="8148610" y="3163824"/>
+            <a:off x="8148610" y="3319272"/>
             <a:ext cx="594360" cy="406908"/>
           </a:xfrm>
           <a:prstGeom prst="rect">
@@ -13155,7 +13252,7 @@
           <a:lstStyle/>
           <a:p>
             <a:pPr>
-              <a:defRPr sz="1000" b="1">
+              <a:defRPr sz="1200" b="1">
                 <a:solidFill>
                   <a:srgbClr val="333333"/>
                 </a:solidFill>
@@ -13163,6 +13260,7 @@
               </a:defRPr>
             </a:pPr>
             <a:r>
+              <a:rPr/>
               <a:t>1200</a:t>
             </a:r>
           </a:p>
@@ -13176,7 +13274,7 @@
         </p:nvSpPr>
         <p:spPr>
           <a:xfrm>
-            <a:off x="6355080" y="3753612"/>
+            <a:off x="6355080" y="3909060"/>
             <a:ext cx="1051560" cy="406908"/>
           </a:xfrm>
           <a:prstGeom prst="rect">
@@ -13191,7 +13289,7 @@
           <a:lstStyle/>
           <a:p>
             <a:pPr algn="r">
-              <a:defRPr sz="1000">
+              <a:defRPr sz="1200">
                 <a:solidFill>
                   <a:srgbClr val="333333"/>
                 </a:solidFill>
@@ -13199,6 +13297,7 @@
               </a:defRPr>
             </a:pPr>
             <a:r>
+              <a:rPr/>
               <a:t>Products</a:t>
             </a:r>
           </a:p>
@@ -13212,8 +13311,8 @@
         </p:nvSpPr>
         <p:spPr>
           <a:xfrm>
-            <a:off x="7498080" y="3771900"/>
-            <a:ext cx="8438" cy="370332"/>
+            <a:off x="7498080" y="3927348"/>
+            <a:ext cx="123444" cy="370332"/>
           </a:xfrm>
           <a:prstGeom prst="rect">
             <a:avLst/>
@@ -13257,7 +13356,7 @@
         </p:nvSpPr>
         <p:spPr>
           <a:xfrm>
-            <a:off x="7561382" y="3753612"/>
+            <a:off x="7676388" y="3909060"/>
             <a:ext cx="594360" cy="406908"/>
           </a:xfrm>
           <a:prstGeom prst="rect">
@@ -13272,7 +13371,7 @@
           <a:lstStyle/>
           <a:p>
             <a:pPr>
-              <a:defRPr sz="1000" b="1">
+              <a:defRPr sz="1200" b="1">
                 <a:solidFill>
                   <a:srgbClr val="333333"/>
                 </a:solidFill>
@@ -13280,6 +13379,7 @@
               </a:defRPr>
             </a:pPr>
             <a:r>
+              <a:rPr/>
               <a:t>17</a:t>
             </a:r>
           </a:p>
@@ -13293,8 +13393,8 @@
         </p:nvSpPr>
         <p:spPr>
           <a:xfrm>
-            <a:off x="868680" y="4736592"/>
-            <a:ext cx="10241280" cy="914400"/>
+            <a:off x="868680" y="4892040"/>
+            <a:ext cx="10241280" cy="1234440"/>
           </a:xfrm>
           <a:prstGeom prst="rect">
             <a:avLst/>
@@ -13319,7 +13419,7 @@
               </a:spcAft>
             </a:pPr>
             <a:r>
-              <a:rPr b="1" i="0" sz="1400">
+              <a:rPr b="1" i="0" sz="1750">
                 <a:solidFill>
                   <a:srgbClr val="003366"/>
                 </a:solidFill>
@@ -13341,7 +13441,7 @@
               </a:spcAft>
             </a:pPr>
             <a:r>
-              <a:rPr b="0" i="0" sz="1100">
+              <a:rPr b="0" i="0" sz="1450">
                 <a:solidFill>
                   <a:srgbClr val="333333"/>
                 </a:solidFill>
@@ -13363,7 +13463,7 @@
               </a:spcAft>
             </a:pPr>
             <a:r>
-              <a:rPr b="0" i="0" sz="1100">
+              <a:rPr b="0" i="0" sz="1450">
                 <a:solidFill>
                   <a:srgbClr val="333333"/>
                 </a:solidFill>
@@ -13745,8 +13845,8 @@
         </p:nvSpPr>
         <p:spPr>
           <a:xfrm>
-            <a:off x="777240" y="1280160"/>
-            <a:ext cx="10515600" cy="548640"/>
+            <a:off x="777240" y="1572768"/>
+            <a:ext cx="10515600" cy="648239"/>
           </a:xfrm>
           <a:prstGeom prst="rect">
             <a:avLst/>
@@ -13771,7 +13871,7 @@
               </a:spcAft>
             </a:pPr>
             <a:r>
-              <a:rPr b="1" i="0" sz="1450">
+              <a:rPr b="1" i="0" sz="1700">
                 <a:solidFill>
                   <a:srgbClr val="003366"/>
                 </a:solidFill>
@@ -13791,8 +13891,8 @@
           <p:nvPr/>
         </p:nvGraphicFramePr>
         <p:xfrm>
-          <a:off x="777240" y="1920240"/>
-          <a:ext cx="10515599" cy="2331720"/>
+          <a:off x="777240" y="2203000"/>
+          <a:ext cx="10515599" cy="2295847"/>
         </p:xfrm>
         <a:graphic>
           <a:graphicData uri="http://schemas.openxmlformats.org/drawingml/2006/table">
@@ -13815,7 +13915,7 @@
                         <a:lnSpc>
                           <a:spcPct val="100000"/>
                         </a:lnSpc>
-                        <a:defRPr sz="1100" b="1">
+                        <a:defRPr sz="1200" b="1">
                           <a:solidFill>
                             <a:srgbClr val="FFFFFF"/>
                           </a:solidFill>
@@ -13842,7 +13942,7 @@
                         <a:lnSpc>
                           <a:spcPct val="100000"/>
                         </a:lnSpc>
-                        <a:defRPr sz="1100" b="1">
+                        <a:defRPr sz="1200" b="1">
                           <a:solidFill>
                             <a:srgbClr val="FFFFFF"/>
                           </a:solidFill>
@@ -13858,7 +13958,7 @@
                         <a:lnSpc>
                           <a:spcPct val="100000"/>
                         </a:lnSpc>
-                        <a:defRPr sz="1100" b="1">
+                        <a:defRPr sz="1200" b="1">
                           <a:solidFill>
                             <a:srgbClr val="FFFFFF"/>
                           </a:solidFill>
@@ -13885,7 +13985,7 @@
                         <a:lnSpc>
                           <a:spcPct val="100000"/>
                         </a:lnSpc>
-                        <a:defRPr sz="1100" b="1">
+                        <a:defRPr sz="1200" b="1">
                           <a:solidFill>
                             <a:srgbClr val="FFFFFF"/>
                           </a:solidFill>
@@ -13901,7 +14001,7 @@
                         <a:lnSpc>
                           <a:spcPct val="100000"/>
                         </a:lnSpc>
-                        <a:defRPr sz="1100" b="1">
+                        <a:defRPr sz="1200" b="1">
                           <a:solidFill>
                             <a:srgbClr val="FFFFFF"/>
                           </a:solidFill>
@@ -13930,7 +14030,7 @@
                         <a:lnSpc>
                           <a:spcPct val="100000"/>
                         </a:lnSpc>
-                        <a:defRPr sz="1100" b="1">
+                        <a:defRPr sz="1200" b="1">
                           <a:solidFill>
                             <a:srgbClr val="333333"/>
                           </a:solidFill>
@@ -13953,7 +14053,7 @@
                         <a:lnSpc>
                           <a:spcPct val="100000"/>
                         </a:lnSpc>
-                        <a:defRPr sz="1100" b="0">
+                        <a:defRPr sz="1200" b="0">
                           <a:solidFill>
                             <a:srgbClr val="333333"/>
                           </a:solidFill>
@@ -13976,7 +14076,7 @@
                         <a:lnSpc>
                           <a:spcPct val="100000"/>
                         </a:lnSpc>
-                        <a:defRPr sz="1100" b="0">
+                        <a:defRPr sz="1200" b="0">
                           <a:solidFill>
                             <a:srgbClr val="333333"/>
                           </a:solidFill>
@@ -14001,7 +14101,7 @@
                         <a:lnSpc>
                           <a:spcPct val="100000"/>
                         </a:lnSpc>
-                        <a:defRPr sz="1100" b="1">
+                        <a:defRPr sz="1200" b="1">
                           <a:solidFill>
                             <a:srgbClr val="333333"/>
                           </a:solidFill>
@@ -14028,7 +14128,7 @@
                         <a:lnSpc>
                           <a:spcPct val="100000"/>
                         </a:lnSpc>
-                        <a:defRPr sz="1100" b="0">
+                        <a:defRPr sz="1200" b="0">
                           <a:solidFill>
                             <a:srgbClr val="333333"/>
                           </a:solidFill>
@@ -14055,7 +14155,7 @@
                         <a:lnSpc>
                           <a:spcPct val="100000"/>
                         </a:lnSpc>
-                        <a:defRPr sz="1100" b="0">
+                        <a:defRPr sz="1200" b="0">
                           <a:solidFill>
                             <a:srgbClr val="333333"/>
                           </a:solidFill>
@@ -14084,7 +14184,7 @@
                         <a:lnSpc>
                           <a:spcPct val="100000"/>
                         </a:lnSpc>
-                        <a:defRPr sz="1100" b="1">
+                        <a:defRPr sz="1200" b="1">
                           <a:solidFill>
                             <a:srgbClr val="333333"/>
                           </a:solidFill>
@@ -14107,7 +14207,7 @@
                         <a:lnSpc>
                           <a:spcPct val="100000"/>
                         </a:lnSpc>
-                        <a:defRPr sz="1100" b="0">
+                        <a:defRPr sz="1200" b="0">
                           <a:solidFill>
                             <a:srgbClr val="333333"/>
                           </a:solidFill>
@@ -14130,7 +14230,7 @@
                         <a:lnSpc>
                           <a:spcPct val="100000"/>
                         </a:lnSpc>
-                        <a:defRPr sz="1100" b="0">
+                        <a:defRPr sz="1200" b="0">
                           <a:solidFill>
                             <a:srgbClr val="333333"/>
                           </a:solidFill>
@@ -14155,7 +14255,7 @@
                         <a:lnSpc>
                           <a:spcPct val="100000"/>
                         </a:lnSpc>
-                        <a:defRPr sz="1100" b="1">
+                        <a:defRPr sz="1200" b="1">
                           <a:solidFill>
                             <a:srgbClr val="333333"/>
                           </a:solidFill>
@@ -14182,7 +14282,7 @@
                         <a:lnSpc>
                           <a:spcPct val="100000"/>
                         </a:lnSpc>
-                        <a:defRPr sz="1100" b="0">
+                        <a:defRPr sz="1200" b="0">
                           <a:solidFill>
                             <a:srgbClr val="333333"/>
                           </a:solidFill>
@@ -14209,7 +14309,7 @@
                         <a:lnSpc>
                           <a:spcPct val="100000"/>
                         </a:lnSpc>
-                        <a:defRPr sz="1100" b="0">
+                        <a:defRPr sz="1200" b="0">
                           <a:solidFill>
                             <a:srgbClr val="333333"/>
                           </a:solidFill>
@@ -14238,7 +14338,7 @@
                         <a:lnSpc>
                           <a:spcPct val="100000"/>
                         </a:lnSpc>
-                        <a:defRPr sz="1100" b="1">
+                        <a:defRPr sz="1200" b="1">
                           <a:solidFill>
                             <a:srgbClr val="333333"/>
                           </a:solidFill>
@@ -14261,7 +14361,7 @@
                         <a:lnSpc>
                           <a:spcPct val="100000"/>
                         </a:lnSpc>
-                        <a:defRPr sz="1100" b="0">
+                        <a:defRPr sz="1200" b="0">
                           <a:solidFill>
                             <a:srgbClr val="333333"/>
                           </a:solidFill>
@@ -14284,7 +14384,7 @@
                         <a:lnSpc>
                           <a:spcPct val="100000"/>
                         </a:lnSpc>
-                        <a:defRPr sz="1100" b="0">
+                        <a:defRPr sz="1200" b="0">
                           <a:solidFill>
                             <a:srgbClr val="333333"/>
                           </a:solidFill>
@@ -14311,8 +14411,8 @@
         </p:nvSpPr>
         <p:spPr>
           <a:xfrm>
-            <a:off x="777240" y="4389120"/>
-            <a:ext cx="10515600" cy="1051560"/>
+            <a:off x="777240" y="4633897"/>
+            <a:ext cx="10515600" cy="1035382"/>
           </a:xfrm>
           <a:prstGeom prst="rect">
             <a:avLst/>
@@ -14337,7 +14437,7 @@
               </a:spcAft>
             </a:pPr>
             <a:r>
-              <a:rPr b="1" i="0" sz="1350">
+              <a:rPr b="1" i="0" sz="1500">
                 <a:solidFill>
                   <a:srgbClr val="003366"/>
                 </a:solidFill>
@@ -14346,7 +14446,7 @@
               <a:t>The left column has no model in it:</a:t>
             </a:r>
             <a:r>
-              <a:rPr b="0" i="0" sz="1250">
+              <a:rPr b="0" i="0" sz="1400">
                 <a:solidFill>
                   <a:srgbClr val="333333"/>
                 </a:solidFill>
@@ -14368,7 +14468,7 @@
               </a:spcAft>
             </a:pPr>
             <a:r>
-              <a:rPr b="1" i="0" sz="1350">
+              <a:rPr b="1" i="0" sz="1500">
                 <a:solidFill>
                   <a:srgbClr val="003366"/>
                 </a:solidFill>
@@ -14377,7 +14477,7 @@
               <a:t>Declining is only meaningful next to answering:</a:t>
             </a:r>
             <a:r>
-              <a:rPr b="0" i="0" sz="1250">
+              <a:rPr b="0" i="0" sz="1400">
                 <a:solidFill>
                   <a:srgbClr val="333333"/>
                 </a:solidFill>
@@ -15468,7 +15568,7 @@
         </p:nvSpPr>
         <p:spPr>
           <a:xfrm>
-            <a:off x="777240" y="1280160"/>
+            <a:off x="777240" y="1572768"/>
             <a:ext cx="10515600" cy="411480"/>
           </a:xfrm>
           <a:prstGeom prst="rect">
@@ -15494,7 +15594,7 @@
               </a:spcAft>
             </a:pPr>
             <a:r>
-              <a:rPr b="1" i="0" sz="1650">
+              <a:rPr b="1" i="0" sz="1700">
                 <a:solidFill>
                   <a:srgbClr val="003366"/>
                 </a:solidFill>
@@ -15514,7 +15614,7 @@
           <p:nvPr/>
         </p:nvGraphicFramePr>
         <p:xfrm>
-          <a:off x="777240" y="1810512"/>
+          <a:off x="777240" y="2103120"/>
           <a:ext cx="10515600" cy="2377440"/>
         </p:xfrm>
         <a:graphic>
@@ -15539,7 +15639,7 @@
                         <a:lnSpc>
                           <a:spcPct val="100000"/>
                         </a:lnSpc>
-                        <a:defRPr sz="1150" b="1">
+                        <a:defRPr sz="1200" b="1">
                           <a:solidFill>
                             <a:srgbClr val="FFFFFF"/>
                           </a:solidFill>
@@ -15566,7 +15666,7 @@
                         <a:lnSpc>
                           <a:spcPct val="100000"/>
                         </a:lnSpc>
-                        <a:defRPr sz="1150" b="1">
+                        <a:defRPr sz="1200" b="1">
                           <a:solidFill>
                             <a:srgbClr val="FFFFFF"/>
                           </a:solidFill>
@@ -15593,7 +15693,7 @@
                         <a:lnSpc>
                           <a:spcPct val="100000"/>
                         </a:lnSpc>
-                        <a:defRPr sz="1150" b="1">
+                        <a:defRPr sz="1200" b="1">
                           <a:solidFill>
                             <a:srgbClr val="FFFFFF"/>
                           </a:solidFill>
@@ -15620,7 +15720,7 @@
                         <a:lnSpc>
                           <a:spcPct val="100000"/>
                         </a:lnSpc>
-                        <a:defRPr sz="1150" b="1">
+                        <a:defRPr sz="1200" b="1">
                           <a:solidFill>
                             <a:srgbClr val="FFFFFF"/>
                           </a:solidFill>
@@ -15649,7 +15749,7 @@
                         <a:lnSpc>
                           <a:spcPct val="100000"/>
                         </a:lnSpc>
-                        <a:defRPr sz="1150" b="1">
+                        <a:defRPr sz="1200" b="1">
                           <a:solidFill>
                             <a:srgbClr val="333333"/>
                           </a:solidFill>
@@ -15672,7 +15772,7 @@
                         <a:lnSpc>
                           <a:spcPct val="100000"/>
                         </a:lnSpc>
-                        <a:defRPr sz="1150" b="0">
+                        <a:defRPr sz="1200" b="0">
                           <a:solidFill>
                             <a:srgbClr val="333333"/>
                           </a:solidFill>
@@ -15695,7 +15795,7 @@
                         <a:lnSpc>
                           <a:spcPct val="100000"/>
                         </a:lnSpc>
-                        <a:defRPr sz="1150" b="0">
+                        <a:defRPr sz="1200" b="0">
                           <a:solidFill>
                             <a:srgbClr val="333333"/>
                           </a:solidFill>
@@ -15718,7 +15818,7 @@
                         <a:lnSpc>
                           <a:spcPct val="100000"/>
                         </a:lnSpc>
-                        <a:defRPr sz="1150" b="0">
+                        <a:defRPr sz="1200" b="0">
                           <a:solidFill>
                             <a:srgbClr val="333333"/>
                           </a:solidFill>
@@ -15743,7 +15843,7 @@
                         <a:lnSpc>
                           <a:spcPct val="100000"/>
                         </a:lnSpc>
-                        <a:defRPr sz="1150" b="1">
+                        <a:defRPr sz="1200" b="1">
                           <a:solidFill>
                             <a:srgbClr val="333333"/>
                           </a:solidFill>
@@ -15770,7 +15870,7 @@
                         <a:lnSpc>
                           <a:spcPct val="100000"/>
                         </a:lnSpc>
-                        <a:defRPr sz="1150" b="0">
+                        <a:defRPr sz="1200" b="0">
                           <a:solidFill>
                             <a:srgbClr val="333333"/>
                           </a:solidFill>
@@ -15797,7 +15897,7 @@
                         <a:lnSpc>
                           <a:spcPct val="100000"/>
                         </a:lnSpc>
-                        <a:defRPr sz="1150" b="0">
+                        <a:defRPr sz="1200" b="0">
                           <a:solidFill>
                             <a:srgbClr val="333333"/>
                           </a:solidFill>
@@ -15824,7 +15924,7 @@
                         <a:lnSpc>
                           <a:spcPct val="100000"/>
                         </a:lnSpc>
-                        <a:defRPr sz="1150" b="0">
+                        <a:defRPr sz="1200" b="0">
                           <a:solidFill>
                             <a:srgbClr val="333333"/>
                           </a:solidFill>
@@ -15853,7 +15953,7 @@
                         <a:lnSpc>
                           <a:spcPct val="100000"/>
                         </a:lnSpc>
-                        <a:defRPr sz="1150" b="1">
+                        <a:defRPr sz="1200" b="1">
                           <a:solidFill>
                             <a:srgbClr val="333333"/>
                           </a:solidFill>
@@ -15876,7 +15976,7 @@
                         <a:lnSpc>
                           <a:spcPct val="100000"/>
                         </a:lnSpc>
-                        <a:defRPr sz="1150" b="0">
+                        <a:defRPr sz="1200" b="0">
                           <a:solidFill>
                             <a:srgbClr val="333333"/>
                           </a:solidFill>
@@ -15899,7 +15999,7 @@
                         <a:lnSpc>
                           <a:spcPct val="100000"/>
                         </a:lnSpc>
-                        <a:defRPr sz="1150" b="0">
+                        <a:defRPr sz="1200" b="0">
                           <a:solidFill>
                             <a:srgbClr val="333333"/>
                           </a:solidFill>
@@ -15922,7 +16022,7 @@
                         <a:lnSpc>
                           <a:spcPct val="100000"/>
                         </a:lnSpc>
-                        <a:defRPr sz="1150" b="0">
+                        <a:defRPr sz="1200" b="0">
                           <a:solidFill>
                             <a:srgbClr val="333333"/>
                           </a:solidFill>
@@ -15947,7 +16047,7 @@
                         <a:lnSpc>
                           <a:spcPct val="100000"/>
                         </a:lnSpc>
-                        <a:defRPr sz="1150" b="1">
+                        <a:defRPr sz="1200" b="1">
                           <a:solidFill>
                             <a:srgbClr val="333333"/>
                           </a:solidFill>
@@ -15974,7 +16074,7 @@
                         <a:lnSpc>
                           <a:spcPct val="100000"/>
                         </a:lnSpc>
-                        <a:defRPr sz="1150" b="0">
+                        <a:defRPr sz="1200" b="0">
                           <a:solidFill>
                             <a:srgbClr val="333333"/>
                           </a:solidFill>
@@ -16001,7 +16101,7 @@
                         <a:lnSpc>
                           <a:spcPct val="100000"/>
                         </a:lnSpc>
-                        <a:defRPr sz="1150" b="0">
+                        <a:defRPr sz="1200" b="0">
                           <a:solidFill>
                             <a:srgbClr val="333333"/>
                           </a:solidFill>
@@ -16028,7 +16128,7 @@
                         <a:lnSpc>
                           <a:spcPct val="100000"/>
                         </a:lnSpc>
-                        <a:defRPr sz="1150" b="0">
+                        <a:defRPr sz="1200" b="0">
                           <a:solidFill>
                             <a:srgbClr val="333333"/>
                           </a:solidFill>
@@ -16057,7 +16157,7 @@
                         <a:lnSpc>
                           <a:spcPct val="100000"/>
                         </a:lnSpc>
-                        <a:defRPr sz="1150" b="1">
+                        <a:defRPr sz="1200" b="1">
                           <a:solidFill>
                             <a:srgbClr val="333333"/>
                           </a:solidFill>
@@ -16080,7 +16180,7 @@
                         <a:lnSpc>
                           <a:spcPct val="100000"/>
                         </a:lnSpc>
-                        <a:defRPr sz="1150" b="1">
+                        <a:defRPr sz="1200" b="1">
                           <a:solidFill>
                             <a:srgbClr val="333333"/>
                           </a:solidFill>
@@ -16103,7 +16203,7 @@
                         <a:lnSpc>
                           <a:spcPct val="100000"/>
                         </a:lnSpc>
-                        <a:defRPr sz="1150" b="1">
+                        <a:defRPr sz="1200" b="1">
                           <a:solidFill>
                             <a:srgbClr val="333333"/>
                           </a:solidFill>
@@ -16126,7 +16226,7 @@
                         <a:lnSpc>
                           <a:spcPct val="100000"/>
                         </a:lnSpc>
-                        <a:defRPr sz="1150" b="1">
+                        <a:defRPr sz="1200" b="1">
                           <a:solidFill>
                             <a:srgbClr val="333333"/>
                           </a:solidFill>
@@ -16153,8 +16253,8 @@
         </p:nvSpPr>
         <p:spPr>
           <a:xfrm>
-            <a:off x="777240" y="4343400"/>
-            <a:ext cx="10515600" cy="1234440"/>
+            <a:off x="777240" y="4636008"/>
+            <a:ext cx="10515600" cy="1572768"/>
           </a:xfrm>
           <a:prstGeom prst="rect">
             <a:avLst/>
@@ -16179,7 +16279,7 @@
               </a:spcAft>
             </a:pPr>
             <a:r>
-              <a:rPr b="1" i="0" sz="1450">
+              <a:rPr b="1" i="0" sz="1700">
                 <a:solidFill>
                   <a:srgbClr val="003366"/>
                 </a:solidFill>
@@ -16201,7 +16301,7 @@
               </a:spcAft>
             </a:pPr>
             <a:r>
-              <a:rPr b="1" i="0" sz="1450">
+              <a:rPr b="1" i="0" sz="1700">
                 <a:solidFill>
                   <a:srgbClr val="003366"/>
                 </a:solidFill>
@@ -16583,8 +16683,8 @@
         </p:nvSpPr>
         <p:spPr>
           <a:xfrm>
-            <a:off x="777240" y="1243584"/>
-            <a:ext cx="10515600" cy="384048"/>
+            <a:off x="777240" y="1572768"/>
+            <a:ext cx="10515600" cy="378139"/>
           </a:xfrm>
           <a:prstGeom prst="rect">
             <a:avLst/>
@@ -16609,7 +16709,7 @@
               </a:spcAft>
             </a:pPr>
             <a:r>
-              <a:rPr b="1" i="0" sz="1650">
+              <a:rPr b="1" i="0" sz="1700">
                 <a:solidFill>
                   <a:srgbClr val="003366"/>
                 </a:solidFill>
@@ -16629,8 +16729,8 @@
           <p:nvPr/>
         </p:nvGraphicFramePr>
         <p:xfrm>
-          <a:off x="777240" y="1737360"/>
-          <a:ext cx="10515600" cy="1600200"/>
+          <a:off x="777240" y="2058947"/>
+          <a:ext cx="10515600" cy="1575581"/>
         </p:xfrm>
         <a:graphic>
           <a:graphicData uri="http://schemas.openxmlformats.org/drawingml/2006/table">
@@ -16963,8 +17063,8 @@
         </p:nvSpPr>
         <p:spPr>
           <a:xfrm>
-            <a:off x="777240" y="3493008"/>
-            <a:ext cx="10515600" cy="402336"/>
+            <a:off x="777240" y="3787585"/>
+            <a:ext cx="10515600" cy="396146"/>
           </a:xfrm>
           <a:prstGeom prst="roundRect">
             <a:avLst/>
@@ -17005,6 +17105,7 @@
               </a:defRPr>
             </a:pPr>
             <a:r>
+              <a:rPr/>
               <a:t>What answering an unanswerable question looks like</a:t>
             </a:r>
           </a:p>
@@ -17019,8 +17120,8 @@
           <p:nvPr/>
         </p:nvGraphicFramePr>
         <p:xfrm>
-          <a:off x="777240" y="3986784"/>
-          <a:ext cx="10515600" cy="1417320"/>
+          <a:off x="777240" y="4273764"/>
+          <a:ext cx="10515600" cy="1395515"/>
         </p:xfrm>
         <a:graphic>
           <a:graphicData uri="http://schemas.openxmlformats.org/drawingml/2006/table">
@@ -17042,7 +17143,7 @@
                         <a:lnSpc>
                           <a:spcPct val="100000"/>
                         </a:lnSpc>
-                        <a:defRPr sz="1100" b="1">
+                        <a:defRPr sz="1200" b="1">
                           <a:solidFill>
                             <a:srgbClr val="FFFFFF"/>
                           </a:solidFill>
@@ -17069,7 +17170,7 @@
                         <a:lnSpc>
                           <a:spcPct val="100000"/>
                         </a:lnSpc>
-                        <a:defRPr sz="1100" b="1">
+                        <a:defRPr sz="1200" b="1">
                           <a:solidFill>
                             <a:srgbClr val="FFFFFF"/>
                           </a:solidFill>
@@ -17098,7 +17199,7 @@
                         <a:lnSpc>
                           <a:spcPct val="100000"/>
                         </a:lnSpc>
-                        <a:defRPr sz="1050" b="1">
+                        <a:defRPr sz="1200" b="1">
                           <a:solidFill>
                             <a:srgbClr val="333333"/>
                           </a:solidFill>
@@ -17121,7 +17222,7 @@
                         <a:lnSpc>
                           <a:spcPct val="100000"/>
                         </a:lnSpc>
-                        <a:defRPr sz="1050" b="0">
+                        <a:defRPr sz="1200" b="0">
                           <a:solidFill>
                             <a:srgbClr val="333333"/>
                           </a:solidFill>
@@ -17146,7 +17247,7 @@
                         <a:lnSpc>
                           <a:spcPct val="100000"/>
                         </a:lnSpc>
-                        <a:defRPr sz="1050" b="1">
+                        <a:defRPr sz="1200" b="1">
                           <a:solidFill>
                             <a:srgbClr val="333333"/>
                           </a:solidFill>
@@ -17173,7 +17274,7 @@
                         <a:lnSpc>
                           <a:spcPct val="100000"/>
                         </a:lnSpc>
-                        <a:defRPr sz="1050" b="0">
+                        <a:defRPr sz="1200" b="0">
                           <a:solidFill>
                             <a:srgbClr val="333333"/>
                           </a:solidFill>
@@ -17202,7 +17303,7 @@
                         <a:lnSpc>
                           <a:spcPct val="100000"/>
                         </a:lnSpc>
-                        <a:defRPr sz="1050" b="1">
+                        <a:defRPr sz="1200" b="1">
                           <a:solidFill>
                             <a:srgbClr val="333333"/>
                           </a:solidFill>
@@ -17225,7 +17326,7 @@
                         <a:lnSpc>
                           <a:spcPct val="100000"/>
                         </a:lnSpc>
-                        <a:defRPr sz="1050" b="0">
+                        <a:defRPr sz="1200" b="0">
                           <a:solidFill>
                             <a:srgbClr val="333333"/>
                           </a:solidFill>
@@ -17678,8 +17779,8 @@
         </p:nvSpPr>
         <p:spPr>
           <a:xfrm>
-            <a:off x="777240" y="1261872"/>
-            <a:ext cx="10515600" cy="548640"/>
+            <a:off x="777240" y="1572768"/>
+            <a:ext cx="10515600" cy="658368"/>
           </a:xfrm>
           <a:prstGeom prst="rect">
             <a:avLst/>
@@ -17704,7 +17805,7 @@
               </a:spcAft>
             </a:pPr>
             <a:r>
-              <a:rPr b="1" i="0" sz="1450">
+              <a:rPr b="1" i="0" sz="1700">
                 <a:solidFill>
                   <a:srgbClr val="003366"/>
                 </a:solidFill>
@@ -17724,7 +17825,7 @@
           <p:nvPr/>
         </p:nvGraphicFramePr>
         <p:xfrm>
-          <a:off x="777240" y="1901952"/>
+          <a:off x="777240" y="2212848"/>
           <a:ext cx="10515600" cy="1234440"/>
         </p:xfrm>
         <a:graphic>
@@ -17748,7 +17849,7 @@
                         <a:lnSpc>
                           <a:spcPct val="100000"/>
                         </a:lnSpc>
-                        <a:defRPr sz="1150" b="1">
+                        <a:defRPr sz="1200" b="1">
                           <a:solidFill>
                             <a:srgbClr val="FFFFFF"/>
                           </a:solidFill>
@@ -17775,7 +17876,7 @@
                         <a:lnSpc>
                           <a:spcPct val="100000"/>
                         </a:lnSpc>
-                        <a:defRPr sz="1150" b="1">
+                        <a:defRPr sz="1200" b="1">
                           <a:solidFill>
                             <a:srgbClr val="FFFFFF"/>
                           </a:solidFill>
@@ -17802,7 +17903,7 @@
                         <a:lnSpc>
                           <a:spcPct val="100000"/>
                         </a:lnSpc>
-                        <a:defRPr sz="1150" b="1">
+                        <a:defRPr sz="1200" b="1">
                           <a:solidFill>
                             <a:srgbClr val="FFFFFF"/>
                           </a:solidFill>
@@ -17831,7 +17932,7 @@
                         <a:lnSpc>
                           <a:spcPct val="100000"/>
                         </a:lnSpc>
-                        <a:defRPr sz="1100" b="0">
+                        <a:defRPr sz="1200" b="0">
                           <a:solidFill>
                             <a:srgbClr val="333333"/>
                           </a:solidFill>
@@ -17847,7 +17948,7 @@
                         <a:lnSpc>
                           <a:spcPct val="100000"/>
                         </a:lnSpc>
-                        <a:defRPr sz="1100" b="0">
+                        <a:defRPr sz="1200" b="0">
                           <a:solidFill>
                             <a:srgbClr val="333333"/>
                           </a:solidFill>
@@ -17870,7 +17971,7 @@
                         <a:lnSpc>
                           <a:spcPct val="100000"/>
                         </a:lnSpc>
-                        <a:defRPr sz="1100" b="1">
+                        <a:defRPr sz="1200" b="1">
                           <a:solidFill>
                             <a:srgbClr val="333333"/>
                           </a:solidFill>
@@ -17893,7 +17994,7 @@
                         <a:lnSpc>
                           <a:spcPct val="100000"/>
                         </a:lnSpc>
-                        <a:defRPr sz="1100" b="0">
+                        <a:defRPr sz="1200" b="0">
                           <a:solidFill>
                             <a:srgbClr val="333333"/>
                           </a:solidFill>
@@ -17918,7 +18019,7 @@
                         <a:lnSpc>
                           <a:spcPct val="100000"/>
                         </a:lnSpc>
-                        <a:defRPr sz="1100" b="0">
+                        <a:defRPr sz="1200" b="0">
                           <a:solidFill>
                             <a:srgbClr val="333333"/>
                           </a:solidFill>
@@ -17934,7 +18035,7 @@
                         <a:lnSpc>
                           <a:spcPct val="100000"/>
                         </a:lnSpc>
-                        <a:defRPr sz="1100" b="0">
+                        <a:defRPr sz="1200" b="0">
                           <a:solidFill>
                             <a:srgbClr val="333333"/>
                           </a:solidFill>
@@ -17961,7 +18062,7 @@
                         <a:lnSpc>
                           <a:spcPct val="100000"/>
                         </a:lnSpc>
-                        <a:defRPr sz="1100" b="1">
+                        <a:defRPr sz="1200" b="1">
                           <a:solidFill>
                             <a:srgbClr val="333333"/>
                           </a:solidFill>
@@ -17988,7 +18089,7 @@
                         <a:lnSpc>
                           <a:spcPct val="100000"/>
                         </a:lnSpc>
-                        <a:defRPr sz="1100" b="0">
+                        <a:defRPr sz="1200" b="0">
                           <a:solidFill>
                             <a:srgbClr val="333333"/>
                           </a:solidFill>
@@ -18019,7 +18120,7 @@
         </p:nvSpPr>
         <p:spPr>
           <a:xfrm>
-            <a:off x="777240" y="3310128"/>
+            <a:off x="777240" y="3621024"/>
             <a:ext cx="10515600" cy="402336"/>
           </a:xfrm>
           <a:prstGeom prst="roundRect">
@@ -18061,6 +18162,7 @@
               </a:defRPr>
             </a:pPr>
             <a:r>
+              <a:rPr/>
               <a:t>The five reports that did not match, and why</a:t>
             </a:r>
           </a:p>
@@ -18075,7 +18177,7 @@
           <p:nvPr/>
         </p:nvGraphicFramePr>
         <p:xfrm>
-          <a:off x="777240" y="3803904"/>
+          <a:off x="777240" y="4114800"/>
           <a:ext cx="10515600" cy="1371600"/>
         </p:xfrm>
         <a:graphic>
@@ -18098,7 +18200,7 @@
                         <a:lnSpc>
                           <a:spcPct val="100000"/>
                         </a:lnSpc>
-                        <a:defRPr sz="1100" b="1">
+                        <a:defRPr sz="1200" b="1">
                           <a:solidFill>
                             <a:srgbClr val="FFFFFF"/>
                           </a:solidFill>
@@ -18125,7 +18227,7 @@
                         <a:lnSpc>
                           <a:spcPct val="100000"/>
                         </a:lnSpc>
-                        <a:defRPr sz="1100" b="1">
+                        <a:defRPr sz="1200" b="1">
                           <a:solidFill>
                             <a:srgbClr val="FFFFFF"/>
                           </a:solidFill>
@@ -18154,7 +18256,7 @@
                         <a:lnSpc>
                           <a:spcPct val="100000"/>
                         </a:lnSpc>
-                        <a:defRPr sz="1050" b="0">
+                        <a:defRPr sz="1200" b="0">
                           <a:solidFill>
                             <a:srgbClr val="333333"/>
                           </a:solidFill>
@@ -18170,7 +18272,7 @@
                         <a:lnSpc>
                           <a:spcPct val="100000"/>
                         </a:lnSpc>
-                        <a:defRPr sz="1050" b="0">
+                        <a:defRPr sz="1200" b="0">
                           <a:solidFill>
                             <a:srgbClr val="333333"/>
                           </a:solidFill>
@@ -18193,7 +18295,7 @@
                         <a:lnSpc>
                           <a:spcPct val="100000"/>
                         </a:lnSpc>
-                        <a:defRPr sz="1050" b="0">
+                        <a:defRPr sz="1200" b="0">
                           <a:solidFill>
                             <a:srgbClr val="333333"/>
                           </a:solidFill>
@@ -18218,7 +18320,7 @@
                         <a:lnSpc>
                           <a:spcPct val="100000"/>
                         </a:lnSpc>
-                        <a:defRPr sz="1050" b="0">
+                        <a:defRPr sz="1200" b="0">
                           <a:solidFill>
                             <a:srgbClr val="333333"/>
                           </a:solidFill>
@@ -18234,7 +18336,7 @@
                         <a:lnSpc>
                           <a:spcPct val="100000"/>
                         </a:lnSpc>
-                        <a:defRPr sz="1050" b="0">
+                        <a:defRPr sz="1200" b="0">
                           <a:solidFill>
                             <a:srgbClr val="333333"/>
                           </a:solidFill>
@@ -18261,7 +18363,7 @@
                         <a:lnSpc>
                           <a:spcPct val="100000"/>
                         </a:lnSpc>
-                        <a:defRPr sz="1050" b="0">
+                        <a:defRPr sz="1200" b="0">
                           <a:solidFill>
                             <a:srgbClr val="333333"/>
                           </a:solidFill>
@@ -18290,7 +18392,7 @@
                         <a:lnSpc>
                           <a:spcPct val="100000"/>
                         </a:lnSpc>
-                        <a:defRPr sz="1050" b="1">
+                        <a:defRPr sz="1200" b="1">
                           <a:solidFill>
                             <a:srgbClr val="333333"/>
                           </a:solidFill>
@@ -18313,7 +18415,7 @@
                         <a:lnSpc>
                           <a:spcPct val="100000"/>
                         </a:lnSpc>
-                        <a:defRPr sz="1050" b="1">
+                        <a:defRPr sz="1200" b="1">
                           <a:solidFill>
                             <a:srgbClr val="333333"/>
                           </a:solidFill>
@@ -18767,8 +18869,8 @@
           <p:nvPr/>
         </p:nvGraphicFramePr>
         <p:xfrm>
-          <a:off x="822960" y="1417320"/>
-          <a:ext cx="10561320" cy="4160520"/>
+          <a:off x="822960" y="1572768"/>
+          <a:ext cx="10561320" cy="4041648"/>
         </p:xfrm>
         <a:graphic>
           <a:graphicData uri="http://schemas.openxmlformats.org/drawingml/2006/table">
@@ -18874,7 +18976,7 @@
                         <a:lnSpc>
                           <a:spcPct val="100000"/>
                         </a:lnSpc>
-                        <a:defRPr sz="1150" b="1">
+                        <a:defRPr sz="1200" b="1">
                           <a:solidFill>
                             <a:srgbClr val="333333"/>
                           </a:solidFill>
@@ -18897,7 +18999,7 @@
                         <a:lnSpc>
                           <a:spcPct val="100000"/>
                         </a:lnSpc>
-                        <a:defRPr sz="1150" b="0">
+                        <a:defRPr sz="1200" b="0">
                           <a:solidFill>
                             <a:srgbClr val="333333"/>
                           </a:solidFill>
@@ -18920,7 +19022,7 @@
                         <a:lnSpc>
                           <a:spcPct val="100000"/>
                         </a:lnSpc>
-                        <a:defRPr sz="1150" b="0">
+                        <a:defRPr sz="1200" b="0">
                           <a:solidFill>
                             <a:srgbClr val="333333"/>
                           </a:solidFill>
@@ -18945,7 +19047,7 @@
                         <a:lnSpc>
                           <a:spcPct val="100000"/>
                         </a:lnSpc>
-                        <a:defRPr sz="1150" b="1">
+                        <a:defRPr sz="1200" b="1">
                           <a:solidFill>
                             <a:srgbClr val="333333"/>
                           </a:solidFill>
@@ -18972,7 +19074,7 @@
                         <a:lnSpc>
                           <a:spcPct val="100000"/>
                         </a:lnSpc>
-                        <a:defRPr sz="1150" b="0">
+                        <a:defRPr sz="1200" b="0">
                           <a:solidFill>
                             <a:srgbClr val="333333"/>
                           </a:solidFill>
@@ -18999,7 +19101,7 @@
                         <a:lnSpc>
                           <a:spcPct val="100000"/>
                         </a:lnSpc>
-                        <a:defRPr sz="1150" b="0">
+                        <a:defRPr sz="1200" b="0">
                           <a:solidFill>
                             <a:srgbClr val="333333"/>
                           </a:solidFill>
@@ -19028,7 +19130,7 @@
                         <a:lnSpc>
                           <a:spcPct val="100000"/>
                         </a:lnSpc>
-                        <a:defRPr sz="1150" b="1">
+                        <a:defRPr sz="1200" b="1">
                           <a:solidFill>
                             <a:srgbClr val="333333"/>
                           </a:solidFill>
@@ -19051,7 +19153,7 @@
                         <a:lnSpc>
                           <a:spcPct val="100000"/>
                         </a:lnSpc>
-                        <a:defRPr sz="1150" b="0">
+                        <a:defRPr sz="1200" b="0">
                           <a:solidFill>
                             <a:srgbClr val="333333"/>
                           </a:solidFill>
@@ -19074,7 +19176,7 @@
                         <a:lnSpc>
                           <a:spcPct val="100000"/>
                         </a:lnSpc>
-                        <a:defRPr sz="1150" b="0">
+                        <a:defRPr sz="1200" b="0">
                           <a:solidFill>
                             <a:srgbClr val="333333"/>
                           </a:solidFill>
@@ -19099,7 +19201,7 @@
                         <a:lnSpc>
                           <a:spcPct val="100000"/>
                         </a:lnSpc>
-                        <a:defRPr sz="1150" b="1">
+                        <a:defRPr sz="1200" b="1">
                           <a:solidFill>
                             <a:srgbClr val="333333"/>
                           </a:solidFill>
@@ -19126,7 +19228,7 @@
                         <a:lnSpc>
                           <a:spcPct val="100000"/>
                         </a:lnSpc>
-                        <a:defRPr sz="1150" b="0">
+                        <a:defRPr sz="1200" b="0">
                           <a:solidFill>
                             <a:srgbClr val="333333"/>
                           </a:solidFill>
@@ -19153,7 +19255,7 @@
                         <a:lnSpc>
                           <a:spcPct val="100000"/>
                         </a:lnSpc>
-                        <a:defRPr sz="1150" b="0">
+                        <a:defRPr sz="1200" b="0">
                           <a:solidFill>
                             <a:srgbClr val="333333"/>
                           </a:solidFill>
@@ -19184,8 +19286,8 @@
         </p:nvSpPr>
         <p:spPr>
           <a:xfrm>
-            <a:off x="960120" y="5650992"/>
-            <a:ext cx="10149840" cy="411480"/>
+            <a:off x="960120" y="5614416"/>
+            <a:ext cx="10149840" cy="621792"/>
           </a:xfrm>
           <a:prstGeom prst="rect">
             <a:avLst/>
@@ -19210,7 +19312,7 @@
               </a:spcAft>
             </a:pPr>
             <a:r>
-              <a:rPr b="1" i="0" sz="1350">
+              <a:rPr b="1" i="0" sz="1500">
                 <a:solidFill>
                   <a:srgbClr val="003366"/>
                 </a:solidFill>
@@ -19219,7 +19321,7 @@
               <a:t>Expected impact:</a:t>
             </a:r>
             <a:r>
-              <a:rPr b="0" i="0" sz="1250">
+              <a:rPr b="0" i="0" sz="1400">
                 <a:solidFill>
                   <a:srgbClr val="333333"/>
                 </a:solidFill>
@@ -19468,7 +19570,7 @@
               </a:defRPr>
             </a:pPr>
             <a:r>
-              <a:t>Scope and Limitations</a:t>
+              <a:t>Scope of the Evaluation</a:t>
             </a:r>
           </a:p>
         </p:txBody>
@@ -19601,8 +19703,8 @@
         </p:nvSpPr>
         <p:spPr>
           <a:xfrm>
-            <a:off x="914400" y="1371600"/>
-            <a:ext cx="10332720" cy="4754880"/>
+            <a:off x="914400" y="1572768"/>
+            <a:ext cx="10332720" cy="4663440"/>
           </a:xfrm>
           <a:prstGeom prst="rect">
             <a:avLst/>
@@ -19627,7 +19729,7 @@
               </a:spcAft>
             </a:pPr>
             <a:r>
-              <a:rPr b="1" i="0" sz="1400">
+              <a:rPr b="1" i="0" sz="1800">
                 <a:solidFill>
                   <a:srgbClr val="003366"/>
                 </a:solidFill>
@@ -19649,7 +19751,7 @@
               </a:spcAft>
             </a:pPr>
             <a:r>
-              <a:rPr b="0" i="0" sz="1100">
+              <a:rPr b="0" i="0" sz="1500">
                 <a:solidFill>
                   <a:srgbClr val="333333"/>
                 </a:solidFill>
@@ -19671,22 +19773,44 @@
               </a:spcAft>
             </a:pPr>
             <a:r>
-              <a:rPr b="1" i="0" sz="1100">
+              <a:rPr b="1" i="0" sz="1500">
                 <a:solidFill>
                   <a:srgbClr val="003366"/>
                 </a:solidFill>
                 <a:latin typeface="Times New Roman"/>
               </a:rPr>
-              <a:t>- Because the layer is per-deployment, cross-domain benchmarks such as Spider and BIRD do not apply:</a:t>
-            </a:r>
-            <a:r>
-              <a:rPr b="0" i="0" sz="1100">
+              <a:t>- The layer is per-deployment, so cross-domain benchmarks such as Spider and BIRD do not apply:</a:t>
+            </a:r>
+            <a:r>
+              <a:rPr b="0" i="0" sz="1500">
                 <a:solidFill>
                   <a:srgbClr val="333333"/>
                 </a:solidFill>
                 <a:latin typeface="Times New Roman"/>
               </a:rPr>
               <a:t> they test generalisation to unseen schemas, which this architecture does not attempt.</a:t>
+            </a:r>
+          </a:p>
+          <a:p>
+            <a:pPr marL="256032" indent="-256032">
+              <a:lnSpc>
+                <a:spcPct val="108000"/>
+              </a:lnSpc>
+              <a:spcBef>
+                <a:spcPts val="300"/>
+              </a:spcBef>
+              <a:spcAft>
+                <a:spcPts val="700"/>
+              </a:spcAft>
+            </a:pPr>
+            <a:r>
+              <a:rPr b="0" i="0" sz="1500">
+                <a:solidFill>
+                  <a:srgbClr val="333333"/>
+                </a:solidFill>
+                <a:latin typeface="Times New Roman"/>
+              </a:rPr>
+              <a:t>- The gateway resolves a model alias per request, so the run is not pinned to one model. Each result row records what served it.</a:t>
             </a:r>
           </a:p>
           <a:p>
@@ -19702,13 +19826,13 @@
               </a:spcAft>
             </a:pPr>
             <a:r>
-              <a:rPr b="1" i="0" sz="1400">
+              <a:rPr b="1" i="0" sz="1800">
                 <a:solidFill>
                   <a:srgbClr val="003366"/>
                 </a:solidFill>
                 <a:latin typeface="Times New Roman"/>
               </a:rPr>
-              <a:t>Limitations I would raise before the committee does:</a:t>
+              <a:t>Not a thesis limitation:</a:t>
             </a:r>
           </a:p>
           <a:p>
@@ -19724,170 +19848,7 @@
               </a:spcAft>
             </a:pPr>
             <a:r>
-              <a:rPr b="0" i="0" sz="1100">
-                <a:solidFill>
-                  <a:srgbClr val="333333"/>
-                </a:solidFill>
-                <a:latin typeface="Times New Roman"/>
-              </a:rPr>
-              <a:t>- Correctness at scale is measured on the 20 reports, not on all 425 supported questions. For those, I show that the SQL runs — not that every answer is right.</a:t>
-            </a:r>
-          </a:p>
-          <a:p>
-            <a:pPr marL="256032" indent="-256032">
-              <a:lnSpc>
-                <a:spcPct val="108000"/>
-              </a:lnSpc>
-              <a:spcBef>
-                <a:spcPts val="300"/>
-              </a:spcBef>
-              <a:spcAft>
-                <a:spcPts val="700"/>
-              </a:spcAft>
-            </a:pPr>
-            <a:r>
-              <a:rPr b="1" i="0" sz="1100">
-                <a:solidFill>
-                  <a:srgbClr val="003366"/>
-                </a:solidFill>
-                <a:latin typeface="Times New Roman"/>
-              </a:rPr>
-              <a:t>- The seeded catalogue is small:</a:t>
-            </a:r>
-            <a:r>
-              <a:rPr b="0" i="0" sz="1100">
-                <a:solidFill>
-                  <a:srgbClr val="333333"/>
-                </a:solidFill>
-                <a:latin typeface="Times New Roman"/>
-              </a:rPr>
-              <a:t> 17 products in 8 categories against 2,500 orders. Order-side reports are tested at realistic volume, but bestsellers and revenue-by-category agree with nopCommerce over short lists. Same compiled SQL, weaker test.</a:t>
-            </a:r>
-          </a:p>
-          <a:p>
-            <a:pPr marL="256032" indent="-256032">
-              <a:lnSpc>
-                <a:spcPct val="108000"/>
-              </a:lnSpc>
-              <a:spcBef>
-                <a:spcPts val="300"/>
-              </a:spcBef>
-              <a:spcAft>
-                <a:spcPts val="700"/>
-              </a:spcAft>
-            </a:pPr>
-            <a:r>
-              <a:rPr b="0" i="0" sz="1100">
-                <a:solidFill>
-                  <a:srgbClr val="333333"/>
-                </a:solidFill>
-                <a:latin typeface="Times New Roman"/>
-              </a:rPr>
-              <a:t>- Three of the 75 boundary questions were not declined. One was a malformed model reply; the other two are the same question phrased twice, asking to compare two named carriers. The model flagged "DHL" and "FedEx" as unmapped, and AEGIS answered by shipping method anyway — by design, because a model-reported gap is treated as evidence, not a verdict. That choice keeps false refusals low and costs exactly this.</a:t>
-            </a:r>
-          </a:p>
-          <a:p>
-            <a:pPr marL="256032" indent="-256032">
-              <a:lnSpc>
-                <a:spcPct val="108000"/>
-              </a:lnSpc>
-              <a:spcBef>
-                <a:spcPts val="300"/>
-              </a:spcBef>
-              <a:spcAft>
-                <a:spcPts val="700"/>
-              </a:spcAft>
-            </a:pPr>
-            <a:r>
-              <a:rPr b="0" i="0" sz="1100">
-                <a:solidFill>
-                  <a:srgbClr val="333333"/>
-                </a:solidFill>
-                <a:latin typeface="Times New Roman"/>
-              </a:rPr>
-              <a:t>- The gateway used for intent extraction resolves a model alias per request, so the run is not pinned to a single model. Each result row records what actually served it.</a:t>
-            </a:r>
-          </a:p>
-          <a:p>
-            <a:pPr marL="256032" indent="-256032">
-              <a:lnSpc>
-                <a:spcPct val="108000"/>
-              </a:lnSpc>
-              <a:spcBef>
-                <a:spcPts val="300"/>
-              </a:spcBef>
-              <a:spcAft>
-                <a:spcPts val="700"/>
-              </a:spcAft>
-            </a:pPr>
-            <a:r>
-              <a:rPr b="0" i="0" sz="1100">
-                <a:solidFill>
-                  <a:srgbClr val="333333"/>
-                </a:solidFill>
-                <a:latin typeface="Times New Roman"/>
-              </a:rPr>
-              <a:t>- Five reports differ from the platform's own output in row count or label column. No report differs in value.</a:t>
-            </a:r>
-          </a:p>
-          <a:p>
-            <a:pPr marL="256032" indent="-256032">
-              <a:lnSpc>
-                <a:spcPct val="108000"/>
-              </a:lnSpc>
-              <a:spcBef>
-                <a:spcPts val="300"/>
-              </a:spcBef>
-              <a:spcAft>
-                <a:spcPts val="700"/>
-              </a:spcAft>
-            </a:pPr>
-            <a:r>
-              <a:rPr b="0" i="0" sz="1100">
-                <a:solidFill>
-                  <a:srgbClr val="333333"/>
-                </a:solidFill>
-                <a:latin typeface="Times New Roman"/>
-              </a:rPr>
-              <a:t>- Other SQL dialects require compiler extensions.</a:t>
-            </a:r>
-          </a:p>
-          <a:p>
-            <a:pPr marL="0" indent="0">
-              <a:lnSpc>
-                <a:spcPct val="108000"/>
-              </a:lnSpc>
-              <a:spcBef>
-                <a:spcPts val="1200"/>
-              </a:spcBef>
-              <a:spcAft>
-                <a:spcPts val="500"/>
-              </a:spcAft>
-            </a:pPr>
-            <a:r>
-              <a:rPr b="1" i="0" sz="1400">
-                <a:solidFill>
-                  <a:srgbClr val="003366"/>
-                </a:solidFill>
-                <a:latin typeface="Times New Roman"/>
-              </a:rPr>
-              <a:t>Not a thesis limitation:</a:t>
-            </a:r>
-          </a:p>
-          <a:p>
-            <a:pPr marL="256032" indent="-256032">
-              <a:lnSpc>
-                <a:spcPct val="108000"/>
-              </a:lnSpc>
-              <a:spcBef>
-                <a:spcPts val="300"/>
-              </a:spcBef>
-              <a:spcAft>
-                <a:spcPts val="700"/>
-              </a:spcAft>
-            </a:pPr>
-            <a:r>
-              <a:rPr b="0" i="0" sz="1100">
+              <a:rPr b="0" i="0" sz="1500">
                 <a:solidFill>
                   <a:srgbClr val="333333"/>
                 </a:solidFill>
@@ -20136,7 +20097,7 @@
               </a:defRPr>
             </a:pPr>
             <a:r>
-              <a:t>Conclusion</a:t>
+              <a:t>Limitations I Would Raise First</a:t>
             </a:r>
           </a:p>
         </p:txBody>
@@ -20269,8 +20230,8 @@
         </p:nvSpPr>
         <p:spPr>
           <a:xfrm>
-            <a:off x="1097280" y="1508760"/>
-            <a:ext cx="9966960" cy="4434840"/>
+            <a:off x="914400" y="1572768"/>
+            <a:ext cx="10332720" cy="4663440"/>
           </a:xfrm>
           <a:prstGeom prst="rect">
             <a:avLst/>
@@ -20282,28 +20243,6 @@
             <a:spAutoFit/>
           </a:bodyPr>
           <a:lstStyle/>
-          <a:p>
-            <a:pPr marL="0" indent="0">
-              <a:lnSpc>
-                <a:spcPct val="108000"/>
-              </a:lnSpc>
-              <a:spcBef>
-                <a:spcPts val="1200"/>
-              </a:spcBef>
-              <a:spcAft>
-                <a:spcPts val="500"/>
-              </a:spcAft>
-            </a:pPr>
-            <a:r>
-              <a:rPr b="1" i="0" sz="2000">
-                <a:solidFill>
-                  <a:srgbClr val="003366"/>
-                </a:solidFill>
-                <a:latin typeface="Times New Roman"/>
-              </a:rPr>
-              <a:t>Conclusion:</a:t>
-            </a:r>
-          </a:p>
           <a:p>
             <a:pPr marL="256032" indent="-256032">
               <a:lnSpc>
@@ -20317,13 +20256,13 @@
               </a:spcAft>
             </a:pPr>
             <a:r>
-              <a:rPr b="0" i="0" sz="1700">
+              <a:rPr b="0" i="0" sz="1500">
                 <a:solidFill>
                   <a:srgbClr val="333333"/>
                 </a:solidFill>
                 <a:latin typeface="Times New Roman"/>
               </a:rPr>
-              <a:t>- AEGIS keeps the LLM useful for language understanding while removing SQL-authoring authority from the model.</a:t>
+              <a:t>- Correctness at scale is measured on the 20 reports, not on all 425 supported questions. For those I show the SQL runs — not that every answer is right.</a:t>
             </a:r>
           </a:p>
           <a:p>
@@ -20339,13 +20278,22 @@
               </a:spcAft>
             </a:pPr>
             <a:r>
-              <a:rPr b="0" i="0" sz="1700">
+              <a:rPr b="1" i="0" sz="1500">
+                <a:solidFill>
+                  <a:srgbClr val="003366"/>
+                </a:solidFill>
+                <a:latin typeface="Times New Roman"/>
+              </a:rPr>
+              <a:t>- The seeded catalogue is small:</a:t>
+            </a:r>
+            <a:r>
+              <a:rPr b="0" i="0" sz="1500">
                 <a:solidFill>
                   <a:srgbClr val="333333"/>
                 </a:solidFill>
                 <a:latin typeface="Times New Roman"/>
               </a:rPr>
-              <a:t>- The semantic layer makes analytics definitions explicit, auditable, and reusable for a target system.</a:t>
+              <a:t> 17 products in 8 categories against 2,500 orders. Order-side reports run at realistic volume, but bestsellers and revenue-by-category agree with nopCommerce over short lists — same compiled SQL, weaker test.</a:t>
             </a:r>
           </a:p>
           <a:p>
@@ -20361,13 +20309,22 @@
               </a:spcAft>
             </a:pPr>
             <a:r>
-              <a:rPr b="0" i="0" sz="1700">
+              <a:rPr b="1" i="0" sz="1500">
+                <a:solidFill>
+                  <a:srgbClr val="003366"/>
+                </a:solidFill>
+                <a:latin typeface="Times New Roman"/>
+              </a:rPr>
+              <a:t>- Three of the 75 boundary questions were not declined:</a:t>
+            </a:r>
+            <a:r>
+              <a:rPr b="0" i="0" sz="1500">
                 <a:solidFill>
                   <a:srgbClr val="333333"/>
                 </a:solidFill>
                 <a:latin typeface="Times New Roman"/>
               </a:rPr>
-              <a:t>- The compiler produces read-only SQL from approved definitions and blocks unsupported execution paths.</a:t>
+              <a:t> one malformed model reply, and the same carrier-comparison question phrased twice. The model flagged "DHL" and "FedEx" as unmapped and AEGIS answered by shipping method anyway — by design, because a model-reported gap is evidence, not a verdict. That keeps false refusals low and costs exactly this.</a:t>
             </a:r>
           </a:p>
           <a:p>
@@ -20383,35 +20340,13 @@
               </a:spcAft>
             </a:pPr>
             <a:r>
-              <a:rPr b="0" i="0" sz="1700">
+              <a:rPr b="0" i="0" sz="1500">
                 <a:solidFill>
                   <a:srgbClr val="333333"/>
                 </a:solidFill>
                 <a:latin typeface="Times New Roman"/>
               </a:rPr>
-              <a:t>- The nopCommerce [7] prototype, the 500-question corpus, and the differential against the platform's own report logic show that the approach can be implemented and evaluated practically.</a:t>
-            </a:r>
-          </a:p>
-          <a:p>
-            <a:pPr marL="0" indent="0">
-              <a:lnSpc>
-                <a:spcPct val="108000"/>
-              </a:lnSpc>
-              <a:spcBef>
-                <a:spcPts val="1200"/>
-              </a:spcBef>
-              <a:spcAft>
-                <a:spcPts val="500"/>
-              </a:spcAft>
-            </a:pPr>
-            <a:r>
-              <a:rPr b="1" i="0" sz="2000">
-                <a:solidFill>
-                  <a:srgbClr val="003366"/>
-                </a:solidFill>
-                <a:latin typeface="Times New Roman"/>
-              </a:rPr>
-              <a:t>Main contribution:</a:t>
+              <a:t>- Five reports differ from the platform's own output in row count or label column. No report differs in value.</a:t>
             </a:r>
           </a:p>
           <a:p>
@@ -20427,13 +20362,13 @@
               </a:spcAft>
             </a:pPr>
             <a:r>
-              <a:rPr b="0" i="0" sz="1700">
+              <a:rPr b="0" i="0" sz="1500">
                 <a:solidFill>
                   <a:srgbClr val="333333"/>
                 </a:solidFill>
                 <a:latin typeface="Times New Roman"/>
               </a:rPr>
-              <a:t>- A constraint-based architecture for safe LLM-assisted natural language analytics.</a:t>
+              <a:t>- Other SQL dialects require compiler extensions.</a:t>
             </a:r>
           </a:p>
         </p:txBody>
@@ -20676,7 +20611,7 @@
               </a:defRPr>
             </a:pPr>
             <a:r>
-              <a:t>Future Work</a:t>
+              <a:t>Conclusion</a:t>
             </a:r>
           </a:p>
         </p:txBody>
@@ -20809,8 +20744,8 @@
         </p:nvSpPr>
         <p:spPr>
           <a:xfrm>
-            <a:off x="1143000" y="1645920"/>
-            <a:ext cx="9784080" cy="3977639"/>
+            <a:off x="1097280" y="1572768"/>
+            <a:ext cx="9966960" cy="4434840"/>
           </a:xfrm>
           <a:prstGeom prst="rect">
             <a:avLst/>
@@ -20835,13 +20770,13 @@
               </a:spcAft>
             </a:pPr>
             <a:r>
-              <a:rPr b="1" i="0" sz="2100">
+              <a:rPr b="1" i="0" sz="2000">
                 <a:solidFill>
                   <a:srgbClr val="003366"/>
                 </a:solidFill>
                 <a:latin typeface="Times New Roman"/>
               </a:rPr>
-              <a:t>Possible extensions:</a:t>
+              <a:t>Conclusion:</a:t>
             </a:r>
           </a:p>
           <a:p>
@@ -20857,13 +20792,13 @@
               </a:spcAft>
             </a:pPr>
             <a:r>
-              <a:rPr b="0" i="0" sz="1800">
+              <a:rPr b="0" i="0" sz="1700">
                 <a:solidFill>
                   <a:srgbClr val="333333"/>
                 </a:solidFill>
                 <a:latin typeface="Times New Roman"/>
               </a:rPr>
-              <a:t>- Evaluate AEGIS on another e-commerce system by replacing only the semantic layer.</a:t>
+              <a:t>- AEGIS keeps the LLM useful for language understanding while removing SQL-authoring authority from the model.</a:t>
             </a:r>
           </a:p>
           <a:p>
@@ -20879,13 +20814,13 @@
               </a:spcAft>
             </a:pPr>
             <a:r>
-              <a:rPr b="0" i="0" sz="1800">
+              <a:rPr b="0" i="0" sz="1700">
                 <a:solidFill>
                   <a:srgbClr val="333333"/>
                 </a:solidFill>
                 <a:latin typeface="Times New Roman"/>
               </a:rPr>
-              <a:t>- Add more oracle reports from real admin and business workflows.</a:t>
+              <a:t>- The semantic layer makes analytics definitions explicit, auditable, and reusable for a target system.</a:t>
             </a:r>
           </a:p>
           <a:p>
@@ -20901,13 +20836,13 @@
               </a:spcAft>
             </a:pPr>
             <a:r>
-              <a:rPr b="0" i="0" sz="1800">
+              <a:rPr b="0" i="0" sz="1700">
                 <a:solidFill>
                   <a:srgbClr val="333333"/>
                 </a:solidFill>
                 <a:latin typeface="Times New Roman"/>
               </a:rPr>
-              <a:t>- Extend compiler modules for PostgreSQL and SQL Server.</a:t>
+              <a:t>- The compiler produces read-only SQL from approved definitions and blocks unsupported execution paths.</a:t>
             </a:r>
           </a:p>
           <a:p>
@@ -20923,13 +20858,35 @@
               </a:spcAft>
             </a:pPr>
             <a:r>
-              <a:rPr b="0" i="0" sz="1800">
+              <a:rPr b="0" i="0" sz="1700">
                 <a:solidFill>
                   <a:srgbClr val="333333"/>
                 </a:solidFill>
                 <a:latin typeface="Times New Roman"/>
               </a:rPr>
-              <a:t>- Improve clarification behavior for ambiguous but answerable user questions.</a:t>
+              <a:t>- The nopCommerce [7] prototype, the 500-question corpus, and the differential against the platform's own report logic show that the approach can be implemented and evaluated practically.</a:t>
+            </a:r>
+          </a:p>
+          <a:p>
+            <a:pPr marL="0" indent="0">
+              <a:lnSpc>
+                <a:spcPct val="108000"/>
+              </a:lnSpc>
+              <a:spcBef>
+                <a:spcPts val="1200"/>
+              </a:spcBef>
+              <a:spcAft>
+                <a:spcPts val="500"/>
+              </a:spcAft>
+            </a:pPr>
+            <a:r>
+              <a:rPr b="1" i="0" sz="2000">
+                <a:solidFill>
+                  <a:srgbClr val="003366"/>
+                </a:solidFill>
+                <a:latin typeface="Times New Roman"/>
+              </a:rPr>
+              <a:t>Main contribution:</a:t>
             </a:r>
           </a:p>
           <a:p>
@@ -20945,13 +20902,13 @@
               </a:spcAft>
             </a:pPr>
             <a:r>
-              <a:rPr b="0" i="0" sz="1800">
+              <a:rPr b="0" i="0" sz="1700">
                 <a:solidFill>
                   <a:srgbClr val="333333"/>
                 </a:solidFill>
                 <a:latin typeface="Times New Roman"/>
               </a:rPr>
-              <a:t>- Add richer chart recommendation while keeping SQL generation deterministic.</a:t>
+              <a:t>- A constraint-based architecture for safe LLM-assisted natural language analytics.</a:t>
             </a:r>
           </a:p>
         </p:txBody>
@@ -21194,7 +21151,7 @@
               </a:defRPr>
             </a:pPr>
             <a:r>
-              <a:t>References</a:t>
+              <a:t>Future Work</a:t>
             </a:r>
           </a:p>
         </p:txBody>
@@ -21327,8 +21284,8 @@
         </p:nvSpPr>
         <p:spPr>
           <a:xfrm>
-            <a:off x="731520" y="1627632"/>
-            <a:ext cx="10744200" cy="4389120"/>
+            <a:off x="1143000" y="1645920"/>
+            <a:ext cx="9784080" cy="3977639"/>
           </a:xfrm>
           <a:prstGeom prst="rect">
             <a:avLst/>
@@ -21336,141 +21293,140 @@
           <a:noFill/>
         </p:spPr>
         <p:txBody>
-          <a:bodyPr wrap="square">
+          <a:bodyPr wrap="square" anchor="t" lIns="0" tIns="0" rIns="0">
             <a:spAutoFit/>
           </a:bodyPr>
           <a:lstStyle/>
           <a:p>
-            <a:pPr marL="274320" indent="-274320">
+            <a:pPr marL="0" indent="0">
               <a:lnSpc>
-                <a:spcPct val="105000"/>
+                <a:spcPct val="108000"/>
               </a:lnSpc>
+              <a:spcBef>
+                <a:spcPts val="1200"/>
+              </a:spcBef>
               <a:spcAft>
-                <a:spcPts val="900"/>
+                <a:spcPts val="500"/>
               </a:spcAft>
             </a:pPr>
             <a:r>
-              <a:rPr sz="1200">
+              <a:rPr b="1" i="0" sz="2100">
+                <a:solidFill>
+                  <a:srgbClr val="003366"/>
+                </a:solidFill>
+                <a:latin typeface="Times New Roman"/>
+              </a:rPr>
+              <a:t>Possible extensions:</a:t>
+            </a:r>
+          </a:p>
+          <a:p>
+            <a:pPr marL="256032" indent="-256032">
+              <a:lnSpc>
+                <a:spcPct val="108000"/>
+              </a:lnSpc>
+              <a:spcBef>
+                <a:spcPts val="300"/>
+              </a:spcBef>
+              <a:spcAft>
+                <a:spcPts val="700"/>
+              </a:spcAft>
+            </a:pPr>
+            <a:r>
+              <a:rPr b="0" i="0" sz="1800">
                 <a:solidFill>
                   <a:srgbClr val="333333"/>
                 </a:solidFill>
                 <a:latin typeface="Times New Roman"/>
               </a:rPr>
-              <a:t>[1] Li, F., &amp; Jagadish, H. V. (2014). Constructing an interactive natural language interface for relational databases. PVLDB.</a:t>
-            </a:r>
-          </a:p>
-          <a:p>
-            <a:pPr marL="274320" indent="-274320">
+              <a:t>- Evaluate AEGIS on another e-commerce system by replacing only the semantic layer.</a:t>
+            </a:r>
+          </a:p>
+          <a:p>
+            <a:pPr marL="256032" indent="-256032">
               <a:lnSpc>
-                <a:spcPct val="105000"/>
+                <a:spcPct val="108000"/>
               </a:lnSpc>
+              <a:spcBef>
+                <a:spcPts val="300"/>
+              </a:spcBef>
               <a:spcAft>
-                <a:spcPts val="900"/>
+                <a:spcPts val="700"/>
               </a:spcAft>
             </a:pPr>
             <a:r>
-              <a:rPr sz="1200">
+              <a:rPr b="0" i="0" sz="1800">
                 <a:solidFill>
                   <a:srgbClr val="333333"/>
                 </a:solidFill>
                 <a:latin typeface="Times New Roman"/>
               </a:rPr>
-              <a:t>[2] Narechania, A., Srinivasan, A., &amp; Stasko, J. (2021). nl4dv: A toolkit for generating analytic specifications from natural language. IEEE TVCG.</a:t>
-            </a:r>
-          </a:p>
-          <a:p>
-            <a:pPr marL="274320" indent="-274320">
+              <a:t>- Add more oracle reports from real admin and business workflows.</a:t>
+            </a:r>
+          </a:p>
+          <a:p>
+            <a:pPr marL="256032" indent="-256032">
               <a:lnSpc>
-                <a:spcPct val="105000"/>
+                <a:spcPct val="108000"/>
               </a:lnSpc>
+              <a:spcBef>
+                <a:spcPts val="300"/>
+              </a:spcBef>
               <a:spcAft>
-                <a:spcPts val="900"/>
+                <a:spcPts val="700"/>
               </a:spcAft>
             </a:pPr>
             <a:r>
-              <a:rPr sz="1200">
+              <a:rPr b="0" i="0" sz="1800">
                 <a:solidFill>
                   <a:srgbClr val="333333"/>
                 </a:solidFill>
                 <a:latin typeface="Times New Roman"/>
               </a:rPr>
-              <a:t>[3] Deng, D., Wu, A., Qu, H., &amp; Wu, Y. (2023). DashBot: Insight-driven dashboard generation. IEEE TVCG.</a:t>
-            </a:r>
-          </a:p>
-          <a:p>
-            <a:pPr marL="274320" indent="-274320">
+              <a:t>- Extend compiler modules for PostgreSQL and SQL Server.</a:t>
+            </a:r>
+          </a:p>
+          <a:p>
+            <a:pPr marL="256032" indent="-256032">
               <a:lnSpc>
-                <a:spcPct val="105000"/>
+                <a:spcPct val="108000"/>
               </a:lnSpc>
+              <a:spcBef>
+                <a:spcPts val="300"/>
+              </a:spcBef>
               <a:spcAft>
-                <a:spcPts val="900"/>
+                <a:spcPts val="700"/>
               </a:spcAft>
             </a:pPr>
             <a:r>
-              <a:rPr sz="1200">
+              <a:rPr b="0" i="0" sz="1800">
                 <a:solidFill>
                   <a:srgbClr val="333333"/>
                 </a:solidFill>
                 <a:latin typeface="Times New Roman"/>
               </a:rPr>
-              <a:t>[4] Scholak, T., Schucher, N., &amp; Bahdanau, D. (2021). PICARD: Parsing incrementally for constrained auto-regressive decoding. EMNLP.</a:t>
-            </a:r>
-          </a:p>
-          <a:p>
-            <a:pPr marL="274320" indent="-274320">
+              <a:t>- Improve clarification behavior for ambiguous but answerable user questions.</a:t>
+            </a:r>
+          </a:p>
+          <a:p>
+            <a:pPr marL="256032" indent="-256032">
               <a:lnSpc>
-                <a:spcPct val="105000"/>
+                <a:spcPct val="108000"/>
               </a:lnSpc>
+              <a:spcBef>
+                <a:spcPts val="300"/>
+              </a:spcBef>
               <a:spcAft>
-                <a:spcPts val="900"/>
+                <a:spcPts val="700"/>
               </a:spcAft>
             </a:pPr>
             <a:r>
-              <a:rPr sz="1200">
+              <a:rPr b="0" i="0" sz="1800">
                 <a:solidFill>
                   <a:srgbClr val="333333"/>
                 </a:solidFill>
                 <a:latin typeface="Times New Roman"/>
               </a:rPr>
-              <a:t>[5] Shalaan, H. S. et al. (2025). G-SQL: A schema-aware and rule-guided approach for robust natural language to SQL translation. IEEE Access.</a:t>
-            </a:r>
-          </a:p>
-          <a:p>
-            <a:pPr marL="274320" indent="-274320">
-              <a:lnSpc>
-                <a:spcPct val="105000"/>
-              </a:lnSpc>
-              <a:spcAft>
-                <a:spcPts val="900"/>
-              </a:spcAft>
-            </a:pPr>
-            <a:r>
-              <a:rPr sz="1200">
-                <a:solidFill>
-                  <a:srgbClr val="333333"/>
-                </a:solidFill>
-                <a:latin typeface="Times New Roman"/>
-              </a:rPr>
-              <a:t>[6] Su, X. et al. (2026). A robust natural language text-to-SQL generation framework with dynamic strategies based on LLMs. Scientific Reports.</a:t>
-            </a:r>
-          </a:p>
-          <a:p>
-            <a:pPr marL="274320" indent="-274320">
-              <a:lnSpc>
-                <a:spcPct val="105000"/>
-              </a:lnSpc>
-              <a:spcAft>
-                <a:spcPts val="900"/>
-              </a:spcAft>
-            </a:pPr>
-            <a:r>
-              <a:rPr sz="1200">
-                <a:solidFill>
-                  <a:srgbClr val="333333"/>
-                </a:solidFill>
-                <a:latin typeface="Times New Roman"/>
-              </a:rPr>
-              <a:t>[7] nopSolutions. nopCommerce open-source e-commerce platform. GitHub repository.</a:t>
+              <a:t>- Add richer chart recommendation while keeping SQL generation deterministic.</a:t>
             </a:r>
           </a:p>
         </p:txBody>
@@ -21713,7 +21669,7 @@
               </a:defRPr>
             </a:pPr>
             <a:r>
-              <a:t>Thank You &amp; Discussion</a:t>
+              <a:t>References</a:t>
             </a:r>
           </a:p>
         </p:txBody>
@@ -21846,8 +21802,8 @@
         </p:nvSpPr>
         <p:spPr>
           <a:xfrm>
-            <a:off x="914400" y="2377440"/>
-            <a:ext cx="10332720" cy="1828800"/>
+            <a:off x="731520" y="1627632"/>
+            <a:ext cx="10744200" cy="4389120"/>
           </a:xfrm>
           <a:prstGeom prst="rect">
             <a:avLst/>
@@ -21855,34 +21811,141 @@
           <a:noFill/>
         </p:spPr>
         <p:txBody>
-          <a:bodyPr wrap="none">
+          <a:bodyPr wrap="square">
             <a:spAutoFit/>
           </a:bodyPr>
           <a:lstStyle/>
           <a:p>
-            <a:pPr algn="ctr">
-              <a:defRPr sz="3600" b="1">
-                <a:solidFill>
-                  <a:srgbClr val="003366"/>
-                </a:solidFill>
-                <a:latin typeface="Times New Roman"/>
-              </a:defRPr>
-            </a:pPr>
-            <a:r>
-              <a:t>THANK YOU!</a:t>
-            </a:r>
-          </a:p>
-          <a:p>
-            <a:pPr algn="ctr">
-              <a:defRPr sz="2000" i="1">
-                <a:solidFill>
-                  <a:srgbClr val="464646"/>
-                </a:solidFill>
-                <a:latin typeface="Times New Roman"/>
-              </a:defRPr>
-            </a:pPr>
-            <a:r>
-              <a:t>Questions &amp; Final Defense Discussion</a:t>
+            <a:pPr marL="274320" indent="-274320">
+              <a:lnSpc>
+                <a:spcPct val="105000"/>
+              </a:lnSpc>
+              <a:spcAft>
+                <a:spcPts val="900"/>
+              </a:spcAft>
+            </a:pPr>
+            <a:r>
+              <a:rPr sz="1200">
+                <a:solidFill>
+                  <a:srgbClr val="333333"/>
+                </a:solidFill>
+                <a:latin typeface="Times New Roman"/>
+              </a:rPr>
+              <a:t>[1] Li, F., &amp; Jagadish, H. V. (2014). Constructing an interactive natural language interface for relational databases. PVLDB.</a:t>
+            </a:r>
+          </a:p>
+          <a:p>
+            <a:pPr marL="274320" indent="-274320">
+              <a:lnSpc>
+                <a:spcPct val="105000"/>
+              </a:lnSpc>
+              <a:spcAft>
+                <a:spcPts val="900"/>
+              </a:spcAft>
+            </a:pPr>
+            <a:r>
+              <a:rPr sz="1200">
+                <a:solidFill>
+                  <a:srgbClr val="333333"/>
+                </a:solidFill>
+                <a:latin typeface="Times New Roman"/>
+              </a:rPr>
+              <a:t>[2] Narechania, A., Srinivasan, A., &amp; Stasko, J. (2021). nl4dv: A toolkit for generating analytic specifications from natural language. IEEE TVCG.</a:t>
+            </a:r>
+          </a:p>
+          <a:p>
+            <a:pPr marL="274320" indent="-274320">
+              <a:lnSpc>
+                <a:spcPct val="105000"/>
+              </a:lnSpc>
+              <a:spcAft>
+                <a:spcPts val="900"/>
+              </a:spcAft>
+            </a:pPr>
+            <a:r>
+              <a:rPr sz="1200">
+                <a:solidFill>
+                  <a:srgbClr val="333333"/>
+                </a:solidFill>
+                <a:latin typeface="Times New Roman"/>
+              </a:rPr>
+              <a:t>[3] Deng, D., Wu, A., Qu, H., &amp; Wu, Y. (2023). DashBot: Insight-driven dashboard generation. IEEE TVCG.</a:t>
+            </a:r>
+          </a:p>
+          <a:p>
+            <a:pPr marL="274320" indent="-274320">
+              <a:lnSpc>
+                <a:spcPct val="105000"/>
+              </a:lnSpc>
+              <a:spcAft>
+                <a:spcPts val="900"/>
+              </a:spcAft>
+            </a:pPr>
+            <a:r>
+              <a:rPr sz="1200">
+                <a:solidFill>
+                  <a:srgbClr val="333333"/>
+                </a:solidFill>
+                <a:latin typeface="Times New Roman"/>
+              </a:rPr>
+              <a:t>[4] Scholak, T., Schucher, N., &amp; Bahdanau, D. (2021). PICARD: Parsing incrementally for constrained auto-regressive decoding. EMNLP.</a:t>
+            </a:r>
+          </a:p>
+          <a:p>
+            <a:pPr marL="274320" indent="-274320">
+              <a:lnSpc>
+                <a:spcPct val="105000"/>
+              </a:lnSpc>
+              <a:spcAft>
+                <a:spcPts val="900"/>
+              </a:spcAft>
+            </a:pPr>
+            <a:r>
+              <a:rPr sz="1200">
+                <a:solidFill>
+                  <a:srgbClr val="333333"/>
+                </a:solidFill>
+                <a:latin typeface="Times New Roman"/>
+              </a:rPr>
+              <a:t>[5] Shalaan, H. S. et al. (2025). G-SQL: A schema-aware and rule-guided approach for robust natural language to SQL translation. IEEE Access.</a:t>
+            </a:r>
+          </a:p>
+          <a:p>
+            <a:pPr marL="274320" indent="-274320">
+              <a:lnSpc>
+                <a:spcPct val="105000"/>
+              </a:lnSpc>
+              <a:spcAft>
+                <a:spcPts val="900"/>
+              </a:spcAft>
+            </a:pPr>
+            <a:r>
+              <a:rPr sz="1200">
+                <a:solidFill>
+                  <a:srgbClr val="333333"/>
+                </a:solidFill>
+                <a:latin typeface="Times New Roman"/>
+              </a:rPr>
+              <a:t>[6] Su, X. et al. (2026). A robust natural language text-to-SQL generation framework with dynamic strategies based on LLMs. Scientific Reports.</a:t>
+            </a:r>
+          </a:p>
+          <a:p>
+            <a:pPr marL="274320" indent="-274320">
+              <a:lnSpc>
+                <a:spcPct val="105000"/>
+              </a:lnSpc>
+              <a:spcAft>
+                <a:spcPts val="900"/>
+              </a:spcAft>
+            </a:pPr>
+            <a:r>
+              <a:rPr sz="1200">
+                <a:solidFill>
+                  <a:srgbClr val="333333"/>
+                </a:solidFill>
+                <a:latin typeface="Times New Roman"/>
+              </a:rPr>
+              <a:t>[7] nopSolutions. nopCommerce open-source e-commerce platform. GitHub repository.</a:t>
             </a:r>
           </a:p>
         </p:txBody>
@@ -22125,7 +22188,7 @@
               </a:defRPr>
             </a:pPr>
             <a:r>
-              <a:t>Appendix A: The Semantic Layer Is a File I Wrote</a:t>
+              <a:t>Thank You &amp; Discussion</a:t>
             </a:r>
           </a:p>
         </p:txBody>
@@ -22258,8 +22321,8 @@
         </p:nvSpPr>
         <p:spPr>
           <a:xfrm>
-            <a:off x="777240" y="1243584"/>
-            <a:ext cx="10515600" cy="384048"/>
+            <a:off x="914400" y="2377440"/>
+            <a:ext cx="10332720" cy="1828800"/>
           </a:xfrm>
           <a:prstGeom prst="rect">
             <a:avLst/>
@@ -22267,574 +22330,36 @@
           <a:noFill/>
         </p:spPr>
         <p:txBody>
-          <a:bodyPr wrap="square" anchor="t" lIns="0" tIns="0" rIns="0">
+          <a:bodyPr wrap="none">
             <a:spAutoFit/>
           </a:bodyPr>
           <a:lstStyle/>
           <a:p>
-            <a:pPr marL="0" indent="0">
-              <a:lnSpc>
-                <a:spcPct val="108000"/>
-              </a:lnSpc>
-              <a:spcBef>
-                <a:spcPts val="1200"/>
-              </a:spcBef>
-              <a:spcAft>
-                <a:spcPts val="500"/>
-              </a:spcAft>
-            </a:pPr>
-            <a:r>
-              <a:rPr b="1" i="0" sz="1600">
+            <a:pPr algn="ctr">
+              <a:defRPr sz="3600" b="1">
                 <a:solidFill>
                   <a:srgbClr val="003366"/>
                 </a:solidFill>
                 <a:latin typeface="Times New Roman"/>
-              </a:rPr>
-              <a:t>aegis/server/semantic_layer.py — two of the objects the model is allowed to name:</a:t>
-            </a:r>
-          </a:p>
-        </p:txBody>
-      </p:sp>
-      <p:sp>
-        <p:nvSpPr>
-          <p:cNvPr id="14" name="Rectangle 13"/>
-          <p:cNvSpPr/>
-          <p:nvPr/>
-        </p:nvSpPr>
-        <p:spPr>
-          <a:xfrm>
-            <a:off x="777240" y="1737360"/>
-            <a:ext cx="5120640" cy="2286000"/>
-          </a:xfrm>
-          <a:prstGeom prst="rect">
-            <a:avLst/>
-          </a:prstGeom>
-          <a:solidFill>
-            <a:srgbClr val="F7F7F7"/>
-          </a:solidFill>
-          <a:ln>
-            <a:solidFill>
-              <a:srgbClr val="B7B7B7"/>
-            </a:solidFill>
-          </a:ln>
-        </p:spPr>
-        <p:style>
-          <a:lnRef idx="1">
-            <a:schemeClr val="accent1"/>
-          </a:lnRef>
-          <a:fillRef idx="3">
-            <a:schemeClr val="accent1"/>
-          </a:fillRef>
-          <a:effectRef idx="2">
-            <a:schemeClr val="accent1"/>
-          </a:effectRef>
-          <a:fontRef idx="minor">
-            <a:schemeClr val="lt1"/>
-          </a:fontRef>
-        </p:style>
-        <p:txBody>
-          <a:bodyPr rtlCol="0" anchor="t" wrap="square" lIns="36576" tIns="73152"/>
-          <a:lstStyle/>
-          <a:p>
-            <a:pPr algn="l">
-              <a:spcAft>
-                <a:spcPts val="100"/>
-              </a:spcAft>
-              <a:defRPr sz="950">
-                <a:solidFill>
-                  <a:srgbClr val="505050"/>
-                </a:solidFill>
-                <a:latin typeface="Consolas"/>
               </a:defRPr>
             </a:pPr>
             <a:r>
-              <a:t>Metric(</a:t>
-            </a:r>
-          </a:p>
-          <a:p>
-            <a:pPr algn="l">
-              <a:spcAft>
-                <a:spcPts val="100"/>
-              </a:spcAft>
-              <a:defRPr sz="950">
-                <a:solidFill>
-                  <a:srgbClr val="505050"/>
-                </a:solidFill>
-                <a:latin typeface="Consolas"/>
+              <a:rPr/>
+              <a:t>THANK YOU!</a:t>
+            </a:r>
+          </a:p>
+          <a:p>
+            <a:pPr algn="ctr">
+              <a:defRPr sz="2000" i="1">
+                <a:solidFill>
+                  <a:srgbClr val="464646"/>
+                </a:solidFill>
+                <a:latin typeface="Times New Roman"/>
               </a:defRPr>
             </a:pPr>
             <a:r>
-              <a:t>    id="avg_order_value",</a:t>
-            </a:r>
-          </a:p>
-          <a:p>
-            <a:pPr algn="l">
-              <a:spcAft>
-                <a:spcPts val="100"/>
-              </a:spcAft>
-              <a:defRPr sz="950">
-                <a:solidFill>
-                  <a:srgbClr val="505050"/>
-                </a:solidFill>
-                <a:latin typeface="Consolas"/>
-              </a:defRPr>
-            </a:pPr>
-            <a:r>
-              <a:t>    label="Average Order Value",</a:t>
-            </a:r>
-          </a:p>
-          <a:p>
-            <a:pPr algn="l">
-              <a:spcAft>
-                <a:spcPts val="100"/>
-              </a:spcAft>
-              <a:defRPr sz="950">
-                <a:solidFill>
-                  <a:srgbClr val="505050"/>
-                </a:solidFill>
-                <a:latin typeface="Consolas"/>
-              </a:defRPr>
-            </a:pPr>
-            <a:r>
-              <a:t>    description="Average revenue per order",</a:t>
-            </a:r>
-          </a:p>
-          <a:p>
-            <a:pPr algn="l">
-              <a:spcAft>
-                <a:spcPts val="100"/>
-              </a:spcAft>
-              <a:defRPr sz="950">
-                <a:solidFill>
-                  <a:srgbClr val="505050"/>
-                </a:solidFill>
-                <a:latin typeface="Consolas"/>
-              </a:defRPr>
-            </a:pPr>
-            <a:r>
-              <a:t>    sql_expr="AVG(COALESCE(o.OrderTotal, 0))",</a:t>
-            </a:r>
-          </a:p>
-          <a:p>
-            <a:pPr algn="l">
-              <a:spcAft>
-                <a:spcPts val="100"/>
-              </a:spcAft>
-              <a:defRPr sz="950">
-                <a:solidFill>
-                  <a:srgbClr val="505050"/>
-                </a:solidFill>
-                <a:latin typeface="Consolas"/>
-              </a:defRPr>
-            </a:pPr>
-            <a:r>
-              <a:t>    binding_table="Order",</a:t>
-            </a:r>
-          </a:p>
-          <a:p>
-            <a:pPr algn="l">
-              <a:spcAft>
-                <a:spcPts val="100"/>
-              </a:spcAft>
-              <a:defRPr sz="950">
-                <a:solidFill>
-                  <a:srgbClr val="505050"/>
-                </a:solidFill>
-                <a:latin typeface="Consolas"/>
-              </a:defRPr>
-            </a:pPr>
-            <a:r>
-              <a:t>    required_joins=[],</a:t>
-            </a:r>
-          </a:p>
-          <a:p>
-            <a:pPr algn="l">
-              <a:spcAft>
-                <a:spcPts val="100"/>
-              </a:spcAft>
-              <a:defRPr sz="950">
-                <a:solidFill>
-                  <a:srgbClr val="505050"/>
-                </a:solidFill>
-                <a:latin typeface="Consolas"/>
-              </a:defRPr>
-            </a:pPr>
-            <a:r>
-              <a:t>    default_visual="kpi_card",</a:t>
-            </a:r>
-          </a:p>
-          <a:p>
-            <a:pPr algn="l">
-              <a:spcAft>
-                <a:spcPts val="100"/>
-              </a:spcAft>
-              <a:defRPr sz="950">
-                <a:solidFill>
-                  <a:srgbClr val="505050"/>
-                </a:solidFill>
-                <a:latin typeface="Consolas"/>
-              </a:defRPr>
-            </a:pPr>
-            <a:r>
-              <a:t>    time_anchor="o.CreatedOnUtc",</a:t>
-            </a:r>
-          </a:p>
-          <a:p>
-            <a:pPr algn="l">
-              <a:spcAft>
-                <a:spcPts val="100"/>
-              </a:spcAft>
-              <a:defRPr sz="950">
-                <a:solidFill>
-                  <a:srgbClr val="505050"/>
-                </a:solidFill>
-                <a:latin typeface="Consolas"/>
-              </a:defRPr>
-            </a:pPr>
-            <a:r>
-              <a:t>)</a:t>
-            </a:r>
-          </a:p>
-        </p:txBody>
-      </p:sp>
-      <p:sp>
-        <p:nvSpPr>
-          <p:cNvPr id="15" name="Rectangle 14"/>
-          <p:cNvSpPr/>
-          <p:nvPr/>
-        </p:nvSpPr>
-        <p:spPr>
-          <a:xfrm>
-            <a:off x="6144768" y="1737360"/>
-            <a:ext cx="5120640" cy="2286000"/>
-          </a:xfrm>
-          <a:prstGeom prst="rect">
-            <a:avLst/>
-          </a:prstGeom>
-          <a:solidFill>
-            <a:srgbClr val="F7F7F7"/>
-          </a:solidFill>
-          <a:ln>
-            <a:solidFill>
-              <a:srgbClr val="B7B7B7"/>
-            </a:solidFill>
-          </a:ln>
-        </p:spPr>
-        <p:style>
-          <a:lnRef idx="1">
-            <a:schemeClr val="accent1"/>
-          </a:lnRef>
-          <a:fillRef idx="3">
-            <a:schemeClr val="accent1"/>
-          </a:fillRef>
-          <a:effectRef idx="2">
-            <a:schemeClr val="accent1"/>
-          </a:effectRef>
-          <a:fontRef idx="minor">
-            <a:schemeClr val="lt1"/>
-          </a:fontRef>
-        </p:style>
-        <p:txBody>
-          <a:bodyPr rtlCol="0" anchor="t" wrap="square" lIns="36576" tIns="73152"/>
-          <a:lstStyle/>
-          <a:p>
-            <a:pPr algn="l">
-              <a:spcAft>
-                <a:spcPts val="100"/>
-              </a:spcAft>
-              <a:defRPr sz="950">
-                <a:solidFill>
-                  <a:srgbClr val="505050"/>
-                </a:solidFill>
-                <a:latin typeface="Consolas"/>
-              </a:defRPr>
-            </a:pPr>
-            <a:r>
-              <a:t>Dimension(</a:t>
-            </a:r>
-          </a:p>
-          <a:p>
-            <a:pPr algn="l">
-              <a:spcAft>
-                <a:spcPts val="100"/>
-              </a:spcAft>
-              <a:defRPr sz="950">
-                <a:solidFill>
-                  <a:srgbClr val="505050"/>
-                </a:solidFill>
-                <a:latin typeface="Consolas"/>
-              </a:defRPr>
-            </a:pPr>
-            <a:r>
-              <a:t>    id="order_status",</a:t>
-            </a:r>
-          </a:p>
-          <a:p>
-            <a:pPr algn="l">
-              <a:spcAft>
-                <a:spcPts val="100"/>
-              </a:spcAft>
-              <a:defRPr sz="950">
-                <a:solidFill>
-                  <a:srgbClr val="505050"/>
-                </a:solidFill>
-                <a:latin typeface="Consolas"/>
-              </a:defRPr>
-            </a:pPr>
-            <a:r>
-              <a:t>    label="Order Status",</a:t>
-            </a:r>
-          </a:p>
-          <a:p>
-            <a:pPr algn="l">
-              <a:spcAft>
-                <a:spcPts val="100"/>
-              </a:spcAft>
-              <a:defRPr sz="950">
-                <a:solidFill>
-                  <a:srgbClr val="505050"/>
-                </a:solidFill>
-                <a:latin typeface="Consolas"/>
-              </a:defRPr>
-            </a:pPr>
-            <a:r>
-              <a:t>    sql_expr="CASE o.OrderStatusId "</a:t>
-            </a:r>
-          </a:p>
-          <a:p>
-            <a:pPr algn="l">
-              <a:spcAft>
-                <a:spcPts val="100"/>
-              </a:spcAft>
-              <a:defRPr sz="950">
-                <a:solidFill>
-                  <a:srgbClr val="505050"/>
-                </a:solidFill>
-                <a:latin typeface="Consolas"/>
-              </a:defRPr>
-            </a:pPr>
-            <a:r>
-              <a:t>             "WHEN 10 THEN 'Pending' "</a:t>
-            </a:r>
-          </a:p>
-          <a:p>
-            <a:pPr algn="l">
-              <a:spcAft>
-                <a:spcPts val="100"/>
-              </a:spcAft>
-              <a:defRPr sz="950">
-                <a:solidFill>
-                  <a:srgbClr val="505050"/>
-                </a:solidFill>
-                <a:latin typeface="Consolas"/>
-              </a:defRPr>
-            </a:pPr>
-            <a:r>
-              <a:t>             "WHEN 20 THEN 'Processing' "</a:t>
-            </a:r>
-          </a:p>
-          <a:p>
-            <a:pPr algn="l">
-              <a:spcAft>
-                <a:spcPts val="100"/>
-              </a:spcAft>
-              <a:defRPr sz="950">
-                <a:solidFill>
-                  <a:srgbClr val="505050"/>
-                </a:solidFill>
-                <a:latin typeface="Consolas"/>
-              </a:defRPr>
-            </a:pPr>
-            <a:r>
-              <a:t>             "WHEN 30 THEN 'Complete' "</a:t>
-            </a:r>
-          </a:p>
-          <a:p>
-            <a:pPr algn="l">
-              <a:spcAft>
-                <a:spcPts val="100"/>
-              </a:spcAft>
-              <a:defRPr sz="950">
-                <a:solidFill>
-                  <a:srgbClr val="505050"/>
-                </a:solidFill>
-                <a:latin typeface="Consolas"/>
-              </a:defRPr>
-            </a:pPr>
-            <a:r>
-              <a:t>             "WHEN 40 THEN 'Cancelled' "</a:t>
-            </a:r>
-          </a:p>
-          <a:p>
-            <a:pPr algn="l">
-              <a:spcAft>
-                <a:spcPts val="100"/>
-              </a:spcAft>
-              <a:defRPr sz="950">
-                <a:solidFill>
-                  <a:srgbClr val="505050"/>
-                </a:solidFill>
-                <a:latin typeface="Consolas"/>
-              </a:defRPr>
-            </a:pPr>
-            <a:r>
-              <a:t>             "ELSE 'Unknown' END",</a:t>
-            </a:r>
-          </a:p>
-          <a:p>
-            <a:pPr algn="l">
-              <a:spcAft>
-                <a:spcPts val="100"/>
-              </a:spcAft>
-              <a:defRPr sz="950">
-                <a:solidFill>
-                  <a:srgbClr val="505050"/>
-                </a:solidFill>
-                <a:latin typeface="Consolas"/>
-              </a:defRPr>
-            </a:pPr>
-            <a:r>
-              <a:t>    binding_table="Order",</a:t>
-            </a:r>
-          </a:p>
-          <a:p>
-            <a:pPr algn="l">
-              <a:spcAft>
-                <a:spcPts val="100"/>
-              </a:spcAft>
-              <a:defRPr sz="950">
-                <a:solidFill>
-                  <a:srgbClr val="505050"/>
-                </a:solidFill>
-                <a:latin typeface="Consolas"/>
-              </a:defRPr>
-            </a:pPr>
-            <a:r>
-              <a:t>    datatype="string",</a:t>
-            </a:r>
-          </a:p>
-          <a:p>
-            <a:pPr algn="l">
-              <a:spcAft>
-                <a:spcPts val="100"/>
-              </a:spcAft>
-              <a:defRPr sz="950">
-                <a:solidFill>
-                  <a:srgbClr val="505050"/>
-                </a:solidFill>
-                <a:latin typeface="Consolas"/>
-              </a:defRPr>
-            </a:pPr>
-            <a:r>
-              <a:t>)</a:t>
-            </a:r>
-          </a:p>
-        </p:txBody>
-      </p:sp>
-      <p:sp>
-        <p:nvSpPr>
-          <p:cNvPr id="16" name="TextBox 15"/>
-          <p:cNvSpPr txBox="1"/>
-          <p:nvPr/>
-        </p:nvSpPr>
-        <p:spPr>
-          <a:xfrm>
-            <a:off x="777240" y="4160520"/>
-            <a:ext cx="10515600" cy="822960"/>
-          </a:xfrm>
-          <a:prstGeom prst="rect">
-            <a:avLst/>
-          </a:prstGeom>
-          <a:noFill/>
-        </p:spPr>
-        <p:txBody>
-          <a:bodyPr wrap="square" anchor="t" lIns="0" tIns="0" rIns="0">
-            <a:spAutoFit/>
-          </a:bodyPr>
-          <a:lstStyle/>
-          <a:p>
-            <a:pPr marL="0" indent="0">
-              <a:lnSpc>
-                <a:spcPct val="108000"/>
-              </a:lnSpc>
-              <a:spcBef>
-                <a:spcPts val="1200"/>
-              </a:spcBef>
-              <a:spcAft>
-                <a:spcPts val="500"/>
-              </a:spcAft>
-            </a:pPr>
-            <a:r>
-              <a:rPr b="1" i="0" sz="1600">
-                <a:solidFill>
-                  <a:srgbClr val="003366"/>
-                </a:solidFill>
-                <a:latin typeface="Times New Roman"/>
-              </a:rPr>
-              <a:t>The model may return the string "avg_order_value". It cannot return the expression, the table, or the join. Deploying AEGIS on another system means writing this file again — and nothing else.</a:t>
-            </a:r>
-          </a:p>
-        </p:txBody>
-      </p:sp>
-      <p:sp>
-        <p:nvSpPr>
-          <p:cNvPr id="17" name="Rounded Rectangle 16"/>
-          <p:cNvSpPr/>
-          <p:nvPr/>
-        </p:nvSpPr>
-        <p:spPr>
-          <a:xfrm>
-            <a:off x="777240" y="5742432"/>
-            <a:ext cx="10515600" cy="475488"/>
-          </a:xfrm>
-          <a:prstGeom prst="roundRect">
-            <a:avLst/>
-          </a:prstGeom>
-          <a:solidFill>
-            <a:srgbClr val="F3F6FB"/>
-          </a:solidFill>
-          <a:ln w="9525">
-            <a:solidFill>
-              <a:srgbClr val="C9D6E8"/>
-            </a:solidFill>
-          </a:ln>
-        </p:spPr>
-        <p:style>
-          <a:lnRef idx="1">
-            <a:schemeClr val="accent1"/>
-          </a:lnRef>
-          <a:fillRef idx="3">
-            <a:schemeClr val="accent1"/>
-          </a:fillRef>
-          <a:effectRef idx="2">
-            <a:schemeClr val="accent1"/>
-          </a:effectRef>
-          <a:fontRef idx="minor">
-            <a:schemeClr val="lt1"/>
-          </a:fontRef>
-        </p:style>
-        <p:txBody>
-          <a:bodyPr rtlCol="0" anchor="ctr" wrap="square" lIns="128016" rIns="128016"/>
-          <a:lstStyle/>
-          <a:p>
-            <a:pPr algn="l"/>
-            <a:r>
-              <a:rPr b="1" sz="1300">
-                <a:solidFill>
-                  <a:srgbClr val="333333"/>
-                </a:solidFill>
-                <a:latin typeface="Times New Roman"/>
-              </a:rPr>
-              <a:t>In plain terms:  </a:t>
-            </a:r>
-            <a:r>
-              <a:rPr sz="1300">
-                <a:solidFill>
-                  <a:srgbClr val="333333"/>
-                </a:solidFill>
-                <a:latin typeface="Times New Roman"/>
-              </a:rPr>
-              <a:t>This list is the whole vocabulary. Anything not written here cannot be asked for.</a:t>
+              <a:rPr/>
+              <a:t>Questions &amp; Final Defense Discussion</a:t>
             </a:r>
           </a:p>
         </p:txBody>
@@ -23210,8 +22735,8 @@
         </p:nvSpPr>
         <p:spPr>
           <a:xfrm>
-            <a:off x="1097280" y="1481328"/>
-            <a:ext cx="10058400" cy="4736592"/>
+            <a:off x="1097280" y="1572768"/>
+            <a:ext cx="10058400" cy="4663440"/>
           </a:xfrm>
           <a:prstGeom prst="rect">
             <a:avLst/>
@@ -23683,7 +23208,7 @@
               </a:defRPr>
             </a:pPr>
             <a:r>
-              <a:t>Appendix B: The Compiler Fills Blanks, It Does Not Write SQL</a:t>
+              <a:t>Appendix A: The Semantic Layer Is a File I Wrote</a:t>
             </a:r>
           </a:p>
         </p:txBody>
@@ -23816,7 +23341,7 @@
         </p:nvSpPr>
         <p:spPr>
           <a:xfrm>
-            <a:off x="777240" y="1243584"/>
+            <a:off x="777240" y="1572768"/>
             <a:ext cx="10515600" cy="384048"/>
           </a:xfrm>
           <a:prstGeom prst="rect">
@@ -23842,13 +23367,13 @@
               </a:spcAft>
             </a:pPr>
             <a:r>
-              <a:rPr b="1" i="0" sz="1600">
+              <a:rPr b="1" i="0" sz="1700">
                 <a:solidFill>
                   <a:srgbClr val="003366"/>
                 </a:solidFill>
                 <a:latin typeface="Times New Roman"/>
               </a:rPr>
-              <a:t>aegis/server/compiler.py — the function that builds the SELECT clause:</a:t>
+              <a:t>aegis/server/semantic_layer.py — two of the objects the model is allowed to name:</a:t>
             </a:r>
           </a:p>
         </p:txBody>
@@ -23861,8 +23386,8 @@
         </p:nvSpPr>
         <p:spPr>
           <a:xfrm>
-            <a:off x="777240" y="1737360"/>
-            <a:ext cx="10515600" cy="2743200"/>
+            <a:off x="777240" y="2066543"/>
+            <a:ext cx="5120640" cy="2286000"/>
           </a:xfrm>
           <a:prstGeom prst="rect">
             <a:avLst/>
@@ -23906,7 +23431,8 @@
               </a:defRPr>
             </a:pPr>
             <a:r>
-              <a:t>def _assemble_select(self, metric, dimension, extra_metrics=None, plan=None) -&gt; str:</a:t>
+              <a:rPr/>
+              <a:t>Metric(</a:t>
             </a:r>
           </a:p>
           <a:p>
@@ -23922,7 +23448,8 @@
               </a:defRPr>
             </a:pPr>
             <a:r>
-              <a:t>    measures = [f"{metric.sql_expr} AS value"]</a:t>
+              <a:rPr/>
+              <a:t>    id="avg_order_value",</a:t>
             </a:r>
           </a:p>
           <a:p>
@@ -23938,7 +23465,8 @@
               </a:defRPr>
             </a:pPr>
             <a:r>
-              <a:t>    for extra in extra_metrics or []:</a:t>
+              <a:rPr/>
+              <a:t>    label="Average Order Value",</a:t>
             </a:r>
           </a:p>
           <a:p>
@@ -23954,7 +23482,8 @@
               </a:defRPr>
             </a:pPr>
             <a:r>
-              <a:t>        measures.append(f"{extra.sql_expr} AS `{extra.id}`")</a:t>
+              <a:rPr/>
+              <a:t>    description="Average revenue per order",</a:t>
             </a:r>
           </a:p>
           <a:p>
@@ -23970,7 +23499,8 @@
               </a:defRPr>
             </a:pPr>
             <a:r>
-              <a:t>    projected = ", ".join(measures)</a:t>
+              <a:rPr/>
+              <a:t>    sql_expr="AVG(COALESCE(o.OrderTotal, 0))",</a:t>
             </a:r>
           </a:p>
           <a:p>
@@ -23985,6 +23515,10 @@
                 <a:latin typeface="Consolas"/>
               </a:defRPr>
             </a:pPr>
+            <a:r>
+              <a:rPr/>
+              <a:t>    binding_table="Order",</a:t>
+            </a:r>
           </a:p>
           <a:p>
             <a:pPr algn="l">
@@ -23999,7 +23533,8 @@
               </a:defRPr>
             </a:pPr>
             <a:r>
-              <a:t>    if dimension:</a:t>
+              <a:rPr/>
+              <a:t>    required_joins=[],</a:t>
             </a:r>
           </a:p>
           <a:p>
@@ -24015,7 +23550,8 @@
               </a:defRPr>
             </a:pPr>
             <a:r>
-              <a:t>        dim_expr = self._dimension_select_expr(dimension, plan)</a:t>
+              <a:rPr/>
+              <a:t>    default_visual="kpi_card",</a:t>
             </a:r>
           </a:p>
           <a:p>
@@ -24031,7 +23567,8 @@
               </a:defRPr>
             </a:pPr>
             <a:r>
-              <a:t>        return f"SELECT {dim_expr} AS label, {projected}"</a:t>
+              <a:rPr/>
+              <a:t>    time_anchor="o.CreatedOnUtc",</a:t>
             </a:r>
           </a:p>
           <a:p>
@@ -24047,9 +23584,52 @@
               </a:defRPr>
             </a:pPr>
             <a:r>
-              <a:t>    return f"SELECT {projected}"</a:t>
-            </a:r>
-          </a:p>
+              <a:rPr/>
+              <a:t>)</a:t>
+            </a:r>
+          </a:p>
+        </p:txBody>
+      </p:sp>
+      <p:sp>
+        <p:nvSpPr>
+          <p:cNvPr id="15" name="Rectangle 14"/>
+          <p:cNvSpPr/>
+          <p:nvPr/>
+        </p:nvSpPr>
+        <p:spPr>
+          <a:xfrm>
+            <a:off x="6144768" y="2066543"/>
+            <a:ext cx="5120640" cy="2286000"/>
+          </a:xfrm>
+          <a:prstGeom prst="rect">
+            <a:avLst/>
+          </a:prstGeom>
+          <a:solidFill>
+            <a:srgbClr val="F7F7F7"/>
+          </a:solidFill>
+          <a:ln>
+            <a:solidFill>
+              <a:srgbClr val="B7B7B7"/>
+            </a:solidFill>
+          </a:ln>
+        </p:spPr>
+        <p:style>
+          <a:lnRef idx="1">
+            <a:schemeClr val="accent1"/>
+          </a:lnRef>
+          <a:fillRef idx="3">
+            <a:schemeClr val="accent1"/>
+          </a:fillRef>
+          <a:effectRef idx="2">
+            <a:schemeClr val="accent1"/>
+          </a:effectRef>
+          <a:fontRef idx="minor">
+            <a:schemeClr val="lt1"/>
+          </a:fontRef>
+        </p:style>
+        <p:txBody>
+          <a:bodyPr rtlCol="0" anchor="t" wrap="square" lIns="36576" tIns="73152"/>
+          <a:lstStyle/>
           <a:p>
             <a:pPr algn="l">
               <a:spcAft>
@@ -24062,6 +23642,10 @@
                 <a:latin typeface="Consolas"/>
               </a:defRPr>
             </a:pPr>
+            <a:r>
+              <a:rPr/>
+              <a:t>Dimension(</a:t>
+            </a:r>
           </a:p>
           <a:p>
             <a:pPr algn="l">
@@ -24076,7 +23660,8 @@
               </a:defRPr>
             </a:pPr>
             <a:r>
-              <a:t># Every interpolated value is an attribute of a semantic-layer object.</a:t>
+              <a:rPr/>
+              <a:t>    id="order_status",</a:t>
             </a:r>
           </a:p>
           <a:p>
@@ -24092,21 +23677,175 @@
               </a:defRPr>
             </a:pPr>
             <a:r>
-              <a:t># No argument to this function carries user text.</a:t>
-            </a:r>
-          </a:p>
-        </p:txBody>
-      </p:sp>
-      <p:sp>
-        <p:nvSpPr>
-          <p:cNvPr id="15" name="TextBox 14"/>
+              <a:rPr/>
+              <a:t>    label="Order Status",</a:t>
+            </a:r>
+          </a:p>
+          <a:p>
+            <a:pPr algn="l">
+              <a:spcAft>
+                <a:spcPts val="100"/>
+              </a:spcAft>
+              <a:defRPr sz="1000">
+                <a:solidFill>
+                  <a:srgbClr val="505050"/>
+                </a:solidFill>
+                <a:latin typeface="Consolas"/>
+              </a:defRPr>
+            </a:pPr>
+            <a:r>
+              <a:rPr/>
+              <a:t>    sql_expr="CASE o.OrderStatusId "</a:t>
+            </a:r>
+          </a:p>
+          <a:p>
+            <a:pPr algn="l">
+              <a:spcAft>
+                <a:spcPts val="100"/>
+              </a:spcAft>
+              <a:defRPr sz="1000">
+                <a:solidFill>
+                  <a:srgbClr val="505050"/>
+                </a:solidFill>
+                <a:latin typeface="Consolas"/>
+              </a:defRPr>
+            </a:pPr>
+            <a:r>
+              <a:rPr/>
+              <a:t>             "WHEN 10 THEN 'Pending' "</a:t>
+            </a:r>
+          </a:p>
+          <a:p>
+            <a:pPr algn="l">
+              <a:spcAft>
+                <a:spcPts val="100"/>
+              </a:spcAft>
+              <a:defRPr sz="1000">
+                <a:solidFill>
+                  <a:srgbClr val="505050"/>
+                </a:solidFill>
+                <a:latin typeface="Consolas"/>
+              </a:defRPr>
+            </a:pPr>
+            <a:r>
+              <a:rPr/>
+              <a:t>             "WHEN 20 THEN 'Processing' "</a:t>
+            </a:r>
+          </a:p>
+          <a:p>
+            <a:pPr algn="l">
+              <a:spcAft>
+                <a:spcPts val="100"/>
+              </a:spcAft>
+              <a:defRPr sz="1000">
+                <a:solidFill>
+                  <a:srgbClr val="505050"/>
+                </a:solidFill>
+                <a:latin typeface="Consolas"/>
+              </a:defRPr>
+            </a:pPr>
+            <a:r>
+              <a:rPr/>
+              <a:t>             "WHEN 30 THEN 'Complete' "</a:t>
+            </a:r>
+          </a:p>
+          <a:p>
+            <a:pPr algn="l">
+              <a:spcAft>
+                <a:spcPts val="100"/>
+              </a:spcAft>
+              <a:defRPr sz="1000">
+                <a:solidFill>
+                  <a:srgbClr val="505050"/>
+                </a:solidFill>
+                <a:latin typeface="Consolas"/>
+              </a:defRPr>
+            </a:pPr>
+            <a:r>
+              <a:rPr/>
+              <a:t>             "WHEN 40 THEN 'Cancelled' "</a:t>
+            </a:r>
+          </a:p>
+          <a:p>
+            <a:pPr algn="l">
+              <a:spcAft>
+                <a:spcPts val="100"/>
+              </a:spcAft>
+              <a:defRPr sz="1000">
+                <a:solidFill>
+                  <a:srgbClr val="505050"/>
+                </a:solidFill>
+                <a:latin typeface="Consolas"/>
+              </a:defRPr>
+            </a:pPr>
+            <a:r>
+              <a:rPr/>
+              <a:t>             "ELSE 'Unknown' END",</a:t>
+            </a:r>
+          </a:p>
+          <a:p>
+            <a:pPr algn="l">
+              <a:spcAft>
+                <a:spcPts val="100"/>
+              </a:spcAft>
+              <a:defRPr sz="1000">
+                <a:solidFill>
+                  <a:srgbClr val="505050"/>
+                </a:solidFill>
+                <a:latin typeface="Consolas"/>
+              </a:defRPr>
+            </a:pPr>
+            <a:r>
+              <a:rPr/>
+              <a:t>    binding_table="Order",</a:t>
+            </a:r>
+          </a:p>
+          <a:p>
+            <a:pPr algn="l">
+              <a:spcAft>
+                <a:spcPts val="100"/>
+              </a:spcAft>
+              <a:defRPr sz="1000">
+                <a:solidFill>
+                  <a:srgbClr val="505050"/>
+                </a:solidFill>
+                <a:latin typeface="Consolas"/>
+              </a:defRPr>
+            </a:pPr>
+            <a:r>
+              <a:rPr/>
+              <a:t>    datatype="string",</a:t>
+            </a:r>
+          </a:p>
+          <a:p>
+            <a:pPr algn="l">
+              <a:spcAft>
+                <a:spcPts val="100"/>
+              </a:spcAft>
+              <a:defRPr sz="1000">
+                <a:solidFill>
+                  <a:srgbClr val="505050"/>
+                </a:solidFill>
+                <a:latin typeface="Consolas"/>
+              </a:defRPr>
+            </a:pPr>
+            <a:r>
+              <a:rPr/>
+              <a:t>)</a:t>
+            </a:r>
+          </a:p>
+        </p:txBody>
+      </p:sp>
+      <p:sp>
+        <p:nvSpPr>
+          <p:cNvPr id="16" name="TextBox 15"/>
           <p:cNvSpPr txBox="1"/>
           <p:nvPr/>
         </p:nvSpPr>
         <p:spPr>
           <a:xfrm>
-            <a:off x="777240" y="4617720"/>
-            <a:ext cx="10515600" cy="868680"/>
+            <a:off x="777240" y="4489703"/>
+            <a:ext cx="10515600" cy="822960"/>
           </a:xfrm>
           <a:prstGeom prst="rect">
             <a:avLst/>
@@ -24131,22 +23870,76 @@
               </a:spcAft>
             </a:pPr>
             <a:r>
-              <a:rPr b="1" i="0" sz="1350">
+              <a:rPr b="1" i="0" sz="1700">
                 <a:solidFill>
                   <a:srgbClr val="003366"/>
                 </a:solidFill>
                 <a:latin typeface="Times New Roman"/>
               </a:rPr>
-              <a:t>Literal values take a separate route:</a:t>
-            </a:r>
-            <a:r>
-              <a:rPr b="0" i="0" sz="1250">
+              <a:t>The model may return the string "avg_order_value". It cannot return the expression, the table, or the join. Deploying AEGIS on another system means writing this file again — and nothing else.</a:t>
+            </a:r>
+          </a:p>
+        </p:txBody>
+      </p:sp>
+      <p:sp>
+        <p:nvSpPr>
+          <p:cNvPr id="17" name="Rounded Rectangle 16"/>
+          <p:cNvSpPr/>
+          <p:nvPr/>
+        </p:nvSpPr>
+        <p:spPr>
+          <a:xfrm>
+            <a:off x="777240" y="5742432"/>
+            <a:ext cx="10515600" cy="475488"/>
+          </a:xfrm>
+          <a:prstGeom prst="roundRect">
+            <a:avLst/>
+          </a:prstGeom>
+          <a:solidFill>
+            <a:srgbClr val="F3F6FB"/>
+          </a:solidFill>
+          <a:ln w="9525">
+            <a:solidFill>
+              <a:srgbClr val="C9D6E8"/>
+            </a:solidFill>
+          </a:ln>
+        </p:spPr>
+        <p:style>
+          <a:lnRef idx="1">
+            <a:schemeClr val="accent1"/>
+          </a:lnRef>
+          <a:fillRef idx="3">
+            <a:schemeClr val="accent1"/>
+          </a:fillRef>
+          <a:effectRef idx="2">
+            <a:schemeClr val="accent1"/>
+          </a:effectRef>
+          <a:fontRef idx="minor">
+            <a:schemeClr val="lt1"/>
+          </a:fontRef>
+        </p:style>
+        <p:txBody>
+          <a:bodyPr rtlCol="0" anchor="ctr" wrap="square" lIns="128016" rIns="128016"/>
+          <a:lstStyle/>
+          <a:p>
+            <a:pPr algn="l"/>
+            <a:r>
+              <a:rPr b="1" sz="1300">
                 <a:solidFill>
                   <a:srgbClr val="333333"/>
                 </a:solidFill>
                 <a:latin typeface="Times New Roman"/>
               </a:rPr>
-              <a:t> a filter compiles to a placeholder and a bound parameter (p.StockQuantity &lt; @p0 with {p0: 10}), so a value never becomes part of the SQL text. After assembly, a forbidden-pattern scan rejects any non-SELECT construct before execution.</a:t>
+              <a:t>In plain terms:  </a:t>
+            </a:r>
+            <a:r>
+              <a:rPr sz="1300">
+                <a:solidFill>
+                  <a:srgbClr val="333333"/>
+                </a:solidFill>
+                <a:latin typeface="Times New Roman"/>
+              </a:rPr>
+              <a:t>This list is the whole vocabulary. Anything not written here cannot be asked for.</a:t>
             </a:r>
           </a:p>
         </p:txBody>
@@ -24389,7 +24182,7 @@
               </a:defRPr>
             </a:pPr>
             <a:r>
-              <a:t>Appendix C: Why Templates Instead of Constrained Decoding</a:t>
+              <a:t>Appendix B: The Compiler Fills Blanks, It Does Not Write SQL</a:t>
             </a:r>
           </a:p>
         </p:txBody>
@@ -24514,6 +24307,723 @@
           </a:p>
         </p:txBody>
       </p:sp>
+      <p:sp>
+        <p:nvSpPr>
+          <p:cNvPr id="13" name="TextBox 12"/>
+          <p:cNvSpPr txBox="1"/>
+          <p:nvPr/>
+        </p:nvSpPr>
+        <p:spPr>
+          <a:xfrm>
+            <a:off x="777240" y="1572768"/>
+            <a:ext cx="10515600" cy="384048"/>
+          </a:xfrm>
+          <a:prstGeom prst="rect">
+            <a:avLst/>
+          </a:prstGeom>
+          <a:noFill/>
+        </p:spPr>
+        <p:txBody>
+          <a:bodyPr wrap="square" anchor="t" lIns="0" tIns="0" rIns="0">
+            <a:spAutoFit/>
+          </a:bodyPr>
+          <a:lstStyle/>
+          <a:p>
+            <a:pPr marL="0" indent="0">
+              <a:lnSpc>
+                <a:spcPct val="108000"/>
+              </a:lnSpc>
+              <a:spcBef>
+                <a:spcPts val="1200"/>
+              </a:spcBef>
+              <a:spcAft>
+                <a:spcPts val="500"/>
+              </a:spcAft>
+            </a:pPr>
+            <a:r>
+              <a:rPr b="1" i="0" sz="1700">
+                <a:solidFill>
+                  <a:srgbClr val="003366"/>
+                </a:solidFill>
+                <a:latin typeface="Times New Roman"/>
+              </a:rPr>
+              <a:t>aegis/server/compiler.py — the function that builds the SELECT clause:</a:t>
+            </a:r>
+          </a:p>
+        </p:txBody>
+      </p:sp>
+      <p:sp>
+        <p:nvSpPr>
+          <p:cNvPr id="14" name="Rectangle 13"/>
+          <p:cNvSpPr/>
+          <p:nvPr/>
+        </p:nvSpPr>
+        <p:spPr>
+          <a:xfrm>
+            <a:off x="777240" y="2066543"/>
+            <a:ext cx="10515600" cy="2743200"/>
+          </a:xfrm>
+          <a:prstGeom prst="rect">
+            <a:avLst/>
+          </a:prstGeom>
+          <a:solidFill>
+            <a:srgbClr val="F7F7F7"/>
+          </a:solidFill>
+          <a:ln>
+            <a:solidFill>
+              <a:srgbClr val="B7B7B7"/>
+            </a:solidFill>
+          </a:ln>
+        </p:spPr>
+        <p:style>
+          <a:lnRef idx="1">
+            <a:schemeClr val="accent1"/>
+          </a:lnRef>
+          <a:fillRef idx="3">
+            <a:schemeClr val="accent1"/>
+          </a:fillRef>
+          <a:effectRef idx="2">
+            <a:schemeClr val="accent1"/>
+          </a:effectRef>
+          <a:fontRef idx="minor">
+            <a:schemeClr val="lt1"/>
+          </a:fontRef>
+        </p:style>
+        <p:txBody>
+          <a:bodyPr rtlCol="0" anchor="t" wrap="square" lIns="36576" tIns="73152"/>
+          <a:lstStyle/>
+          <a:p>
+            <a:pPr algn="l">
+              <a:spcAft>
+                <a:spcPts val="100"/>
+              </a:spcAft>
+              <a:defRPr sz="1000">
+                <a:solidFill>
+                  <a:srgbClr val="505050"/>
+                </a:solidFill>
+                <a:latin typeface="Consolas"/>
+              </a:defRPr>
+            </a:pPr>
+            <a:r>
+              <a:rPr/>
+              <a:t>def _assemble_select(self, metric, dimension, extra_metrics=None, plan=None) -&gt; str:</a:t>
+            </a:r>
+          </a:p>
+          <a:p>
+            <a:pPr algn="l">
+              <a:spcAft>
+                <a:spcPts val="100"/>
+              </a:spcAft>
+              <a:defRPr sz="1000">
+                <a:solidFill>
+                  <a:srgbClr val="505050"/>
+                </a:solidFill>
+                <a:latin typeface="Consolas"/>
+              </a:defRPr>
+            </a:pPr>
+            <a:r>
+              <a:rPr/>
+              <a:t>    measures = [f"{metric.sql_expr} AS value"]</a:t>
+            </a:r>
+          </a:p>
+          <a:p>
+            <a:pPr algn="l">
+              <a:spcAft>
+                <a:spcPts val="100"/>
+              </a:spcAft>
+              <a:defRPr sz="1000">
+                <a:solidFill>
+                  <a:srgbClr val="505050"/>
+                </a:solidFill>
+                <a:latin typeface="Consolas"/>
+              </a:defRPr>
+            </a:pPr>
+            <a:r>
+              <a:rPr/>
+              <a:t>    for extra in extra_metrics or []:</a:t>
+            </a:r>
+          </a:p>
+          <a:p>
+            <a:pPr algn="l">
+              <a:spcAft>
+                <a:spcPts val="100"/>
+              </a:spcAft>
+              <a:defRPr sz="1000">
+                <a:solidFill>
+                  <a:srgbClr val="505050"/>
+                </a:solidFill>
+                <a:latin typeface="Consolas"/>
+              </a:defRPr>
+            </a:pPr>
+            <a:r>
+              <a:rPr/>
+              <a:t>        measures.append(f"{extra.sql_expr} AS `{extra.id}`")</a:t>
+            </a:r>
+          </a:p>
+          <a:p>
+            <a:pPr algn="l">
+              <a:spcAft>
+                <a:spcPts val="100"/>
+              </a:spcAft>
+              <a:defRPr sz="1000">
+                <a:solidFill>
+                  <a:srgbClr val="505050"/>
+                </a:solidFill>
+                <a:latin typeface="Consolas"/>
+              </a:defRPr>
+            </a:pPr>
+            <a:r>
+              <a:rPr/>
+              <a:t>    projected = ", ".join(measures)</a:t>
+            </a:r>
+          </a:p>
+          <a:p>
+            <a:pPr algn="l">
+              <a:spcAft>
+                <a:spcPts val="100"/>
+              </a:spcAft>
+              <a:defRPr sz="1000">
+                <a:solidFill>
+                  <a:srgbClr val="505050"/>
+                </a:solidFill>
+                <a:latin typeface="Consolas"/>
+              </a:defRPr>
+            </a:pPr>
+          </a:p>
+          <a:p>
+            <a:pPr algn="l">
+              <a:spcAft>
+                <a:spcPts val="100"/>
+              </a:spcAft>
+              <a:defRPr sz="1000">
+                <a:solidFill>
+                  <a:srgbClr val="505050"/>
+                </a:solidFill>
+                <a:latin typeface="Consolas"/>
+              </a:defRPr>
+            </a:pPr>
+            <a:r>
+              <a:rPr/>
+              <a:t>    if dimension:</a:t>
+            </a:r>
+          </a:p>
+          <a:p>
+            <a:pPr algn="l">
+              <a:spcAft>
+                <a:spcPts val="100"/>
+              </a:spcAft>
+              <a:defRPr sz="1000">
+                <a:solidFill>
+                  <a:srgbClr val="505050"/>
+                </a:solidFill>
+                <a:latin typeface="Consolas"/>
+              </a:defRPr>
+            </a:pPr>
+            <a:r>
+              <a:rPr/>
+              <a:t>        dim_expr = self._dimension_select_expr(dimension, plan)</a:t>
+            </a:r>
+          </a:p>
+          <a:p>
+            <a:pPr algn="l">
+              <a:spcAft>
+                <a:spcPts val="100"/>
+              </a:spcAft>
+              <a:defRPr sz="1000">
+                <a:solidFill>
+                  <a:srgbClr val="505050"/>
+                </a:solidFill>
+                <a:latin typeface="Consolas"/>
+              </a:defRPr>
+            </a:pPr>
+            <a:r>
+              <a:rPr/>
+              <a:t>        return f"SELECT {dim_expr} AS label, {projected}"</a:t>
+            </a:r>
+          </a:p>
+          <a:p>
+            <a:pPr algn="l">
+              <a:spcAft>
+                <a:spcPts val="100"/>
+              </a:spcAft>
+              <a:defRPr sz="1000">
+                <a:solidFill>
+                  <a:srgbClr val="505050"/>
+                </a:solidFill>
+                <a:latin typeface="Consolas"/>
+              </a:defRPr>
+            </a:pPr>
+            <a:r>
+              <a:rPr/>
+              <a:t>    return f"SELECT {projected}"</a:t>
+            </a:r>
+          </a:p>
+          <a:p>
+            <a:pPr algn="l">
+              <a:spcAft>
+                <a:spcPts val="100"/>
+              </a:spcAft>
+              <a:defRPr sz="1000">
+                <a:solidFill>
+                  <a:srgbClr val="505050"/>
+                </a:solidFill>
+                <a:latin typeface="Consolas"/>
+              </a:defRPr>
+            </a:pPr>
+          </a:p>
+          <a:p>
+            <a:pPr algn="l">
+              <a:spcAft>
+                <a:spcPts val="100"/>
+              </a:spcAft>
+              <a:defRPr sz="1000">
+                <a:solidFill>
+                  <a:srgbClr val="505050"/>
+                </a:solidFill>
+                <a:latin typeface="Consolas"/>
+              </a:defRPr>
+            </a:pPr>
+            <a:r>
+              <a:rPr/>
+              <a:t># Every interpolated value is an attribute of a semantic-layer object.</a:t>
+            </a:r>
+          </a:p>
+          <a:p>
+            <a:pPr algn="l">
+              <a:spcAft>
+                <a:spcPts val="100"/>
+              </a:spcAft>
+              <a:defRPr sz="1000">
+                <a:solidFill>
+                  <a:srgbClr val="505050"/>
+                </a:solidFill>
+                <a:latin typeface="Consolas"/>
+              </a:defRPr>
+            </a:pPr>
+            <a:r>
+              <a:rPr/>
+              <a:t># No argument to this function carries user text.</a:t>
+            </a:r>
+          </a:p>
+        </p:txBody>
+      </p:sp>
+      <p:sp>
+        <p:nvSpPr>
+          <p:cNvPr id="15" name="TextBox 14"/>
+          <p:cNvSpPr txBox="1"/>
+          <p:nvPr/>
+        </p:nvSpPr>
+        <p:spPr>
+          <a:xfrm>
+            <a:off x="777240" y="4946903"/>
+            <a:ext cx="10515600" cy="868680"/>
+          </a:xfrm>
+          <a:prstGeom prst="rect">
+            <a:avLst/>
+          </a:prstGeom>
+          <a:noFill/>
+        </p:spPr>
+        <p:txBody>
+          <a:bodyPr wrap="square" anchor="t" lIns="0" tIns="0" rIns="0">
+            <a:spAutoFit/>
+          </a:bodyPr>
+          <a:lstStyle/>
+          <a:p>
+            <a:pPr marL="0" indent="0">
+              <a:lnSpc>
+                <a:spcPct val="108000"/>
+              </a:lnSpc>
+              <a:spcBef>
+                <a:spcPts val="1200"/>
+              </a:spcBef>
+              <a:spcAft>
+                <a:spcPts val="500"/>
+              </a:spcAft>
+            </a:pPr>
+            <a:r>
+              <a:rPr b="1" i="0" sz="1500">
+                <a:solidFill>
+                  <a:srgbClr val="003366"/>
+                </a:solidFill>
+                <a:latin typeface="Times New Roman"/>
+              </a:rPr>
+              <a:t>Literal values take a separate route:</a:t>
+            </a:r>
+            <a:r>
+              <a:rPr b="0" i="0" sz="1400">
+                <a:solidFill>
+                  <a:srgbClr val="333333"/>
+                </a:solidFill>
+                <a:latin typeface="Times New Roman"/>
+              </a:rPr>
+              <a:t> a filter compiles to a placeholder and a bound parameter (p.StockQuantity &lt; @p0 with {p0: 10}), so a value never becomes part of the SQL text. After assembly, a forbidden-pattern scan rejects any non-SELECT construct before execution.</a:t>
+            </a:r>
+          </a:p>
+        </p:txBody>
+      </p:sp>
+    </p:spTree>
+  </p:cSld>
+  <p:clrMapOvr>
+    <a:masterClrMapping/>
+  </p:clrMapOvr>
+</p:sld>
+</file>
+
+<file path=ppt/slides/slide32.xml><?xml version="1.0" encoding="utf-8"?>
+<p:sld xmlns:a="http://schemas.openxmlformats.org/drawingml/2006/main" xmlns:p="http://schemas.openxmlformats.org/presentationml/2006/main" xmlns:r="http://schemas.openxmlformats.org/officeDocument/2006/relationships">
+  <p:cSld>
+    <p:spTree>
+      <p:nvGrpSpPr>
+        <p:cNvPr id="1" name=""/>
+        <p:cNvGrpSpPr/>
+        <p:nvPr/>
+      </p:nvGrpSpPr>
+      <p:grpSpPr/>
+      <p:sp>
+        <p:nvSpPr>
+          <p:cNvPr id="11" name="Rectangle 10">
+            <a:extLst>
+              <a:ext uri="{FF2B5EF4-FFF2-40B4-BE49-F238E27FC236}">
+                <a16:creationId xmlns:a16="http://schemas.microsoft.com/office/drawing/2014/main" id="{D059D760-A365-91EB-B942-587B657A477E}"/>
+              </a:ext>
+            </a:extLst>
+          </p:cNvPr>
+          <p:cNvSpPr/>
+          <p:nvPr/>
+        </p:nvSpPr>
+        <p:spPr>
+          <a:xfrm>
+            <a:off x="-1" y="1500807"/>
+            <a:ext cx="12191999" cy="18288"/>
+          </a:xfrm>
+          <a:prstGeom prst="rect">
+            <a:avLst/>
+          </a:prstGeom>
+          <a:gradFill flip="none" rotWithShape="1">
+            <a:gsLst>
+              <a:gs pos="0">
+                <a:schemeClr val="accent1">
+                  <a:lumMod val="40000"/>
+                  <a:lumOff val="60000"/>
+                </a:schemeClr>
+              </a:gs>
+              <a:gs pos="36000">
+                <a:schemeClr val="accent1">
+                  <a:lumMod val="95000"/>
+                  <a:lumOff val="5000"/>
+                </a:schemeClr>
+              </a:gs>
+              <a:gs pos="100000">
+                <a:schemeClr val="tx2">
+                  <a:lumMod val="50000"/>
+                </a:schemeClr>
+              </a:gs>
+            </a:gsLst>
+            <a:path path="circle">
+              <a:fillToRect l="50000" t="130000" r="50000" b="-30000"/>
+            </a:path>
+            <a:tileRect/>
+          </a:gradFill>
+          <a:ln>
+            <a:noFill/>
+          </a:ln>
+        </p:spPr>
+        <p:style>
+          <a:lnRef idx="2">
+            <a:schemeClr val="accent1">
+              <a:shade val="15000"/>
+            </a:schemeClr>
+          </a:lnRef>
+          <a:fillRef idx="1">
+            <a:schemeClr val="accent1"/>
+          </a:fillRef>
+          <a:effectRef idx="0">
+            <a:schemeClr val="accent1"/>
+          </a:effectRef>
+          <a:fontRef idx="minor">
+            <a:schemeClr val="lt1"/>
+          </a:fontRef>
+        </p:style>
+        <p:txBody>
+          <a:bodyPr rtlCol="0" anchor="ctr"/>
+          <a:lstStyle/>
+          <a:p>
+            <a:pPr algn="ctr"/>
+            <a:endParaRPr lang="en-US"/>
+          </a:p>
+        </p:txBody>
+      </p:sp>
+      <p:sp>
+        <p:nvSpPr>
+          <p:cNvPr id="7" name="Rectangle 6">
+            <a:extLst>
+              <a:ext uri="{FF2B5EF4-FFF2-40B4-BE49-F238E27FC236}">
+                <a16:creationId xmlns:a16="http://schemas.microsoft.com/office/drawing/2014/main" id="{37F49795-9FC6-D65C-AAE9-247F6DF3DA3F}"/>
+              </a:ext>
+            </a:extLst>
+          </p:cNvPr>
+          <p:cNvSpPr/>
+          <p:nvPr/>
+        </p:nvSpPr>
+        <p:spPr>
+          <a:xfrm>
+            <a:off x="0" y="6291468"/>
+            <a:ext cx="12192000" cy="586409"/>
+          </a:xfrm>
+          <a:prstGeom prst="rect">
+            <a:avLst/>
+          </a:prstGeom>
+          <a:solidFill>
+            <a:schemeClr val="tx2">
+              <a:lumMod val="75000"/>
+            </a:schemeClr>
+          </a:solidFill>
+          <a:ln>
+            <a:noFill/>
+          </a:ln>
+          <a:effectLst>
+            <a:outerShdw blurRad="63500" sx="102000" sy="102000" algn="ctr" rotWithShape="0">
+              <a:prstClr val="black">
+                <a:alpha val="40000"/>
+              </a:prstClr>
+            </a:outerShdw>
+          </a:effectLst>
+        </p:spPr>
+        <p:style>
+          <a:lnRef idx="2">
+            <a:schemeClr val="accent1">
+              <a:shade val="15000"/>
+            </a:schemeClr>
+          </a:lnRef>
+          <a:fillRef idx="1">
+            <a:schemeClr val="accent1"/>
+          </a:fillRef>
+          <a:effectRef idx="0">
+            <a:schemeClr val="accent1"/>
+          </a:effectRef>
+          <a:fontRef idx="minor">
+            <a:schemeClr val="lt1"/>
+          </a:fontRef>
+        </p:style>
+        <p:txBody>
+          <a:bodyPr rtlCol="0" anchor="ctr"/>
+          <a:lstStyle/>
+          <a:p>
+            <a:pPr algn="ctr"/>
+            <a:endParaRPr lang="en-US" dirty="0"/>
+          </a:p>
+        </p:txBody>
+      </p:sp>
+      <p:sp>
+        <p:nvSpPr>
+          <p:cNvPr id="3" name="Rectangle 2">
+            <a:extLst>
+              <a:ext uri="{FF2B5EF4-FFF2-40B4-BE49-F238E27FC236}">
+                <a16:creationId xmlns:a16="http://schemas.microsoft.com/office/drawing/2014/main" id="{6027AE48-C47C-33FE-8F56-0AA4260C9B62}"/>
+              </a:ext>
+            </a:extLst>
+          </p:cNvPr>
+          <p:cNvSpPr/>
+          <p:nvPr/>
+        </p:nvSpPr>
+        <p:spPr>
+          <a:xfrm>
+            <a:off x="0" y="0"/>
+            <a:ext cx="12192000" cy="1500809"/>
+          </a:xfrm>
+          <a:prstGeom prst="rect">
+            <a:avLst/>
+          </a:prstGeom>
+          <a:solidFill>
+            <a:schemeClr val="accent1">
+              <a:lumMod val="20000"/>
+              <a:lumOff val="80000"/>
+            </a:schemeClr>
+          </a:solidFill>
+          <a:ln>
+            <a:noFill/>
+          </a:ln>
+          <a:effectLst/>
+        </p:spPr>
+        <p:style>
+          <a:lnRef idx="2">
+            <a:schemeClr val="accent1">
+              <a:shade val="15000"/>
+            </a:schemeClr>
+          </a:lnRef>
+          <a:fillRef idx="1">
+            <a:schemeClr val="accent1"/>
+          </a:fillRef>
+          <a:effectRef idx="0">
+            <a:schemeClr val="accent1"/>
+          </a:effectRef>
+          <a:fontRef idx="minor">
+            <a:schemeClr val="lt1"/>
+          </a:fontRef>
+        </p:style>
+        <p:txBody>
+          <a:bodyPr rtlCol="0" anchor="ctr"/>
+          <a:lstStyle/>
+          <a:p>
+            <a:pPr algn="ctr"/>
+            <a:endParaRPr lang="en-US" dirty="0"/>
+          </a:p>
+        </p:txBody>
+      </p:sp>
+      <p:sp>
+        <p:nvSpPr>
+          <p:cNvPr id="2" name="Title 1"/>
+          <p:cNvSpPr>
+            <a:spLocks noGrp="1"/>
+          </p:cNvSpPr>
+          <p:nvPr>
+            <p:ph type="title"/>
+          </p:nvPr>
+        </p:nvSpPr>
+        <p:spPr>
+          <a:xfrm>
+            <a:off x="1188720" y="365760"/>
+            <a:ext cx="9601200" cy="731520"/>
+          </a:xfrm>
+        </p:spPr>
+        <p:txBody>
+          <a:bodyPr/>
+          <a:lstStyle/>
+          <a:p>
+            <a:pPr>
+              <a:defRPr b="1" sz="2400">
+                <a:solidFill>
+                  <a:srgbClr val="003366"/>
+                </a:solidFill>
+                <a:latin typeface="Times New Roman"/>
+              </a:defRPr>
+            </a:pPr>
+            <a:r>
+              <a:t>Appendix C: Why Templates Instead of Constrained Decoding</a:t>
+            </a:r>
+          </a:p>
+        </p:txBody>
+      </p:sp>
+      <p:pic>
+        <p:nvPicPr>
+          <p:cNvPr id="12" name="Picture 11" descr="image.png"/>
+          <p:cNvPicPr>
+            <a:picLocks noChangeAspect="1"/>
+          </p:cNvPicPr>
+          <p:nvPr/>
+        </p:nvPicPr>
+        <p:blipFill>
+          <a:blip r:embed="rId2"/>
+          <a:stretch>
+            <a:fillRect/>
+          </a:stretch>
+        </p:blipFill>
+        <p:spPr>
+          <a:xfrm>
+            <a:off x="512874" y="457199"/>
+            <a:ext cx="592309" cy="586409"/>
+          </a:xfrm>
+          <a:prstGeom prst="rect">
+            <a:avLst/>
+          </a:prstGeom>
+        </p:spPr>
+      </p:pic>
+      <p:sp>
+        <p:nvSpPr>
+          <p:cNvPr id="4" name="Date Placeholder 3">
+            <a:extLst>
+              <a:ext uri="{FF2B5EF4-FFF2-40B4-BE49-F238E27FC236}">
+                <a16:creationId xmlns:a16="http://schemas.microsoft.com/office/drawing/2014/main" id="{4C2A3C15-2DFB-89FB-3AD7-611F4E0BA472}"/>
+              </a:ext>
+            </a:extLst>
+          </p:cNvPr>
+          <p:cNvSpPr>
+            <a:spLocks noGrp="1"/>
+          </p:cNvSpPr>
+          <p:nvPr>
+            <p:ph type="dt" sz="half" idx="10"/>
+          </p:nvPr>
+        </p:nvSpPr>
+        <p:spPr/>
+        <p:txBody>
+          <a:bodyPr/>
+          <a:lstStyle/>
+          <a:p>
+            <a:pPr>
+              <a:defRPr>
+                <a:latin typeface="Times New Roman"/>
+              </a:defRPr>
+            </a:pPr>
+            <a:r>
+              <a:t>Tuesday, August 18, 2026</a:t>
+            </a:r>
+          </a:p>
+        </p:txBody>
+      </p:sp>
+      <p:sp>
+        <p:nvSpPr>
+          <p:cNvPr id="5" name="Footer Placeholder 4">
+            <a:extLst>
+              <a:ext uri="{FF2B5EF4-FFF2-40B4-BE49-F238E27FC236}">
+                <a16:creationId xmlns:a16="http://schemas.microsoft.com/office/drawing/2014/main" id="{16B89723-33F1-15E2-783B-D602C96206A1}"/>
+              </a:ext>
+            </a:extLst>
+          </p:cNvPr>
+          <p:cNvSpPr>
+            <a:spLocks noGrp="1"/>
+          </p:cNvSpPr>
+          <p:nvPr>
+            <p:ph type="ftr" sz="quarter" idx="11"/>
+          </p:nvPr>
+        </p:nvSpPr>
+        <p:spPr/>
+        <p:txBody>
+          <a:bodyPr/>
+          <a:lstStyle/>
+          <a:p>
+            <a:pPr>
+              <a:defRPr>
+                <a:latin typeface="Times New Roman"/>
+              </a:defRPr>
+            </a:pPr>
+            <a:r>
+              <a:t>Department of Computer Science &amp; Engineering, PUB</a:t>
+            </a:r>
+          </a:p>
+        </p:txBody>
+      </p:sp>
+      <p:sp>
+        <p:nvSpPr>
+          <p:cNvPr id="6" name="Slide Number Placeholder 5">
+            <a:extLst>
+              <a:ext uri="{FF2B5EF4-FFF2-40B4-BE49-F238E27FC236}">
+                <a16:creationId xmlns:a16="http://schemas.microsoft.com/office/drawing/2014/main" id="{7104B3F8-8A1A-BE19-5C71-AE319E3DCF2B}"/>
+              </a:ext>
+            </a:extLst>
+          </p:cNvPr>
+          <p:cNvSpPr>
+            <a:spLocks noGrp="1"/>
+          </p:cNvSpPr>
+          <p:nvPr>
+            <p:ph type="sldNum" sz="quarter" idx="12"/>
+          </p:nvPr>
+        </p:nvSpPr>
+        <p:spPr/>
+        <p:txBody>
+          <a:bodyPr/>
+          <a:lstStyle/>
+          <a:p>
+            <a:pPr>
+              <a:defRPr>
+                <a:latin typeface="Times New Roman"/>
+              </a:defRPr>
+            </a:pPr>
+            <a:r>
+              <a:t>32</a:t>
+            </a:r>
+          </a:p>
+        </p:txBody>
+      </p:sp>
       <p:graphicFrame>
         <p:nvGraphicFramePr>
           <p:cNvPr id="13" name="Table 12"/>
@@ -24523,7 +25033,7 @@
           <p:nvPr/>
         </p:nvGraphicFramePr>
         <p:xfrm>
-          <a:off x="777240" y="1371600"/>
+          <a:off x="777240" y="1572768"/>
           <a:ext cx="10515600" cy="2834640"/>
         </p:xfrm>
         <a:graphic>
@@ -24854,8 +25364,8 @@
         </p:nvSpPr>
         <p:spPr>
           <a:xfrm>
-            <a:off x="777240" y="4343400"/>
-            <a:ext cx="10515600" cy="1234440"/>
+            <a:off x="777240" y="4544568"/>
+            <a:ext cx="10515600" cy="1691640"/>
           </a:xfrm>
           <a:prstGeom prst="rect">
             <a:avLst/>
@@ -24880,7 +25390,7 @@
               </a:spcAft>
             </a:pPr>
             <a:r>
-              <a:rPr b="1" i="0" sz="1450">
+              <a:rPr b="1" i="0" sz="1700">
                 <a:solidFill>
                   <a:srgbClr val="003366"/>
                 </a:solidFill>
@@ -24902,7 +25412,7 @@
               </a:spcAft>
             </a:pPr>
             <a:r>
-              <a:rPr b="1" i="0" sz="1250">
+              <a:rPr b="1" i="0" sz="1500">
                 <a:solidFill>
                   <a:srgbClr val="003366"/>
                 </a:solidFill>
@@ -24911,7 +25421,7 @@
               <a:t>The trade is real and worth stating plainly:</a:t>
             </a:r>
             <a:r>
-              <a:rPr b="0" i="0" sz="1150">
+              <a:rPr b="0" i="0" sz="1400">
                 <a:solidFill>
                   <a:srgbClr val="333333"/>
                 </a:solidFill>
@@ -25833,7 +26343,7 @@
         </p:nvSpPr>
         <p:spPr>
           <a:xfrm>
-            <a:off x="1005840" y="1371600"/>
+            <a:off x="1005840" y="1572768"/>
             <a:ext cx="10149840" cy="731520"/>
           </a:xfrm>
           <a:prstGeom prst="rect">
@@ -25878,7 +26388,7 @@
         </p:nvSpPr>
         <p:spPr>
           <a:xfrm>
-            <a:off x="1143000" y="2286000"/>
+            <a:off x="1143000" y="2487168"/>
             <a:ext cx="2743200" cy="914400"/>
           </a:xfrm>
           <a:prstGeom prst="roundRect">
@@ -25920,10 +26430,12 @@
               </a:defRPr>
             </a:pPr>
             <a:r>
+              <a:rPr/>
               <a:t>Waiter</a:t>
             </a:r>
             <a:br/>
             <a:r>
+              <a:rPr/>
               <a:t>takes the order</a:t>
             </a:r>
           </a:p>
@@ -25937,7 +26449,7 @@
         </p:nvSpPr>
         <p:spPr>
           <a:xfrm>
-            <a:off x="4572000" y="2286000"/>
+            <a:off x="4572000" y="2487168"/>
             <a:ext cx="2743200" cy="914400"/>
           </a:xfrm>
           <a:prstGeom prst="roundRect">
@@ -25979,10 +26491,12 @@
               </a:defRPr>
             </a:pPr>
             <a:r>
+              <a:rPr/>
               <a:t>Order form</a:t>
             </a:r>
             <a:br/>
             <a:r>
+              <a:rPr/>
               <a:t>fixed fields only</a:t>
             </a:r>
           </a:p>
@@ -25996,7 +26510,7 @@
         </p:nvSpPr>
         <p:spPr>
           <a:xfrm>
-            <a:off x="8001000" y="2286000"/>
+            <a:off x="8001000" y="2487168"/>
             <a:ext cx="2743200" cy="914400"/>
           </a:xfrm>
           <a:prstGeom prst="roundRect">
@@ -26038,10 +26552,12 @@
               </a:defRPr>
             </a:pPr>
             <a:r>
+              <a:rPr/>
               <a:t>Kitchen</a:t>
             </a:r>
             <a:br/>
             <a:r>
+              <a:rPr/>
               <a:t>cooks the dish</a:t>
             </a:r>
           </a:p>
@@ -26126,7 +26642,7 @@
           <p:nvPr/>
         </p:nvGraphicFramePr>
         <p:xfrm>
-          <a:off x="1143000" y="3520440"/>
+          <a:off x="1143000" y="3721608"/>
           <a:ext cx="9601200" cy="1874519"/>
         </p:xfrm>
         <a:graphic>
@@ -26887,7 +27403,7 @@
           <p:nvPr/>
         </p:nvGraphicFramePr>
         <p:xfrm>
-          <a:off x="713232" y="1417320"/>
+          <a:off x="713232" y="1572768"/>
           <a:ext cx="10744199" cy="4370832"/>
         </p:xfrm>
         <a:graphic>
@@ -28518,7 +29034,7 @@
           <p:nvPr/>
         </p:nvGraphicFramePr>
         <p:xfrm>
-          <a:off x="822960" y="1325880"/>
+          <a:off x="822960" y="1572768"/>
           <a:ext cx="10561320" cy="4572000"/>
         </p:xfrm>
         <a:graphic>
